--- a/information-source-decks/01-hopper-sensor-suite.pptx
+++ b/information-source-decks/01-hopper-sensor-suite.pptx
@@ -2,19 +2,19 @@
 <file path=ppt/presentation.xml><?xml version="1.0" encoding="utf-8"?>
 <p:presentation xmlns:p="http://schemas.openxmlformats.org/presentationml/2006/main">
   <p:sldMasterIdLst>
-    <p:sldMasterId xmlns:r="http://schemas.openxmlformats.org/officeDocument/2006/relationships" id="2147483648" r:id="Re0b5dae02062430f"/>
+    <p:sldMasterId xmlns:r="http://schemas.openxmlformats.org/officeDocument/2006/relationships" id="2147483648" r:id="R6cc5097a733c427f"/>
   </p:sldMasterIdLst>
   <p:notesMasterIdLst>
-    <p:notesMasterId xmlns:r="http://schemas.openxmlformats.org/officeDocument/2006/relationships" r:id="Rc3bcbee1fc544b71"/>
+    <p:notesMasterId xmlns:r="http://schemas.openxmlformats.org/officeDocument/2006/relationships" r:id="R4584b62e95cc4fb4"/>
   </p:notesMasterIdLst>
   <p:sldIdLst>
-    <p:sldId xmlns:r="http://schemas.openxmlformats.org/officeDocument/2006/relationships" id="256" r:id="Rbf8df7dd81a14389"/>
-    <p:sldId xmlns:r="http://schemas.openxmlformats.org/officeDocument/2006/relationships" id="257" r:id="R486001e95c6c447e"/>
-    <p:sldId xmlns:r="http://schemas.openxmlformats.org/officeDocument/2006/relationships" id="258" r:id="R64d2b1cc021b4d75"/>
-    <p:sldId xmlns:r="http://schemas.openxmlformats.org/officeDocument/2006/relationships" id="259" r:id="Rf91e697ac7ca4eb4"/>
-    <p:sldId xmlns:r="http://schemas.openxmlformats.org/officeDocument/2006/relationships" id="260" r:id="R09daa863e97442db"/>
-    <p:sldId xmlns:r="http://schemas.openxmlformats.org/officeDocument/2006/relationships" id="261" r:id="R2ba1f83df5a64b84"/>
-    <p:sldId xmlns:r="http://schemas.openxmlformats.org/officeDocument/2006/relationships" id="262" r:id="R953eb57c31554f07"/>
+    <p:sldId xmlns:r="http://schemas.openxmlformats.org/officeDocument/2006/relationships" id="256" r:id="R160b98ccacf24f25"/>
+    <p:sldId xmlns:r="http://schemas.openxmlformats.org/officeDocument/2006/relationships" id="257" r:id="Raa70b1a1eb7f43b3"/>
+    <p:sldId xmlns:r="http://schemas.openxmlformats.org/officeDocument/2006/relationships" id="258" r:id="R1916e9b479ca44bf"/>
+    <p:sldId xmlns:r="http://schemas.openxmlformats.org/officeDocument/2006/relationships" id="259" r:id="Rf41af5e12b604753"/>
+    <p:sldId xmlns:r="http://schemas.openxmlformats.org/officeDocument/2006/relationships" id="260" r:id="R297f45006d7b4e94"/>
+    <p:sldId xmlns:r="http://schemas.openxmlformats.org/officeDocument/2006/relationships" id="261" r:id="R33f3ac944ad84ebc"/>
+    <p:sldId xmlns:r="http://schemas.openxmlformats.org/officeDocument/2006/relationships" id="262" r:id="R367cf0e465cd4b49"/>
   </p:sldIdLst>
   <p:sldSz cx="12192000" cy="6858000"/>
   <p:notesSz cx="6858000" cy="9144000"/>
@@ -448,7 +448,7 @@
           <a:lstStyle xmlns:a="http://schemas.openxmlformats.org/drawingml/2006/main"/>
           <a:p xmlns:a="http://schemas.openxmlformats.org/drawingml/2006/main">
             <a:r>
-              <a:t>Sensor-suite lesson cover.</a:t>
+              <a:t>Introduce the real Hopper and separate visible external sensors from internal flight electronics.</a:t>
             </a:r>
           </a:p>
           <a:p xmlns:a="http://schemas.openxmlformats.org/drawingml/2006/main">
@@ -463,7 +463,7 @@
           </a:p>
           <a:p xmlns:a="http://schemas.openxmlformats.org/drawingml/2006/main">
             <a:r>
-              <a:t>- User-supplied Hopper photographs in drone_photos/.</a:t>
+              <a:t>- User-supplied high-resolution photograph: drone_photos/IMG_4476.jpeg</a:t>
             </a:r>
           </a:p>
           <a:p xmlns:a="http://schemas.openxmlformats.org/drawingml/2006/main">
@@ -538,7 +538,7 @@
           <a:lstStyle xmlns:a="http://schemas.openxmlformats.org/drawingml/2006/main"/>
           <a:p xmlns:a="http://schemas.openxmlformats.org/drawingml/2006/main">
             <a:r>
-              <a:t>Use the supplied annotated sensor map. The map covers a wider platform family, so explicitly distinguish its optional GPS/GNSS receiver from this classroom Hopper, which does not include GPS/GNSS hardware.</a:t>
+              <a:t>The low-resolution sensor-map reference is intentionally not used. The new layout uses the authentic high-resolution underside photograph and distinguishes visible modules from internal sensors. Exact internal component placement is not inferred from the photograph.</a:t>
             </a:r>
           </a:p>
           <a:p xmlns:a="http://schemas.openxmlformats.org/drawingml/2006/main">
@@ -553,7 +553,12 @@
           </a:p>
           <a:p xmlns:a="http://schemas.openxmlformats.org/drawingml/2006/main">
             <a:r>
-              <a:t>- User-supplied image: drone_photos/sensor_map.jpeg</a:t>
+              <a:t>- User-supplied high-resolution photograph: drone_photos/IMG_4476.jpeg</a:t>
+            </a:r>
+          </a:p>
+          <a:p xmlns:a="http://schemas.openxmlformats.org/drawingml/2006/main">
+            <a:r>
+              <a:t>- Existing Hopper sensor lesson: local_site/scripts/generate-information-pdfs.py</a:t>
             </a:r>
           </a:p>
           <a:p xmlns:a="http://schemas.openxmlformats.org/drawingml/2006/main">
@@ -718,7 +723,7 @@
           <a:lstStyle xmlns:a="http://schemas.openxmlformats.org/drawingml/2006/main"/>
           <a:p xmlns:a="http://schemas.openxmlformats.org/drawingml/2006/main">
             <a:r>
-              <a:t>Existing sensor-suite lesson content.</a:t>
+              <a:t>The onboard controller combines inertial, optical-flow, range, pressure, and magnetic cues into an estimated state. The state estimate—not any one raw sensor—feeds the controller, which continually updates the motor command.</a:t>
             </a:r>
           </a:p>
           <a:p xmlns:a="http://schemas.openxmlformats.org/drawingml/2006/main">
@@ -898,7 +903,7 @@
           <a:lstStyle xmlns:a="http://schemas.openxmlformats.org/drawingml/2006/main"/>
           <a:p xmlns:a="http://schemas.openxmlformats.org/drawingml/2006/main">
             <a:r>
-              <a:t>Use the supplied sensor map to identify the RGB camera and other onboard sensing paths. Emphasize that Bluetooth controls flight while Wi-Fi/HTTP supplies camera imagery; either link may be healthy while the other is not. GPS/GNSS is not installed on this Hopper.</a:t>
+              <a:t>Bluetooth controls flight and reports limited state. Wi-Fi/HTTP transports the camera stream. The paths are independent, so a green Bluetooth connection does not prove that browser-readable pixels are available.</a:t>
             </a:r>
           </a:p>
           <a:p xmlns:a="http://schemas.openxmlformats.org/drawingml/2006/main">
@@ -913,12 +918,17 @@
           </a:p>
           <a:p xmlns:a="http://schemas.openxmlformats.org/drawingml/2006/main">
             <a:r>
-              <a:t>- User-supplied image: drone_photos/sensor_map.jpeg</a:t>
-            </a:r>
-          </a:p>
-          <a:p xmlns:a="http://schemas.openxmlformats.org/drawingml/2006/main">
-            <a:r>
-              <a:t>- Hopper Studio implementation: local_site/lib/vision.ts and desktop/server.mjs</a:t>
+              <a:t>- Hopper Studio implementation: local_site/lib/drone.ts</a:t>
+            </a:r>
+          </a:p>
+          <a:p xmlns:a="http://schemas.openxmlformats.org/drawingml/2006/main">
+            <a:r>
+              <a:t>- Hopper Studio implementation: local_site/lib/vision.ts</a:t>
+            </a:r>
+          </a:p>
+          <a:p xmlns:a="http://schemas.openxmlformats.org/drawingml/2006/main">
+            <a:r>
+              <a:t>- Hopper Studio camera proxy: local_site/desktop/server.mjs and app/api/camera/route.ts</a:t>
             </a:r>
           </a:p>
           <a:p xmlns:a="http://schemas.openxmlformats.org/drawingml/2006/main">
@@ -1081,7 +1091,7 @@
   </p:cSld>
   <p:clrMap bg1="lt1" tx1="dk1" bg2="lt2" tx2="dk2" accent1="accent1" accent2="accent2" accent3="accent3" accent4="accent4" accent5="accent5" accent6="accent6" hlink="hlink" folHlink="folHlink"/>
   <p:sldLayoutIdLst>
-    <p:sldLayoutId xmlns:r="http://schemas.openxmlformats.org/officeDocument/2006/relationships" id="2147483649" r:id="R6bc74fa477c1489f"/>
+    <p:sldLayoutId xmlns:r="http://schemas.openxmlformats.org/officeDocument/2006/relationships" id="2147483649" r:id="R716b79eebd924bac"/>
   </p:sldLayoutIdLst>
   <p:txStyles>
     <p:titleStyle>
@@ -1611,6 +1621,13 @@
 <file path=ppt/slides/slide1.xml><?xml version="1.0" encoding="utf-8"?>
 <p:sld xmlns:p="http://schemas.openxmlformats.org/presentationml/2006/main">
   <p:cSld>
+    <p:bg>
+      <p:bgPr>
+        <a:solidFill xmlns:a="http://schemas.openxmlformats.org/drawingml/2006/main">
+          <a:srgbClr val="001B3A"/>
+        </a:solidFill>
+      </p:bgPr>
+    </p:bg>
     <p:spTree>
       <p:nvGrpSpPr>
         <p:cNvPr id="1" name=""/>
@@ -1622,23 +1639,23 @@
       </p:grpSpPr>
       <p:pic>
         <p:nvPicPr>
-          <p:cNvPr id="4" name=""/>
+          <p:cNvPr id="14" name=""/>
           <p:cNvPicPr>
             <a:picLocks xmlns:a="http://schemas.openxmlformats.org/drawingml/2006/main" noChangeAspect="1"/>
           </p:cNvPicPr>
           <p:nvPr/>
         </p:nvPicPr>
         <p:blipFill>
-          <a:blip xmlns:r="http://schemas.openxmlformats.org/officeDocument/2006/relationships" xmlns:a="http://schemas.openxmlformats.org/drawingml/2006/main" r:embed="Ra0adcb26acf74621"/>
-          <a:srcRect xmlns:a="http://schemas.openxmlformats.org/drawingml/2006/main" l="0" t="0" r="0" b="0"/>
+          <a:blip xmlns:r="http://schemas.openxmlformats.org/officeDocument/2006/relationships" xmlns:a="http://schemas.openxmlformats.org/drawingml/2006/main" r:embed="R0968157d555641d7"/>
+          <a:srcRect xmlns:a="http://schemas.openxmlformats.org/drawingml/2006/main" l="0" t="10411" r="0" b="10411"/>
           <a:stretch xmlns:a="http://schemas.openxmlformats.org/drawingml/2006/main">
             <a:fillRect l="0" t="0" r="0" b="0"/>
           </a:stretch>
         </p:blipFill>
         <p:spPr>
           <a:xfrm xmlns:a="http://schemas.openxmlformats.org/drawingml/2006/main">
-            <a:off x="0" y="0"/>
-            <a:ext cx="12192000" cy="6858000"/>
+            <a:off x="5695950" y="0"/>
+            <a:ext cx="6496050" cy="6858000"/>
           </a:xfrm>
           <a:prstGeom xmlns:a="http://schemas.openxmlformats.org/drawingml/2006/main" prst="rect">
             <a:avLst/>
@@ -1650,52 +1667,104 @@
           <p:cNvPr id="2" name="">
             <a:extLst xmlns:a="http://schemas.openxmlformats.org/drawingml/2006/main">
               <a:ext uri="{FF2B5EF4-FFF2-40B4-BE49-F238E27FC236}">
-                <a16:creationId xmlns:a16="http://schemas.microsoft.com/office/drawing/2014/main" id="{E718EBCD-D268-4020-B3B2-0CE8BD65939C}"/>
-              </a:ext>
-            </a:extLst>
-          </p:cNvPr>
-          <p:cNvSpPr>
-            <a:spLocks xmlns:a="http://schemas.openxmlformats.org/drawingml/2006/main" noGrp="1"/>
-          </p:cNvSpPr>
-          <p:nvPr/>
-        </p:nvSpPr>
-        <p:spPr>
-          <a:xfrm xmlns:a="http://schemas.openxmlformats.org/drawingml/2006/main">
-            <a:off x="457200" y="6429375"/>
-            <a:ext cx="2571750" cy="285750"/>
-          </a:xfrm>
-          <a:prstGeom xmlns:a="http://schemas.openxmlformats.org/drawingml/2006/main" prst="rect">
-            <a:avLst/>
+                <a16:creationId xmlns:a16="http://schemas.microsoft.com/office/drawing/2014/main" id="{E8FEA98C-7AD8-44FC-9875-EF0241287A0D}"/>
+              </a:ext>
+            </a:extLst>
+          </p:cNvPr>
+          <p:cNvSpPr>
+            <a:spLocks xmlns:a="http://schemas.openxmlformats.org/drawingml/2006/main" noGrp="1"/>
+          </p:cNvSpPr>
+          <p:nvPr/>
+        </p:nvSpPr>
+        <p:spPr>
+          <a:xfrm xmlns:a="http://schemas.openxmlformats.org/drawingml/2006/main">
+            <a:off x="5524500" y="0"/>
+            <a:ext cx="590550" cy="6858000"/>
+          </a:xfrm>
+          <a:prstGeom xmlns:a="http://schemas.openxmlformats.org/drawingml/2006/main" prst="rect">
+            <a:avLst/>
+          </a:prstGeom>
+          <a:ln xmlns:a="http://schemas.openxmlformats.org/drawingml/2006/main" w="0">
+            <a:noFill/>
+            <a:prstDash val="solid"/>
+          </a:ln>
+        </p:spPr>
+      </p:sp>
+      <p:sp>
+        <p:nvSpPr>
+          <p:cNvPr id="3" name="">
+            <a:extLst xmlns:a="http://schemas.openxmlformats.org/drawingml/2006/main">
+              <a:ext uri="{FF2B5EF4-FFF2-40B4-BE49-F238E27FC236}">
+                <a16:creationId xmlns:a16="http://schemas.microsoft.com/office/drawing/2014/main" id="{764D5316-B03F-459A-A346-8C43600B4E0E}"/>
+              </a:ext>
+            </a:extLst>
+          </p:cNvPr>
+          <p:cNvSpPr>
+            <a:spLocks xmlns:a="http://schemas.openxmlformats.org/drawingml/2006/main" noGrp="1"/>
+          </p:cNvSpPr>
+          <p:nvPr/>
+        </p:nvSpPr>
+        <p:spPr>
+          <a:xfrm xmlns:a="http://schemas.openxmlformats.org/drawingml/2006/main">
+            <a:off x="514350" y="438150"/>
+            <a:ext cx="2381250" cy="838200"/>
+          </a:xfrm>
+          <a:prstGeom xmlns:a="http://schemas.openxmlformats.org/drawingml/2006/main" prst="roundRect">
+            <a:avLst>
+              <a:gd name="adj" fmla="val 13636"/>
+            </a:avLst>
           </a:prstGeom>
           <a:solidFill xmlns:a="http://schemas.openxmlformats.org/drawingml/2006/main">
-            <a:srgbClr val="001B3A"/>
-          </a:solidFill>
-          <a:ln xmlns:a="http://schemas.openxmlformats.org/drawingml/2006/main" w="0">
+            <a:srgbClr val="FFFFFF"/>
+          </a:solidFill>
+          <a:ln xmlns:a="http://schemas.openxmlformats.org/drawingml/2006/main" w="14288">
             <a:solidFill>
-              <a:srgbClr val="001B3A"/>
+              <a:srgbClr val="FFFFFF"/>
             </a:solidFill>
             <a:prstDash val="solid"/>
           </a:ln>
         </p:spPr>
       </p:sp>
-      <p:sp>
-        <p:nvSpPr>
-          <p:cNvPr id="3" name="">
-            <a:extLst xmlns:a="http://schemas.openxmlformats.org/drawingml/2006/main">
-              <a:ext uri="{FF2B5EF4-FFF2-40B4-BE49-F238E27FC236}">
-                <a16:creationId xmlns:a16="http://schemas.microsoft.com/office/drawing/2014/main" id="{F2C0D003-53CE-41E9-BAF4-AC5A5C2AD162}"/>
-              </a:ext>
-            </a:extLst>
-          </p:cNvPr>
-          <p:cNvSpPr>
-            <a:spLocks xmlns:a="http://schemas.openxmlformats.org/drawingml/2006/main" noGrp="1"/>
-          </p:cNvSpPr>
-          <p:nvPr/>
-        </p:nvSpPr>
-        <p:spPr>
-          <a:xfrm xmlns:a="http://schemas.openxmlformats.org/drawingml/2006/main">
-            <a:off x="609600" y="6534150"/>
-            <a:ext cx="2190750" cy="142875"/>
+      <p:pic>
+        <p:nvPicPr>
+          <p:cNvPr id="17" name=""/>
+          <p:cNvPicPr>
+            <a:picLocks xmlns:a="http://schemas.openxmlformats.org/drawingml/2006/main" noChangeAspect="1"/>
+          </p:cNvPicPr>
+          <p:nvPr/>
+        </p:nvPicPr>
+        <p:blipFill>
+          <a:blip xmlns:r="http://schemas.openxmlformats.org/officeDocument/2006/relationships" xmlns:a="http://schemas.openxmlformats.org/drawingml/2006/main" r:embed="Rbc9bdc2a0f3a4dc6"/>
+          <a:stretch xmlns:a="http://schemas.openxmlformats.org/drawingml/2006/main"/>
+        </p:blipFill>
+        <p:spPr>
+          <a:xfrm xmlns:a="http://schemas.openxmlformats.org/drawingml/2006/main">
+            <a:off x="1115994" y="561975"/>
+            <a:ext cx="1177963" cy="590550"/>
+          </a:xfrm>
+          <a:prstGeom xmlns:a="http://schemas.openxmlformats.org/drawingml/2006/main" prst="rect">
+            <a:avLst/>
+          </a:prstGeom>
+        </p:spPr>
+      </p:pic>
+      <p:sp>
+        <p:nvSpPr>
+          <p:cNvPr id="5" name="">
+            <a:extLst xmlns:a="http://schemas.openxmlformats.org/drawingml/2006/main">
+              <a:ext uri="{FF2B5EF4-FFF2-40B4-BE49-F238E27FC236}">
+                <a16:creationId xmlns:a16="http://schemas.microsoft.com/office/drawing/2014/main" id="{AFF290BE-8B86-42B6-8936-8C44A852DA65}"/>
+              </a:ext>
+            </a:extLst>
+          </p:cNvPr>
+          <p:cNvSpPr>
+            <a:spLocks xmlns:a="http://schemas.openxmlformats.org/drawingml/2006/main" noGrp="1"/>
+          </p:cNvSpPr>
+          <p:nvPr/>
+        </p:nvSpPr>
+        <p:spPr>
+          <a:xfrm xmlns:a="http://schemas.openxmlformats.org/drawingml/2006/main">
+            <a:off x="552450" y="1752600"/>
+            <a:ext cx="3810000" cy="228600"/>
           </a:xfrm>
           <a:prstGeom xmlns:a="http://schemas.openxmlformats.org/drawingml/2006/main" prst="rect">
             <a:avLst/>
@@ -1711,19 +1780,420 @@
           <a:lstStyle xmlns:a="http://schemas.openxmlformats.org/drawingml/2006/main"/>
           <a:p xmlns:a="http://schemas.openxmlformats.org/drawingml/2006/main">
             <a:pPr>
-              <a:defRPr sz="675">
-                <a:solidFill>
-                  <a:srgbClr val="9EB4C0"/>
+              <a:defRPr sz="975" b="1">
+                <a:solidFill>
+                  <a:srgbClr val="14B8B4"/>
                 </a:solidFill>
               </a:defRPr>
             </a:pPr>
             <a:r>
-              <a:rPr sz="675">
-                <a:solidFill>
-                  <a:srgbClr val="9EB4C0"/>
+              <a:rPr sz="975" b="1">
+                <a:solidFill>
+                  <a:srgbClr val="14B8B4"/>
                 </a:solidFill>
               </a:rPr>
-              <a:t>DECK 01  |  7 SLIDES</a:t>
+              <a:t>HOPPER INFORMATION SERIES</a:t>
+            </a:r>
+          </a:p>
+        </p:txBody>
+      </p:sp>
+      <p:sp>
+        <p:nvSpPr>
+          <p:cNvPr id="6" name="">
+            <a:extLst xmlns:a="http://schemas.openxmlformats.org/drawingml/2006/main">
+              <a:ext uri="{FF2B5EF4-FFF2-40B4-BE49-F238E27FC236}">
+                <a16:creationId xmlns:a16="http://schemas.microsoft.com/office/drawing/2014/main" id="{2F07BAE4-5592-46D0-91D9-AC109CB70224}"/>
+              </a:ext>
+            </a:extLst>
+          </p:cNvPr>
+          <p:cNvSpPr>
+            <a:spLocks xmlns:a="http://schemas.openxmlformats.org/drawingml/2006/main" noGrp="1"/>
+          </p:cNvSpPr>
+          <p:nvPr/>
+        </p:nvSpPr>
+        <p:spPr>
+          <a:xfrm xmlns:a="http://schemas.openxmlformats.org/drawingml/2006/main">
+            <a:off x="552450" y="2047875"/>
+            <a:ext cx="4095750" cy="209550"/>
+          </a:xfrm>
+          <a:prstGeom xmlns:a="http://schemas.openxmlformats.org/drawingml/2006/main" prst="rect">
+            <a:avLst/>
+          </a:prstGeom>
+          <a:noFill xmlns:a="http://schemas.openxmlformats.org/drawingml/2006/main"/>
+          <a:ln xmlns:a="http://schemas.openxmlformats.org/drawingml/2006/main" w="0">
+            <a:noFill/>
+            <a:prstDash val="solid"/>
+          </a:ln>
+        </p:spPr>
+        <p:txBody>
+          <a:bodyPr xmlns:a="http://schemas.openxmlformats.org/drawingml/2006/main"/>
+          <a:lstStyle xmlns:a="http://schemas.openxmlformats.org/drawingml/2006/main"/>
+          <a:p xmlns:a="http://schemas.openxmlformats.org/drawingml/2006/main">
+            <a:pPr>
+              <a:defRPr sz="900" b="1">
+                <a:solidFill>
+                  <a:srgbClr val="C9A227"/>
+                </a:solidFill>
+              </a:defRPr>
+            </a:pPr>
+            <a:r>
+              <a:rPr sz="900" b="1">
+                <a:solidFill>
+                  <a:srgbClr val="C9A227"/>
+                </a:solidFill>
+              </a:rPr>
+              <a:t>SENSOR SUITE</a:t>
+            </a:r>
+          </a:p>
+        </p:txBody>
+      </p:sp>
+      <p:sp>
+        <p:nvSpPr>
+          <p:cNvPr id="7" name="">
+            <a:extLst xmlns:a="http://schemas.openxmlformats.org/drawingml/2006/main">
+              <a:ext uri="{FF2B5EF4-FFF2-40B4-BE49-F238E27FC236}">
+                <a16:creationId xmlns:a16="http://schemas.microsoft.com/office/drawing/2014/main" id="{7763304F-4365-4FEC-B61D-983D0DC2DBC7}"/>
+              </a:ext>
+            </a:extLst>
+          </p:cNvPr>
+          <p:cNvSpPr>
+            <a:spLocks xmlns:a="http://schemas.openxmlformats.org/drawingml/2006/main" noGrp="1"/>
+          </p:cNvSpPr>
+          <p:nvPr/>
+        </p:nvSpPr>
+        <p:spPr>
+          <a:xfrm xmlns:a="http://schemas.openxmlformats.org/drawingml/2006/main">
+            <a:off x="552450" y="2457450"/>
+            <a:ext cx="4572000" cy="1619250"/>
+          </a:xfrm>
+          <a:prstGeom xmlns:a="http://schemas.openxmlformats.org/drawingml/2006/main" prst="rect">
+            <a:avLst/>
+          </a:prstGeom>
+          <a:noFill xmlns:a="http://schemas.openxmlformats.org/drawingml/2006/main"/>
+          <a:ln xmlns:a="http://schemas.openxmlformats.org/drawingml/2006/main" w="0">
+            <a:noFill/>
+            <a:prstDash val="solid"/>
+          </a:ln>
+        </p:spPr>
+        <p:txBody>
+          <a:bodyPr xmlns:a="http://schemas.openxmlformats.org/drawingml/2006/main" anchor="ctr"/>
+          <a:lstStyle xmlns:a="http://schemas.openxmlformats.org/drawingml/2006/main"/>
+          <a:p xmlns:a="http://schemas.openxmlformats.org/drawingml/2006/main">
+            <a:pPr>
+              <a:defRPr sz="4050" b="1">
+                <a:solidFill>
+                  <a:srgbClr val="FFFFFF"/>
+                </a:solidFill>
+              </a:defRPr>
+            </a:pPr>
+            <a:r>
+              <a:rPr sz="4050" b="1">
+                <a:solidFill>
+                  <a:srgbClr val="FFFFFF"/>
+                </a:solidFill>
+              </a:rPr>
+              <a:t>Hopper sensor suite</a:t>
+            </a:r>
+          </a:p>
+        </p:txBody>
+      </p:sp>
+      <p:sp>
+        <p:nvSpPr>
+          <p:cNvPr id="8" name="">
+            <a:extLst xmlns:a="http://schemas.openxmlformats.org/drawingml/2006/main">
+              <a:ext uri="{FF2B5EF4-FFF2-40B4-BE49-F238E27FC236}">
+                <a16:creationId xmlns:a16="http://schemas.microsoft.com/office/drawing/2014/main" id="{4B424D01-8BDB-46E4-A92B-245C37D9963A}"/>
+              </a:ext>
+            </a:extLst>
+          </p:cNvPr>
+          <p:cNvSpPr>
+            <a:spLocks xmlns:a="http://schemas.openxmlformats.org/drawingml/2006/main" noGrp="1"/>
+          </p:cNvSpPr>
+          <p:nvPr/>
+        </p:nvSpPr>
+        <p:spPr>
+          <a:xfrm xmlns:a="http://schemas.openxmlformats.org/drawingml/2006/main">
+            <a:off x="552450" y="4238625"/>
+            <a:ext cx="4667250" cy="819150"/>
+          </a:xfrm>
+          <a:prstGeom xmlns:a="http://schemas.openxmlformats.org/drawingml/2006/main" prst="rect">
+            <a:avLst/>
+          </a:prstGeom>
+          <a:noFill xmlns:a="http://schemas.openxmlformats.org/drawingml/2006/main"/>
+          <a:ln xmlns:a="http://schemas.openxmlformats.org/drawingml/2006/main" w="0">
+            <a:noFill/>
+            <a:prstDash val="solid"/>
+          </a:ln>
+        </p:spPr>
+        <p:txBody>
+          <a:bodyPr xmlns:a="http://schemas.openxmlformats.org/drawingml/2006/main"/>
+          <a:lstStyle xmlns:a="http://schemas.openxmlformats.org/drawingml/2006/main"/>
+          <a:p xmlns:a="http://schemas.openxmlformats.org/drawingml/2006/main">
+            <a:pPr>
+              <a:defRPr sz="1500">
+                <a:solidFill>
+                  <a:srgbClr val="D4E2E8"/>
+                </a:solidFill>
+              </a:defRPr>
+            </a:pPr>
+            <a:r>
+              <a:rPr sz="1500">
+                <a:solidFill>
+                  <a:srgbClr val="D4E2E8"/>
+                </a:solidFill>
+              </a:rPr>
+              <a:t>How an indoor quadrotor measures motion, sees the room, and stays stable without GPS.</a:t>
+            </a:r>
+          </a:p>
+        </p:txBody>
+      </p:sp>
+      <p:sp>
+        <p:nvSpPr>
+          <p:cNvPr id="9" name="">
+            <a:extLst xmlns:a="http://schemas.openxmlformats.org/drawingml/2006/main">
+              <a:ext uri="{FF2B5EF4-FFF2-40B4-BE49-F238E27FC236}">
+                <a16:creationId xmlns:a16="http://schemas.microsoft.com/office/drawing/2014/main" id="{E666391C-F8A5-4679-A1AD-79D132A6EC3B}"/>
+              </a:ext>
+            </a:extLst>
+          </p:cNvPr>
+          <p:cNvSpPr>
+            <a:spLocks xmlns:a="http://schemas.openxmlformats.org/drawingml/2006/main" noGrp="1"/>
+          </p:cNvSpPr>
+          <p:nvPr/>
+        </p:nvSpPr>
+        <p:spPr>
+          <a:xfrm xmlns:a="http://schemas.openxmlformats.org/drawingml/2006/main">
+            <a:off x="552450" y="5372100"/>
+            <a:ext cx="952500" cy="304800"/>
+          </a:xfrm>
+          <a:prstGeom xmlns:a="http://schemas.openxmlformats.org/drawingml/2006/main" prst="roundRect">
+            <a:avLst>
+              <a:gd name="adj" fmla="val 50000"/>
+            </a:avLst>
+          </a:prstGeom>
+          <a:solidFill xmlns:a="http://schemas.openxmlformats.org/drawingml/2006/main">
+            <a:srgbClr val="123654"/>
+          </a:solidFill>
+          <a:ln xmlns:a="http://schemas.openxmlformats.org/drawingml/2006/main" w="14288">
+            <a:solidFill>
+              <a:srgbClr val="123654"/>
+            </a:solidFill>
+            <a:prstDash val="solid"/>
+          </a:ln>
+        </p:spPr>
+        <p:txBody>
+          <a:bodyPr xmlns:a="http://schemas.openxmlformats.org/drawingml/2006/main"/>
+          <a:lstStyle xmlns:a="http://schemas.openxmlformats.org/drawingml/2006/main"/>
+          <a:p xmlns:a="http://schemas.openxmlformats.org/drawingml/2006/main">
+            <a:pPr algn="ctr">
+              <a:defRPr sz="1050" b="1">
+                <a:solidFill>
+                  <a:srgbClr val="FFFFFF"/>
+                </a:solidFill>
+              </a:defRPr>
+            </a:pPr>
+            <a:r>
+              <a:rPr sz="1050" b="1">
+                <a:solidFill>
+                  <a:srgbClr val="FFFFFF"/>
+                </a:solidFill>
+              </a:rPr>
+              <a:t>NO GPS</a:t>
+            </a:r>
+          </a:p>
+        </p:txBody>
+      </p:sp>
+      <p:sp>
+        <p:nvSpPr>
+          <p:cNvPr id="10" name="">
+            <a:extLst xmlns:a="http://schemas.openxmlformats.org/drawingml/2006/main">
+              <a:ext uri="{FF2B5EF4-FFF2-40B4-BE49-F238E27FC236}">
+                <a16:creationId xmlns:a16="http://schemas.microsoft.com/office/drawing/2014/main" id="{B78A7874-4500-4850-8561-FC3A9A16124F}"/>
+              </a:ext>
+            </a:extLst>
+          </p:cNvPr>
+          <p:cNvSpPr>
+            <a:spLocks xmlns:a="http://schemas.openxmlformats.org/drawingml/2006/main" noGrp="1"/>
+          </p:cNvSpPr>
+          <p:nvPr/>
+        </p:nvSpPr>
+        <p:spPr>
+          <a:xfrm xmlns:a="http://schemas.openxmlformats.org/drawingml/2006/main">
+            <a:off x="1619250" y="5372100"/>
+            <a:ext cx="1600200" cy="304800"/>
+          </a:xfrm>
+          <a:prstGeom xmlns:a="http://schemas.openxmlformats.org/drawingml/2006/main" prst="roundRect">
+            <a:avLst>
+              <a:gd name="adj" fmla="val 50000"/>
+            </a:avLst>
+          </a:prstGeom>
+          <a:solidFill xmlns:a="http://schemas.openxmlformats.org/drawingml/2006/main">
+            <a:srgbClr val="123654"/>
+          </a:solidFill>
+          <a:ln xmlns:a="http://schemas.openxmlformats.org/drawingml/2006/main" w="14288">
+            <a:solidFill>
+              <a:srgbClr val="123654"/>
+            </a:solidFill>
+            <a:prstDash val="solid"/>
+          </a:ln>
+        </p:spPr>
+        <p:txBody>
+          <a:bodyPr xmlns:a="http://schemas.openxmlformats.org/drawingml/2006/main"/>
+          <a:lstStyle xmlns:a="http://schemas.openxmlformats.org/drawingml/2006/main"/>
+          <a:p xmlns:a="http://schemas.openxmlformats.org/drawingml/2006/main">
+            <a:pPr algn="ctr">
+              <a:defRPr sz="1050" b="1">
+                <a:solidFill>
+                  <a:srgbClr val="FFFFFF"/>
+                </a:solidFill>
+              </a:defRPr>
+            </a:pPr>
+            <a:r>
+              <a:rPr sz="1050" b="1">
+                <a:solidFill>
+                  <a:srgbClr val="FFFFFF"/>
+                </a:solidFill>
+              </a:rPr>
+              <a:t>INDOOR SENSING</a:t>
+            </a:r>
+          </a:p>
+        </p:txBody>
+      </p:sp>
+      <p:sp>
+        <p:nvSpPr>
+          <p:cNvPr id="11" name="">
+            <a:extLst xmlns:a="http://schemas.openxmlformats.org/drawingml/2006/main">
+              <a:ext uri="{FF2B5EF4-FFF2-40B4-BE49-F238E27FC236}">
+                <a16:creationId xmlns:a16="http://schemas.microsoft.com/office/drawing/2014/main" id="{EE5D0460-73D9-4523-AFBC-69993C71AAF3}"/>
+              </a:ext>
+            </a:extLst>
+          </p:cNvPr>
+          <p:cNvSpPr>
+            <a:spLocks xmlns:a="http://schemas.openxmlformats.org/drawingml/2006/main" noGrp="1"/>
+          </p:cNvSpPr>
+          <p:nvPr/>
+        </p:nvSpPr>
+        <p:spPr>
+          <a:xfrm xmlns:a="http://schemas.openxmlformats.org/drawingml/2006/main">
+            <a:off x="3333750" y="5372100"/>
+            <a:ext cx="1533525" cy="304800"/>
+          </a:xfrm>
+          <a:prstGeom xmlns:a="http://schemas.openxmlformats.org/drawingml/2006/main" prst="roundRect">
+            <a:avLst>
+              <a:gd name="adj" fmla="val 50000"/>
+            </a:avLst>
+          </a:prstGeom>
+          <a:solidFill xmlns:a="http://schemas.openxmlformats.org/drawingml/2006/main">
+            <a:srgbClr val="008C95"/>
+          </a:solidFill>
+          <a:ln xmlns:a="http://schemas.openxmlformats.org/drawingml/2006/main" w="14288">
+            <a:solidFill>
+              <a:srgbClr val="008C95"/>
+            </a:solidFill>
+            <a:prstDash val="solid"/>
+          </a:ln>
+        </p:spPr>
+        <p:txBody>
+          <a:bodyPr xmlns:a="http://schemas.openxmlformats.org/drawingml/2006/main"/>
+          <a:lstStyle xmlns:a="http://schemas.openxmlformats.org/drawingml/2006/main"/>
+          <a:p xmlns:a="http://schemas.openxmlformats.org/drawingml/2006/main">
+            <a:pPr algn="ctr">
+              <a:defRPr sz="1050" b="1">
+                <a:solidFill>
+                  <a:srgbClr val="FFFFFF"/>
+                </a:solidFill>
+              </a:defRPr>
+            </a:pPr>
+            <a:r>
+              <a:rPr sz="1050" b="1">
+                <a:solidFill>
+                  <a:srgbClr val="FFFFFF"/>
+                </a:solidFill>
+              </a:rPr>
+              <a:t>SENSOR FUSION</a:t>
+            </a:r>
+          </a:p>
+        </p:txBody>
+      </p:sp>
+      <p:sp>
+        <p:nvSpPr>
+          <p:cNvPr id="12" name="">
+            <a:extLst xmlns:a="http://schemas.openxmlformats.org/drawingml/2006/main">
+              <a:ext uri="{FF2B5EF4-FFF2-40B4-BE49-F238E27FC236}">
+                <a16:creationId xmlns:a16="http://schemas.microsoft.com/office/drawing/2014/main" id="{6694410B-F499-4688-BA37-9A87BDB20A36}"/>
+              </a:ext>
+            </a:extLst>
+          </p:cNvPr>
+          <p:cNvSpPr>
+            <a:spLocks xmlns:a="http://schemas.openxmlformats.org/drawingml/2006/main" noGrp="1"/>
+          </p:cNvSpPr>
+          <p:nvPr/>
+        </p:nvSpPr>
+        <p:spPr>
+          <a:xfrm xmlns:a="http://schemas.openxmlformats.org/drawingml/2006/main">
+            <a:off x="552450" y="6419850"/>
+            <a:ext cx="4400550" cy="9525"/>
+          </a:xfrm>
+          <a:prstGeom xmlns:a="http://schemas.openxmlformats.org/drawingml/2006/main" prst="rect">
+            <a:avLst/>
+          </a:prstGeom>
+          <a:solidFill xmlns:a="http://schemas.openxmlformats.org/drawingml/2006/main">
+            <a:srgbClr val="33556E"/>
+          </a:solidFill>
+          <a:ln xmlns:a="http://schemas.openxmlformats.org/drawingml/2006/main" w="0">
+            <a:solidFill>
+              <a:srgbClr val="33556E"/>
+            </a:solidFill>
+            <a:prstDash val="solid"/>
+          </a:ln>
+        </p:spPr>
+      </p:sp>
+      <p:sp>
+        <p:nvSpPr>
+          <p:cNvPr id="13" name="">
+            <a:extLst xmlns:a="http://schemas.openxmlformats.org/drawingml/2006/main">
+              <a:ext uri="{FF2B5EF4-FFF2-40B4-BE49-F238E27FC236}">
+                <a16:creationId xmlns:a16="http://schemas.microsoft.com/office/drawing/2014/main" id="{D427D072-6F65-481F-9EC4-9C153CC46210}"/>
+              </a:ext>
+            </a:extLst>
+          </p:cNvPr>
+          <p:cNvSpPr>
+            <a:spLocks xmlns:a="http://schemas.openxmlformats.org/drawingml/2006/main" noGrp="1"/>
+          </p:cNvSpPr>
+          <p:nvPr/>
+        </p:nvSpPr>
+        <p:spPr>
+          <a:xfrm xmlns:a="http://schemas.openxmlformats.org/drawingml/2006/main">
+            <a:off x="552450" y="6543675"/>
+            <a:ext cx="3048000" cy="152400"/>
+          </a:xfrm>
+          <a:prstGeom xmlns:a="http://schemas.openxmlformats.org/drawingml/2006/main" prst="rect">
+            <a:avLst/>
+          </a:prstGeom>
+          <a:noFill xmlns:a="http://schemas.openxmlformats.org/drawingml/2006/main"/>
+          <a:ln xmlns:a="http://schemas.openxmlformats.org/drawingml/2006/main" w="0">
+            <a:noFill/>
+            <a:prstDash val="solid"/>
+          </a:ln>
+        </p:spPr>
+        <p:txBody>
+          <a:bodyPr xmlns:a="http://schemas.openxmlformats.org/drawingml/2006/main"/>
+          <a:lstStyle xmlns:a="http://schemas.openxmlformats.org/drawingml/2006/main"/>
+          <a:p xmlns:a="http://schemas.openxmlformats.org/drawingml/2006/main">
+            <a:pPr>
+              <a:defRPr sz="750">
+                <a:solidFill>
+                  <a:srgbClr val="94AFBC"/>
+                </a:solidFill>
+              </a:defRPr>
+            </a:pPr>
+            <a:r>
+              <a:rPr sz="750">
+                <a:solidFill>
+                  <a:srgbClr val="94AFBC"/>
+                </a:solidFill>
+              </a:rPr>
+              <a:t>DECK 01  |  SENSOR SUITE</a:t>
             </a:r>
           </a:p>
         </p:txBody>
@@ -1731,7 +2201,7 @@
     </p:spTree>
     <p:extLst>
       <p:ext uri="{BB962C8B-B14F-4D97-AF65-F5344CB8AC3E}">
-        <p14:creationId xmlns:p14="http://schemas.microsoft.com/office/powerpoint/2010/main" val="752424741"/>
+        <p14:creationId xmlns:p14="http://schemas.microsoft.com/office/powerpoint/2010/main" val="907825962"/>
       </p:ext>
     </p:extLst>
   </p:cSld>
@@ -1759,10 +2229,10 @@
       </p:grpSpPr>
       <p:sp>
         <p:nvSpPr>
-          <p:cNvPr id="18" name="">
-            <a:extLst xmlns:a="http://schemas.openxmlformats.org/drawingml/2006/main">
-              <a:ext uri="{FF2B5EF4-FFF2-40B4-BE49-F238E27FC236}">
-                <a16:creationId xmlns:a16="http://schemas.microsoft.com/office/drawing/2014/main" id="{79043F50-C034-4C71-81C8-B2E48195DD9B}"/>
+          <p:cNvPr id="37" name="">
+            <a:extLst xmlns:a="http://schemas.openxmlformats.org/drawingml/2006/main">
+              <a:ext uri="{FF2B5EF4-FFF2-40B4-BE49-F238E27FC236}">
+                <a16:creationId xmlns:a16="http://schemas.microsoft.com/office/drawing/2014/main" id="{F20E6CA9-AF61-4BF2-BB9E-92B476A1ADE3}"/>
               </a:ext>
             </a:extLst>
           </p:cNvPr>
@@ -1795,7 +2265,7 @@
           <p:cNvPr id="2" name="">
             <a:extLst xmlns:a="http://schemas.openxmlformats.org/drawingml/2006/main">
               <a:ext uri="{FF2B5EF4-FFF2-40B4-BE49-F238E27FC236}">
-                <a16:creationId xmlns:a16="http://schemas.microsoft.com/office/drawing/2014/main" id="{712D133A-9FC1-4038-933D-5255B0CC01EF}"/>
+                <a16:creationId xmlns:a16="http://schemas.microsoft.com/office/drawing/2014/main" id="{CD6139A9-D558-461C-8DB9-C0C7BBBEAE6B}"/>
               </a:ext>
             </a:extLst>
           </p:cNvPr>
@@ -1828,7 +2298,7 @@
           <p:cNvPr id="3" name="">
             <a:extLst xmlns:a="http://schemas.openxmlformats.org/drawingml/2006/main">
               <a:ext uri="{FF2B5EF4-FFF2-40B4-BE49-F238E27FC236}">
-                <a16:creationId xmlns:a16="http://schemas.microsoft.com/office/drawing/2014/main" id="{BB95951B-50BF-4218-B307-725A840CF64B}"/>
+                <a16:creationId xmlns:a16="http://schemas.microsoft.com/office/drawing/2014/main" id="{4BAB39BD-1960-46B4-940C-5278376FC5C0}"/>
               </a:ext>
             </a:extLst>
           </p:cNvPr>
@@ -1878,7 +2348,7 @@
           <p:cNvPr id="4" name="">
             <a:extLst xmlns:a="http://schemas.openxmlformats.org/drawingml/2006/main">
               <a:ext uri="{FF2B5EF4-FFF2-40B4-BE49-F238E27FC236}">
-                <a16:creationId xmlns:a16="http://schemas.microsoft.com/office/drawing/2014/main" id="{CB0FA974-4FF5-4DB4-91C9-D999E7F4B060}"/>
+                <a16:creationId xmlns:a16="http://schemas.microsoft.com/office/drawing/2014/main" id="{04EC3438-024D-4B31-9AF4-BE8E7726940C}"/>
               </a:ext>
             </a:extLst>
           </p:cNvPr>
@@ -1918,7 +2388,7 @@
                   <a:srgbClr val="C9A227"/>
                 </a:solidFill>
               </a:rPr>
-              <a:t>EXTERNAL HARDWARE</a:t>
+              <a:t>REAL HARDWARE</a:t>
             </a:r>
           </a:p>
         </p:txBody>
@@ -1928,7 +2398,7 @@
           <p:cNvPr id="5" name="">
             <a:extLst xmlns:a="http://schemas.openxmlformats.org/drawingml/2006/main">
               <a:ext uri="{FF2B5EF4-FFF2-40B4-BE49-F238E27FC236}">
-                <a16:creationId xmlns:a16="http://schemas.microsoft.com/office/drawing/2014/main" id="{69470417-048A-4BD6-A393-6D468AE72E8E}"/>
+                <a16:creationId xmlns:a16="http://schemas.microsoft.com/office/drawing/2014/main" id="{7D1B9BD7-9D48-443D-91E2-56AD3C5B58E2}"/>
               </a:ext>
             </a:extLst>
           </p:cNvPr>
@@ -1968,21 +2438,21 @@
                   <a:srgbClr val="001B3A"/>
                 </a:solidFill>
               </a:rPr>
-              <a:t>The sensor map identifies every onboard sensing path</a:t>
+              <a:t>External sensors see the room; internal sensors track motion</a:t>
             </a:r>
           </a:p>
         </p:txBody>
       </p:sp>
       <p:pic>
         <p:nvPicPr>
-          <p:cNvPr id="23" name=""/>
+          <p:cNvPr id="42" name=""/>
           <p:cNvPicPr>
             <a:picLocks xmlns:a="http://schemas.openxmlformats.org/drawingml/2006/main" noChangeAspect="1"/>
           </p:cNvPicPr>
           <p:nvPr/>
         </p:nvPicPr>
         <p:blipFill>
-          <a:blip xmlns:r="http://schemas.openxmlformats.org/officeDocument/2006/relationships" xmlns:a="http://schemas.openxmlformats.org/drawingml/2006/main" r:embed="R8104f51f7be44e5d"/>
+          <a:blip xmlns:r="http://schemas.openxmlformats.org/officeDocument/2006/relationships" xmlns:a="http://schemas.openxmlformats.org/drawingml/2006/main" r:embed="R19e955d03d9047ba"/>
           <a:stretch xmlns:a="http://schemas.openxmlformats.org/drawingml/2006/main"/>
         </p:blipFill>
         <p:spPr>
@@ -2000,7 +2470,7 @@
           <p:cNvPr id="7" name="">
             <a:extLst xmlns:a="http://schemas.openxmlformats.org/drawingml/2006/main">
               <a:ext uri="{FF2B5EF4-FFF2-40B4-BE49-F238E27FC236}">
-                <a16:creationId xmlns:a16="http://schemas.microsoft.com/office/drawing/2014/main" id="{904E7DC9-9DC3-4AFA-9C79-06F09315DDAD}"/>
+                <a16:creationId xmlns:a16="http://schemas.microsoft.com/office/drawing/2014/main" id="{9AB85FD8-9832-4D58-9D0A-73CE2D7FC618}"/>
               </a:ext>
             </a:extLst>
           </p:cNvPr>
@@ -2033,7 +2503,7 @@
           <p:cNvPr id="8" name="">
             <a:extLst xmlns:a="http://schemas.openxmlformats.org/drawingml/2006/main">
               <a:ext uri="{FF2B5EF4-FFF2-40B4-BE49-F238E27FC236}">
-                <a16:creationId xmlns:a16="http://schemas.microsoft.com/office/drawing/2014/main" id="{2763B16D-E104-4AC7-B3CB-56D7D863CCA3}"/>
+                <a16:creationId xmlns:a16="http://schemas.microsoft.com/office/drawing/2014/main" id="{67CB9411-DDFE-4FB1-AE96-C9AE956AFE11}"/>
               </a:ext>
             </a:extLst>
           </p:cNvPr>
@@ -2083,7 +2553,7 @@
           <p:cNvPr id="9" name="">
             <a:extLst xmlns:a="http://schemas.openxmlformats.org/drawingml/2006/main">
               <a:ext uri="{FF2B5EF4-FFF2-40B4-BE49-F238E27FC236}">
-                <a16:creationId xmlns:a16="http://schemas.microsoft.com/office/drawing/2014/main" id="{8183D0C5-901C-465A-8C3D-42D297E6F3F9}"/>
+                <a16:creationId xmlns:a16="http://schemas.microsoft.com/office/drawing/2014/main" id="{BD1509AE-A3D8-4BFE-881C-4137C9E4EFF0}"/>
               </a:ext>
             </a:extLst>
           </p:cNvPr>
@@ -2128,48 +2598,24 @@
           </a:p>
         </p:txBody>
       </p:sp>
-      <p:pic>
-        <p:nvPicPr>
-          <p:cNvPr id="27" name=""/>
-          <p:cNvPicPr>
-            <a:picLocks xmlns:a="http://schemas.openxmlformats.org/drawingml/2006/main" noChangeAspect="1"/>
-          </p:cNvPicPr>
-          <p:nvPr/>
-        </p:nvPicPr>
-        <p:blipFill>
-          <a:blip xmlns:r="http://schemas.openxmlformats.org/officeDocument/2006/relationships" xmlns:a="http://schemas.openxmlformats.org/drawingml/2006/main" r:embed="R00ba838778c942ce"/>
-          <a:stretch xmlns:a="http://schemas.openxmlformats.org/drawingml/2006/main"/>
-        </p:blipFill>
-        <p:spPr>
-          <a:xfrm xmlns:a="http://schemas.openxmlformats.org/drawingml/2006/main">
-            <a:off x="862013" y="1476375"/>
-            <a:ext cx="6829425" cy="4552950"/>
-          </a:xfrm>
-          <a:prstGeom xmlns:a="http://schemas.openxmlformats.org/drawingml/2006/main" prst="roundRect">
-            <a:avLst>
-              <a:gd name="adj" fmla="val 3347"/>
-            </a:avLst>
-          </a:prstGeom>
-        </p:spPr>
-      </p:pic>
-      <p:sp>
-        <p:nvSpPr>
-          <p:cNvPr id="11" name="">
-            <a:extLst xmlns:a="http://schemas.openxmlformats.org/drawingml/2006/main">
-              <a:ext uri="{FF2B5EF4-FFF2-40B4-BE49-F238E27FC236}">
-                <a16:creationId xmlns:a16="http://schemas.microsoft.com/office/drawing/2014/main" id="{B7984FEC-05A3-47C0-B6CC-F2581DDB0EED}"/>
-              </a:ext>
-            </a:extLst>
-          </p:cNvPr>
-          <p:cNvSpPr>
-            <a:spLocks xmlns:a="http://schemas.openxmlformats.org/drawingml/2006/main" noGrp="1"/>
-          </p:cNvSpPr>
-          <p:nvPr/>
-        </p:nvSpPr>
-        <p:spPr>
-          <a:xfrm xmlns:a="http://schemas.openxmlformats.org/drawingml/2006/main">
-            <a:off x="8382000" y="1476375"/>
-            <a:ext cx="3295650" cy="2857500"/>
+      <p:sp>
+        <p:nvSpPr>
+          <p:cNvPr id="10" name="">
+            <a:extLst xmlns:a="http://schemas.openxmlformats.org/drawingml/2006/main">
+              <a:ext uri="{FF2B5EF4-FFF2-40B4-BE49-F238E27FC236}">
+                <a16:creationId xmlns:a16="http://schemas.microsoft.com/office/drawing/2014/main" id="{F6593178-E68D-44C8-8870-35C635BE01EF}"/>
+              </a:ext>
+            </a:extLst>
+          </p:cNvPr>
+          <p:cNvSpPr>
+            <a:spLocks xmlns:a="http://schemas.openxmlformats.org/drawingml/2006/main" noGrp="1"/>
+          </p:cNvSpPr>
+          <p:nvPr/>
+        </p:nvSpPr>
+        <p:spPr>
+          <a:xfrm xmlns:a="http://schemas.openxmlformats.org/drawingml/2006/main">
+            <a:off x="4057650" y="1333500"/>
+            <a:ext cx="3810000" cy="4762500"/>
           </a:xfrm>
           <a:prstGeom xmlns:a="http://schemas.openxmlformats.org/drawingml/2006/main" prst="roundRect">
             <a:avLst>
@@ -2181,63 +2627,348 @@
           </a:solidFill>
           <a:ln xmlns:a="http://schemas.openxmlformats.org/drawingml/2006/main" w="14288">
             <a:solidFill>
-              <a:srgbClr val="C6D4DB"/>
+              <a:srgbClr val="C6D5DB"/>
             </a:solidFill>
             <a:prstDash val="solid"/>
           </a:ln>
         </p:spPr>
       </p:sp>
+      <p:pic>
+        <p:nvPicPr>
+          <p:cNvPr id="47" name=""/>
+          <p:cNvPicPr>
+            <a:picLocks xmlns:a="http://schemas.openxmlformats.org/drawingml/2006/main" noChangeAspect="1"/>
+          </p:cNvPicPr>
+          <p:nvPr/>
+        </p:nvPicPr>
+        <p:blipFill>
+          <a:blip xmlns:r="http://schemas.openxmlformats.org/officeDocument/2006/relationships" xmlns:a="http://schemas.openxmlformats.org/drawingml/2006/main" r:embed="R2c8beecaa38449d1"/>
+          <a:stretch xmlns:a="http://schemas.openxmlformats.org/drawingml/2006/main"/>
+        </p:blipFill>
+        <p:spPr>
+          <a:xfrm xmlns:a="http://schemas.openxmlformats.org/drawingml/2006/main">
+            <a:off x="4248150" y="1428750"/>
+            <a:ext cx="3429000" cy="4572000"/>
+          </a:xfrm>
+          <a:prstGeom xmlns:a="http://schemas.openxmlformats.org/drawingml/2006/main" prst="roundRect">
+            <a:avLst>
+              <a:gd name="adj" fmla="val 3333"/>
+            </a:avLst>
+          </a:prstGeom>
+        </p:spPr>
+      </p:pic>
       <p:sp>
         <p:nvSpPr>
           <p:cNvPr id="12" name="">
             <a:extLst xmlns:a="http://schemas.openxmlformats.org/drawingml/2006/main">
               <a:ext uri="{FF2B5EF4-FFF2-40B4-BE49-F238E27FC236}">
-                <a16:creationId xmlns:a16="http://schemas.microsoft.com/office/drawing/2014/main" id="{17635A32-6E8A-41BC-975E-75B1C6943A88}"/>
-              </a:ext>
-            </a:extLst>
-          </p:cNvPr>
-          <p:cNvSpPr>
-            <a:spLocks xmlns:a="http://schemas.openxmlformats.org/drawingml/2006/main" noGrp="1"/>
-          </p:cNvSpPr>
-          <p:nvPr/>
-        </p:nvSpPr>
-        <p:spPr>
-          <a:xfrm xmlns:a="http://schemas.openxmlformats.org/drawingml/2006/main">
-            <a:off x="8382000" y="1476375"/>
-            <a:ext cx="66675" cy="2857500"/>
-          </a:xfrm>
-          <a:prstGeom xmlns:a="http://schemas.openxmlformats.org/drawingml/2006/main" prst="rect">
-            <a:avLst/>
-          </a:prstGeom>
-          <a:solidFill xmlns:a="http://schemas.openxmlformats.org/drawingml/2006/main">
-            <a:srgbClr val="008C95"/>
-          </a:solidFill>
-          <a:ln xmlns:a="http://schemas.openxmlformats.org/drawingml/2006/main" w="0">
+                <a16:creationId xmlns:a16="http://schemas.microsoft.com/office/drawing/2014/main" id="{C5BEFB42-68FC-4843-8A91-5FCD70522112}"/>
+              </a:ext>
+            </a:extLst>
+          </p:cNvPr>
+          <p:cNvSpPr>
+            <a:spLocks xmlns:a="http://schemas.openxmlformats.org/drawingml/2006/main" noGrp="1"/>
+          </p:cNvSpPr>
+          <p:nvPr/>
+        </p:nvSpPr>
+        <p:spPr>
+          <a:xfrm xmlns:a="http://schemas.openxmlformats.org/drawingml/2006/main">
+            <a:off x="5791200" y="3276600"/>
+            <a:ext cx="171450" cy="171450"/>
+          </a:xfrm>
+          <a:prstGeom xmlns:a="http://schemas.openxmlformats.org/drawingml/2006/main" prst="rect">
+            <a:avLst/>
+          </a:prstGeom>
+          <a:ln xmlns:a="http://schemas.openxmlformats.org/drawingml/2006/main" w="0">
+            <a:prstDash val="solid"/>
+          </a:ln>
+        </p:spPr>
+      </p:sp>
+      <p:sp>
+        <p:nvSpPr>
+          <p:cNvPr id="13" name="">
+            <a:extLst xmlns:a="http://schemas.openxmlformats.org/drawingml/2006/main">
+              <a:ext uri="{FF2B5EF4-FFF2-40B4-BE49-F238E27FC236}">
+                <a16:creationId xmlns:a16="http://schemas.microsoft.com/office/drawing/2014/main" id="{C017F23A-6EDB-46DF-8A7E-F652FB921FAB}"/>
+              </a:ext>
+            </a:extLst>
+          </p:cNvPr>
+          <p:cNvSpPr>
+            <a:spLocks xmlns:a="http://schemas.openxmlformats.org/drawingml/2006/main" noGrp="1"/>
+          </p:cNvSpPr>
+          <p:nvPr/>
+        </p:nvSpPr>
+        <p:spPr>
+          <a:xfrm xmlns:a="http://schemas.openxmlformats.org/drawingml/2006/main">
+            <a:off x="5791200" y="3867150"/>
+            <a:ext cx="171450" cy="171450"/>
+          </a:xfrm>
+          <a:prstGeom xmlns:a="http://schemas.openxmlformats.org/drawingml/2006/main" prst="rect">
+            <a:avLst/>
+          </a:prstGeom>
+          <a:ln xmlns:a="http://schemas.openxmlformats.org/drawingml/2006/main" w="0">
+            <a:prstDash val="solid"/>
+          </a:ln>
+        </p:spPr>
+      </p:sp>
+      <p:sp>
+        <p:nvSpPr>
+          <p:cNvPr id="14" name="">
+            <a:extLst xmlns:a="http://schemas.openxmlformats.org/drawingml/2006/main">
+              <a:ext uri="{FF2B5EF4-FFF2-40B4-BE49-F238E27FC236}">
+                <a16:creationId xmlns:a16="http://schemas.microsoft.com/office/drawing/2014/main" id="{3124CFB3-CF9D-430C-A1B6-AE51F7C71717}"/>
+              </a:ext>
+            </a:extLst>
+          </p:cNvPr>
+          <p:cNvSpPr>
+            <a:spLocks xmlns:a="http://schemas.openxmlformats.org/drawingml/2006/main" noGrp="1"/>
+          </p:cNvSpPr>
+          <p:nvPr/>
+        </p:nvSpPr>
+        <p:spPr>
+          <a:xfrm xmlns:a="http://schemas.openxmlformats.org/drawingml/2006/main">
+            <a:off x="666750" y="1790700"/>
+            <a:ext cx="2857500" cy="1190625"/>
+          </a:xfrm>
+          <a:prstGeom xmlns:a="http://schemas.openxmlformats.org/drawingml/2006/main" prst="rect">
+            <a:avLst/>
+          </a:prstGeom>
+          <a:ln xmlns:a="http://schemas.openxmlformats.org/drawingml/2006/main" w="0">
+            <a:prstDash val="solid"/>
+          </a:ln>
+        </p:spPr>
+      </p:sp>
+      <p:sp>
+        <p:nvSpPr>
+          <p:cNvPr id="15" name="">
+            <a:extLst xmlns:a="http://schemas.openxmlformats.org/drawingml/2006/main">
+              <a:ext uri="{FF2B5EF4-FFF2-40B4-BE49-F238E27FC236}">
+                <a16:creationId xmlns:a16="http://schemas.microsoft.com/office/drawing/2014/main" id="{FC46914D-8C98-4004-BA57-DC3F9636D49E}"/>
+              </a:ext>
+            </a:extLst>
+          </p:cNvPr>
+          <p:cNvSpPr>
+            <a:spLocks xmlns:a="http://schemas.openxmlformats.org/drawingml/2006/main" noGrp="1"/>
+          </p:cNvSpPr>
+          <p:nvPr/>
+        </p:nvSpPr>
+        <p:spPr>
+          <a:xfrm xmlns:a="http://schemas.openxmlformats.org/drawingml/2006/main">
+            <a:off x="666750" y="3295650"/>
+            <a:ext cx="2857500" cy="1428750"/>
+          </a:xfrm>
+          <a:prstGeom xmlns:a="http://schemas.openxmlformats.org/drawingml/2006/main" prst="rect">
+            <a:avLst/>
+          </a:prstGeom>
+          <a:ln xmlns:a="http://schemas.openxmlformats.org/drawingml/2006/main" w="0">
+            <a:prstDash val="solid"/>
+          </a:ln>
+        </p:spPr>
+      </p:sp>
+      <p:cxnSp>
+        <p:nvCxnSpPr>
+          <p:cNvPr id="52" name=""/>
+          <p:cNvCxnSpPr>
+            <a:stCxn xmlns:a="http://schemas.openxmlformats.org/drawingml/2006/main" id="14" idx="3"/>
+            <a:endCxn xmlns:a="http://schemas.openxmlformats.org/drawingml/2006/main" id="12" idx="1"/>
+          </p:cNvCxnSpPr>
+          <p:nvPr/>
+        </p:nvCxnSpPr>
+        <p:spPr>
+          <a:xfrm xmlns:a="http://schemas.openxmlformats.org/drawingml/2006/main">
+            <a:off x="3524250" y="2386013"/>
+            <a:ext cx="2266950" cy="976313"/>
+          </a:xfrm>
+          <a:prstGeom xmlns:a="http://schemas.openxmlformats.org/drawingml/2006/main" prst="straightConnector1">
+            <a:avLst/>
+          </a:prstGeom>
+          <a:ln xmlns:a="http://schemas.openxmlformats.org/drawingml/2006/main" w="28575">
             <a:solidFill>
               <a:srgbClr val="008C95"/>
             </a:solidFill>
             <a:prstDash val="solid"/>
-          </a:ln>
-        </p:spPr>
-      </p:sp>
-      <p:sp>
-        <p:nvSpPr>
-          <p:cNvPr id="13" name="">
-            <a:extLst xmlns:a="http://schemas.openxmlformats.org/drawingml/2006/main">
-              <a:ext uri="{FF2B5EF4-FFF2-40B4-BE49-F238E27FC236}">
-                <a16:creationId xmlns:a16="http://schemas.microsoft.com/office/drawing/2014/main" id="{7AA08F11-EACD-4909-8319-689F7324B23E}"/>
-              </a:ext>
-            </a:extLst>
-          </p:cNvPr>
-          <p:cNvSpPr>
-            <a:spLocks xmlns:a="http://schemas.openxmlformats.org/drawingml/2006/main" noGrp="1"/>
-          </p:cNvSpPr>
-          <p:nvPr/>
-        </p:nvSpPr>
-        <p:spPr>
-          <a:xfrm xmlns:a="http://schemas.openxmlformats.org/drawingml/2006/main">
-            <a:off x="8610600" y="1666875"/>
-            <a:ext cx="2876550" cy="266700"/>
+            <a:tailEnd type="triangle" w="med" len="med"/>
+          </a:ln>
+        </p:spPr>
+      </p:cxnSp>
+      <p:cxnSp>
+        <p:nvCxnSpPr>
+          <p:cNvPr id="53" name=""/>
+          <p:cNvCxnSpPr>
+            <a:stCxn xmlns:a="http://schemas.openxmlformats.org/drawingml/2006/main" id="15" idx="3"/>
+            <a:endCxn xmlns:a="http://schemas.openxmlformats.org/drawingml/2006/main" id="13" idx="1"/>
+          </p:cNvCxnSpPr>
+          <p:nvPr/>
+        </p:nvCxnSpPr>
+        <p:spPr>
+          <a:xfrm xmlns:a="http://schemas.openxmlformats.org/drawingml/2006/main" flipV="1">
+            <a:off x="3524250" y="3952875"/>
+            <a:ext cx="2266950" cy="57150"/>
+          </a:xfrm>
+          <a:prstGeom xmlns:a="http://schemas.openxmlformats.org/drawingml/2006/main" prst="straightConnector1">
+            <a:avLst/>
+          </a:prstGeom>
+          <a:ln xmlns:a="http://schemas.openxmlformats.org/drawingml/2006/main" w="28575">
+            <a:solidFill>
+              <a:srgbClr val="C9A227"/>
+            </a:solidFill>
+            <a:prstDash val="solid"/>
+            <a:tailEnd type="triangle" w="med" len="med"/>
+          </a:ln>
+        </p:spPr>
+      </p:cxnSp>
+      <p:sp>
+        <p:nvSpPr>
+          <p:cNvPr id="18" name="">
+            <a:extLst xmlns:a="http://schemas.openxmlformats.org/drawingml/2006/main">
+              <a:ext uri="{FF2B5EF4-FFF2-40B4-BE49-F238E27FC236}">
+                <a16:creationId xmlns:a16="http://schemas.microsoft.com/office/drawing/2014/main" id="{36A2397F-AF56-48DA-83C3-257247BFB933}"/>
+              </a:ext>
+            </a:extLst>
+          </p:cNvPr>
+          <p:cNvSpPr>
+            <a:spLocks xmlns:a="http://schemas.openxmlformats.org/drawingml/2006/main" noGrp="1"/>
+          </p:cNvSpPr>
+          <p:nvPr/>
+        </p:nvSpPr>
+        <p:spPr>
+          <a:xfrm xmlns:a="http://schemas.openxmlformats.org/drawingml/2006/main">
+            <a:off x="5791200" y="3276600"/>
+            <a:ext cx="171450" cy="171450"/>
+          </a:xfrm>
+          <a:prstGeom xmlns:a="http://schemas.openxmlformats.org/drawingml/2006/main" prst="ellipse">
+            <a:avLst/>
+          </a:prstGeom>
+          <a:solidFill xmlns:a="http://schemas.openxmlformats.org/drawingml/2006/main">
+            <a:srgbClr val="008C95"/>
+          </a:solidFill>
+          <a:ln xmlns:a="http://schemas.openxmlformats.org/drawingml/2006/main" w="28575">
+            <a:solidFill>
+              <a:srgbClr val="FFFFFF"/>
+            </a:solidFill>
+            <a:prstDash val="solid"/>
+          </a:ln>
+        </p:spPr>
+      </p:sp>
+      <p:sp>
+        <p:nvSpPr>
+          <p:cNvPr id="19" name="">
+            <a:extLst xmlns:a="http://schemas.openxmlformats.org/drawingml/2006/main">
+              <a:ext uri="{FF2B5EF4-FFF2-40B4-BE49-F238E27FC236}">
+                <a16:creationId xmlns:a16="http://schemas.microsoft.com/office/drawing/2014/main" id="{FE7FDDB1-B1B9-4D01-AED2-B4F6B77D67B1}"/>
+              </a:ext>
+            </a:extLst>
+          </p:cNvPr>
+          <p:cNvSpPr>
+            <a:spLocks xmlns:a="http://schemas.openxmlformats.org/drawingml/2006/main" noGrp="1"/>
+          </p:cNvSpPr>
+          <p:nvPr/>
+        </p:nvSpPr>
+        <p:spPr>
+          <a:xfrm xmlns:a="http://schemas.openxmlformats.org/drawingml/2006/main">
+            <a:off x="5791200" y="3867150"/>
+            <a:ext cx="171450" cy="171450"/>
+          </a:xfrm>
+          <a:prstGeom xmlns:a="http://schemas.openxmlformats.org/drawingml/2006/main" prst="ellipse">
+            <a:avLst/>
+          </a:prstGeom>
+          <a:solidFill xmlns:a="http://schemas.openxmlformats.org/drawingml/2006/main">
+            <a:srgbClr val="C9A227"/>
+          </a:solidFill>
+          <a:ln xmlns:a="http://schemas.openxmlformats.org/drawingml/2006/main" w="28575">
+            <a:solidFill>
+              <a:srgbClr val="FFFFFF"/>
+            </a:solidFill>
+            <a:prstDash val="solid"/>
+          </a:ln>
+        </p:spPr>
+      </p:sp>
+      <p:sp>
+        <p:nvSpPr>
+          <p:cNvPr id="20" name="">
+            <a:extLst xmlns:a="http://schemas.openxmlformats.org/drawingml/2006/main">
+              <a:ext uri="{FF2B5EF4-FFF2-40B4-BE49-F238E27FC236}">
+                <a16:creationId xmlns:a16="http://schemas.microsoft.com/office/drawing/2014/main" id="{803A88AC-C96B-491C-BF5A-4AF6F3D6267E}"/>
+              </a:ext>
+            </a:extLst>
+          </p:cNvPr>
+          <p:cNvSpPr>
+            <a:spLocks xmlns:a="http://schemas.openxmlformats.org/drawingml/2006/main" noGrp="1"/>
+          </p:cNvSpPr>
+          <p:nvPr/>
+        </p:nvSpPr>
+        <p:spPr>
+          <a:xfrm xmlns:a="http://schemas.openxmlformats.org/drawingml/2006/main">
+            <a:off x="609600" y="1666875"/>
+            <a:ext cx="3028950" cy="1428750"/>
+          </a:xfrm>
+          <a:prstGeom xmlns:a="http://schemas.openxmlformats.org/drawingml/2006/main" prst="roundRect">
+            <a:avLst>
+              <a:gd name="adj" fmla="val 8000"/>
+            </a:avLst>
+          </a:prstGeom>
+          <a:solidFill xmlns:a="http://schemas.openxmlformats.org/drawingml/2006/main">
+            <a:srgbClr val="FFFFFF"/>
+          </a:solidFill>
+          <a:ln xmlns:a="http://schemas.openxmlformats.org/drawingml/2006/main" w="14288">
+            <a:solidFill>
+              <a:srgbClr val="C6D4DB"/>
+            </a:solidFill>
+            <a:prstDash val="solid"/>
+          </a:ln>
+        </p:spPr>
+      </p:sp>
+      <p:sp>
+        <p:nvSpPr>
+          <p:cNvPr id="21" name="">
+            <a:extLst xmlns:a="http://schemas.openxmlformats.org/drawingml/2006/main">
+              <a:ext uri="{FF2B5EF4-FFF2-40B4-BE49-F238E27FC236}">
+                <a16:creationId xmlns:a16="http://schemas.microsoft.com/office/drawing/2014/main" id="{E11BA149-7798-44AE-93ED-9B3FEEABBC62}"/>
+              </a:ext>
+            </a:extLst>
+          </p:cNvPr>
+          <p:cNvSpPr>
+            <a:spLocks xmlns:a="http://schemas.openxmlformats.org/drawingml/2006/main" noGrp="1"/>
+          </p:cNvSpPr>
+          <p:nvPr/>
+        </p:nvSpPr>
+        <p:spPr>
+          <a:xfrm xmlns:a="http://schemas.openxmlformats.org/drawingml/2006/main">
+            <a:off x="609600" y="1666875"/>
+            <a:ext cx="66675" cy="1428750"/>
+          </a:xfrm>
+          <a:prstGeom xmlns:a="http://schemas.openxmlformats.org/drawingml/2006/main" prst="rect">
+            <a:avLst/>
+          </a:prstGeom>
+          <a:solidFill xmlns:a="http://schemas.openxmlformats.org/drawingml/2006/main">
+            <a:srgbClr val="008C95"/>
+          </a:solidFill>
+          <a:ln xmlns:a="http://schemas.openxmlformats.org/drawingml/2006/main" w="0">
+            <a:solidFill>
+              <a:srgbClr val="008C95"/>
+            </a:solidFill>
+            <a:prstDash val="solid"/>
+          </a:ln>
+        </p:spPr>
+      </p:sp>
+      <p:sp>
+        <p:nvSpPr>
+          <p:cNvPr id="22" name="">
+            <a:extLst xmlns:a="http://schemas.openxmlformats.org/drawingml/2006/main">
+              <a:ext uri="{FF2B5EF4-FFF2-40B4-BE49-F238E27FC236}">
+                <a16:creationId xmlns:a16="http://schemas.microsoft.com/office/drawing/2014/main" id="{AEBDEA54-DEBE-4937-88A4-A4E3388C940C}"/>
+              </a:ext>
+            </a:extLst>
+          </p:cNvPr>
+          <p:cNvSpPr>
+            <a:spLocks xmlns:a="http://schemas.openxmlformats.org/drawingml/2006/main" noGrp="1"/>
+          </p:cNvSpPr>
+          <p:nvPr/>
+        </p:nvSpPr>
+        <p:spPr>
+          <a:xfrm xmlns:a="http://schemas.openxmlformats.org/drawingml/2006/main">
+            <a:off x="838200" y="1857375"/>
+            <a:ext cx="2609850" cy="266700"/>
           </a:xfrm>
           <a:prstGeom xmlns:a="http://schemas.openxmlformats.org/drawingml/2006/main" prst="rect">
             <a:avLst/>
@@ -2265,29 +2996,29 @@
                   <a:srgbClr val="001B3A"/>
                 </a:solidFill>
               </a:rPr>
-              <a:t>THIS HOPPER</a:t>
-            </a:r>
-          </a:p>
-        </p:txBody>
-      </p:sp>
-      <p:sp>
-        <p:nvSpPr>
-          <p:cNvPr id="14" name="">
-            <a:extLst xmlns:a="http://schemas.openxmlformats.org/drawingml/2006/main">
-              <a:ext uri="{FF2B5EF4-FFF2-40B4-BE49-F238E27FC236}">
-                <a16:creationId xmlns:a16="http://schemas.microsoft.com/office/drawing/2014/main" id="{0E11B1F3-83B0-459F-9BBD-E2B518456F1B}"/>
-              </a:ext>
-            </a:extLst>
-          </p:cNvPr>
-          <p:cNvSpPr>
-            <a:spLocks xmlns:a="http://schemas.openxmlformats.org/drawingml/2006/main" noGrp="1"/>
-          </p:cNvSpPr>
-          <p:nvPr/>
-        </p:nvSpPr>
-        <p:spPr>
-          <a:xfrm xmlns:a="http://schemas.openxmlformats.org/drawingml/2006/main">
-            <a:off x="8610600" y="2057400"/>
-            <a:ext cx="2876550" cy="2133600"/>
+              <a:t>FORWARD RGB CAMERA</a:t>
+            </a:r>
+          </a:p>
+        </p:txBody>
+      </p:sp>
+      <p:sp>
+        <p:nvSpPr>
+          <p:cNvPr id="23" name="">
+            <a:extLst xmlns:a="http://schemas.openxmlformats.org/drawingml/2006/main">
+              <a:ext uri="{FF2B5EF4-FFF2-40B4-BE49-F238E27FC236}">
+                <a16:creationId xmlns:a16="http://schemas.microsoft.com/office/drawing/2014/main" id="{F5033260-8016-494E-A349-7DB03C8E92CA}"/>
+              </a:ext>
+            </a:extLst>
+          </p:cNvPr>
+          <p:cNvSpPr>
+            <a:spLocks xmlns:a="http://schemas.openxmlformats.org/drawingml/2006/main" noGrp="1"/>
+          </p:cNvSpPr>
+          <p:nvPr/>
+        </p:nvSpPr>
+        <p:spPr>
+          <a:xfrm xmlns:a="http://schemas.openxmlformats.org/drawingml/2006/main">
+            <a:off x="838200" y="2247900"/>
+            <a:ext cx="2609850" cy="704850"/>
           </a:xfrm>
           <a:prstGeom xmlns:a="http://schemas.openxmlformats.org/drawingml/2006/main" prst="rect">
             <a:avLst/>
@@ -2315,7 +3046,7 @@
                   <a:srgbClr val="0D2843"/>
                 </a:solidFill>
               </a:rPr>
-              <a:t>• Uses IMU, barometer, magnetometer, optical flow, time-of-flight range, and camera sensing.</a:t>
+              <a:t>• Supplies the Wi-Fi video stream used by Hopper Studio vision.</a:t>
             </a:r>
           </a:p>
           <a:p xmlns:a="http://schemas.openxmlformats.org/drawingml/2006/main">
@@ -2332,9 +3063,160 @@
                   <a:srgbClr val="0D2843"/>
                 </a:solidFill>
               </a:rPr>
-              <a:t>• Flies indoors using relative measurements and onboard sensor fusion.</a:t>
-            </a:r>
-          </a:p>
+              <a:t>• It is not part of the Bluetooth flight-control link.</a:t>
+            </a:r>
+          </a:p>
+        </p:txBody>
+      </p:sp>
+      <p:sp>
+        <p:nvSpPr>
+          <p:cNvPr id="24" name="">
+            <a:extLst xmlns:a="http://schemas.openxmlformats.org/drawingml/2006/main">
+              <a:ext uri="{FF2B5EF4-FFF2-40B4-BE49-F238E27FC236}">
+                <a16:creationId xmlns:a16="http://schemas.microsoft.com/office/drawing/2014/main" id="{732231F8-B8D8-4EFD-998C-60EC724427C7}"/>
+              </a:ext>
+            </a:extLst>
+          </p:cNvPr>
+          <p:cNvSpPr>
+            <a:spLocks xmlns:a="http://schemas.openxmlformats.org/drawingml/2006/main" noGrp="1"/>
+          </p:cNvSpPr>
+          <p:nvPr/>
+        </p:nvSpPr>
+        <p:spPr>
+          <a:xfrm xmlns:a="http://schemas.openxmlformats.org/drawingml/2006/main">
+            <a:off x="609600" y="3333750"/>
+            <a:ext cx="3028950" cy="1619250"/>
+          </a:xfrm>
+          <a:prstGeom xmlns:a="http://schemas.openxmlformats.org/drawingml/2006/main" prst="roundRect">
+            <a:avLst>
+              <a:gd name="adj" fmla="val 7059"/>
+            </a:avLst>
+          </a:prstGeom>
+          <a:solidFill xmlns:a="http://schemas.openxmlformats.org/drawingml/2006/main">
+            <a:srgbClr val="F5EFCF"/>
+          </a:solidFill>
+          <a:ln xmlns:a="http://schemas.openxmlformats.org/drawingml/2006/main" w="14288">
+            <a:solidFill>
+              <a:srgbClr val="C6D4DB"/>
+            </a:solidFill>
+            <a:prstDash val="solid"/>
+          </a:ln>
+        </p:spPr>
+      </p:sp>
+      <p:sp>
+        <p:nvSpPr>
+          <p:cNvPr id="25" name="">
+            <a:extLst xmlns:a="http://schemas.openxmlformats.org/drawingml/2006/main">
+              <a:ext uri="{FF2B5EF4-FFF2-40B4-BE49-F238E27FC236}">
+                <a16:creationId xmlns:a16="http://schemas.microsoft.com/office/drawing/2014/main" id="{760CDC6D-9A86-4DFA-BCED-D6294C082CD6}"/>
+              </a:ext>
+            </a:extLst>
+          </p:cNvPr>
+          <p:cNvSpPr>
+            <a:spLocks xmlns:a="http://schemas.openxmlformats.org/drawingml/2006/main" noGrp="1"/>
+          </p:cNvSpPr>
+          <p:nvPr/>
+        </p:nvSpPr>
+        <p:spPr>
+          <a:xfrm xmlns:a="http://schemas.openxmlformats.org/drawingml/2006/main">
+            <a:off x="609600" y="3333750"/>
+            <a:ext cx="66675" cy="1619250"/>
+          </a:xfrm>
+          <a:prstGeom xmlns:a="http://schemas.openxmlformats.org/drawingml/2006/main" prst="rect">
+            <a:avLst/>
+          </a:prstGeom>
+          <a:solidFill xmlns:a="http://schemas.openxmlformats.org/drawingml/2006/main">
+            <a:srgbClr val="C9A227"/>
+          </a:solidFill>
+          <a:ln xmlns:a="http://schemas.openxmlformats.org/drawingml/2006/main" w="0">
+            <a:solidFill>
+              <a:srgbClr val="C9A227"/>
+            </a:solidFill>
+            <a:prstDash val="solid"/>
+          </a:ln>
+        </p:spPr>
+      </p:sp>
+      <p:sp>
+        <p:nvSpPr>
+          <p:cNvPr id="26" name="">
+            <a:extLst xmlns:a="http://schemas.openxmlformats.org/drawingml/2006/main">
+              <a:ext uri="{FF2B5EF4-FFF2-40B4-BE49-F238E27FC236}">
+                <a16:creationId xmlns:a16="http://schemas.microsoft.com/office/drawing/2014/main" id="{20B712D9-FD9C-4A03-8712-CE86419B212D}"/>
+              </a:ext>
+            </a:extLst>
+          </p:cNvPr>
+          <p:cNvSpPr>
+            <a:spLocks xmlns:a="http://schemas.openxmlformats.org/drawingml/2006/main" noGrp="1"/>
+          </p:cNvSpPr>
+          <p:nvPr/>
+        </p:nvSpPr>
+        <p:spPr>
+          <a:xfrm xmlns:a="http://schemas.openxmlformats.org/drawingml/2006/main">
+            <a:off x="838200" y="3524250"/>
+            <a:ext cx="2609850" cy="266700"/>
+          </a:xfrm>
+          <a:prstGeom xmlns:a="http://schemas.openxmlformats.org/drawingml/2006/main" prst="rect">
+            <a:avLst/>
+          </a:prstGeom>
+          <a:noFill xmlns:a="http://schemas.openxmlformats.org/drawingml/2006/main"/>
+          <a:ln xmlns:a="http://schemas.openxmlformats.org/drawingml/2006/main" w="0">
+            <a:noFill/>
+            <a:prstDash val="solid"/>
+          </a:ln>
+        </p:spPr>
+        <p:txBody>
+          <a:bodyPr xmlns:a="http://schemas.openxmlformats.org/drawingml/2006/main"/>
+          <a:lstStyle xmlns:a="http://schemas.openxmlformats.org/drawingml/2006/main"/>
+          <a:p xmlns:a="http://schemas.openxmlformats.org/drawingml/2006/main">
+            <a:pPr>
+              <a:defRPr sz="1500" b="1">
+                <a:solidFill>
+                  <a:srgbClr val="001B3A"/>
+                </a:solidFill>
+              </a:defRPr>
+            </a:pPr>
+            <a:r>
+              <a:rPr sz="1500" b="1">
+                <a:solidFill>
+                  <a:srgbClr val="001B3A"/>
+                </a:solidFill>
+              </a:rPr>
+              <a:t>DOWNWARD SENSING MODULE</a:t>
+            </a:r>
+          </a:p>
+        </p:txBody>
+      </p:sp>
+      <p:sp>
+        <p:nvSpPr>
+          <p:cNvPr id="27" name="">
+            <a:extLst xmlns:a="http://schemas.openxmlformats.org/drawingml/2006/main">
+              <a:ext uri="{FF2B5EF4-FFF2-40B4-BE49-F238E27FC236}">
+                <a16:creationId xmlns:a16="http://schemas.microsoft.com/office/drawing/2014/main" id="{841D587D-4FC5-46EB-80AA-EE47C820DC9E}"/>
+              </a:ext>
+            </a:extLst>
+          </p:cNvPr>
+          <p:cNvSpPr>
+            <a:spLocks xmlns:a="http://schemas.openxmlformats.org/drawingml/2006/main" noGrp="1"/>
+          </p:cNvSpPr>
+          <p:nvPr/>
+        </p:nvSpPr>
+        <p:spPr>
+          <a:xfrm xmlns:a="http://schemas.openxmlformats.org/drawingml/2006/main">
+            <a:off x="838200" y="3914775"/>
+            <a:ext cx="2609850" cy="895350"/>
+          </a:xfrm>
+          <a:prstGeom xmlns:a="http://schemas.openxmlformats.org/drawingml/2006/main" prst="rect">
+            <a:avLst/>
+          </a:prstGeom>
+          <a:noFill xmlns:a="http://schemas.openxmlformats.org/drawingml/2006/main"/>
+          <a:ln xmlns:a="http://schemas.openxmlformats.org/drawingml/2006/main" w="0">
+            <a:noFill/>
+            <a:prstDash val="solid"/>
+          </a:ln>
+        </p:spPr>
+        <p:txBody>
+          <a:bodyPr xmlns:a="http://schemas.openxmlformats.org/drawingml/2006/main"/>
+          <a:lstStyle xmlns:a="http://schemas.openxmlformats.org/drawingml/2006/main"/>
           <a:p xmlns:a="http://schemas.openxmlformats.org/drawingml/2006/main">
             <a:pPr>
               <a:defRPr sz="1275">
@@ -2349,33 +3231,369 @@
                   <a:srgbClr val="0D2843"/>
                 </a:solidFill>
               </a:rPr>
-              <a:t>• Does not include the optional GPS/GNSS receiver shown in the platform-family map.</a:t>
-            </a:r>
-          </a:p>
-        </p:txBody>
-      </p:sp>
-      <p:sp>
-        <p:nvSpPr>
-          <p:cNvPr id="15" name="">
-            <a:extLst xmlns:a="http://schemas.openxmlformats.org/drawingml/2006/main">
-              <a:ext uri="{FF2B5EF4-FFF2-40B4-BE49-F238E27FC236}">
-                <a16:creationId xmlns:a16="http://schemas.microsoft.com/office/drawing/2014/main" id="{284C55C5-7409-4E63-808B-7D644E9CA5C3}"/>
-              </a:ext>
-            </a:extLst>
-          </p:cNvPr>
-          <p:cNvSpPr>
-            <a:spLocks xmlns:a="http://schemas.openxmlformats.org/drawingml/2006/main" noGrp="1"/>
-          </p:cNvSpPr>
-          <p:nvPr/>
-        </p:nvSpPr>
-        <p:spPr>
-          <a:xfrm xmlns:a="http://schemas.openxmlformats.org/drawingml/2006/main">
-            <a:off x="8382000" y="4619625"/>
-            <a:ext cx="3295650" cy="1409700"/>
+              <a:t>• Optical flow estimates motion over the floor.</a:t>
+            </a:r>
+          </a:p>
+          <a:p xmlns:a="http://schemas.openxmlformats.org/drawingml/2006/main">
+            <a:pPr>
+              <a:defRPr sz="1275">
+                <a:solidFill>
+                  <a:srgbClr val="0D2843"/>
+                </a:solidFill>
+              </a:defRPr>
+            </a:pPr>
+            <a:r>
+              <a:rPr sz="1275">
+                <a:solidFill>
+                  <a:srgbClr val="0D2843"/>
+                </a:solidFill>
+              </a:rPr>
+              <a:t>• Time-of-flight range provides a short-range floor-distance cue.</a:t>
+            </a:r>
+          </a:p>
+        </p:txBody>
+      </p:sp>
+      <p:sp>
+        <p:nvSpPr>
+          <p:cNvPr id="28" name="">
+            <a:extLst xmlns:a="http://schemas.openxmlformats.org/drawingml/2006/main">
+              <a:ext uri="{FF2B5EF4-FFF2-40B4-BE49-F238E27FC236}">
+                <a16:creationId xmlns:a16="http://schemas.microsoft.com/office/drawing/2014/main" id="{6F9B1B7B-BAF4-4AF8-9C44-CB33B71FFBF9}"/>
+              </a:ext>
+            </a:extLst>
+          </p:cNvPr>
+          <p:cNvSpPr>
+            <a:spLocks xmlns:a="http://schemas.openxmlformats.org/drawingml/2006/main" noGrp="1"/>
+          </p:cNvSpPr>
+          <p:nvPr/>
+        </p:nvSpPr>
+        <p:spPr>
+          <a:xfrm xmlns:a="http://schemas.openxmlformats.org/drawingml/2006/main">
+            <a:off x="1219200" y="5219700"/>
+            <a:ext cx="1809750" cy="247650"/>
+          </a:xfrm>
+          <a:prstGeom xmlns:a="http://schemas.openxmlformats.org/drawingml/2006/main" prst="rect">
+            <a:avLst/>
+          </a:prstGeom>
+          <a:noFill xmlns:a="http://schemas.openxmlformats.org/drawingml/2006/main"/>
+          <a:ln xmlns:a="http://schemas.openxmlformats.org/drawingml/2006/main" w="0">
+            <a:noFill/>
+            <a:prstDash val="solid"/>
+          </a:ln>
+        </p:spPr>
+        <p:txBody>
+          <a:bodyPr xmlns:a="http://schemas.openxmlformats.org/drawingml/2006/main"/>
+          <a:lstStyle xmlns:a="http://schemas.openxmlformats.org/drawingml/2006/main"/>
+          <a:p xmlns:a="http://schemas.openxmlformats.org/drawingml/2006/main">
+            <a:pPr algn="ctr">
+              <a:defRPr sz="1350" b="1">
+                <a:solidFill>
+                  <a:srgbClr val="008C95"/>
+                </a:solidFill>
+              </a:defRPr>
+            </a:pPr>
+            <a:r>
+              <a:rPr sz="1350" b="1">
+                <a:solidFill>
+                  <a:srgbClr val="008C95"/>
+                </a:solidFill>
+              </a:rPr>
+              <a:t>Visible hardware</a:t>
+            </a:r>
+          </a:p>
+        </p:txBody>
+      </p:sp>
+      <p:sp>
+        <p:nvSpPr>
+          <p:cNvPr id="29" name="">
+            <a:extLst xmlns:a="http://schemas.openxmlformats.org/drawingml/2006/main">
+              <a:ext uri="{FF2B5EF4-FFF2-40B4-BE49-F238E27FC236}">
+                <a16:creationId xmlns:a16="http://schemas.microsoft.com/office/drawing/2014/main" id="{9A931BF2-9183-4A75-8FD2-D512136E04B9}"/>
+              </a:ext>
+            </a:extLst>
+          </p:cNvPr>
+          <p:cNvSpPr>
+            <a:spLocks xmlns:a="http://schemas.openxmlformats.org/drawingml/2006/main" noGrp="1"/>
+          </p:cNvSpPr>
+          <p:nvPr/>
+        </p:nvSpPr>
+        <p:spPr>
+          <a:xfrm xmlns:a="http://schemas.openxmlformats.org/drawingml/2006/main">
+            <a:off x="742950" y="5524500"/>
+            <a:ext cx="2762250" cy="495300"/>
+          </a:xfrm>
+          <a:prstGeom xmlns:a="http://schemas.openxmlformats.org/drawingml/2006/main" prst="rect">
+            <a:avLst/>
+          </a:prstGeom>
+          <a:noFill xmlns:a="http://schemas.openxmlformats.org/drawingml/2006/main"/>
+          <a:ln xmlns:a="http://schemas.openxmlformats.org/drawingml/2006/main" w="0">
+            <a:noFill/>
+            <a:prstDash val="solid"/>
+          </a:ln>
+        </p:spPr>
+        <p:txBody>
+          <a:bodyPr xmlns:a="http://schemas.openxmlformats.org/drawingml/2006/main"/>
+          <a:lstStyle xmlns:a="http://schemas.openxmlformats.org/drawingml/2006/main"/>
+          <a:p xmlns:a="http://schemas.openxmlformats.org/drawingml/2006/main">
+            <a:pPr algn="ctr">
+              <a:defRPr sz="1125">
+                <a:solidFill>
+                  <a:srgbClr val="536A7B"/>
+                </a:solidFill>
+              </a:defRPr>
+            </a:pPr>
+            <a:r>
+              <a:rPr sz="1125">
+                <a:solidFill>
+                  <a:srgbClr val="536A7B"/>
+                </a:solidFill>
+              </a:rPr>
+              <a:t>The exposed underside makes the camera and downward sensor cluster easy to inspect.</a:t>
+            </a:r>
+          </a:p>
+        </p:txBody>
+      </p:sp>
+      <p:sp>
+        <p:nvSpPr>
+          <p:cNvPr id="30" name="">
+            <a:extLst xmlns:a="http://schemas.openxmlformats.org/drawingml/2006/main">
+              <a:ext uri="{FF2B5EF4-FFF2-40B4-BE49-F238E27FC236}">
+                <a16:creationId xmlns:a16="http://schemas.microsoft.com/office/drawing/2014/main" id="{7173BB00-D1DA-4EBD-9733-2057B6935E53}"/>
+              </a:ext>
+            </a:extLst>
+          </p:cNvPr>
+          <p:cNvSpPr>
+            <a:spLocks xmlns:a="http://schemas.openxmlformats.org/drawingml/2006/main" noGrp="1"/>
+          </p:cNvSpPr>
+          <p:nvPr/>
+        </p:nvSpPr>
+        <p:spPr>
+          <a:xfrm xmlns:a="http://schemas.openxmlformats.org/drawingml/2006/main">
+            <a:off x="8286750" y="1524000"/>
+            <a:ext cx="3390900" cy="2667000"/>
           </a:xfrm>
           <a:prstGeom xmlns:a="http://schemas.openxmlformats.org/drawingml/2006/main" prst="roundRect">
             <a:avLst>
-              <a:gd name="adj" fmla="val 8108"/>
+              <a:gd name="adj" fmla="val 4286"/>
+            </a:avLst>
+          </a:prstGeom>
+          <a:solidFill xmlns:a="http://schemas.openxmlformats.org/drawingml/2006/main">
+            <a:srgbClr val="FFFFFF"/>
+          </a:solidFill>
+          <a:ln xmlns:a="http://schemas.openxmlformats.org/drawingml/2006/main" w="14288">
+            <a:solidFill>
+              <a:srgbClr val="C6D4DB"/>
+            </a:solidFill>
+            <a:prstDash val="solid"/>
+          </a:ln>
+        </p:spPr>
+      </p:sp>
+      <p:sp>
+        <p:nvSpPr>
+          <p:cNvPr id="31" name="">
+            <a:extLst xmlns:a="http://schemas.openxmlformats.org/drawingml/2006/main">
+              <a:ext uri="{FF2B5EF4-FFF2-40B4-BE49-F238E27FC236}">
+                <a16:creationId xmlns:a16="http://schemas.microsoft.com/office/drawing/2014/main" id="{36165072-C430-4245-983C-C3F396AB3ACE}"/>
+              </a:ext>
+            </a:extLst>
+          </p:cNvPr>
+          <p:cNvSpPr>
+            <a:spLocks xmlns:a="http://schemas.openxmlformats.org/drawingml/2006/main" noGrp="1"/>
+          </p:cNvSpPr>
+          <p:nvPr/>
+        </p:nvSpPr>
+        <p:spPr>
+          <a:xfrm xmlns:a="http://schemas.openxmlformats.org/drawingml/2006/main">
+            <a:off x="8286750" y="1524000"/>
+            <a:ext cx="66675" cy="2667000"/>
+          </a:xfrm>
+          <a:prstGeom xmlns:a="http://schemas.openxmlformats.org/drawingml/2006/main" prst="rect">
+            <a:avLst/>
+          </a:prstGeom>
+          <a:solidFill xmlns:a="http://schemas.openxmlformats.org/drawingml/2006/main">
+            <a:srgbClr val="008C95"/>
+          </a:solidFill>
+          <a:ln xmlns:a="http://schemas.openxmlformats.org/drawingml/2006/main" w="0">
+            <a:solidFill>
+              <a:srgbClr val="008C95"/>
+            </a:solidFill>
+            <a:prstDash val="solid"/>
+          </a:ln>
+        </p:spPr>
+      </p:sp>
+      <p:sp>
+        <p:nvSpPr>
+          <p:cNvPr id="32" name="">
+            <a:extLst xmlns:a="http://schemas.openxmlformats.org/drawingml/2006/main">
+              <a:ext uri="{FF2B5EF4-FFF2-40B4-BE49-F238E27FC236}">
+                <a16:creationId xmlns:a16="http://schemas.microsoft.com/office/drawing/2014/main" id="{65188C86-1A11-41C4-9C32-BF17CD8B0980}"/>
+              </a:ext>
+            </a:extLst>
+          </p:cNvPr>
+          <p:cNvSpPr>
+            <a:spLocks xmlns:a="http://schemas.openxmlformats.org/drawingml/2006/main" noGrp="1"/>
+          </p:cNvSpPr>
+          <p:nvPr/>
+        </p:nvSpPr>
+        <p:spPr>
+          <a:xfrm xmlns:a="http://schemas.openxmlformats.org/drawingml/2006/main">
+            <a:off x="8515350" y="1714500"/>
+            <a:ext cx="2971800" cy="266700"/>
+          </a:xfrm>
+          <a:prstGeom xmlns:a="http://schemas.openxmlformats.org/drawingml/2006/main" prst="rect">
+            <a:avLst/>
+          </a:prstGeom>
+          <a:noFill xmlns:a="http://schemas.openxmlformats.org/drawingml/2006/main"/>
+          <a:ln xmlns:a="http://schemas.openxmlformats.org/drawingml/2006/main" w="0">
+            <a:noFill/>
+            <a:prstDash val="solid"/>
+          </a:ln>
+        </p:spPr>
+        <p:txBody>
+          <a:bodyPr xmlns:a="http://schemas.openxmlformats.org/drawingml/2006/main"/>
+          <a:lstStyle xmlns:a="http://schemas.openxmlformats.org/drawingml/2006/main"/>
+          <a:p xmlns:a="http://schemas.openxmlformats.org/drawingml/2006/main">
+            <a:pPr>
+              <a:defRPr sz="1500" b="1">
+                <a:solidFill>
+                  <a:srgbClr val="001B3A"/>
+                </a:solidFill>
+              </a:defRPr>
+            </a:pPr>
+            <a:r>
+              <a:rPr sz="1500" b="1">
+                <a:solidFill>
+                  <a:srgbClr val="001B3A"/>
+                </a:solidFill>
+              </a:rPr>
+              <a:t>INSIDE THE BODY</a:t>
+            </a:r>
+          </a:p>
+        </p:txBody>
+      </p:sp>
+      <p:sp>
+        <p:nvSpPr>
+          <p:cNvPr id="33" name="">
+            <a:extLst xmlns:a="http://schemas.openxmlformats.org/drawingml/2006/main">
+              <a:ext uri="{FF2B5EF4-FFF2-40B4-BE49-F238E27FC236}">
+                <a16:creationId xmlns:a16="http://schemas.microsoft.com/office/drawing/2014/main" id="{A495DA62-8F20-4888-BF13-E3BB0CDB99AC}"/>
+              </a:ext>
+            </a:extLst>
+          </p:cNvPr>
+          <p:cNvSpPr>
+            <a:spLocks xmlns:a="http://schemas.openxmlformats.org/drawingml/2006/main" noGrp="1"/>
+          </p:cNvSpPr>
+          <p:nvPr/>
+        </p:nvSpPr>
+        <p:spPr>
+          <a:xfrm xmlns:a="http://schemas.openxmlformats.org/drawingml/2006/main">
+            <a:off x="8515350" y="2105025"/>
+            <a:ext cx="2971800" cy="1943100"/>
+          </a:xfrm>
+          <a:prstGeom xmlns:a="http://schemas.openxmlformats.org/drawingml/2006/main" prst="rect">
+            <a:avLst/>
+          </a:prstGeom>
+          <a:noFill xmlns:a="http://schemas.openxmlformats.org/drawingml/2006/main"/>
+          <a:ln xmlns:a="http://schemas.openxmlformats.org/drawingml/2006/main" w="0">
+            <a:noFill/>
+            <a:prstDash val="solid"/>
+          </a:ln>
+        </p:spPr>
+        <p:txBody>
+          <a:bodyPr xmlns:a="http://schemas.openxmlformats.org/drawingml/2006/main"/>
+          <a:lstStyle xmlns:a="http://schemas.openxmlformats.org/drawingml/2006/main"/>
+          <a:p xmlns:a="http://schemas.openxmlformats.org/drawingml/2006/main">
+            <a:pPr>
+              <a:defRPr sz="1275">
+                <a:solidFill>
+                  <a:srgbClr val="0D2843"/>
+                </a:solidFill>
+              </a:defRPr>
+            </a:pPr>
+            <a:r>
+              <a:rPr sz="1275">
+                <a:solidFill>
+                  <a:srgbClr val="0D2843"/>
+                </a:solidFill>
+              </a:rPr>
+              <a:t>• IMU: accelerometers + gyroscopes.</a:t>
+            </a:r>
+          </a:p>
+          <a:p xmlns:a="http://schemas.openxmlformats.org/drawingml/2006/main">
+            <a:pPr>
+              <a:defRPr sz="1275">
+                <a:solidFill>
+                  <a:srgbClr val="0D2843"/>
+                </a:solidFill>
+              </a:defRPr>
+            </a:pPr>
+            <a:r>
+              <a:rPr sz="1275">
+                <a:solidFill>
+                  <a:srgbClr val="0D2843"/>
+                </a:solidFill>
+              </a:rPr>
+              <a:t>• Barometer: air-pressure change.</a:t>
+            </a:r>
+          </a:p>
+          <a:p xmlns:a="http://schemas.openxmlformats.org/drawingml/2006/main">
+            <a:pPr>
+              <a:defRPr sz="1275">
+                <a:solidFill>
+                  <a:srgbClr val="0D2843"/>
+                </a:solidFill>
+              </a:defRPr>
+            </a:pPr>
+            <a:r>
+              <a:rPr sz="1275">
+                <a:solidFill>
+                  <a:srgbClr val="0D2843"/>
+                </a:solidFill>
+              </a:rPr>
+              <a:t>• Magnetometer: heading cue.</a:t>
+            </a:r>
+          </a:p>
+          <a:p xmlns:a="http://schemas.openxmlformats.org/drawingml/2006/main">
+            <a:pPr>
+              <a:defRPr sz="1275">
+                <a:solidFill>
+                  <a:srgbClr val="0D2843"/>
+                </a:solidFill>
+              </a:defRPr>
+            </a:pPr>
+            <a:r>
+              <a:rPr sz="1275">
+                <a:solidFill>
+                  <a:srgbClr val="0D2843"/>
+                </a:solidFill>
+              </a:rPr>
+              <a:t>• Temperature sensing and the flight controller support compensation and fusion.</a:t>
+            </a:r>
+          </a:p>
+        </p:txBody>
+      </p:sp>
+      <p:sp>
+        <p:nvSpPr>
+          <p:cNvPr id="34" name="">
+            <a:extLst xmlns:a="http://schemas.openxmlformats.org/drawingml/2006/main">
+              <a:ext uri="{FF2B5EF4-FFF2-40B4-BE49-F238E27FC236}">
+                <a16:creationId xmlns:a16="http://schemas.microsoft.com/office/drawing/2014/main" id="{60D8E4CA-A134-4DCF-9823-63CF6F6B5027}"/>
+              </a:ext>
+            </a:extLst>
+          </p:cNvPr>
+          <p:cNvSpPr>
+            <a:spLocks xmlns:a="http://schemas.openxmlformats.org/drawingml/2006/main" noGrp="1"/>
+          </p:cNvSpPr>
+          <p:nvPr/>
+        </p:nvSpPr>
+        <p:spPr>
+          <a:xfrm xmlns:a="http://schemas.openxmlformats.org/drawingml/2006/main">
+            <a:off x="8286750" y="4457700"/>
+            <a:ext cx="3390900" cy="1543050"/>
+          </a:xfrm>
+          <a:prstGeom xmlns:a="http://schemas.openxmlformats.org/drawingml/2006/main" prst="roundRect">
+            <a:avLst>
+              <a:gd name="adj" fmla="val 7407"/>
             </a:avLst>
           </a:prstGeom>
           <a:solidFill xmlns:a="http://schemas.openxmlformats.org/drawingml/2006/main">
@@ -2391,22 +3609,22 @@
       </p:sp>
       <p:sp>
         <p:nvSpPr>
-          <p:cNvPr id="16" name="">
-            <a:extLst xmlns:a="http://schemas.openxmlformats.org/drawingml/2006/main">
-              <a:ext uri="{FF2B5EF4-FFF2-40B4-BE49-F238E27FC236}">
-                <a16:creationId xmlns:a16="http://schemas.microsoft.com/office/drawing/2014/main" id="{4E1D7505-244B-45D2-B884-58E5F5515EB1}"/>
-              </a:ext>
-            </a:extLst>
-          </p:cNvPr>
-          <p:cNvSpPr>
-            <a:spLocks xmlns:a="http://schemas.openxmlformats.org/drawingml/2006/main" noGrp="1"/>
-          </p:cNvSpPr>
-          <p:nvPr/>
-        </p:nvSpPr>
-        <p:spPr>
-          <a:xfrm xmlns:a="http://schemas.openxmlformats.org/drawingml/2006/main">
-            <a:off x="8610600" y="4857750"/>
-            <a:ext cx="2838450" cy="400050"/>
+          <p:cNvPr id="35" name="">
+            <a:extLst xmlns:a="http://schemas.openxmlformats.org/drawingml/2006/main">
+              <a:ext uri="{FF2B5EF4-FFF2-40B4-BE49-F238E27FC236}">
+                <a16:creationId xmlns:a16="http://schemas.microsoft.com/office/drawing/2014/main" id="{495A4F74-98AB-4483-8243-79C0499E37D3}"/>
+              </a:ext>
+            </a:extLst>
+          </p:cNvPr>
+          <p:cNvSpPr>
+            <a:spLocks xmlns:a="http://schemas.openxmlformats.org/drawingml/2006/main" noGrp="1"/>
+          </p:cNvSpPr>
+          <p:nvPr/>
+        </p:nvSpPr>
+        <p:spPr>
+          <a:xfrm xmlns:a="http://schemas.openxmlformats.org/drawingml/2006/main">
+            <a:off x="8515350" y="4686300"/>
+            <a:ext cx="2933700" cy="381000"/>
           </a:xfrm>
           <a:prstGeom xmlns:a="http://schemas.openxmlformats.org/drawingml/2006/main" prst="rect">
             <a:avLst/>
@@ -2422,14 +3640,14 @@
           <a:lstStyle xmlns:a="http://schemas.openxmlformats.org/drawingml/2006/main"/>
           <a:p xmlns:a="http://schemas.openxmlformats.org/drawingml/2006/main">
             <a:pPr algn="ctr">
-              <a:defRPr sz="2250" b="1">
+              <a:defRPr sz="2100" b="1">
                 <a:solidFill>
                   <a:srgbClr val="D94F5C"/>
                 </a:solidFill>
               </a:defRPr>
             </a:pPr>
             <a:r>
-              <a:rPr sz="2250" b="1">
+              <a:rPr sz="2100" b="1">
                 <a:solidFill>
                   <a:srgbClr val="D94F5C"/>
                 </a:solidFill>
@@ -2441,22 +3659,22 @@
       </p:sp>
       <p:sp>
         <p:nvSpPr>
-          <p:cNvPr id="17" name="">
-            <a:extLst xmlns:a="http://schemas.openxmlformats.org/drawingml/2006/main">
-              <a:ext uri="{FF2B5EF4-FFF2-40B4-BE49-F238E27FC236}">
-                <a16:creationId xmlns:a16="http://schemas.microsoft.com/office/drawing/2014/main" id="{4D9B307E-EE76-4E6D-A503-660659A9BCA8}"/>
-              </a:ext>
-            </a:extLst>
-          </p:cNvPr>
-          <p:cNvSpPr>
-            <a:spLocks xmlns:a="http://schemas.openxmlformats.org/drawingml/2006/main" noGrp="1"/>
-          </p:cNvSpPr>
-          <p:nvPr/>
-        </p:nvSpPr>
-        <p:spPr>
-          <a:xfrm xmlns:a="http://schemas.openxmlformats.org/drawingml/2006/main">
-            <a:off x="8667750" y="5429250"/>
-            <a:ext cx="2724150" cy="323850"/>
+          <p:cNvPr id="36" name="">
+            <a:extLst xmlns:a="http://schemas.openxmlformats.org/drawingml/2006/main">
+              <a:ext uri="{FF2B5EF4-FFF2-40B4-BE49-F238E27FC236}">
+                <a16:creationId xmlns:a16="http://schemas.microsoft.com/office/drawing/2014/main" id="{7E8EC7BA-D1FC-4F90-8386-9054670778D4}"/>
+              </a:ext>
+            </a:extLst>
+          </p:cNvPr>
+          <p:cNvSpPr>
+            <a:spLocks xmlns:a="http://schemas.openxmlformats.org/drawingml/2006/main" noGrp="1"/>
+          </p:cNvSpPr>
+          <p:nvPr/>
+        </p:nvSpPr>
+        <p:spPr>
+          <a:xfrm xmlns:a="http://schemas.openxmlformats.org/drawingml/2006/main">
+            <a:off x="8572500" y="5257800"/>
+            <a:ext cx="2819400" cy="495300"/>
           </a:xfrm>
           <a:prstGeom xmlns:a="http://schemas.openxmlformats.org/drawingml/2006/main" prst="rect">
             <a:avLst/>
@@ -2472,19 +3690,19 @@
           <a:lstStyle xmlns:a="http://schemas.openxmlformats.org/drawingml/2006/main"/>
           <a:p xmlns:a="http://schemas.openxmlformats.org/drawingml/2006/main">
             <a:pPr algn="ctr">
-              <a:defRPr sz="1275">
+              <a:defRPr sz="1200">
                 <a:solidFill>
                   <a:srgbClr val="001B3A"/>
                 </a:solidFill>
               </a:defRPr>
             </a:pPr>
             <a:r>
-              <a:rPr sz="1275">
+              <a:rPr sz="1200">
                 <a:solidFill>
                   <a:srgbClr val="001B3A"/>
                 </a:solidFill>
               </a:rPr>
-              <a:t>No latitude/longitude or global waypoint position.</a:t>
+              <a:t>No latitude/longitude, global waypoint position, or GPS-derived speed.</a:t>
             </a:r>
           </a:p>
         </p:txBody>
@@ -2492,7 +3710,7 @@
     </p:spTree>
     <p:extLst>
       <p:ext uri="{BB962C8B-B14F-4D97-AF65-F5344CB8AC3E}">
-        <p14:creationId xmlns:p14="http://schemas.microsoft.com/office/powerpoint/2010/main" val="971376067"/>
+        <p14:creationId xmlns:p14="http://schemas.microsoft.com/office/powerpoint/2010/main" val="259751598"/>
       </p:ext>
     </p:extLst>
   </p:cSld>
@@ -2520,7 +3738,7 @@
           <p:nvPr/>
         </p:nvPicPr>
         <p:blipFill>
-          <a:blip xmlns:r="http://schemas.openxmlformats.org/officeDocument/2006/relationships" xmlns:a="http://schemas.openxmlformats.org/drawingml/2006/main" r:embed="R14d3867093dc4fe4"/>
+          <a:blip xmlns:r="http://schemas.openxmlformats.org/officeDocument/2006/relationships" xmlns:a="http://schemas.openxmlformats.org/drawingml/2006/main" r:embed="Rcd008439b19c4eb3"/>
           <a:srcRect xmlns:a="http://schemas.openxmlformats.org/drawingml/2006/main" l="0" t="0" r="0" b="0"/>
           <a:stretch xmlns:a="http://schemas.openxmlformats.org/drawingml/2006/main">
             <a:fillRect l="0" t="0" r="0" b="0"/>
@@ -2541,7 +3759,7 @@
           <p:cNvPr id="2" name="">
             <a:extLst xmlns:a="http://schemas.openxmlformats.org/drawingml/2006/main">
               <a:ext uri="{FF2B5EF4-FFF2-40B4-BE49-F238E27FC236}">
-                <a16:creationId xmlns:a16="http://schemas.microsoft.com/office/drawing/2014/main" id="{AB38E8D8-80DA-46C5-9545-231577F89D11}"/>
+                <a16:creationId xmlns:a16="http://schemas.microsoft.com/office/drawing/2014/main" id="{B9424A1D-3943-4311-BE63-10E43E7077E4}"/>
               </a:ext>
             </a:extLst>
           </p:cNvPr>
@@ -2574,7 +3792,7 @@
           <p:cNvPr id="3" name="">
             <a:extLst xmlns:a="http://schemas.openxmlformats.org/drawingml/2006/main">
               <a:ext uri="{FF2B5EF4-FFF2-40B4-BE49-F238E27FC236}">
-                <a16:creationId xmlns:a16="http://schemas.microsoft.com/office/drawing/2014/main" id="{3EBFA2C2-BB7F-4E23-9179-CBEDE66043F3}"/>
+                <a16:creationId xmlns:a16="http://schemas.microsoft.com/office/drawing/2014/main" id="{694FFA9F-C73C-402F-B9A2-2C8AD1B3448E}"/>
               </a:ext>
             </a:extLst>
           </p:cNvPr>
@@ -2624,7 +3842,7 @@
           <p:cNvPr id="4" name="">
             <a:extLst xmlns:a="http://schemas.openxmlformats.org/drawingml/2006/main">
               <a:ext uri="{FF2B5EF4-FFF2-40B4-BE49-F238E27FC236}">
-                <a16:creationId xmlns:a16="http://schemas.microsoft.com/office/drawing/2014/main" id="{58685C8A-7D6D-49EC-985C-DC1F18FCC195}"/>
+                <a16:creationId xmlns:a16="http://schemas.microsoft.com/office/drawing/2014/main" id="{120D0A4E-9D54-4B5E-8D43-645B0C11F78F}"/>
               </a:ext>
             </a:extLst>
           </p:cNvPr>
@@ -2657,7 +3875,7 @@
           <p:cNvPr id="5" name="">
             <a:extLst xmlns:a="http://schemas.openxmlformats.org/drawingml/2006/main">
               <a:ext uri="{FF2B5EF4-FFF2-40B4-BE49-F238E27FC236}">
-                <a16:creationId xmlns:a16="http://schemas.microsoft.com/office/drawing/2014/main" id="{9B0F2F9D-C04D-4C18-BD29-E094774DF4D9}"/>
+                <a16:creationId xmlns:a16="http://schemas.microsoft.com/office/drawing/2014/main" id="{1D7A8D84-4638-4D83-8D7C-D1CA1CB8DDEB}"/>
               </a:ext>
             </a:extLst>
           </p:cNvPr>
@@ -2705,7 +3923,7 @@
     </p:spTree>
     <p:extLst>
       <p:ext uri="{BB962C8B-B14F-4D97-AF65-F5344CB8AC3E}">
-        <p14:creationId xmlns:p14="http://schemas.microsoft.com/office/powerpoint/2010/main" val="489097999"/>
+        <p14:creationId xmlns:p14="http://schemas.microsoft.com/office/powerpoint/2010/main" val="625607224"/>
       </p:ext>
     </p:extLst>
   </p:cSld>
@@ -2715,6 +3933,13 @@
 <file path=ppt/slides/slide4.xml><?xml version="1.0" encoding="utf-8"?>
 <p:sld xmlns:p="http://schemas.openxmlformats.org/presentationml/2006/main">
   <p:cSld>
+    <p:bg>
+      <p:bgPr>
+        <a:solidFill xmlns:a="http://schemas.openxmlformats.org/drawingml/2006/main">
+          <a:srgbClr val="EEF3F5"/>
+        </a:solidFill>
+      </p:bgPr>
+    </p:bg>
     <p:spTree>
       <p:nvGrpSpPr>
         <p:cNvPr id="1" name=""/>
@@ -2724,25 +3949,238 @@
       <p:grpSpPr>
         <a:xfrm xmlns:a="http://schemas.openxmlformats.org/drawingml/2006/main"/>
       </p:grpSpPr>
+      <p:sp>
+        <p:nvSpPr>
+          <p:cNvPr id="60" name="">
+            <a:extLst xmlns:a="http://schemas.openxmlformats.org/drawingml/2006/main">
+              <a:ext uri="{FF2B5EF4-FFF2-40B4-BE49-F238E27FC236}">
+                <a16:creationId xmlns:a16="http://schemas.microsoft.com/office/drawing/2014/main" id="{645CE0B0-9AD7-4A65-8F8D-BEF4F24A29FE}"/>
+              </a:ext>
+            </a:extLst>
+          </p:cNvPr>
+          <p:cNvSpPr>
+            <a:spLocks xmlns:a="http://schemas.openxmlformats.org/drawingml/2006/main" noGrp="1"/>
+          </p:cNvSpPr>
+          <p:nvPr/>
+        </p:nvSpPr>
+        <p:spPr>
+          <a:xfrm xmlns:a="http://schemas.openxmlformats.org/drawingml/2006/main">
+            <a:off x="0" y="0"/>
+            <a:ext cx="12192000" cy="95250"/>
+          </a:xfrm>
+          <a:prstGeom xmlns:a="http://schemas.openxmlformats.org/drawingml/2006/main" prst="rect">
+            <a:avLst/>
+          </a:prstGeom>
+          <a:solidFill xmlns:a="http://schemas.openxmlformats.org/drawingml/2006/main">
+            <a:srgbClr val="001B3A"/>
+          </a:solidFill>
+          <a:ln xmlns:a="http://schemas.openxmlformats.org/drawingml/2006/main" w="0">
+            <a:solidFill>
+              <a:srgbClr val="001B3A"/>
+            </a:solidFill>
+            <a:prstDash val="solid"/>
+          </a:ln>
+        </p:spPr>
+      </p:sp>
+      <p:sp>
+        <p:nvSpPr>
+          <p:cNvPr id="2" name="">
+            <a:extLst xmlns:a="http://schemas.openxmlformats.org/drawingml/2006/main">
+              <a:ext uri="{FF2B5EF4-FFF2-40B4-BE49-F238E27FC236}">
+                <a16:creationId xmlns:a16="http://schemas.microsoft.com/office/drawing/2014/main" id="{D2BBA4E4-C20F-4F86-A9B3-6048CE27D5A7}"/>
+              </a:ext>
+            </a:extLst>
+          </p:cNvPr>
+          <p:cNvSpPr>
+            <a:spLocks xmlns:a="http://schemas.openxmlformats.org/drawingml/2006/main" noGrp="1"/>
+          </p:cNvSpPr>
+          <p:nvPr/>
+        </p:nvSpPr>
+        <p:spPr>
+          <a:xfrm xmlns:a="http://schemas.openxmlformats.org/drawingml/2006/main">
+            <a:off x="0" y="95250"/>
+            <a:ext cx="12192000" cy="47625"/>
+          </a:xfrm>
+          <a:prstGeom xmlns:a="http://schemas.openxmlformats.org/drawingml/2006/main" prst="rect">
+            <a:avLst/>
+          </a:prstGeom>
+          <a:solidFill xmlns:a="http://schemas.openxmlformats.org/drawingml/2006/main">
+            <a:srgbClr val="008C95"/>
+          </a:solidFill>
+          <a:ln xmlns:a="http://schemas.openxmlformats.org/drawingml/2006/main" w="0">
+            <a:solidFill>
+              <a:srgbClr val="008C95"/>
+            </a:solidFill>
+            <a:prstDash val="solid"/>
+          </a:ln>
+        </p:spPr>
+      </p:sp>
+      <p:sp>
+        <p:nvSpPr>
+          <p:cNvPr id="3" name="">
+            <a:extLst xmlns:a="http://schemas.openxmlformats.org/drawingml/2006/main">
+              <a:ext uri="{FF2B5EF4-FFF2-40B4-BE49-F238E27FC236}">
+                <a16:creationId xmlns:a16="http://schemas.microsoft.com/office/drawing/2014/main" id="{6013FF67-738E-47DC-A4AF-DE5027A11B37}"/>
+              </a:ext>
+            </a:extLst>
+          </p:cNvPr>
+          <p:cNvSpPr>
+            <a:spLocks xmlns:a="http://schemas.openxmlformats.org/drawingml/2006/main" noGrp="1"/>
+          </p:cNvSpPr>
+          <p:nvPr/>
+        </p:nvSpPr>
+        <p:spPr>
+          <a:xfrm xmlns:a="http://schemas.openxmlformats.org/drawingml/2006/main">
+            <a:off x="514350" y="295275"/>
+            <a:ext cx="3143250" cy="209550"/>
+          </a:xfrm>
+          <a:prstGeom xmlns:a="http://schemas.openxmlformats.org/drawingml/2006/main" prst="rect">
+            <a:avLst/>
+          </a:prstGeom>
+          <a:noFill xmlns:a="http://schemas.openxmlformats.org/drawingml/2006/main"/>
+          <a:ln xmlns:a="http://schemas.openxmlformats.org/drawingml/2006/main" w="0">
+            <a:noFill/>
+            <a:prstDash val="solid"/>
+          </a:ln>
+        </p:spPr>
+        <p:txBody>
+          <a:bodyPr xmlns:a="http://schemas.openxmlformats.org/drawingml/2006/main"/>
+          <a:lstStyle xmlns:a="http://schemas.openxmlformats.org/drawingml/2006/main"/>
+          <a:p xmlns:a="http://schemas.openxmlformats.org/drawingml/2006/main">
+            <a:pPr>
+              <a:defRPr sz="900" b="1">
+                <a:solidFill>
+                  <a:srgbClr val="008C95"/>
+                </a:solidFill>
+              </a:defRPr>
+            </a:pPr>
+            <a:r>
+              <a:rPr sz="900" b="1">
+                <a:solidFill>
+                  <a:srgbClr val="008C95"/>
+                </a:solidFill>
+              </a:rPr>
+              <a:t>SENSOR SUITE / 04</a:t>
+            </a:r>
+          </a:p>
+        </p:txBody>
+      </p:sp>
+      <p:sp>
+        <p:nvSpPr>
+          <p:cNvPr id="4" name="">
+            <a:extLst xmlns:a="http://schemas.openxmlformats.org/drawingml/2006/main">
+              <a:ext uri="{FF2B5EF4-FFF2-40B4-BE49-F238E27FC236}">
+                <a16:creationId xmlns:a16="http://schemas.microsoft.com/office/drawing/2014/main" id="{96B1B754-1C1A-4DAB-A45D-313E085E927B}"/>
+              </a:ext>
+            </a:extLst>
+          </p:cNvPr>
+          <p:cNvSpPr>
+            <a:spLocks xmlns:a="http://schemas.openxmlformats.org/drawingml/2006/main" noGrp="1"/>
+          </p:cNvSpPr>
+          <p:nvPr/>
+        </p:nvSpPr>
+        <p:spPr>
+          <a:xfrm xmlns:a="http://schemas.openxmlformats.org/drawingml/2006/main">
+            <a:off x="514350" y="542925"/>
+            <a:ext cx="4000500" cy="171450"/>
+          </a:xfrm>
+          <a:prstGeom xmlns:a="http://schemas.openxmlformats.org/drawingml/2006/main" prst="rect">
+            <a:avLst/>
+          </a:prstGeom>
+          <a:noFill xmlns:a="http://schemas.openxmlformats.org/drawingml/2006/main"/>
+          <a:ln xmlns:a="http://schemas.openxmlformats.org/drawingml/2006/main" w="0">
+            <a:noFill/>
+            <a:prstDash val="solid"/>
+          </a:ln>
+        </p:spPr>
+        <p:txBody>
+          <a:bodyPr xmlns:a="http://schemas.openxmlformats.org/drawingml/2006/main"/>
+          <a:lstStyle xmlns:a="http://schemas.openxmlformats.org/drawingml/2006/main"/>
+          <a:p xmlns:a="http://schemas.openxmlformats.org/drawingml/2006/main">
+            <a:pPr>
+              <a:defRPr sz="750" b="1">
+                <a:solidFill>
+                  <a:srgbClr val="C9A227"/>
+                </a:solidFill>
+              </a:defRPr>
+            </a:pPr>
+            <a:r>
+              <a:rPr sz="750" b="1">
+                <a:solidFill>
+                  <a:srgbClr val="C9A227"/>
+                </a:solidFill>
+              </a:rPr>
+              <a:t>FROM MEASUREMENT TO MOTOR</a:t>
+            </a:r>
+          </a:p>
+        </p:txBody>
+      </p:sp>
+      <p:sp>
+        <p:nvSpPr>
+          <p:cNvPr id="5" name="">
+            <a:extLst xmlns:a="http://schemas.openxmlformats.org/drawingml/2006/main">
+              <a:ext uri="{FF2B5EF4-FFF2-40B4-BE49-F238E27FC236}">
+                <a16:creationId xmlns:a16="http://schemas.microsoft.com/office/drawing/2014/main" id="{3F1DFBA4-DBC0-43A2-90BB-B21E4E93500B}"/>
+              </a:ext>
+            </a:extLst>
+          </p:cNvPr>
+          <p:cNvSpPr>
+            <a:spLocks xmlns:a="http://schemas.openxmlformats.org/drawingml/2006/main" noGrp="1"/>
+          </p:cNvSpPr>
+          <p:nvPr/>
+        </p:nvSpPr>
+        <p:spPr>
+          <a:xfrm xmlns:a="http://schemas.openxmlformats.org/drawingml/2006/main">
+            <a:off x="514350" y="762000"/>
+            <a:ext cx="10048875" cy="476250"/>
+          </a:xfrm>
+          <a:prstGeom xmlns:a="http://schemas.openxmlformats.org/drawingml/2006/main" prst="rect">
+            <a:avLst/>
+          </a:prstGeom>
+          <a:noFill xmlns:a="http://schemas.openxmlformats.org/drawingml/2006/main"/>
+          <a:ln xmlns:a="http://schemas.openxmlformats.org/drawingml/2006/main" w="0">
+            <a:noFill/>
+            <a:prstDash val="solid"/>
+          </a:ln>
+        </p:spPr>
+        <p:txBody>
+          <a:bodyPr xmlns:a="http://schemas.openxmlformats.org/drawingml/2006/main"/>
+          <a:lstStyle xmlns:a="http://schemas.openxmlformats.org/drawingml/2006/main"/>
+          <a:p xmlns:a="http://schemas.openxmlformats.org/drawingml/2006/main">
+            <a:pPr>
+              <a:defRPr sz="2700" b="1">
+                <a:solidFill>
+                  <a:srgbClr val="001B3A"/>
+                </a:solidFill>
+              </a:defRPr>
+            </a:pPr>
+            <a:r>
+              <a:rPr sz="2700" b="1">
+                <a:solidFill>
+                  <a:srgbClr val="001B3A"/>
+                </a:solidFill>
+              </a:rPr>
+              <a:t>Sensor fusion closes the control loop</a:t>
+            </a:r>
+          </a:p>
+        </p:txBody>
+      </p:sp>
       <p:pic>
         <p:nvPicPr>
-          <p:cNvPr id="6" name=""/>
+          <p:cNvPr id="65" name=""/>
           <p:cNvPicPr>
             <a:picLocks xmlns:a="http://schemas.openxmlformats.org/drawingml/2006/main" noChangeAspect="1"/>
           </p:cNvPicPr>
           <p:nvPr/>
         </p:nvPicPr>
         <p:blipFill>
-          <a:blip xmlns:r="http://schemas.openxmlformats.org/officeDocument/2006/relationships" xmlns:a="http://schemas.openxmlformats.org/drawingml/2006/main" r:embed="R505cf2fd1c5e4779"/>
-          <a:srcRect xmlns:a="http://schemas.openxmlformats.org/drawingml/2006/main" l="0" t="0" r="0" b="0"/>
-          <a:stretch xmlns:a="http://schemas.openxmlformats.org/drawingml/2006/main">
-            <a:fillRect l="0" t="0" r="0" b="0"/>
-          </a:stretch>
+          <a:blip xmlns:r="http://schemas.openxmlformats.org/officeDocument/2006/relationships" xmlns:a="http://schemas.openxmlformats.org/drawingml/2006/main" r:embed="Rd32cdaf49cd8486c"/>
+          <a:stretch xmlns:a="http://schemas.openxmlformats.org/drawingml/2006/main"/>
         </p:blipFill>
         <p:spPr>
           <a:xfrm xmlns:a="http://schemas.openxmlformats.org/drawingml/2006/main">
-            <a:off x="0" y="0"/>
-            <a:ext cx="12192000" cy="6858000"/>
+            <a:off x="11258550" y="399746"/>
+            <a:ext cx="457200" cy="229209"/>
           </a:xfrm>
           <a:prstGeom xmlns:a="http://schemas.openxmlformats.org/drawingml/2006/main" prst="rect">
             <a:avLst/>
@@ -2751,32 +4189,32 @@
       </p:pic>
       <p:sp>
         <p:nvSpPr>
-          <p:cNvPr id="2" name="">
-            <a:extLst xmlns:a="http://schemas.openxmlformats.org/drawingml/2006/main">
-              <a:ext uri="{FF2B5EF4-FFF2-40B4-BE49-F238E27FC236}">
-                <a16:creationId xmlns:a16="http://schemas.microsoft.com/office/drawing/2014/main" id="{5CAD23E0-C19C-4C94-A409-836683020BEE}"/>
-              </a:ext>
-            </a:extLst>
-          </p:cNvPr>
-          <p:cNvSpPr>
-            <a:spLocks xmlns:a="http://schemas.openxmlformats.org/drawingml/2006/main" noGrp="1"/>
-          </p:cNvSpPr>
-          <p:nvPr/>
-        </p:nvSpPr>
-        <p:spPr>
-          <a:xfrm xmlns:a="http://schemas.openxmlformats.org/drawingml/2006/main">
-            <a:off x="323850" y="257175"/>
-            <a:ext cx="2667000" cy="247650"/>
+          <p:cNvPr id="7" name="">
+            <a:extLst xmlns:a="http://schemas.openxmlformats.org/drawingml/2006/main">
+              <a:ext uri="{FF2B5EF4-FFF2-40B4-BE49-F238E27FC236}">
+                <a16:creationId xmlns:a16="http://schemas.microsoft.com/office/drawing/2014/main" id="{74494F20-BCAA-4069-9698-315E275A16F2}"/>
+              </a:ext>
+            </a:extLst>
+          </p:cNvPr>
+          <p:cNvSpPr>
+            <a:spLocks xmlns:a="http://schemas.openxmlformats.org/drawingml/2006/main" noGrp="1"/>
+          </p:cNvSpPr>
+          <p:nvPr/>
+        </p:nvSpPr>
+        <p:spPr>
+          <a:xfrm xmlns:a="http://schemas.openxmlformats.org/drawingml/2006/main">
+            <a:off x="514350" y="6505575"/>
+            <a:ext cx="11163300" cy="9525"/>
           </a:xfrm>
           <a:prstGeom xmlns:a="http://schemas.openxmlformats.org/drawingml/2006/main" prst="rect">
             <a:avLst/>
           </a:prstGeom>
           <a:solidFill xmlns:a="http://schemas.openxmlformats.org/drawingml/2006/main">
-            <a:srgbClr val="EEF3F5"/>
+            <a:srgbClr val="B8C7CF"/>
           </a:solidFill>
           <a:ln xmlns:a="http://schemas.openxmlformats.org/drawingml/2006/main" w="0">
             <a:solidFill>
-              <a:srgbClr val="EEF3F5"/>
+              <a:srgbClr val="B8C7CF"/>
             </a:solidFill>
             <a:prstDash val="solid"/>
           </a:ln>
@@ -2784,22 +4222,22 @@
       </p:sp>
       <p:sp>
         <p:nvSpPr>
-          <p:cNvPr id="3" name="">
-            <a:extLst xmlns:a="http://schemas.openxmlformats.org/drawingml/2006/main">
-              <a:ext uri="{FF2B5EF4-FFF2-40B4-BE49-F238E27FC236}">
-                <a16:creationId xmlns:a16="http://schemas.microsoft.com/office/drawing/2014/main" id="{0F7377C2-3AB2-47F8-B649-EC2BD50CC9CA}"/>
-              </a:ext>
-            </a:extLst>
-          </p:cNvPr>
-          <p:cNvSpPr>
-            <a:spLocks xmlns:a="http://schemas.openxmlformats.org/drawingml/2006/main" noGrp="1"/>
-          </p:cNvSpPr>
-          <p:nvPr/>
-        </p:nvSpPr>
-        <p:spPr>
-          <a:xfrm xmlns:a="http://schemas.openxmlformats.org/drawingml/2006/main">
-            <a:off x="381000" y="323850"/>
-            <a:ext cx="2476500" cy="171450"/>
+          <p:cNvPr id="8" name="">
+            <a:extLst xmlns:a="http://schemas.openxmlformats.org/drawingml/2006/main">
+              <a:ext uri="{FF2B5EF4-FFF2-40B4-BE49-F238E27FC236}">
+                <a16:creationId xmlns:a16="http://schemas.microsoft.com/office/drawing/2014/main" id="{61A05887-DC3D-4534-A2C8-72FA04600628}"/>
+              </a:ext>
+            </a:extLst>
+          </p:cNvPr>
+          <p:cNvSpPr>
+            <a:spLocks xmlns:a="http://schemas.openxmlformats.org/drawingml/2006/main" noGrp="1"/>
+          </p:cNvSpPr>
+          <p:nvPr/>
+        </p:nvSpPr>
+        <p:spPr>
+          <a:xfrm xmlns:a="http://schemas.openxmlformats.org/drawingml/2006/main">
+            <a:off x="514350" y="6572250"/>
+            <a:ext cx="4286250" cy="142875"/>
           </a:xfrm>
           <a:prstGeom xmlns:a="http://schemas.openxmlformats.org/drawingml/2006/main" prst="rect">
             <a:avLst/>
@@ -2815,74 +4253,41 @@
           <a:lstStyle xmlns:a="http://schemas.openxmlformats.org/drawingml/2006/main"/>
           <a:p xmlns:a="http://schemas.openxmlformats.org/drawingml/2006/main">
             <a:pPr>
-              <a:defRPr sz="750" b="1">
-                <a:solidFill>
-                  <a:srgbClr val="008C95"/>
+              <a:defRPr sz="675">
+                <a:solidFill>
+                  <a:srgbClr val="536A7B"/>
                 </a:solidFill>
               </a:defRPr>
             </a:pPr>
             <a:r>
-              <a:rPr sz="750" b="1">
-                <a:solidFill>
-                  <a:srgbClr val="008C95"/>
+              <a:rPr sz="675">
+                <a:solidFill>
+                  <a:srgbClr val="536A7B"/>
                 </a:solidFill>
               </a:rPr>
-              <a:t>SENSOR SUITE / 04</a:t>
-            </a:r>
-          </a:p>
-        </p:txBody>
-      </p:sp>
-      <p:sp>
-        <p:nvSpPr>
-          <p:cNvPr id="4" name="">
-            <a:extLst xmlns:a="http://schemas.openxmlformats.org/drawingml/2006/main">
-              <a:ext uri="{FF2B5EF4-FFF2-40B4-BE49-F238E27FC236}">
-                <a16:creationId xmlns:a16="http://schemas.microsoft.com/office/drawing/2014/main" id="{86FB768F-6D03-4C13-99B8-3A1716881434}"/>
-              </a:ext>
-            </a:extLst>
-          </p:cNvPr>
-          <p:cNvSpPr>
-            <a:spLocks xmlns:a="http://schemas.openxmlformats.org/drawingml/2006/main" noGrp="1"/>
-          </p:cNvSpPr>
-          <p:nvPr/>
-        </p:nvSpPr>
-        <p:spPr>
-          <a:xfrm xmlns:a="http://schemas.openxmlformats.org/drawingml/2006/main">
-            <a:off x="10820400" y="6496050"/>
-            <a:ext cx="914400" cy="238125"/>
-          </a:xfrm>
-          <a:prstGeom xmlns:a="http://schemas.openxmlformats.org/drawingml/2006/main" prst="rect">
-            <a:avLst/>
-          </a:prstGeom>
-          <a:solidFill xmlns:a="http://schemas.openxmlformats.org/drawingml/2006/main">
-            <a:srgbClr val="EEF3F5"/>
-          </a:solidFill>
-          <a:ln xmlns:a="http://schemas.openxmlformats.org/drawingml/2006/main" w="0">
-            <a:solidFill>
-              <a:srgbClr val="EEF3F5"/>
-            </a:solidFill>
-            <a:prstDash val="solid"/>
-          </a:ln>
-        </p:spPr>
-      </p:sp>
-      <p:sp>
-        <p:nvSpPr>
-          <p:cNvPr id="5" name="">
-            <a:extLst xmlns:a="http://schemas.openxmlformats.org/drawingml/2006/main">
-              <a:ext uri="{FF2B5EF4-FFF2-40B4-BE49-F238E27FC236}">
-                <a16:creationId xmlns:a16="http://schemas.microsoft.com/office/drawing/2014/main" id="{5F387E5A-DE8E-471B-B824-C19F7CA0E204}"/>
-              </a:ext>
-            </a:extLst>
-          </p:cNvPr>
-          <p:cNvSpPr>
-            <a:spLocks xmlns:a="http://schemas.openxmlformats.org/drawingml/2006/main" noGrp="1"/>
-          </p:cNvSpPr>
-          <p:nvPr/>
-        </p:nvSpPr>
-        <p:spPr>
-          <a:xfrm xmlns:a="http://schemas.openxmlformats.org/drawingml/2006/main">
-            <a:off x="10934700" y="6572250"/>
-            <a:ext cx="666750" cy="133350"/>
+              <a:t>WRC | HOPPER STUDIO | INFORMATION SERIES</a:t>
+            </a:r>
+          </a:p>
+        </p:txBody>
+      </p:sp>
+      <p:sp>
+        <p:nvSpPr>
+          <p:cNvPr id="9" name="">
+            <a:extLst xmlns:a="http://schemas.openxmlformats.org/drawingml/2006/main">
+              <a:ext uri="{FF2B5EF4-FFF2-40B4-BE49-F238E27FC236}">
+                <a16:creationId xmlns:a16="http://schemas.microsoft.com/office/drawing/2014/main" id="{5E83529C-9818-4341-979C-EA10C74E49DF}"/>
+              </a:ext>
+            </a:extLst>
+          </p:cNvPr>
+          <p:cNvSpPr>
+            <a:spLocks xmlns:a="http://schemas.openxmlformats.org/drawingml/2006/main" noGrp="1"/>
+          </p:cNvSpPr>
+          <p:nvPr/>
+        </p:nvSpPr>
+        <p:spPr>
+          <a:xfrm xmlns:a="http://schemas.openxmlformats.org/drawingml/2006/main">
+            <a:off x="10953750" y="6572250"/>
+            <a:ext cx="723900" cy="142875"/>
           </a:xfrm>
           <a:prstGeom xmlns:a="http://schemas.openxmlformats.org/drawingml/2006/main" prst="rect">
             <a:avLst/>
@@ -2911,6 +4316,1989 @@
                 </a:solidFill>
               </a:rPr>
               <a:t>4 / 7</a:t>
+            </a:r>
+          </a:p>
+        </p:txBody>
+      </p:sp>
+      <p:sp>
+        <p:nvSpPr>
+          <p:cNvPr id="10" name="">
+            <a:extLst xmlns:a="http://schemas.openxmlformats.org/drawingml/2006/main">
+              <a:ext uri="{FF2B5EF4-FFF2-40B4-BE49-F238E27FC236}">
+                <a16:creationId xmlns:a16="http://schemas.microsoft.com/office/drawing/2014/main" id="{9453558E-FE78-411A-B239-3852DA1A014E}"/>
+              </a:ext>
+            </a:extLst>
+          </p:cNvPr>
+          <p:cNvSpPr>
+            <a:spLocks xmlns:a="http://schemas.openxmlformats.org/drawingml/2006/main" noGrp="1"/>
+          </p:cNvSpPr>
+          <p:nvPr/>
+        </p:nvSpPr>
+        <p:spPr>
+          <a:xfrm xmlns:a="http://schemas.openxmlformats.org/drawingml/2006/main">
+            <a:off x="609600" y="1581150"/>
+            <a:ext cx="2400300" cy="1466850"/>
+          </a:xfrm>
+          <a:prstGeom xmlns:a="http://schemas.openxmlformats.org/drawingml/2006/main" prst="rect">
+            <a:avLst/>
+          </a:prstGeom>
+          <a:ln xmlns:a="http://schemas.openxmlformats.org/drawingml/2006/main" w="0">
+            <a:prstDash val="solid"/>
+          </a:ln>
+        </p:spPr>
+      </p:sp>
+      <p:sp>
+        <p:nvSpPr>
+          <p:cNvPr id="11" name="">
+            <a:extLst xmlns:a="http://schemas.openxmlformats.org/drawingml/2006/main">
+              <a:ext uri="{FF2B5EF4-FFF2-40B4-BE49-F238E27FC236}">
+                <a16:creationId xmlns:a16="http://schemas.microsoft.com/office/drawing/2014/main" id="{27B0B3F5-3A12-4AFE-A501-4DA29462AD1E}"/>
+              </a:ext>
+            </a:extLst>
+          </p:cNvPr>
+          <p:cNvSpPr>
+            <a:spLocks xmlns:a="http://schemas.openxmlformats.org/drawingml/2006/main" noGrp="1"/>
+          </p:cNvSpPr>
+          <p:nvPr/>
+        </p:nvSpPr>
+        <p:spPr>
+          <a:xfrm xmlns:a="http://schemas.openxmlformats.org/drawingml/2006/main">
+            <a:off x="3429000" y="1581150"/>
+            <a:ext cx="2400300" cy="1466850"/>
+          </a:xfrm>
+          <a:prstGeom xmlns:a="http://schemas.openxmlformats.org/drawingml/2006/main" prst="rect">
+            <a:avLst/>
+          </a:prstGeom>
+          <a:ln xmlns:a="http://schemas.openxmlformats.org/drawingml/2006/main" w="0">
+            <a:prstDash val="solid"/>
+          </a:ln>
+        </p:spPr>
+      </p:sp>
+      <p:sp>
+        <p:nvSpPr>
+          <p:cNvPr id="12" name="">
+            <a:extLst xmlns:a="http://schemas.openxmlformats.org/drawingml/2006/main">
+              <a:ext uri="{FF2B5EF4-FFF2-40B4-BE49-F238E27FC236}">
+                <a16:creationId xmlns:a16="http://schemas.microsoft.com/office/drawing/2014/main" id="{991CDB38-3B03-4422-941C-7B98C4A66C7B}"/>
+              </a:ext>
+            </a:extLst>
+          </p:cNvPr>
+          <p:cNvSpPr>
+            <a:spLocks xmlns:a="http://schemas.openxmlformats.org/drawingml/2006/main" noGrp="1"/>
+          </p:cNvSpPr>
+          <p:nvPr/>
+        </p:nvSpPr>
+        <p:spPr>
+          <a:xfrm xmlns:a="http://schemas.openxmlformats.org/drawingml/2006/main">
+            <a:off x="6248400" y="1581150"/>
+            <a:ext cx="2400300" cy="1466850"/>
+          </a:xfrm>
+          <a:prstGeom xmlns:a="http://schemas.openxmlformats.org/drawingml/2006/main" prst="rect">
+            <a:avLst/>
+          </a:prstGeom>
+          <a:ln xmlns:a="http://schemas.openxmlformats.org/drawingml/2006/main" w="0">
+            <a:prstDash val="solid"/>
+          </a:ln>
+        </p:spPr>
+      </p:sp>
+      <p:sp>
+        <p:nvSpPr>
+          <p:cNvPr id="13" name="">
+            <a:extLst xmlns:a="http://schemas.openxmlformats.org/drawingml/2006/main">
+              <a:ext uri="{FF2B5EF4-FFF2-40B4-BE49-F238E27FC236}">
+                <a16:creationId xmlns:a16="http://schemas.microsoft.com/office/drawing/2014/main" id="{55C21A9E-99BA-42EC-B5CA-2F703B747CD3}"/>
+              </a:ext>
+            </a:extLst>
+          </p:cNvPr>
+          <p:cNvSpPr>
+            <a:spLocks xmlns:a="http://schemas.openxmlformats.org/drawingml/2006/main" noGrp="1"/>
+          </p:cNvSpPr>
+          <p:nvPr/>
+        </p:nvSpPr>
+        <p:spPr>
+          <a:xfrm xmlns:a="http://schemas.openxmlformats.org/drawingml/2006/main">
+            <a:off x="9067800" y="1581150"/>
+            <a:ext cx="2400300" cy="1466850"/>
+          </a:xfrm>
+          <a:prstGeom xmlns:a="http://schemas.openxmlformats.org/drawingml/2006/main" prst="rect">
+            <a:avLst/>
+          </a:prstGeom>
+          <a:ln xmlns:a="http://schemas.openxmlformats.org/drawingml/2006/main" w="0">
+            <a:prstDash val="solid"/>
+          </a:ln>
+        </p:spPr>
+      </p:sp>
+      <p:cxnSp>
+        <p:nvCxnSpPr>
+          <p:cNvPr id="73" name=""/>
+          <p:cNvCxnSpPr>
+            <a:stCxn xmlns:a="http://schemas.openxmlformats.org/drawingml/2006/main" id="10" idx="3"/>
+            <a:endCxn xmlns:a="http://schemas.openxmlformats.org/drawingml/2006/main" id="11" idx="1"/>
+          </p:cNvCxnSpPr>
+          <p:nvPr/>
+        </p:nvCxnSpPr>
+        <p:spPr>
+          <a:xfrm xmlns:a="http://schemas.openxmlformats.org/drawingml/2006/main">
+            <a:off x="3009900" y="2314575"/>
+            <a:ext cx="419100" cy="0"/>
+          </a:xfrm>
+          <a:prstGeom xmlns:a="http://schemas.openxmlformats.org/drawingml/2006/main" prst="straightConnector1">
+            <a:avLst/>
+          </a:prstGeom>
+          <a:ln xmlns:a="http://schemas.openxmlformats.org/drawingml/2006/main" w="38100">
+            <a:solidFill>
+              <a:srgbClr val="008C95"/>
+            </a:solidFill>
+            <a:prstDash val="solid"/>
+            <a:tailEnd type="triangle" w="med" len="med"/>
+          </a:ln>
+        </p:spPr>
+      </p:cxnSp>
+      <p:cxnSp>
+        <p:nvCxnSpPr>
+          <p:cNvPr id="74" name=""/>
+          <p:cNvCxnSpPr>
+            <a:stCxn xmlns:a="http://schemas.openxmlformats.org/drawingml/2006/main" id="11" idx="3"/>
+            <a:endCxn xmlns:a="http://schemas.openxmlformats.org/drawingml/2006/main" id="12" idx="1"/>
+          </p:cNvCxnSpPr>
+          <p:nvPr/>
+        </p:nvCxnSpPr>
+        <p:spPr>
+          <a:xfrm xmlns:a="http://schemas.openxmlformats.org/drawingml/2006/main">
+            <a:off x="5829300" y="2314575"/>
+            <a:ext cx="419100" cy="0"/>
+          </a:xfrm>
+          <a:prstGeom xmlns:a="http://schemas.openxmlformats.org/drawingml/2006/main" prst="straightConnector1">
+            <a:avLst/>
+          </a:prstGeom>
+          <a:ln xmlns:a="http://schemas.openxmlformats.org/drawingml/2006/main" w="38100">
+            <a:solidFill>
+              <a:srgbClr val="008C95"/>
+            </a:solidFill>
+            <a:prstDash val="solid"/>
+            <a:tailEnd type="triangle" w="med" len="med"/>
+          </a:ln>
+        </p:spPr>
+      </p:cxnSp>
+      <p:cxnSp>
+        <p:nvCxnSpPr>
+          <p:cNvPr id="75" name=""/>
+          <p:cNvCxnSpPr>
+            <a:stCxn xmlns:a="http://schemas.openxmlformats.org/drawingml/2006/main" id="12" idx="3"/>
+            <a:endCxn xmlns:a="http://schemas.openxmlformats.org/drawingml/2006/main" id="13" idx="1"/>
+          </p:cNvCxnSpPr>
+          <p:nvPr/>
+        </p:nvCxnSpPr>
+        <p:spPr>
+          <a:xfrm xmlns:a="http://schemas.openxmlformats.org/drawingml/2006/main">
+            <a:off x="8648700" y="2314575"/>
+            <a:ext cx="419100" cy="0"/>
+          </a:xfrm>
+          <a:prstGeom xmlns:a="http://schemas.openxmlformats.org/drawingml/2006/main" prst="straightConnector1">
+            <a:avLst/>
+          </a:prstGeom>
+          <a:ln xmlns:a="http://schemas.openxmlformats.org/drawingml/2006/main" w="38100">
+            <a:solidFill>
+              <a:srgbClr val="008C95"/>
+            </a:solidFill>
+            <a:prstDash val="solid"/>
+            <a:tailEnd type="triangle" w="med" len="med"/>
+          </a:ln>
+        </p:spPr>
+      </p:cxnSp>
+      <p:sp>
+        <p:nvSpPr>
+          <p:cNvPr id="17" name="">
+            <a:extLst xmlns:a="http://schemas.openxmlformats.org/drawingml/2006/main">
+              <a:ext uri="{FF2B5EF4-FFF2-40B4-BE49-F238E27FC236}">
+                <a16:creationId xmlns:a16="http://schemas.microsoft.com/office/drawing/2014/main" id="{DA90505D-4D81-4FB9-8BE0-4322EEB6EBD5}"/>
+              </a:ext>
+            </a:extLst>
+          </p:cNvPr>
+          <p:cNvSpPr>
+            <a:spLocks xmlns:a="http://schemas.openxmlformats.org/drawingml/2006/main" noGrp="1"/>
+          </p:cNvSpPr>
+          <p:nvPr/>
+        </p:nvSpPr>
+        <p:spPr>
+          <a:xfrm xmlns:a="http://schemas.openxmlformats.org/drawingml/2006/main">
+            <a:off x="609600" y="1581150"/>
+            <a:ext cx="2400300" cy="1466850"/>
+          </a:xfrm>
+          <a:prstGeom xmlns:a="http://schemas.openxmlformats.org/drawingml/2006/main" prst="roundRect">
+            <a:avLst>
+              <a:gd name="adj" fmla="val 7792"/>
+            </a:avLst>
+          </a:prstGeom>
+          <a:solidFill xmlns:a="http://schemas.openxmlformats.org/drawingml/2006/main">
+            <a:srgbClr val="FFFFFF"/>
+          </a:solidFill>
+          <a:ln xmlns:a="http://schemas.openxmlformats.org/drawingml/2006/main" w="14288">
+            <a:solidFill>
+              <a:srgbClr val="C3D2D9"/>
+            </a:solidFill>
+            <a:prstDash val="solid"/>
+          </a:ln>
+        </p:spPr>
+      </p:sp>
+      <p:sp>
+        <p:nvSpPr>
+          <p:cNvPr id="18" name="">
+            <a:extLst xmlns:a="http://schemas.openxmlformats.org/drawingml/2006/main">
+              <a:ext uri="{FF2B5EF4-FFF2-40B4-BE49-F238E27FC236}">
+                <a16:creationId xmlns:a16="http://schemas.microsoft.com/office/drawing/2014/main" id="{95C3DB94-5F27-42A8-95A3-EA3ACC889EE7}"/>
+              </a:ext>
+            </a:extLst>
+          </p:cNvPr>
+          <p:cNvSpPr>
+            <a:spLocks xmlns:a="http://schemas.openxmlformats.org/drawingml/2006/main" noGrp="1"/>
+          </p:cNvSpPr>
+          <p:nvPr/>
+        </p:nvSpPr>
+        <p:spPr>
+          <a:xfrm xmlns:a="http://schemas.openxmlformats.org/drawingml/2006/main">
+            <a:off x="781050" y="1752600"/>
+            <a:ext cx="400050" cy="304800"/>
+          </a:xfrm>
+          <a:prstGeom xmlns:a="http://schemas.openxmlformats.org/drawingml/2006/main" prst="roundRect">
+            <a:avLst>
+              <a:gd name="adj" fmla="val 50000"/>
+            </a:avLst>
+          </a:prstGeom>
+          <a:solidFill xmlns:a="http://schemas.openxmlformats.org/drawingml/2006/main">
+            <a:srgbClr val="008C95"/>
+          </a:solidFill>
+          <a:ln xmlns:a="http://schemas.openxmlformats.org/drawingml/2006/main" w="14288">
+            <a:solidFill>
+              <a:srgbClr val="008C95"/>
+            </a:solidFill>
+            <a:prstDash val="solid"/>
+          </a:ln>
+        </p:spPr>
+        <p:txBody>
+          <a:bodyPr xmlns:a="http://schemas.openxmlformats.org/drawingml/2006/main"/>
+          <a:lstStyle xmlns:a="http://schemas.openxmlformats.org/drawingml/2006/main"/>
+          <a:p xmlns:a="http://schemas.openxmlformats.org/drawingml/2006/main">
+            <a:pPr algn="ctr">
+              <a:defRPr sz="1050" b="1">
+                <a:solidFill>
+                  <a:srgbClr val="FFFFFF"/>
+                </a:solidFill>
+              </a:defRPr>
+            </a:pPr>
+            <a:r>
+              <a:rPr sz="1050" b="1">
+                <a:solidFill>
+                  <a:srgbClr val="FFFFFF"/>
+                </a:solidFill>
+              </a:rPr>
+              <a:t>1</a:t>
+            </a:r>
+          </a:p>
+        </p:txBody>
+      </p:sp>
+      <p:sp>
+        <p:nvSpPr>
+          <p:cNvPr id="19" name="">
+            <a:extLst xmlns:a="http://schemas.openxmlformats.org/drawingml/2006/main">
+              <a:ext uri="{FF2B5EF4-FFF2-40B4-BE49-F238E27FC236}">
+                <a16:creationId xmlns:a16="http://schemas.microsoft.com/office/drawing/2014/main" id="{562FAFAF-A8ED-4B62-8A2B-82D5C11B65B6}"/>
+              </a:ext>
+            </a:extLst>
+          </p:cNvPr>
+          <p:cNvSpPr>
+            <a:spLocks xmlns:a="http://schemas.openxmlformats.org/drawingml/2006/main" noGrp="1"/>
+          </p:cNvSpPr>
+          <p:nvPr/>
+        </p:nvSpPr>
+        <p:spPr>
+          <a:xfrm xmlns:a="http://schemas.openxmlformats.org/drawingml/2006/main">
+            <a:off x="1295400" y="1790700"/>
+            <a:ext cx="1504950" cy="266700"/>
+          </a:xfrm>
+          <a:prstGeom xmlns:a="http://schemas.openxmlformats.org/drawingml/2006/main" prst="rect">
+            <a:avLst/>
+          </a:prstGeom>
+          <a:noFill xmlns:a="http://schemas.openxmlformats.org/drawingml/2006/main"/>
+          <a:ln xmlns:a="http://schemas.openxmlformats.org/drawingml/2006/main" w="0">
+            <a:noFill/>
+            <a:prstDash val="solid"/>
+          </a:ln>
+        </p:spPr>
+        <p:txBody>
+          <a:bodyPr xmlns:a="http://schemas.openxmlformats.org/drawingml/2006/main"/>
+          <a:lstStyle xmlns:a="http://schemas.openxmlformats.org/drawingml/2006/main"/>
+          <a:p xmlns:a="http://schemas.openxmlformats.org/drawingml/2006/main">
+            <a:pPr>
+              <a:defRPr sz="1425" b="1">
+                <a:solidFill>
+                  <a:srgbClr val="001B3A"/>
+                </a:solidFill>
+              </a:defRPr>
+            </a:pPr>
+            <a:r>
+              <a:rPr sz="1425" b="1">
+                <a:solidFill>
+                  <a:srgbClr val="001B3A"/>
+                </a:solidFill>
+              </a:rPr>
+              <a:t>Mission</a:t>
+            </a:r>
+          </a:p>
+        </p:txBody>
+      </p:sp>
+      <p:sp>
+        <p:nvSpPr>
+          <p:cNvPr id="20" name="">
+            <a:extLst xmlns:a="http://schemas.openxmlformats.org/drawingml/2006/main">
+              <a:ext uri="{FF2B5EF4-FFF2-40B4-BE49-F238E27FC236}">
+                <a16:creationId xmlns:a16="http://schemas.microsoft.com/office/drawing/2014/main" id="{8D2C51E3-DEAE-478A-89D6-9BBF35424882}"/>
+              </a:ext>
+            </a:extLst>
+          </p:cNvPr>
+          <p:cNvSpPr>
+            <a:spLocks xmlns:a="http://schemas.openxmlformats.org/drawingml/2006/main" noGrp="1"/>
+          </p:cNvSpPr>
+          <p:nvPr/>
+        </p:nvSpPr>
+        <p:spPr>
+          <a:xfrm xmlns:a="http://schemas.openxmlformats.org/drawingml/2006/main">
+            <a:off x="800100" y="2247900"/>
+            <a:ext cx="2019300" cy="552450"/>
+          </a:xfrm>
+          <a:prstGeom xmlns:a="http://schemas.openxmlformats.org/drawingml/2006/main" prst="rect">
+            <a:avLst/>
+          </a:prstGeom>
+          <a:noFill xmlns:a="http://schemas.openxmlformats.org/drawingml/2006/main"/>
+          <a:ln xmlns:a="http://schemas.openxmlformats.org/drawingml/2006/main" w="0">
+            <a:noFill/>
+            <a:prstDash val="solid"/>
+          </a:ln>
+        </p:spPr>
+        <p:txBody>
+          <a:bodyPr xmlns:a="http://schemas.openxmlformats.org/drawingml/2006/main"/>
+          <a:lstStyle xmlns:a="http://schemas.openxmlformats.org/drawingml/2006/main"/>
+          <a:p xmlns:a="http://schemas.openxmlformats.org/drawingml/2006/main">
+            <a:pPr>
+              <a:defRPr sz="1050">
+                <a:solidFill>
+                  <a:srgbClr val="536A7B"/>
+                </a:solidFill>
+              </a:defRPr>
+            </a:pPr>
+            <a:r>
+              <a:rPr sz="1050">
+                <a:solidFill>
+                  <a:srgbClr val="536A7B"/>
+                </a:solidFill>
+              </a:rPr>
+              <a:t>Blocks or JavaScript request a motion.</a:t>
+            </a:r>
+          </a:p>
+        </p:txBody>
+      </p:sp>
+      <p:sp>
+        <p:nvSpPr>
+          <p:cNvPr id="21" name="">
+            <a:extLst xmlns:a="http://schemas.openxmlformats.org/drawingml/2006/main">
+              <a:ext uri="{FF2B5EF4-FFF2-40B4-BE49-F238E27FC236}">
+                <a16:creationId xmlns:a16="http://schemas.microsoft.com/office/drawing/2014/main" id="{A86DB96D-1746-4565-9852-F29A64074662}"/>
+              </a:ext>
+            </a:extLst>
+          </p:cNvPr>
+          <p:cNvSpPr>
+            <a:spLocks xmlns:a="http://schemas.openxmlformats.org/drawingml/2006/main" noGrp="1"/>
+          </p:cNvSpPr>
+          <p:nvPr/>
+        </p:nvSpPr>
+        <p:spPr>
+          <a:xfrm xmlns:a="http://schemas.openxmlformats.org/drawingml/2006/main">
+            <a:off x="3429000" y="1581150"/>
+            <a:ext cx="2400300" cy="1466850"/>
+          </a:xfrm>
+          <a:prstGeom xmlns:a="http://schemas.openxmlformats.org/drawingml/2006/main" prst="roundRect">
+            <a:avLst>
+              <a:gd name="adj" fmla="val 7792"/>
+            </a:avLst>
+          </a:prstGeom>
+          <a:solidFill xmlns:a="http://schemas.openxmlformats.org/drawingml/2006/main">
+            <a:srgbClr val="FFFFFF"/>
+          </a:solidFill>
+          <a:ln xmlns:a="http://schemas.openxmlformats.org/drawingml/2006/main" w="14288">
+            <a:solidFill>
+              <a:srgbClr val="C3D2D9"/>
+            </a:solidFill>
+            <a:prstDash val="solid"/>
+          </a:ln>
+        </p:spPr>
+      </p:sp>
+      <p:sp>
+        <p:nvSpPr>
+          <p:cNvPr id="22" name="">
+            <a:extLst xmlns:a="http://schemas.openxmlformats.org/drawingml/2006/main">
+              <a:ext uri="{FF2B5EF4-FFF2-40B4-BE49-F238E27FC236}">
+                <a16:creationId xmlns:a16="http://schemas.microsoft.com/office/drawing/2014/main" id="{3CEDFED4-83D7-40E6-92C4-96C67C8DE63A}"/>
+              </a:ext>
+            </a:extLst>
+          </p:cNvPr>
+          <p:cNvSpPr>
+            <a:spLocks xmlns:a="http://schemas.openxmlformats.org/drawingml/2006/main" noGrp="1"/>
+          </p:cNvSpPr>
+          <p:nvPr/>
+        </p:nvSpPr>
+        <p:spPr>
+          <a:xfrm xmlns:a="http://schemas.openxmlformats.org/drawingml/2006/main">
+            <a:off x="3600450" y="1752600"/>
+            <a:ext cx="400050" cy="304800"/>
+          </a:xfrm>
+          <a:prstGeom xmlns:a="http://schemas.openxmlformats.org/drawingml/2006/main" prst="roundRect">
+            <a:avLst>
+              <a:gd name="adj" fmla="val 50000"/>
+            </a:avLst>
+          </a:prstGeom>
+          <a:solidFill xmlns:a="http://schemas.openxmlformats.org/drawingml/2006/main">
+            <a:srgbClr val="008C95"/>
+          </a:solidFill>
+          <a:ln xmlns:a="http://schemas.openxmlformats.org/drawingml/2006/main" w="14288">
+            <a:solidFill>
+              <a:srgbClr val="008C95"/>
+            </a:solidFill>
+            <a:prstDash val="solid"/>
+          </a:ln>
+        </p:spPr>
+        <p:txBody>
+          <a:bodyPr xmlns:a="http://schemas.openxmlformats.org/drawingml/2006/main"/>
+          <a:lstStyle xmlns:a="http://schemas.openxmlformats.org/drawingml/2006/main"/>
+          <a:p xmlns:a="http://schemas.openxmlformats.org/drawingml/2006/main">
+            <a:pPr algn="ctr">
+              <a:defRPr sz="1050" b="1">
+                <a:solidFill>
+                  <a:srgbClr val="FFFFFF"/>
+                </a:solidFill>
+              </a:defRPr>
+            </a:pPr>
+            <a:r>
+              <a:rPr sz="1050" b="1">
+                <a:solidFill>
+                  <a:srgbClr val="FFFFFF"/>
+                </a:solidFill>
+              </a:rPr>
+              <a:t>2</a:t>
+            </a:r>
+          </a:p>
+        </p:txBody>
+      </p:sp>
+      <p:sp>
+        <p:nvSpPr>
+          <p:cNvPr id="23" name="">
+            <a:extLst xmlns:a="http://schemas.openxmlformats.org/drawingml/2006/main">
+              <a:ext uri="{FF2B5EF4-FFF2-40B4-BE49-F238E27FC236}">
+                <a16:creationId xmlns:a16="http://schemas.microsoft.com/office/drawing/2014/main" id="{A2EBD36C-D315-4D39-B6B0-A56DAE7C6D0B}"/>
+              </a:ext>
+            </a:extLst>
+          </p:cNvPr>
+          <p:cNvSpPr>
+            <a:spLocks xmlns:a="http://schemas.openxmlformats.org/drawingml/2006/main" noGrp="1"/>
+          </p:cNvSpPr>
+          <p:nvPr/>
+        </p:nvSpPr>
+        <p:spPr>
+          <a:xfrm xmlns:a="http://schemas.openxmlformats.org/drawingml/2006/main">
+            <a:off x="4114800" y="1790700"/>
+            <a:ext cx="1504950" cy="266700"/>
+          </a:xfrm>
+          <a:prstGeom xmlns:a="http://schemas.openxmlformats.org/drawingml/2006/main" prst="rect">
+            <a:avLst/>
+          </a:prstGeom>
+          <a:noFill xmlns:a="http://schemas.openxmlformats.org/drawingml/2006/main"/>
+          <a:ln xmlns:a="http://schemas.openxmlformats.org/drawingml/2006/main" w="0">
+            <a:noFill/>
+            <a:prstDash val="solid"/>
+          </a:ln>
+        </p:spPr>
+        <p:txBody>
+          <a:bodyPr xmlns:a="http://schemas.openxmlformats.org/drawingml/2006/main"/>
+          <a:lstStyle xmlns:a="http://schemas.openxmlformats.org/drawingml/2006/main"/>
+          <a:p xmlns:a="http://schemas.openxmlformats.org/drawingml/2006/main">
+            <a:pPr>
+              <a:defRPr sz="1425" b="1">
+                <a:solidFill>
+                  <a:srgbClr val="001B3A"/>
+                </a:solidFill>
+              </a:defRPr>
+            </a:pPr>
+            <a:r>
+              <a:rPr sz="1425" b="1">
+                <a:solidFill>
+                  <a:srgbClr val="001B3A"/>
+                </a:solidFill>
+              </a:rPr>
+              <a:t>Controller</a:t>
+            </a:r>
+          </a:p>
+        </p:txBody>
+      </p:sp>
+      <p:sp>
+        <p:nvSpPr>
+          <p:cNvPr id="24" name="">
+            <a:extLst xmlns:a="http://schemas.openxmlformats.org/drawingml/2006/main">
+              <a:ext uri="{FF2B5EF4-FFF2-40B4-BE49-F238E27FC236}">
+                <a16:creationId xmlns:a16="http://schemas.microsoft.com/office/drawing/2014/main" id="{36C4739D-5610-42A5-82A7-4643176E4D1D}"/>
+              </a:ext>
+            </a:extLst>
+          </p:cNvPr>
+          <p:cNvSpPr>
+            <a:spLocks xmlns:a="http://schemas.openxmlformats.org/drawingml/2006/main" noGrp="1"/>
+          </p:cNvSpPr>
+          <p:nvPr/>
+        </p:nvSpPr>
+        <p:spPr>
+          <a:xfrm xmlns:a="http://schemas.openxmlformats.org/drawingml/2006/main">
+            <a:off x="3619500" y="2247900"/>
+            <a:ext cx="2019300" cy="552450"/>
+          </a:xfrm>
+          <a:prstGeom xmlns:a="http://schemas.openxmlformats.org/drawingml/2006/main" prst="rect">
+            <a:avLst/>
+          </a:prstGeom>
+          <a:noFill xmlns:a="http://schemas.openxmlformats.org/drawingml/2006/main"/>
+          <a:ln xmlns:a="http://schemas.openxmlformats.org/drawingml/2006/main" w="0">
+            <a:noFill/>
+            <a:prstDash val="solid"/>
+          </a:ln>
+        </p:spPr>
+        <p:txBody>
+          <a:bodyPr xmlns:a="http://schemas.openxmlformats.org/drawingml/2006/main"/>
+          <a:lstStyle xmlns:a="http://schemas.openxmlformats.org/drawingml/2006/main"/>
+          <a:p xmlns:a="http://schemas.openxmlformats.org/drawingml/2006/main">
+            <a:pPr>
+              <a:defRPr sz="1050">
+                <a:solidFill>
+                  <a:srgbClr val="536A7B"/>
+                </a:solidFill>
+              </a:defRPr>
+            </a:pPr>
+            <a:r>
+              <a:rPr sz="1050">
+                <a:solidFill>
+                  <a:srgbClr val="536A7B"/>
+                </a:solidFill>
+              </a:rPr>
+              <a:t>Target thrust and attitude are calculated.</a:t>
+            </a:r>
+          </a:p>
+        </p:txBody>
+      </p:sp>
+      <p:sp>
+        <p:nvSpPr>
+          <p:cNvPr id="25" name="">
+            <a:extLst xmlns:a="http://schemas.openxmlformats.org/drawingml/2006/main">
+              <a:ext uri="{FF2B5EF4-FFF2-40B4-BE49-F238E27FC236}">
+                <a16:creationId xmlns:a16="http://schemas.microsoft.com/office/drawing/2014/main" id="{07D6016D-353A-46D4-BCCB-7AF1C7EF9498}"/>
+              </a:ext>
+            </a:extLst>
+          </p:cNvPr>
+          <p:cNvSpPr>
+            <a:spLocks xmlns:a="http://schemas.openxmlformats.org/drawingml/2006/main" noGrp="1"/>
+          </p:cNvSpPr>
+          <p:nvPr/>
+        </p:nvSpPr>
+        <p:spPr>
+          <a:xfrm xmlns:a="http://schemas.openxmlformats.org/drawingml/2006/main">
+            <a:off x="6248400" y="1581150"/>
+            <a:ext cx="2400300" cy="1466850"/>
+          </a:xfrm>
+          <a:prstGeom xmlns:a="http://schemas.openxmlformats.org/drawingml/2006/main" prst="roundRect">
+            <a:avLst>
+              <a:gd name="adj" fmla="val 7792"/>
+            </a:avLst>
+          </a:prstGeom>
+          <a:solidFill xmlns:a="http://schemas.openxmlformats.org/drawingml/2006/main">
+            <a:srgbClr val="FFFFFF"/>
+          </a:solidFill>
+          <a:ln xmlns:a="http://schemas.openxmlformats.org/drawingml/2006/main" w="14288">
+            <a:solidFill>
+              <a:srgbClr val="C3D2D9"/>
+            </a:solidFill>
+            <a:prstDash val="solid"/>
+          </a:ln>
+        </p:spPr>
+      </p:sp>
+      <p:sp>
+        <p:nvSpPr>
+          <p:cNvPr id="26" name="">
+            <a:extLst xmlns:a="http://schemas.openxmlformats.org/drawingml/2006/main">
+              <a:ext uri="{FF2B5EF4-FFF2-40B4-BE49-F238E27FC236}">
+                <a16:creationId xmlns:a16="http://schemas.microsoft.com/office/drawing/2014/main" id="{42ED9911-F91C-4F6A-8B03-E220241F0B77}"/>
+              </a:ext>
+            </a:extLst>
+          </p:cNvPr>
+          <p:cNvSpPr>
+            <a:spLocks xmlns:a="http://schemas.openxmlformats.org/drawingml/2006/main" noGrp="1"/>
+          </p:cNvSpPr>
+          <p:nvPr/>
+        </p:nvSpPr>
+        <p:spPr>
+          <a:xfrm xmlns:a="http://schemas.openxmlformats.org/drawingml/2006/main">
+            <a:off x="6419850" y="1752600"/>
+            <a:ext cx="400050" cy="304800"/>
+          </a:xfrm>
+          <a:prstGeom xmlns:a="http://schemas.openxmlformats.org/drawingml/2006/main" prst="roundRect">
+            <a:avLst>
+              <a:gd name="adj" fmla="val 50000"/>
+            </a:avLst>
+          </a:prstGeom>
+          <a:solidFill xmlns:a="http://schemas.openxmlformats.org/drawingml/2006/main">
+            <a:srgbClr val="008C95"/>
+          </a:solidFill>
+          <a:ln xmlns:a="http://schemas.openxmlformats.org/drawingml/2006/main" w="14288">
+            <a:solidFill>
+              <a:srgbClr val="008C95"/>
+            </a:solidFill>
+            <a:prstDash val="solid"/>
+          </a:ln>
+        </p:spPr>
+        <p:txBody>
+          <a:bodyPr xmlns:a="http://schemas.openxmlformats.org/drawingml/2006/main"/>
+          <a:lstStyle xmlns:a="http://schemas.openxmlformats.org/drawingml/2006/main"/>
+          <a:p xmlns:a="http://schemas.openxmlformats.org/drawingml/2006/main">
+            <a:pPr algn="ctr">
+              <a:defRPr sz="1050" b="1">
+                <a:solidFill>
+                  <a:srgbClr val="FFFFFF"/>
+                </a:solidFill>
+              </a:defRPr>
+            </a:pPr>
+            <a:r>
+              <a:rPr sz="1050" b="1">
+                <a:solidFill>
+                  <a:srgbClr val="FFFFFF"/>
+                </a:solidFill>
+              </a:rPr>
+              <a:t>3</a:t>
+            </a:r>
+          </a:p>
+        </p:txBody>
+      </p:sp>
+      <p:sp>
+        <p:nvSpPr>
+          <p:cNvPr id="27" name="">
+            <a:extLst xmlns:a="http://schemas.openxmlformats.org/drawingml/2006/main">
+              <a:ext uri="{FF2B5EF4-FFF2-40B4-BE49-F238E27FC236}">
+                <a16:creationId xmlns:a16="http://schemas.microsoft.com/office/drawing/2014/main" id="{21C5C9E1-83B2-4204-BC4E-6C82A72D2E17}"/>
+              </a:ext>
+            </a:extLst>
+          </p:cNvPr>
+          <p:cNvSpPr>
+            <a:spLocks xmlns:a="http://schemas.openxmlformats.org/drawingml/2006/main" noGrp="1"/>
+          </p:cNvSpPr>
+          <p:nvPr/>
+        </p:nvSpPr>
+        <p:spPr>
+          <a:xfrm xmlns:a="http://schemas.openxmlformats.org/drawingml/2006/main">
+            <a:off x="6934200" y="1790700"/>
+            <a:ext cx="1504950" cy="266700"/>
+          </a:xfrm>
+          <a:prstGeom xmlns:a="http://schemas.openxmlformats.org/drawingml/2006/main" prst="rect">
+            <a:avLst/>
+          </a:prstGeom>
+          <a:noFill xmlns:a="http://schemas.openxmlformats.org/drawingml/2006/main"/>
+          <a:ln xmlns:a="http://schemas.openxmlformats.org/drawingml/2006/main" w="0">
+            <a:noFill/>
+            <a:prstDash val="solid"/>
+          </a:ln>
+        </p:spPr>
+        <p:txBody>
+          <a:bodyPr xmlns:a="http://schemas.openxmlformats.org/drawingml/2006/main"/>
+          <a:lstStyle xmlns:a="http://schemas.openxmlformats.org/drawingml/2006/main"/>
+          <a:p xmlns:a="http://schemas.openxmlformats.org/drawingml/2006/main">
+            <a:pPr>
+              <a:defRPr sz="1425" b="1">
+                <a:solidFill>
+                  <a:srgbClr val="001B3A"/>
+                </a:solidFill>
+              </a:defRPr>
+            </a:pPr>
+            <a:r>
+              <a:rPr sz="1425" b="1">
+                <a:solidFill>
+                  <a:srgbClr val="001B3A"/>
+                </a:solidFill>
+              </a:rPr>
+              <a:t>Motors</a:t>
+            </a:r>
+          </a:p>
+        </p:txBody>
+      </p:sp>
+      <p:sp>
+        <p:nvSpPr>
+          <p:cNvPr id="28" name="">
+            <a:extLst xmlns:a="http://schemas.openxmlformats.org/drawingml/2006/main">
+              <a:ext uri="{FF2B5EF4-FFF2-40B4-BE49-F238E27FC236}">
+                <a16:creationId xmlns:a16="http://schemas.microsoft.com/office/drawing/2014/main" id="{35667647-4D98-4F9F-93EB-C437591644EC}"/>
+              </a:ext>
+            </a:extLst>
+          </p:cNvPr>
+          <p:cNvSpPr>
+            <a:spLocks xmlns:a="http://schemas.openxmlformats.org/drawingml/2006/main" noGrp="1"/>
+          </p:cNvSpPr>
+          <p:nvPr/>
+        </p:nvSpPr>
+        <p:spPr>
+          <a:xfrm xmlns:a="http://schemas.openxmlformats.org/drawingml/2006/main">
+            <a:off x="6438900" y="2247900"/>
+            <a:ext cx="2019300" cy="552450"/>
+          </a:xfrm>
+          <a:prstGeom xmlns:a="http://schemas.openxmlformats.org/drawingml/2006/main" prst="rect">
+            <a:avLst/>
+          </a:prstGeom>
+          <a:noFill xmlns:a="http://schemas.openxmlformats.org/drawingml/2006/main"/>
+          <a:ln xmlns:a="http://schemas.openxmlformats.org/drawingml/2006/main" w="0">
+            <a:noFill/>
+            <a:prstDash val="solid"/>
+          </a:ln>
+        </p:spPr>
+        <p:txBody>
+          <a:bodyPr xmlns:a="http://schemas.openxmlformats.org/drawingml/2006/main"/>
+          <a:lstStyle xmlns:a="http://schemas.openxmlformats.org/drawingml/2006/main"/>
+          <a:p xmlns:a="http://schemas.openxmlformats.org/drawingml/2006/main">
+            <a:pPr>
+              <a:defRPr sz="1050">
+                <a:solidFill>
+                  <a:srgbClr val="536A7B"/>
+                </a:solidFill>
+              </a:defRPr>
+            </a:pPr>
+            <a:r>
+              <a:rPr sz="1050">
+                <a:solidFill>
+                  <a:srgbClr val="536A7B"/>
+                </a:solidFill>
+              </a:rPr>
+              <a:t>Four rotor speeds create force and torque.</a:t>
+            </a:r>
+          </a:p>
+        </p:txBody>
+      </p:sp>
+      <p:sp>
+        <p:nvSpPr>
+          <p:cNvPr id="29" name="">
+            <a:extLst xmlns:a="http://schemas.openxmlformats.org/drawingml/2006/main">
+              <a:ext uri="{FF2B5EF4-FFF2-40B4-BE49-F238E27FC236}">
+                <a16:creationId xmlns:a16="http://schemas.microsoft.com/office/drawing/2014/main" id="{8048B3FF-CF19-401B-9EBB-3C3EBD0085A6}"/>
+              </a:ext>
+            </a:extLst>
+          </p:cNvPr>
+          <p:cNvSpPr>
+            <a:spLocks xmlns:a="http://schemas.openxmlformats.org/drawingml/2006/main" noGrp="1"/>
+          </p:cNvSpPr>
+          <p:nvPr/>
+        </p:nvSpPr>
+        <p:spPr>
+          <a:xfrm xmlns:a="http://schemas.openxmlformats.org/drawingml/2006/main">
+            <a:off x="9067800" y="1581150"/>
+            <a:ext cx="2400300" cy="1466850"/>
+          </a:xfrm>
+          <a:prstGeom xmlns:a="http://schemas.openxmlformats.org/drawingml/2006/main" prst="roundRect">
+            <a:avLst>
+              <a:gd name="adj" fmla="val 7792"/>
+            </a:avLst>
+          </a:prstGeom>
+          <a:solidFill xmlns:a="http://schemas.openxmlformats.org/drawingml/2006/main">
+            <a:srgbClr val="001B3A"/>
+          </a:solidFill>
+          <a:ln xmlns:a="http://schemas.openxmlformats.org/drawingml/2006/main" w="14288">
+            <a:solidFill>
+              <a:srgbClr val="001B3A"/>
+            </a:solidFill>
+            <a:prstDash val="solid"/>
+          </a:ln>
+        </p:spPr>
+      </p:sp>
+      <p:sp>
+        <p:nvSpPr>
+          <p:cNvPr id="30" name="">
+            <a:extLst xmlns:a="http://schemas.openxmlformats.org/drawingml/2006/main">
+              <a:ext uri="{FF2B5EF4-FFF2-40B4-BE49-F238E27FC236}">
+                <a16:creationId xmlns:a16="http://schemas.microsoft.com/office/drawing/2014/main" id="{C97B7953-96BF-4D34-A55D-8955B3DF6221}"/>
+              </a:ext>
+            </a:extLst>
+          </p:cNvPr>
+          <p:cNvSpPr>
+            <a:spLocks xmlns:a="http://schemas.openxmlformats.org/drawingml/2006/main" noGrp="1"/>
+          </p:cNvSpPr>
+          <p:nvPr/>
+        </p:nvSpPr>
+        <p:spPr>
+          <a:xfrm xmlns:a="http://schemas.openxmlformats.org/drawingml/2006/main">
+            <a:off x="9239250" y="1752600"/>
+            <a:ext cx="400050" cy="304800"/>
+          </a:xfrm>
+          <a:prstGeom xmlns:a="http://schemas.openxmlformats.org/drawingml/2006/main" prst="roundRect">
+            <a:avLst>
+              <a:gd name="adj" fmla="val 50000"/>
+            </a:avLst>
+          </a:prstGeom>
+          <a:solidFill xmlns:a="http://schemas.openxmlformats.org/drawingml/2006/main">
+            <a:srgbClr val="C9A227"/>
+          </a:solidFill>
+          <a:ln xmlns:a="http://schemas.openxmlformats.org/drawingml/2006/main" w="14288">
+            <a:solidFill>
+              <a:srgbClr val="C9A227"/>
+            </a:solidFill>
+            <a:prstDash val="solid"/>
+          </a:ln>
+        </p:spPr>
+        <p:txBody>
+          <a:bodyPr xmlns:a="http://schemas.openxmlformats.org/drawingml/2006/main"/>
+          <a:lstStyle xmlns:a="http://schemas.openxmlformats.org/drawingml/2006/main"/>
+          <a:p xmlns:a="http://schemas.openxmlformats.org/drawingml/2006/main">
+            <a:pPr algn="ctr">
+              <a:defRPr sz="1050" b="1">
+                <a:solidFill>
+                  <a:srgbClr val="001B3A"/>
+                </a:solidFill>
+              </a:defRPr>
+            </a:pPr>
+            <a:r>
+              <a:rPr sz="1050" b="1">
+                <a:solidFill>
+                  <a:srgbClr val="001B3A"/>
+                </a:solidFill>
+              </a:rPr>
+              <a:t>4</a:t>
+            </a:r>
+          </a:p>
+        </p:txBody>
+      </p:sp>
+      <p:sp>
+        <p:nvSpPr>
+          <p:cNvPr id="31" name="">
+            <a:extLst xmlns:a="http://schemas.openxmlformats.org/drawingml/2006/main">
+              <a:ext uri="{FF2B5EF4-FFF2-40B4-BE49-F238E27FC236}">
+                <a16:creationId xmlns:a16="http://schemas.microsoft.com/office/drawing/2014/main" id="{93F0B7F6-365B-4941-8AEB-9194AEA1CCFE}"/>
+              </a:ext>
+            </a:extLst>
+          </p:cNvPr>
+          <p:cNvSpPr>
+            <a:spLocks xmlns:a="http://schemas.openxmlformats.org/drawingml/2006/main" noGrp="1"/>
+          </p:cNvSpPr>
+          <p:nvPr/>
+        </p:nvSpPr>
+        <p:spPr>
+          <a:xfrm xmlns:a="http://schemas.openxmlformats.org/drawingml/2006/main">
+            <a:off x="9753600" y="1790700"/>
+            <a:ext cx="1504950" cy="266700"/>
+          </a:xfrm>
+          <a:prstGeom xmlns:a="http://schemas.openxmlformats.org/drawingml/2006/main" prst="rect">
+            <a:avLst/>
+          </a:prstGeom>
+          <a:noFill xmlns:a="http://schemas.openxmlformats.org/drawingml/2006/main"/>
+          <a:ln xmlns:a="http://schemas.openxmlformats.org/drawingml/2006/main" w="0">
+            <a:noFill/>
+            <a:prstDash val="solid"/>
+          </a:ln>
+        </p:spPr>
+        <p:txBody>
+          <a:bodyPr xmlns:a="http://schemas.openxmlformats.org/drawingml/2006/main"/>
+          <a:lstStyle xmlns:a="http://schemas.openxmlformats.org/drawingml/2006/main"/>
+          <a:p xmlns:a="http://schemas.openxmlformats.org/drawingml/2006/main">
+            <a:pPr>
+              <a:defRPr sz="1425" b="1">
+                <a:solidFill>
+                  <a:srgbClr val="FFFFFF"/>
+                </a:solidFill>
+              </a:defRPr>
+            </a:pPr>
+            <a:r>
+              <a:rPr sz="1425" b="1">
+                <a:solidFill>
+                  <a:srgbClr val="FFFFFF"/>
+                </a:solidFill>
+              </a:rPr>
+              <a:t>Aircraft</a:t>
+            </a:r>
+          </a:p>
+        </p:txBody>
+      </p:sp>
+      <p:sp>
+        <p:nvSpPr>
+          <p:cNvPr id="32" name="">
+            <a:extLst xmlns:a="http://schemas.openxmlformats.org/drawingml/2006/main">
+              <a:ext uri="{FF2B5EF4-FFF2-40B4-BE49-F238E27FC236}">
+                <a16:creationId xmlns:a16="http://schemas.microsoft.com/office/drawing/2014/main" id="{978BFA17-8D8A-4F6A-A63C-69A185DD68CA}"/>
+              </a:ext>
+            </a:extLst>
+          </p:cNvPr>
+          <p:cNvSpPr>
+            <a:spLocks xmlns:a="http://schemas.openxmlformats.org/drawingml/2006/main" noGrp="1"/>
+          </p:cNvSpPr>
+          <p:nvPr/>
+        </p:nvSpPr>
+        <p:spPr>
+          <a:xfrm xmlns:a="http://schemas.openxmlformats.org/drawingml/2006/main">
+            <a:off x="9258300" y="2247900"/>
+            <a:ext cx="2019300" cy="552450"/>
+          </a:xfrm>
+          <a:prstGeom xmlns:a="http://schemas.openxmlformats.org/drawingml/2006/main" prst="rect">
+            <a:avLst/>
+          </a:prstGeom>
+          <a:noFill xmlns:a="http://schemas.openxmlformats.org/drawingml/2006/main"/>
+          <a:ln xmlns:a="http://schemas.openxmlformats.org/drawingml/2006/main" w="0">
+            <a:noFill/>
+            <a:prstDash val="solid"/>
+          </a:ln>
+        </p:spPr>
+        <p:txBody>
+          <a:bodyPr xmlns:a="http://schemas.openxmlformats.org/drawingml/2006/main"/>
+          <a:lstStyle xmlns:a="http://schemas.openxmlformats.org/drawingml/2006/main"/>
+          <a:p xmlns:a="http://schemas.openxmlformats.org/drawingml/2006/main">
+            <a:pPr>
+              <a:defRPr sz="1050">
+                <a:solidFill>
+                  <a:srgbClr val="D6E7EC"/>
+                </a:solidFill>
+              </a:defRPr>
+            </a:pPr>
+            <a:r>
+              <a:rPr sz="1050">
+                <a:solidFill>
+                  <a:srgbClr val="D6E7EC"/>
+                </a:solidFill>
+              </a:rPr>
+              <a:t>The body moves through the room.</a:t>
+            </a:r>
+          </a:p>
+        </p:txBody>
+      </p:sp>
+      <p:sp>
+        <p:nvSpPr>
+          <p:cNvPr id="33" name="">
+            <a:extLst xmlns:a="http://schemas.openxmlformats.org/drawingml/2006/main">
+              <a:ext uri="{FF2B5EF4-FFF2-40B4-BE49-F238E27FC236}">
+                <a16:creationId xmlns:a16="http://schemas.microsoft.com/office/drawing/2014/main" id="{82806E06-B1C0-43C3-B75C-09FB2BFF4A07}"/>
+              </a:ext>
+            </a:extLst>
+          </p:cNvPr>
+          <p:cNvSpPr>
+            <a:spLocks xmlns:a="http://schemas.openxmlformats.org/drawingml/2006/main" noGrp="1"/>
+          </p:cNvSpPr>
+          <p:nvPr/>
+        </p:nvSpPr>
+        <p:spPr>
+          <a:xfrm xmlns:a="http://schemas.openxmlformats.org/drawingml/2006/main">
+            <a:off x="1714500" y="3810000"/>
+            <a:ext cx="9715500" cy="2095500"/>
+          </a:xfrm>
+          <a:prstGeom xmlns:a="http://schemas.openxmlformats.org/drawingml/2006/main" prst="roundRect">
+            <a:avLst>
+              <a:gd name="adj" fmla="val 5455"/>
+            </a:avLst>
+          </a:prstGeom>
+          <a:solidFill xmlns:a="http://schemas.openxmlformats.org/drawingml/2006/main">
+            <a:srgbClr val="DDF2F1"/>
+          </a:solidFill>
+          <a:ln xmlns:a="http://schemas.openxmlformats.org/drawingml/2006/main" w="14288">
+            <a:solidFill>
+              <a:srgbClr val="9FD4D3"/>
+            </a:solidFill>
+            <a:prstDash val="solid"/>
+          </a:ln>
+        </p:spPr>
+      </p:sp>
+      <p:sp>
+        <p:nvSpPr>
+          <p:cNvPr id="34" name="">
+            <a:extLst xmlns:a="http://schemas.openxmlformats.org/drawingml/2006/main">
+              <a:ext uri="{FF2B5EF4-FFF2-40B4-BE49-F238E27FC236}">
+                <a16:creationId xmlns:a16="http://schemas.microsoft.com/office/drawing/2014/main" id="{9E861886-751B-4944-A2F0-998CCD63C85E}"/>
+              </a:ext>
+            </a:extLst>
+          </p:cNvPr>
+          <p:cNvSpPr>
+            <a:spLocks xmlns:a="http://schemas.openxmlformats.org/drawingml/2006/main" noGrp="1"/>
+          </p:cNvSpPr>
+          <p:nvPr/>
+        </p:nvSpPr>
+        <p:spPr>
+          <a:xfrm xmlns:a="http://schemas.openxmlformats.org/drawingml/2006/main">
+            <a:off x="1943100" y="3981450"/>
+            <a:ext cx="2152650" cy="304800"/>
+          </a:xfrm>
+          <a:prstGeom xmlns:a="http://schemas.openxmlformats.org/drawingml/2006/main" prst="roundRect">
+            <a:avLst>
+              <a:gd name="adj" fmla="val 50000"/>
+            </a:avLst>
+          </a:prstGeom>
+          <a:solidFill xmlns:a="http://schemas.openxmlformats.org/drawingml/2006/main">
+            <a:srgbClr val="008C95"/>
+          </a:solidFill>
+          <a:ln xmlns:a="http://schemas.openxmlformats.org/drawingml/2006/main" w="14288">
+            <a:solidFill>
+              <a:srgbClr val="008C95"/>
+            </a:solidFill>
+            <a:prstDash val="solid"/>
+          </a:ln>
+        </p:spPr>
+        <p:txBody>
+          <a:bodyPr xmlns:a="http://schemas.openxmlformats.org/drawingml/2006/main"/>
+          <a:lstStyle xmlns:a="http://schemas.openxmlformats.org/drawingml/2006/main"/>
+          <a:p xmlns:a="http://schemas.openxmlformats.org/drawingml/2006/main">
+            <a:pPr algn="ctr">
+              <a:defRPr sz="1050" b="1">
+                <a:solidFill>
+                  <a:srgbClr val="FFFFFF"/>
+                </a:solidFill>
+              </a:defRPr>
+            </a:pPr>
+            <a:r>
+              <a:rPr sz="1050" b="1">
+                <a:solidFill>
+                  <a:srgbClr val="FFFFFF"/>
+                </a:solidFill>
+              </a:rPr>
+              <a:t>ONBOARD SENSOR FUSION</a:t>
+            </a:r>
+          </a:p>
+        </p:txBody>
+      </p:sp>
+      <p:sp>
+        <p:nvSpPr>
+          <p:cNvPr id="35" name="">
+            <a:extLst xmlns:a="http://schemas.openxmlformats.org/drawingml/2006/main">
+              <a:ext uri="{FF2B5EF4-FFF2-40B4-BE49-F238E27FC236}">
+                <a16:creationId xmlns:a16="http://schemas.microsoft.com/office/drawing/2014/main" id="{7FFCC14E-FB89-4DE3-A2B9-E91358A042F1}"/>
+              </a:ext>
+            </a:extLst>
+          </p:cNvPr>
+          <p:cNvSpPr>
+            <a:spLocks xmlns:a="http://schemas.openxmlformats.org/drawingml/2006/main" noGrp="1"/>
+          </p:cNvSpPr>
+          <p:nvPr/>
+        </p:nvSpPr>
+        <p:spPr>
+          <a:xfrm xmlns:a="http://schemas.openxmlformats.org/drawingml/2006/main">
+            <a:off x="10734675" y="5534025"/>
+            <a:ext cx="19050" cy="19050"/>
+          </a:xfrm>
+          <a:prstGeom xmlns:a="http://schemas.openxmlformats.org/drawingml/2006/main" prst="rect">
+            <a:avLst/>
+          </a:prstGeom>
+          <a:ln xmlns:a="http://schemas.openxmlformats.org/drawingml/2006/main" w="0">
+            <a:prstDash val="solid"/>
+          </a:ln>
+        </p:spPr>
+      </p:sp>
+      <p:sp>
+        <p:nvSpPr>
+          <p:cNvPr id="36" name="">
+            <a:extLst xmlns:a="http://schemas.openxmlformats.org/drawingml/2006/main">
+              <a:ext uri="{FF2B5EF4-FFF2-40B4-BE49-F238E27FC236}">
+                <a16:creationId xmlns:a16="http://schemas.microsoft.com/office/drawing/2014/main" id="{D50459E0-FAFF-4D58-8C98-D6ACD0945E3C}"/>
+              </a:ext>
+            </a:extLst>
+          </p:cNvPr>
+          <p:cNvSpPr>
+            <a:spLocks xmlns:a="http://schemas.openxmlformats.org/drawingml/2006/main" noGrp="1"/>
+          </p:cNvSpPr>
+          <p:nvPr/>
+        </p:nvSpPr>
+        <p:spPr>
+          <a:xfrm xmlns:a="http://schemas.openxmlformats.org/drawingml/2006/main">
+            <a:off x="5705475" y="5534025"/>
+            <a:ext cx="19050" cy="19050"/>
+          </a:xfrm>
+          <a:prstGeom xmlns:a="http://schemas.openxmlformats.org/drawingml/2006/main" prst="rect">
+            <a:avLst/>
+          </a:prstGeom>
+          <a:ln xmlns:a="http://schemas.openxmlformats.org/drawingml/2006/main" w="0">
+            <a:prstDash val="solid"/>
+          </a:ln>
+        </p:spPr>
+      </p:sp>
+      <p:cxnSp>
+        <p:nvCxnSpPr>
+          <p:cNvPr id="96" name=""/>
+          <p:cNvCxnSpPr>
+            <a:stCxn xmlns:a="http://schemas.openxmlformats.org/drawingml/2006/main" id="35" idx="1"/>
+            <a:endCxn xmlns:a="http://schemas.openxmlformats.org/drawingml/2006/main" id="36" idx="3"/>
+          </p:cNvCxnSpPr>
+          <p:nvPr/>
+        </p:nvCxnSpPr>
+        <p:spPr>
+          <a:xfrm xmlns:a="http://schemas.openxmlformats.org/drawingml/2006/main" flipH="1">
+            <a:off x="5724525" y="5543550"/>
+            <a:ext cx="5010150" cy="0"/>
+          </a:xfrm>
+          <a:prstGeom xmlns:a="http://schemas.openxmlformats.org/drawingml/2006/main" prst="straightConnector1">
+            <a:avLst/>
+          </a:prstGeom>
+          <a:ln xmlns:a="http://schemas.openxmlformats.org/drawingml/2006/main" w="28575">
+            <a:solidFill>
+              <a:srgbClr val="008C95"/>
+            </a:solidFill>
+            <a:prstDash val="solid"/>
+            <a:tailEnd type="triangle" w="med" len="med"/>
+          </a:ln>
+        </p:spPr>
+      </p:cxnSp>
+      <p:sp>
+        <p:nvSpPr>
+          <p:cNvPr id="38" name="">
+            <a:extLst xmlns:a="http://schemas.openxmlformats.org/drawingml/2006/main">
+              <a:ext uri="{FF2B5EF4-FFF2-40B4-BE49-F238E27FC236}">
+                <a16:creationId xmlns:a16="http://schemas.microsoft.com/office/drawing/2014/main" id="{152138DC-4EA0-47B3-BA75-FD390B19ECF1}"/>
+              </a:ext>
+            </a:extLst>
+          </p:cNvPr>
+          <p:cNvSpPr>
+            <a:spLocks xmlns:a="http://schemas.openxmlformats.org/drawingml/2006/main" noGrp="1"/>
+          </p:cNvSpPr>
+          <p:nvPr/>
+        </p:nvSpPr>
+        <p:spPr>
+          <a:xfrm xmlns:a="http://schemas.openxmlformats.org/drawingml/2006/main">
+            <a:off x="4543425" y="4505325"/>
+            <a:ext cx="19050" cy="19050"/>
+          </a:xfrm>
+          <a:prstGeom xmlns:a="http://schemas.openxmlformats.org/drawingml/2006/main" prst="rect">
+            <a:avLst/>
+          </a:prstGeom>
+          <a:ln xmlns:a="http://schemas.openxmlformats.org/drawingml/2006/main" w="0">
+            <a:prstDash val="solid"/>
+          </a:ln>
+        </p:spPr>
+      </p:sp>
+      <p:sp>
+        <p:nvSpPr>
+          <p:cNvPr id="39" name="">
+            <a:extLst xmlns:a="http://schemas.openxmlformats.org/drawingml/2006/main">
+              <a:ext uri="{FF2B5EF4-FFF2-40B4-BE49-F238E27FC236}">
+                <a16:creationId xmlns:a16="http://schemas.microsoft.com/office/drawing/2014/main" id="{FC3C4462-5174-4E1A-9129-FAA58E68A907}"/>
+              </a:ext>
+            </a:extLst>
+          </p:cNvPr>
+          <p:cNvSpPr>
+            <a:spLocks xmlns:a="http://schemas.openxmlformats.org/drawingml/2006/main" noGrp="1"/>
+          </p:cNvSpPr>
+          <p:nvPr/>
+        </p:nvSpPr>
+        <p:spPr>
+          <a:xfrm xmlns:a="http://schemas.openxmlformats.org/drawingml/2006/main">
+            <a:off x="4619625" y="3038475"/>
+            <a:ext cx="19050" cy="19050"/>
+          </a:xfrm>
+          <a:prstGeom xmlns:a="http://schemas.openxmlformats.org/drawingml/2006/main" prst="rect">
+            <a:avLst/>
+          </a:prstGeom>
+          <a:ln xmlns:a="http://schemas.openxmlformats.org/drawingml/2006/main" w="0">
+            <a:prstDash val="solid"/>
+          </a:ln>
+        </p:spPr>
+      </p:sp>
+      <p:cxnSp>
+        <p:nvCxnSpPr>
+          <p:cNvPr id="99" name=""/>
+          <p:cNvCxnSpPr>
+            <a:stCxn xmlns:a="http://schemas.openxmlformats.org/drawingml/2006/main" id="38" idx="0"/>
+            <a:endCxn xmlns:a="http://schemas.openxmlformats.org/drawingml/2006/main" id="39" idx="2"/>
+          </p:cNvCxnSpPr>
+          <p:nvPr/>
+        </p:nvCxnSpPr>
+        <p:spPr>
+          <a:xfrm xmlns:a="http://schemas.openxmlformats.org/drawingml/2006/main" flipV="1">
+            <a:off x="4552950" y="3057525"/>
+            <a:ext cx="76200" cy="1447800"/>
+          </a:xfrm>
+          <a:prstGeom xmlns:a="http://schemas.openxmlformats.org/drawingml/2006/main" prst="straightConnector1">
+            <a:avLst/>
+          </a:prstGeom>
+          <a:ln xmlns:a="http://schemas.openxmlformats.org/drawingml/2006/main" w="38100">
+            <a:solidFill>
+              <a:srgbClr val="C9A227"/>
+            </a:solidFill>
+            <a:prstDash val="solid"/>
+            <a:tailEnd type="triangle" w="med" len="med"/>
+          </a:ln>
+        </p:spPr>
+      </p:cxnSp>
+      <p:sp>
+        <p:nvSpPr>
+          <p:cNvPr id="41" name="">
+            <a:extLst xmlns:a="http://schemas.openxmlformats.org/drawingml/2006/main">
+              <a:ext uri="{FF2B5EF4-FFF2-40B4-BE49-F238E27FC236}">
+                <a16:creationId xmlns:a16="http://schemas.microsoft.com/office/drawing/2014/main" id="{A74DBB82-A6A1-4F35-922C-6A82D0D578AC}"/>
+              </a:ext>
+            </a:extLst>
+          </p:cNvPr>
+          <p:cNvSpPr>
+            <a:spLocks xmlns:a="http://schemas.openxmlformats.org/drawingml/2006/main" noGrp="1"/>
+          </p:cNvSpPr>
+          <p:nvPr/>
+        </p:nvSpPr>
+        <p:spPr>
+          <a:xfrm xmlns:a="http://schemas.openxmlformats.org/drawingml/2006/main">
+            <a:off x="3390900" y="4514850"/>
+            <a:ext cx="2324100" cy="1066800"/>
+          </a:xfrm>
+          <a:prstGeom xmlns:a="http://schemas.openxmlformats.org/drawingml/2006/main" prst="roundRect">
+            <a:avLst>
+              <a:gd name="adj" fmla="val 10714"/>
+            </a:avLst>
+          </a:prstGeom>
+          <a:solidFill xmlns:a="http://schemas.openxmlformats.org/drawingml/2006/main">
+            <a:srgbClr val="001B3A"/>
+          </a:solidFill>
+          <a:ln xmlns:a="http://schemas.openxmlformats.org/drawingml/2006/main" w="14288">
+            <a:solidFill>
+              <a:srgbClr val="001B3A"/>
+            </a:solidFill>
+            <a:prstDash val="solid"/>
+          </a:ln>
+        </p:spPr>
+      </p:sp>
+      <p:sp>
+        <p:nvSpPr>
+          <p:cNvPr id="42" name="">
+            <a:extLst xmlns:a="http://schemas.openxmlformats.org/drawingml/2006/main">
+              <a:ext uri="{FF2B5EF4-FFF2-40B4-BE49-F238E27FC236}">
+                <a16:creationId xmlns:a16="http://schemas.microsoft.com/office/drawing/2014/main" id="{2A52C1FA-E1BE-4256-AC2F-D9D13DF00E7A}"/>
+              </a:ext>
+            </a:extLst>
+          </p:cNvPr>
+          <p:cNvSpPr>
+            <a:spLocks xmlns:a="http://schemas.openxmlformats.org/drawingml/2006/main" noGrp="1"/>
+          </p:cNvSpPr>
+          <p:nvPr/>
+        </p:nvSpPr>
+        <p:spPr>
+          <a:xfrm xmlns:a="http://schemas.openxmlformats.org/drawingml/2006/main">
+            <a:off x="3581400" y="4705350"/>
+            <a:ext cx="1943100" cy="247650"/>
+          </a:xfrm>
+          <a:prstGeom xmlns:a="http://schemas.openxmlformats.org/drawingml/2006/main" prst="rect">
+            <a:avLst/>
+          </a:prstGeom>
+          <a:noFill xmlns:a="http://schemas.openxmlformats.org/drawingml/2006/main"/>
+          <a:ln xmlns:a="http://schemas.openxmlformats.org/drawingml/2006/main" w="0">
+            <a:noFill/>
+            <a:prstDash val="solid"/>
+          </a:ln>
+        </p:spPr>
+        <p:txBody>
+          <a:bodyPr xmlns:a="http://schemas.openxmlformats.org/drawingml/2006/main"/>
+          <a:lstStyle xmlns:a="http://schemas.openxmlformats.org/drawingml/2006/main"/>
+          <a:p xmlns:a="http://schemas.openxmlformats.org/drawingml/2006/main">
+            <a:pPr algn="ctr">
+              <a:defRPr sz="1500" b="1">
+                <a:solidFill>
+                  <a:srgbClr val="C9A227"/>
+                </a:solidFill>
+              </a:defRPr>
+            </a:pPr>
+            <a:r>
+              <a:rPr sz="1500" b="1">
+                <a:solidFill>
+                  <a:srgbClr val="C9A227"/>
+                </a:solidFill>
+              </a:rPr>
+              <a:t>STATE ESTIMATE</a:t>
+            </a:r>
+          </a:p>
+        </p:txBody>
+      </p:sp>
+      <p:sp>
+        <p:nvSpPr>
+          <p:cNvPr id="43" name="">
+            <a:extLst xmlns:a="http://schemas.openxmlformats.org/drawingml/2006/main">
+              <a:ext uri="{FF2B5EF4-FFF2-40B4-BE49-F238E27FC236}">
+                <a16:creationId xmlns:a16="http://schemas.microsoft.com/office/drawing/2014/main" id="{F57CB3E0-5304-4B9B-A3B3-2F9DAE8F372B}"/>
+              </a:ext>
+            </a:extLst>
+          </p:cNvPr>
+          <p:cNvSpPr>
+            <a:spLocks xmlns:a="http://schemas.openxmlformats.org/drawingml/2006/main" noGrp="1"/>
+          </p:cNvSpPr>
+          <p:nvPr/>
+        </p:nvSpPr>
+        <p:spPr>
+          <a:xfrm xmlns:a="http://schemas.openxmlformats.org/drawingml/2006/main">
+            <a:off x="3600450" y="5067300"/>
+            <a:ext cx="1905000" cy="400050"/>
+          </a:xfrm>
+          <a:prstGeom xmlns:a="http://schemas.openxmlformats.org/drawingml/2006/main" prst="rect">
+            <a:avLst/>
+          </a:prstGeom>
+          <a:noFill xmlns:a="http://schemas.openxmlformats.org/drawingml/2006/main"/>
+          <a:ln xmlns:a="http://schemas.openxmlformats.org/drawingml/2006/main" w="0">
+            <a:noFill/>
+            <a:prstDash val="solid"/>
+          </a:ln>
+        </p:spPr>
+        <p:txBody>
+          <a:bodyPr xmlns:a="http://schemas.openxmlformats.org/drawingml/2006/main"/>
+          <a:lstStyle xmlns:a="http://schemas.openxmlformats.org/drawingml/2006/main"/>
+          <a:p xmlns:a="http://schemas.openxmlformats.org/drawingml/2006/main">
+            <a:pPr algn="ctr">
+              <a:defRPr sz="1050">
+                <a:solidFill>
+                  <a:srgbClr val="FFFFFF"/>
+                </a:solidFill>
+              </a:defRPr>
+            </a:pPr>
+            <a:r>
+              <a:rPr sz="1050">
+                <a:solidFill>
+                  <a:srgbClr val="FFFFFF"/>
+                </a:solidFill>
+              </a:rPr>
+              <a:t>Fused attitude, rates,</a:t>
+            </a:r>
+          </a:p>
+          <a:p xmlns:a="http://schemas.openxmlformats.org/drawingml/2006/main">
+            <a:pPr algn="ctr">
+              <a:defRPr sz="1050">
+                <a:solidFill>
+                  <a:srgbClr val="FFFFFF"/>
+                </a:solidFill>
+              </a:defRPr>
+            </a:pPr>
+            <a:r>
+              <a:rPr sz="1050">
+                <a:solidFill>
+                  <a:srgbClr val="FFFFFF"/>
+                </a:solidFill>
+              </a:rPr>
+              <a:t>height trend, and motion</a:t>
+            </a:r>
+          </a:p>
+        </p:txBody>
+      </p:sp>
+      <p:sp>
+        <p:nvSpPr>
+          <p:cNvPr id="44" name="">
+            <a:extLst xmlns:a="http://schemas.openxmlformats.org/drawingml/2006/main">
+              <a:ext uri="{FF2B5EF4-FFF2-40B4-BE49-F238E27FC236}">
+                <a16:creationId xmlns:a16="http://schemas.microsoft.com/office/drawing/2014/main" id="{E881EDC6-C44E-43E8-9FD2-DB6ED0189FE7}"/>
+              </a:ext>
+            </a:extLst>
+          </p:cNvPr>
+          <p:cNvSpPr>
+            <a:spLocks xmlns:a="http://schemas.openxmlformats.org/drawingml/2006/main" noGrp="1"/>
+          </p:cNvSpPr>
+          <p:nvPr/>
+        </p:nvSpPr>
+        <p:spPr>
+          <a:xfrm xmlns:a="http://schemas.openxmlformats.org/drawingml/2006/main">
+            <a:off x="6562725" y="5391150"/>
+            <a:ext cx="19050" cy="152400"/>
+          </a:xfrm>
+          <a:prstGeom xmlns:a="http://schemas.openxmlformats.org/drawingml/2006/main" prst="rect">
+            <a:avLst/>
+          </a:prstGeom>
+          <a:solidFill xmlns:a="http://schemas.openxmlformats.org/drawingml/2006/main">
+            <a:srgbClr val="008C95"/>
+          </a:solidFill>
+          <a:ln xmlns:a="http://schemas.openxmlformats.org/drawingml/2006/main" w="0">
+            <a:solidFill>
+              <a:srgbClr val="008C95"/>
+            </a:solidFill>
+            <a:prstDash val="solid"/>
+          </a:ln>
+        </p:spPr>
+      </p:sp>
+      <p:sp>
+        <p:nvSpPr>
+          <p:cNvPr id="45" name="">
+            <a:extLst xmlns:a="http://schemas.openxmlformats.org/drawingml/2006/main">
+              <a:ext uri="{FF2B5EF4-FFF2-40B4-BE49-F238E27FC236}">
+                <a16:creationId xmlns:a16="http://schemas.microsoft.com/office/drawing/2014/main" id="{EE230E2A-1D32-4F7D-85E7-70D7353F5500}"/>
+              </a:ext>
+            </a:extLst>
+          </p:cNvPr>
+          <p:cNvSpPr>
+            <a:spLocks xmlns:a="http://schemas.openxmlformats.org/drawingml/2006/main" noGrp="1"/>
+          </p:cNvSpPr>
+          <p:nvPr/>
+        </p:nvSpPr>
+        <p:spPr>
+          <a:xfrm xmlns:a="http://schemas.openxmlformats.org/drawingml/2006/main">
+            <a:off x="6229350" y="4705350"/>
+            <a:ext cx="685800" cy="685800"/>
+          </a:xfrm>
+          <a:prstGeom xmlns:a="http://schemas.openxmlformats.org/drawingml/2006/main" prst="ellipse">
+            <a:avLst/>
+          </a:prstGeom>
+          <a:solidFill xmlns:a="http://schemas.openxmlformats.org/drawingml/2006/main">
+            <a:srgbClr val="FFFFFF"/>
+          </a:solidFill>
+          <a:ln xmlns:a="http://schemas.openxmlformats.org/drawingml/2006/main" w="28575">
+            <a:solidFill>
+              <a:srgbClr val="008C95"/>
+            </a:solidFill>
+            <a:prstDash val="solid"/>
+          </a:ln>
+        </p:spPr>
+      </p:sp>
+      <p:sp>
+        <p:nvSpPr>
+          <p:cNvPr id="46" name="">
+            <a:extLst xmlns:a="http://schemas.openxmlformats.org/drawingml/2006/main">
+              <a:ext uri="{FF2B5EF4-FFF2-40B4-BE49-F238E27FC236}">
+                <a16:creationId xmlns:a16="http://schemas.microsoft.com/office/drawing/2014/main" id="{A2FB9FB6-EF87-48CB-A59A-51E4DFC28E99}"/>
+              </a:ext>
+            </a:extLst>
+          </p:cNvPr>
+          <p:cNvSpPr>
+            <a:spLocks xmlns:a="http://schemas.openxmlformats.org/drawingml/2006/main" noGrp="1"/>
+          </p:cNvSpPr>
+          <p:nvPr/>
+        </p:nvSpPr>
+        <p:spPr>
+          <a:xfrm xmlns:a="http://schemas.openxmlformats.org/drawingml/2006/main">
+            <a:off x="6267450" y="4933950"/>
+            <a:ext cx="609600" cy="228600"/>
+          </a:xfrm>
+          <a:prstGeom xmlns:a="http://schemas.openxmlformats.org/drawingml/2006/main" prst="rect">
+            <a:avLst/>
+          </a:prstGeom>
+          <a:noFill xmlns:a="http://schemas.openxmlformats.org/drawingml/2006/main"/>
+          <a:ln xmlns:a="http://schemas.openxmlformats.org/drawingml/2006/main" w="0">
+            <a:noFill/>
+            <a:prstDash val="solid"/>
+          </a:ln>
+        </p:spPr>
+        <p:txBody>
+          <a:bodyPr xmlns:a="http://schemas.openxmlformats.org/drawingml/2006/main"/>
+          <a:lstStyle xmlns:a="http://schemas.openxmlformats.org/drawingml/2006/main"/>
+          <a:p xmlns:a="http://schemas.openxmlformats.org/drawingml/2006/main">
+            <a:pPr algn="ctr">
+              <a:defRPr sz="1050" b="1">
+                <a:solidFill>
+                  <a:srgbClr val="001B3A"/>
+                </a:solidFill>
+              </a:defRPr>
+            </a:pPr>
+            <a:r>
+              <a:rPr sz="1050" b="1">
+                <a:solidFill>
+                  <a:srgbClr val="001B3A"/>
+                </a:solidFill>
+              </a:rPr>
+              <a:t>IMU</a:t>
+            </a:r>
+          </a:p>
+        </p:txBody>
+      </p:sp>
+      <p:sp>
+        <p:nvSpPr>
+          <p:cNvPr id="47" name="">
+            <a:extLst xmlns:a="http://schemas.openxmlformats.org/drawingml/2006/main">
+              <a:ext uri="{FF2B5EF4-FFF2-40B4-BE49-F238E27FC236}">
+                <a16:creationId xmlns:a16="http://schemas.microsoft.com/office/drawing/2014/main" id="{6BD1CFC6-5D15-4BD8-AA51-2D7F1A157EDE}"/>
+              </a:ext>
+            </a:extLst>
+          </p:cNvPr>
+          <p:cNvSpPr>
+            <a:spLocks xmlns:a="http://schemas.openxmlformats.org/drawingml/2006/main" noGrp="1"/>
+          </p:cNvSpPr>
+          <p:nvPr/>
+        </p:nvSpPr>
+        <p:spPr>
+          <a:xfrm xmlns:a="http://schemas.openxmlformats.org/drawingml/2006/main">
+            <a:off x="7515225" y="5391150"/>
+            <a:ext cx="19050" cy="152400"/>
+          </a:xfrm>
+          <a:prstGeom xmlns:a="http://schemas.openxmlformats.org/drawingml/2006/main" prst="rect">
+            <a:avLst/>
+          </a:prstGeom>
+          <a:solidFill xmlns:a="http://schemas.openxmlformats.org/drawingml/2006/main">
+            <a:srgbClr val="008C95"/>
+          </a:solidFill>
+          <a:ln xmlns:a="http://schemas.openxmlformats.org/drawingml/2006/main" w="0">
+            <a:solidFill>
+              <a:srgbClr val="008C95"/>
+            </a:solidFill>
+            <a:prstDash val="solid"/>
+          </a:ln>
+        </p:spPr>
+      </p:sp>
+      <p:sp>
+        <p:nvSpPr>
+          <p:cNvPr id="48" name="">
+            <a:extLst xmlns:a="http://schemas.openxmlformats.org/drawingml/2006/main">
+              <a:ext uri="{FF2B5EF4-FFF2-40B4-BE49-F238E27FC236}">
+                <a16:creationId xmlns:a16="http://schemas.microsoft.com/office/drawing/2014/main" id="{E3677134-56B2-42F8-A084-8EF1C923E569}"/>
+              </a:ext>
+            </a:extLst>
+          </p:cNvPr>
+          <p:cNvSpPr>
+            <a:spLocks xmlns:a="http://schemas.openxmlformats.org/drawingml/2006/main" noGrp="1"/>
+          </p:cNvSpPr>
+          <p:nvPr/>
+        </p:nvSpPr>
+        <p:spPr>
+          <a:xfrm xmlns:a="http://schemas.openxmlformats.org/drawingml/2006/main">
+            <a:off x="7181850" y="4705350"/>
+            <a:ext cx="685800" cy="685800"/>
+          </a:xfrm>
+          <a:prstGeom xmlns:a="http://schemas.openxmlformats.org/drawingml/2006/main" prst="ellipse">
+            <a:avLst/>
+          </a:prstGeom>
+          <a:solidFill xmlns:a="http://schemas.openxmlformats.org/drawingml/2006/main">
+            <a:srgbClr val="FFFFFF"/>
+          </a:solidFill>
+          <a:ln xmlns:a="http://schemas.openxmlformats.org/drawingml/2006/main" w="28575">
+            <a:solidFill>
+              <a:srgbClr val="C9A227"/>
+            </a:solidFill>
+            <a:prstDash val="solid"/>
+          </a:ln>
+        </p:spPr>
+      </p:sp>
+      <p:sp>
+        <p:nvSpPr>
+          <p:cNvPr id="49" name="">
+            <a:extLst xmlns:a="http://schemas.openxmlformats.org/drawingml/2006/main">
+              <a:ext uri="{FF2B5EF4-FFF2-40B4-BE49-F238E27FC236}">
+                <a16:creationId xmlns:a16="http://schemas.microsoft.com/office/drawing/2014/main" id="{BAF5FAC6-EC87-4C1D-9E8A-BB772F2A8FDF}"/>
+              </a:ext>
+            </a:extLst>
+          </p:cNvPr>
+          <p:cNvSpPr>
+            <a:spLocks xmlns:a="http://schemas.openxmlformats.org/drawingml/2006/main" noGrp="1"/>
+          </p:cNvSpPr>
+          <p:nvPr/>
+        </p:nvSpPr>
+        <p:spPr>
+          <a:xfrm xmlns:a="http://schemas.openxmlformats.org/drawingml/2006/main">
+            <a:off x="7219950" y="4933950"/>
+            <a:ext cx="609600" cy="228600"/>
+          </a:xfrm>
+          <a:prstGeom xmlns:a="http://schemas.openxmlformats.org/drawingml/2006/main" prst="rect">
+            <a:avLst/>
+          </a:prstGeom>
+          <a:noFill xmlns:a="http://schemas.openxmlformats.org/drawingml/2006/main"/>
+          <a:ln xmlns:a="http://schemas.openxmlformats.org/drawingml/2006/main" w="0">
+            <a:noFill/>
+            <a:prstDash val="solid"/>
+          </a:ln>
+        </p:spPr>
+        <p:txBody>
+          <a:bodyPr xmlns:a="http://schemas.openxmlformats.org/drawingml/2006/main"/>
+          <a:lstStyle xmlns:a="http://schemas.openxmlformats.org/drawingml/2006/main"/>
+          <a:p xmlns:a="http://schemas.openxmlformats.org/drawingml/2006/main">
+            <a:pPr algn="ctr">
+              <a:defRPr sz="1050" b="1">
+                <a:solidFill>
+                  <a:srgbClr val="001B3A"/>
+                </a:solidFill>
+              </a:defRPr>
+            </a:pPr>
+            <a:r>
+              <a:rPr sz="1050" b="1">
+                <a:solidFill>
+                  <a:srgbClr val="001B3A"/>
+                </a:solidFill>
+              </a:rPr>
+              <a:t>FLOW</a:t>
+            </a:r>
+          </a:p>
+        </p:txBody>
+      </p:sp>
+      <p:sp>
+        <p:nvSpPr>
+          <p:cNvPr id="50" name="">
+            <a:extLst xmlns:a="http://schemas.openxmlformats.org/drawingml/2006/main">
+              <a:ext uri="{FF2B5EF4-FFF2-40B4-BE49-F238E27FC236}">
+                <a16:creationId xmlns:a16="http://schemas.microsoft.com/office/drawing/2014/main" id="{86F357D3-4AD3-428E-9F66-E3006CDB348A}"/>
+              </a:ext>
+            </a:extLst>
+          </p:cNvPr>
+          <p:cNvSpPr>
+            <a:spLocks xmlns:a="http://schemas.openxmlformats.org/drawingml/2006/main" noGrp="1"/>
+          </p:cNvSpPr>
+          <p:nvPr/>
+        </p:nvSpPr>
+        <p:spPr>
+          <a:xfrm xmlns:a="http://schemas.openxmlformats.org/drawingml/2006/main">
+            <a:off x="8467725" y="5391150"/>
+            <a:ext cx="19050" cy="152400"/>
+          </a:xfrm>
+          <a:prstGeom xmlns:a="http://schemas.openxmlformats.org/drawingml/2006/main" prst="rect">
+            <a:avLst/>
+          </a:prstGeom>
+          <a:solidFill xmlns:a="http://schemas.openxmlformats.org/drawingml/2006/main">
+            <a:srgbClr val="008C95"/>
+          </a:solidFill>
+          <a:ln xmlns:a="http://schemas.openxmlformats.org/drawingml/2006/main" w="0">
+            <a:solidFill>
+              <a:srgbClr val="008C95"/>
+            </a:solidFill>
+            <a:prstDash val="solid"/>
+          </a:ln>
+        </p:spPr>
+      </p:sp>
+      <p:sp>
+        <p:nvSpPr>
+          <p:cNvPr id="51" name="">
+            <a:extLst xmlns:a="http://schemas.openxmlformats.org/drawingml/2006/main">
+              <a:ext uri="{FF2B5EF4-FFF2-40B4-BE49-F238E27FC236}">
+                <a16:creationId xmlns:a16="http://schemas.microsoft.com/office/drawing/2014/main" id="{4E1FB5D5-3056-4905-9B9A-59788F51A2B0}"/>
+              </a:ext>
+            </a:extLst>
+          </p:cNvPr>
+          <p:cNvSpPr>
+            <a:spLocks xmlns:a="http://schemas.openxmlformats.org/drawingml/2006/main" noGrp="1"/>
+          </p:cNvSpPr>
+          <p:nvPr/>
+        </p:nvSpPr>
+        <p:spPr>
+          <a:xfrm xmlns:a="http://schemas.openxmlformats.org/drawingml/2006/main">
+            <a:off x="8134350" y="4705350"/>
+            <a:ext cx="685800" cy="685800"/>
+          </a:xfrm>
+          <a:prstGeom xmlns:a="http://schemas.openxmlformats.org/drawingml/2006/main" prst="ellipse">
+            <a:avLst/>
+          </a:prstGeom>
+          <a:solidFill xmlns:a="http://schemas.openxmlformats.org/drawingml/2006/main">
+            <a:srgbClr val="FFFFFF"/>
+          </a:solidFill>
+          <a:ln xmlns:a="http://schemas.openxmlformats.org/drawingml/2006/main" w="28575">
+            <a:solidFill>
+              <a:srgbClr val="008C95"/>
+            </a:solidFill>
+            <a:prstDash val="solid"/>
+          </a:ln>
+        </p:spPr>
+      </p:sp>
+      <p:sp>
+        <p:nvSpPr>
+          <p:cNvPr id="52" name="">
+            <a:extLst xmlns:a="http://schemas.openxmlformats.org/drawingml/2006/main">
+              <a:ext uri="{FF2B5EF4-FFF2-40B4-BE49-F238E27FC236}">
+                <a16:creationId xmlns:a16="http://schemas.microsoft.com/office/drawing/2014/main" id="{8EA20509-8660-4C0F-ABB6-54D74270FCC0}"/>
+              </a:ext>
+            </a:extLst>
+          </p:cNvPr>
+          <p:cNvSpPr>
+            <a:spLocks xmlns:a="http://schemas.openxmlformats.org/drawingml/2006/main" noGrp="1"/>
+          </p:cNvSpPr>
+          <p:nvPr/>
+        </p:nvSpPr>
+        <p:spPr>
+          <a:xfrm xmlns:a="http://schemas.openxmlformats.org/drawingml/2006/main">
+            <a:off x="8172450" y="4933950"/>
+            <a:ext cx="609600" cy="228600"/>
+          </a:xfrm>
+          <a:prstGeom xmlns:a="http://schemas.openxmlformats.org/drawingml/2006/main" prst="rect">
+            <a:avLst/>
+          </a:prstGeom>
+          <a:noFill xmlns:a="http://schemas.openxmlformats.org/drawingml/2006/main"/>
+          <a:ln xmlns:a="http://schemas.openxmlformats.org/drawingml/2006/main" w="0">
+            <a:noFill/>
+            <a:prstDash val="solid"/>
+          </a:ln>
+        </p:spPr>
+        <p:txBody>
+          <a:bodyPr xmlns:a="http://schemas.openxmlformats.org/drawingml/2006/main"/>
+          <a:lstStyle xmlns:a="http://schemas.openxmlformats.org/drawingml/2006/main"/>
+          <a:p xmlns:a="http://schemas.openxmlformats.org/drawingml/2006/main">
+            <a:pPr algn="ctr">
+              <a:defRPr sz="1050" b="1">
+                <a:solidFill>
+                  <a:srgbClr val="001B3A"/>
+                </a:solidFill>
+              </a:defRPr>
+            </a:pPr>
+            <a:r>
+              <a:rPr sz="1050" b="1">
+                <a:solidFill>
+                  <a:srgbClr val="001B3A"/>
+                </a:solidFill>
+              </a:rPr>
+              <a:t>TOF</a:t>
+            </a:r>
+          </a:p>
+        </p:txBody>
+      </p:sp>
+      <p:sp>
+        <p:nvSpPr>
+          <p:cNvPr id="53" name="">
+            <a:extLst xmlns:a="http://schemas.openxmlformats.org/drawingml/2006/main">
+              <a:ext uri="{FF2B5EF4-FFF2-40B4-BE49-F238E27FC236}">
+                <a16:creationId xmlns:a16="http://schemas.microsoft.com/office/drawing/2014/main" id="{91876B59-6F46-452B-A2EE-452800005F39}"/>
+              </a:ext>
+            </a:extLst>
+          </p:cNvPr>
+          <p:cNvSpPr>
+            <a:spLocks xmlns:a="http://schemas.openxmlformats.org/drawingml/2006/main" noGrp="1"/>
+          </p:cNvSpPr>
+          <p:nvPr/>
+        </p:nvSpPr>
+        <p:spPr>
+          <a:xfrm xmlns:a="http://schemas.openxmlformats.org/drawingml/2006/main">
+            <a:off x="9420225" y="5391150"/>
+            <a:ext cx="19050" cy="152400"/>
+          </a:xfrm>
+          <a:prstGeom xmlns:a="http://schemas.openxmlformats.org/drawingml/2006/main" prst="rect">
+            <a:avLst/>
+          </a:prstGeom>
+          <a:solidFill xmlns:a="http://schemas.openxmlformats.org/drawingml/2006/main">
+            <a:srgbClr val="008C95"/>
+          </a:solidFill>
+          <a:ln xmlns:a="http://schemas.openxmlformats.org/drawingml/2006/main" w="0">
+            <a:solidFill>
+              <a:srgbClr val="008C95"/>
+            </a:solidFill>
+            <a:prstDash val="solid"/>
+          </a:ln>
+        </p:spPr>
+      </p:sp>
+      <p:sp>
+        <p:nvSpPr>
+          <p:cNvPr id="54" name="">
+            <a:extLst xmlns:a="http://schemas.openxmlformats.org/drawingml/2006/main">
+              <a:ext uri="{FF2B5EF4-FFF2-40B4-BE49-F238E27FC236}">
+                <a16:creationId xmlns:a16="http://schemas.microsoft.com/office/drawing/2014/main" id="{09CDABB1-5532-41F0-8B2C-6A2607F47E87}"/>
+              </a:ext>
+            </a:extLst>
+          </p:cNvPr>
+          <p:cNvSpPr>
+            <a:spLocks xmlns:a="http://schemas.openxmlformats.org/drawingml/2006/main" noGrp="1"/>
+          </p:cNvSpPr>
+          <p:nvPr/>
+        </p:nvSpPr>
+        <p:spPr>
+          <a:xfrm xmlns:a="http://schemas.openxmlformats.org/drawingml/2006/main">
+            <a:off x="9086850" y="4705350"/>
+            <a:ext cx="685800" cy="685800"/>
+          </a:xfrm>
+          <a:prstGeom xmlns:a="http://schemas.openxmlformats.org/drawingml/2006/main" prst="ellipse">
+            <a:avLst/>
+          </a:prstGeom>
+          <a:solidFill xmlns:a="http://schemas.openxmlformats.org/drawingml/2006/main">
+            <a:srgbClr val="FFFFFF"/>
+          </a:solidFill>
+          <a:ln xmlns:a="http://schemas.openxmlformats.org/drawingml/2006/main" w="28575">
+            <a:solidFill>
+              <a:srgbClr val="C9A227"/>
+            </a:solidFill>
+            <a:prstDash val="solid"/>
+          </a:ln>
+        </p:spPr>
+      </p:sp>
+      <p:sp>
+        <p:nvSpPr>
+          <p:cNvPr id="55" name="">
+            <a:extLst xmlns:a="http://schemas.openxmlformats.org/drawingml/2006/main">
+              <a:ext uri="{FF2B5EF4-FFF2-40B4-BE49-F238E27FC236}">
+                <a16:creationId xmlns:a16="http://schemas.microsoft.com/office/drawing/2014/main" id="{3B292D1B-16DA-402C-8CED-6D405AB9ED79}"/>
+              </a:ext>
+            </a:extLst>
+          </p:cNvPr>
+          <p:cNvSpPr>
+            <a:spLocks xmlns:a="http://schemas.openxmlformats.org/drawingml/2006/main" noGrp="1"/>
+          </p:cNvSpPr>
+          <p:nvPr/>
+        </p:nvSpPr>
+        <p:spPr>
+          <a:xfrm xmlns:a="http://schemas.openxmlformats.org/drawingml/2006/main">
+            <a:off x="9124950" y="4933950"/>
+            <a:ext cx="609600" cy="228600"/>
+          </a:xfrm>
+          <a:prstGeom xmlns:a="http://schemas.openxmlformats.org/drawingml/2006/main" prst="rect">
+            <a:avLst/>
+          </a:prstGeom>
+          <a:noFill xmlns:a="http://schemas.openxmlformats.org/drawingml/2006/main"/>
+          <a:ln xmlns:a="http://schemas.openxmlformats.org/drawingml/2006/main" w="0">
+            <a:noFill/>
+            <a:prstDash val="solid"/>
+          </a:ln>
+        </p:spPr>
+        <p:txBody>
+          <a:bodyPr xmlns:a="http://schemas.openxmlformats.org/drawingml/2006/main"/>
+          <a:lstStyle xmlns:a="http://schemas.openxmlformats.org/drawingml/2006/main"/>
+          <a:p xmlns:a="http://schemas.openxmlformats.org/drawingml/2006/main">
+            <a:pPr algn="ctr">
+              <a:defRPr sz="1050" b="1">
+                <a:solidFill>
+                  <a:srgbClr val="001B3A"/>
+                </a:solidFill>
+              </a:defRPr>
+            </a:pPr>
+            <a:r>
+              <a:rPr sz="1050" b="1">
+                <a:solidFill>
+                  <a:srgbClr val="001B3A"/>
+                </a:solidFill>
+              </a:rPr>
+              <a:t>BARO</a:t>
+            </a:r>
+          </a:p>
+        </p:txBody>
+      </p:sp>
+      <p:sp>
+        <p:nvSpPr>
+          <p:cNvPr id="56" name="">
+            <a:extLst xmlns:a="http://schemas.openxmlformats.org/drawingml/2006/main">
+              <a:ext uri="{FF2B5EF4-FFF2-40B4-BE49-F238E27FC236}">
+                <a16:creationId xmlns:a16="http://schemas.microsoft.com/office/drawing/2014/main" id="{E1F185E3-F63D-4617-92B7-0A10CFABFFA1}"/>
+              </a:ext>
+            </a:extLst>
+          </p:cNvPr>
+          <p:cNvSpPr>
+            <a:spLocks xmlns:a="http://schemas.openxmlformats.org/drawingml/2006/main" noGrp="1"/>
+          </p:cNvSpPr>
+          <p:nvPr/>
+        </p:nvSpPr>
+        <p:spPr>
+          <a:xfrm xmlns:a="http://schemas.openxmlformats.org/drawingml/2006/main">
+            <a:off x="10372725" y="5391150"/>
+            <a:ext cx="19050" cy="152400"/>
+          </a:xfrm>
+          <a:prstGeom xmlns:a="http://schemas.openxmlformats.org/drawingml/2006/main" prst="rect">
+            <a:avLst/>
+          </a:prstGeom>
+          <a:solidFill xmlns:a="http://schemas.openxmlformats.org/drawingml/2006/main">
+            <a:srgbClr val="008C95"/>
+          </a:solidFill>
+          <a:ln xmlns:a="http://schemas.openxmlformats.org/drawingml/2006/main" w="0">
+            <a:solidFill>
+              <a:srgbClr val="008C95"/>
+            </a:solidFill>
+            <a:prstDash val="solid"/>
+          </a:ln>
+        </p:spPr>
+      </p:sp>
+      <p:sp>
+        <p:nvSpPr>
+          <p:cNvPr id="57" name="">
+            <a:extLst xmlns:a="http://schemas.openxmlformats.org/drawingml/2006/main">
+              <a:ext uri="{FF2B5EF4-FFF2-40B4-BE49-F238E27FC236}">
+                <a16:creationId xmlns:a16="http://schemas.microsoft.com/office/drawing/2014/main" id="{9E0EE87B-5435-4F7E-AD54-5A1A79C7F5AC}"/>
+              </a:ext>
+            </a:extLst>
+          </p:cNvPr>
+          <p:cNvSpPr>
+            <a:spLocks xmlns:a="http://schemas.openxmlformats.org/drawingml/2006/main" noGrp="1"/>
+          </p:cNvSpPr>
+          <p:nvPr/>
+        </p:nvSpPr>
+        <p:spPr>
+          <a:xfrm xmlns:a="http://schemas.openxmlformats.org/drawingml/2006/main">
+            <a:off x="10039350" y="4705350"/>
+            <a:ext cx="685800" cy="685800"/>
+          </a:xfrm>
+          <a:prstGeom xmlns:a="http://schemas.openxmlformats.org/drawingml/2006/main" prst="ellipse">
+            <a:avLst/>
+          </a:prstGeom>
+          <a:solidFill xmlns:a="http://schemas.openxmlformats.org/drawingml/2006/main">
+            <a:srgbClr val="FFFFFF"/>
+          </a:solidFill>
+          <a:ln xmlns:a="http://schemas.openxmlformats.org/drawingml/2006/main" w="28575">
+            <a:solidFill>
+              <a:srgbClr val="008C95"/>
+            </a:solidFill>
+            <a:prstDash val="solid"/>
+          </a:ln>
+        </p:spPr>
+      </p:sp>
+      <p:sp>
+        <p:nvSpPr>
+          <p:cNvPr id="58" name="">
+            <a:extLst xmlns:a="http://schemas.openxmlformats.org/drawingml/2006/main">
+              <a:ext uri="{FF2B5EF4-FFF2-40B4-BE49-F238E27FC236}">
+                <a16:creationId xmlns:a16="http://schemas.microsoft.com/office/drawing/2014/main" id="{E9765924-B14E-44FF-ACC0-C6C8C12790A3}"/>
+              </a:ext>
+            </a:extLst>
+          </p:cNvPr>
+          <p:cNvSpPr>
+            <a:spLocks xmlns:a="http://schemas.openxmlformats.org/drawingml/2006/main" noGrp="1"/>
+          </p:cNvSpPr>
+          <p:nvPr/>
+        </p:nvSpPr>
+        <p:spPr>
+          <a:xfrm xmlns:a="http://schemas.openxmlformats.org/drawingml/2006/main">
+            <a:off x="10077450" y="4933950"/>
+            <a:ext cx="609600" cy="228600"/>
+          </a:xfrm>
+          <a:prstGeom xmlns:a="http://schemas.openxmlformats.org/drawingml/2006/main" prst="rect">
+            <a:avLst/>
+          </a:prstGeom>
+          <a:noFill xmlns:a="http://schemas.openxmlformats.org/drawingml/2006/main"/>
+          <a:ln xmlns:a="http://schemas.openxmlformats.org/drawingml/2006/main" w="0">
+            <a:noFill/>
+            <a:prstDash val="solid"/>
+          </a:ln>
+        </p:spPr>
+        <p:txBody>
+          <a:bodyPr xmlns:a="http://schemas.openxmlformats.org/drawingml/2006/main"/>
+          <a:lstStyle xmlns:a="http://schemas.openxmlformats.org/drawingml/2006/main"/>
+          <a:p xmlns:a="http://schemas.openxmlformats.org/drawingml/2006/main">
+            <a:pPr algn="ctr">
+              <a:defRPr sz="1050" b="1">
+                <a:solidFill>
+                  <a:srgbClr val="001B3A"/>
+                </a:solidFill>
+              </a:defRPr>
+            </a:pPr>
+            <a:r>
+              <a:rPr sz="1050" b="1">
+                <a:solidFill>
+                  <a:srgbClr val="001B3A"/>
+                </a:solidFill>
+              </a:rPr>
+              <a:t>MAG</a:t>
+            </a:r>
+          </a:p>
+        </p:txBody>
+      </p:sp>
+      <p:sp>
+        <p:nvSpPr>
+          <p:cNvPr id="59" name="">
+            <a:extLst xmlns:a="http://schemas.openxmlformats.org/drawingml/2006/main">
+              <a:ext uri="{FF2B5EF4-FFF2-40B4-BE49-F238E27FC236}">
+                <a16:creationId xmlns:a16="http://schemas.microsoft.com/office/drawing/2014/main" id="{F4610899-1914-4DC1-98A2-FF1BBEE2FABB}"/>
+              </a:ext>
+            </a:extLst>
+          </p:cNvPr>
+          <p:cNvSpPr>
+            <a:spLocks xmlns:a="http://schemas.openxmlformats.org/drawingml/2006/main" noGrp="1"/>
+          </p:cNvSpPr>
+          <p:nvPr/>
+        </p:nvSpPr>
+        <p:spPr>
+          <a:xfrm xmlns:a="http://schemas.openxmlformats.org/drawingml/2006/main">
+            <a:off x="1809750" y="6115050"/>
+            <a:ext cx="8572500" cy="228600"/>
+          </a:xfrm>
+          <a:prstGeom xmlns:a="http://schemas.openxmlformats.org/drawingml/2006/main" prst="rect">
+            <a:avLst/>
+          </a:prstGeom>
+          <a:noFill xmlns:a="http://schemas.openxmlformats.org/drawingml/2006/main"/>
+          <a:ln xmlns:a="http://schemas.openxmlformats.org/drawingml/2006/main" w="0">
+            <a:noFill/>
+            <a:prstDash val="solid"/>
+          </a:ln>
+        </p:spPr>
+        <p:txBody>
+          <a:bodyPr xmlns:a="http://schemas.openxmlformats.org/drawingml/2006/main"/>
+          <a:lstStyle xmlns:a="http://schemas.openxmlformats.org/drawingml/2006/main"/>
+          <a:p xmlns:a="http://schemas.openxmlformats.org/drawingml/2006/main">
+            <a:pPr algn="ctr">
+              <a:defRPr sz="1275" b="1">
+                <a:solidFill>
+                  <a:srgbClr val="001B3A"/>
+                </a:solidFill>
+              </a:defRPr>
+            </a:pPr>
+            <a:r>
+              <a:rPr sz="1275" b="1">
+                <a:solidFill>
+                  <a:srgbClr val="001B3A"/>
+                </a:solidFill>
+              </a:rPr>
+              <a:t>The controller corrects motor commands from one fused state estimate—not from any single raw sensor.</a:t>
             </a:r>
           </a:p>
         </p:txBody>
@@ -2918,7 +6306,7 @@
     </p:spTree>
     <p:extLst>
       <p:ext uri="{BB962C8B-B14F-4D97-AF65-F5344CB8AC3E}">
-        <p14:creationId xmlns:p14="http://schemas.microsoft.com/office/powerpoint/2010/main" val="2130555059"/>
+        <p14:creationId xmlns:p14="http://schemas.microsoft.com/office/powerpoint/2010/main" val="1818392459"/>
       </p:ext>
     </p:extLst>
   </p:cSld>
@@ -2946,7 +6334,7 @@
           <p:nvPr/>
         </p:nvPicPr>
         <p:blipFill>
-          <a:blip xmlns:r="http://schemas.openxmlformats.org/officeDocument/2006/relationships" xmlns:a="http://schemas.openxmlformats.org/drawingml/2006/main" r:embed="R2b8b1de27afa42e6"/>
+          <a:blip xmlns:r="http://schemas.openxmlformats.org/officeDocument/2006/relationships" xmlns:a="http://schemas.openxmlformats.org/drawingml/2006/main" r:embed="R65eef3fccc3f49fe"/>
           <a:srcRect xmlns:a="http://schemas.openxmlformats.org/drawingml/2006/main" l="0" t="0" r="0" b="0"/>
           <a:stretch xmlns:a="http://schemas.openxmlformats.org/drawingml/2006/main">
             <a:fillRect l="0" t="0" r="0" b="0"/>
@@ -2967,7 +6355,7 @@
           <p:cNvPr id="2" name="">
             <a:extLst xmlns:a="http://schemas.openxmlformats.org/drawingml/2006/main">
               <a:ext uri="{FF2B5EF4-FFF2-40B4-BE49-F238E27FC236}">
-                <a16:creationId xmlns:a16="http://schemas.microsoft.com/office/drawing/2014/main" id="{8F6E6B31-A9BA-4CA8-A8D4-423B22FD7B58}"/>
+                <a16:creationId xmlns:a16="http://schemas.microsoft.com/office/drawing/2014/main" id="{AC369ADF-AA29-455B-AFF6-D50AAA070F0E}"/>
               </a:ext>
             </a:extLst>
           </p:cNvPr>
@@ -3000,7 +6388,7 @@
           <p:cNvPr id="3" name="">
             <a:extLst xmlns:a="http://schemas.openxmlformats.org/drawingml/2006/main">
               <a:ext uri="{FF2B5EF4-FFF2-40B4-BE49-F238E27FC236}">
-                <a16:creationId xmlns:a16="http://schemas.microsoft.com/office/drawing/2014/main" id="{9768565B-7E65-49DE-A8D9-D13215D57E38}"/>
+                <a16:creationId xmlns:a16="http://schemas.microsoft.com/office/drawing/2014/main" id="{01B8971D-9458-4404-821A-7A58B4F247FC}"/>
               </a:ext>
             </a:extLst>
           </p:cNvPr>
@@ -3050,7 +6438,7 @@
           <p:cNvPr id="4" name="">
             <a:extLst xmlns:a="http://schemas.openxmlformats.org/drawingml/2006/main">
               <a:ext uri="{FF2B5EF4-FFF2-40B4-BE49-F238E27FC236}">
-                <a16:creationId xmlns:a16="http://schemas.microsoft.com/office/drawing/2014/main" id="{3127E8CC-3D97-4CEF-A7A0-4F163F214919}"/>
+                <a16:creationId xmlns:a16="http://schemas.microsoft.com/office/drawing/2014/main" id="{854C053B-7DC9-4926-B215-BFAA395E68B7}"/>
               </a:ext>
             </a:extLst>
           </p:cNvPr>
@@ -3083,7 +6471,7 @@
           <p:cNvPr id="5" name="">
             <a:extLst xmlns:a="http://schemas.openxmlformats.org/drawingml/2006/main">
               <a:ext uri="{FF2B5EF4-FFF2-40B4-BE49-F238E27FC236}">
-                <a16:creationId xmlns:a16="http://schemas.microsoft.com/office/drawing/2014/main" id="{A6971FAC-E39E-4895-83FA-605B7C6BA026}"/>
+                <a16:creationId xmlns:a16="http://schemas.microsoft.com/office/drawing/2014/main" id="{B2399D08-246D-4185-B8E0-D9531D0FF866}"/>
               </a:ext>
             </a:extLst>
           </p:cNvPr>
@@ -3131,7 +6519,7 @@
     </p:spTree>
     <p:extLst>
       <p:ext uri="{BB962C8B-B14F-4D97-AF65-F5344CB8AC3E}">
-        <p14:creationId xmlns:p14="http://schemas.microsoft.com/office/powerpoint/2010/main" val="664745608"/>
+        <p14:creationId xmlns:p14="http://schemas.microsoft.com/office/powerpoint/2010/main" val="1449450557"/>
       </p:ext>
     </p:extLst>
   </p:cSld>
@@ -3159,10 +6547,10 @@
       </p:grpSpPr>
       <p:sp>
         <p:nvSpPr>
-          <p:cNvPr id="39" name="">
-            <a:extLst xmlns:a="http://schemas.openxmlformats.org/drawingml/2006/main">
-              <a:ext uri="{FF2B5EF4-FFF2-40B4-BE49-F238E27FC236}">
-                <a16:creationId xmlns:a16="http://schemas.microsoft.com/office/drawing/2014/main" id="{EE5526B6-02A5-4277-9E9E-43B2409A899A}"/>
+          <p:cNvPr id="60" name="">
+            <a:extLst xmlns:a="http://schemas.openxmlformats.org/drawingml/2006/main">
+              <a:ext uri="{FF2B5EF4-FFF2-40B4-BE49-F238E27FC236}">
+                <a16:creationId xmlns:a16="http://schemas.microsoft.com/office/drawing/2014/main" id="{B81C767F-25CD-4080-90C5-527D93CFC5F9}"/>
               </a:ext>
             </a:extLst>
           </p:cNvPr>
@@ -3195,7 +6583,7 @@
           <p:cNvPr id="2" name="">
             <a:extLst xmlns:a="http://schemas.openxmlformats.org/drawingml/2006/main">
               <a:ext uri="{FF2B5EF4-FFF2-40B4-BE49-F238E27FC236}">
-                <a16:creationId xmlns:a16="http://schemas.microsoft.com/office/drawing/2014/main" id="{2A492D46-DC5D-40BA-BE63-89365AC0F8E2}"/>
+                <a16:creationId xmlns:a16="http://schemas.microsoft.com/office/drawing/2014/main" id="{695245B1-0452-403C-A695-677B16FBE3AE}"/>
               </a:ext>
             </a:extLst>
           </p:cNvPr>
@@ -3228,7 +6616,7 @@
           <p:cNvPr id="3" name="">
             <a:extLst xmlns:a="http://schemas.openxmlformats.org/drawingml/2006/main">
               <a:ext uri="{FF2B5EF4-FFF2-40B4-BE49-F238E27FC236}">
-                <a16:creationId xmlns:a16="http://schemas.microsoft.com/office/drawing/2014/main" id="{AE93FC5C-3C52-4792-825C-1E396A479698}"/>
+                <a16:creationId xmlns:a16="http://schemas.microsoft.com/office/drawing/2014/main" id="{9BB01C17-3874-4B85-8CC8-2CA2FF5B95E4}"/>
               </a:ext>
             </a:extLst>
           </p:cNvPr>
@@ -3278,7 +6666,7 @@
           <p:cNvPr id="4" name="">
             <a:extLst xmlns:a="http://schemas.openxmlformats.org/drawingml/2006/main">
               <a:ext uri="{FF2B5EF4-FFF2-40B4-BE49-F238E27FC236}">
-                <a16:creationId xmlns:a16="http://schemas.microsoft.com/office/drawing/2014/main" id="{5B9638C6-67E6-4832-A1FD-773DF4FC2B8E}"/>
+                <a16:creationId xmlns:a16="http://schemas.microsoft.com/office/drawing/2014/main" id="{B8D9C043-8015-4E8C-855D-EC73814BBFED}"/>
               </a:ext>
             </a:extLst>
           </p:cNvPr>
@@ -3328,7 +6716,7 @@
           <p:cNvPr id="5" name="">
             <a:extLst xmlns:a="http://schemas.openxmlformats.org/drawingml/2006/main">
               <a:ext uri="{FF2B5EF4-FFF2-40B4-BE49-F238E27FC236}">
-                <a16:creationId xmlns:a16="http://schemas.microsoft.com/office/drawing/2014/main" id="{B8F96AC8-BB72-4C46-B1E7-DA43D87F0EF1}"/>
+                <a16:creationId xmlns:a16="http://schemas.microsoft.com/office/drawing/2014/main" id="{0EE98CC7-6E74-4724-BC43-EA7B43C68338}"/>
               </a:ext>
             </a:extLst>
           </p:cNvPr>
@@ -3375,14 +6763,14 @@
       </p:sp>
       <p:pic>
         <p:nvPicPr>
-          <p:cNvPr id="44" name=""/>
+          <p:cNvPr id="65" name=""/>
           <p:cNvPicPr>
             <a:picLocks xmlns:a="http://schemas.openxmlformats.org/drawingml/2006/main" noChangeAspect="1"/>
           </p:cNvPicPr>
           <p:nvPr/>
         </p:nvPicPr>
         <p:blipFill>
-          <a:blip xmlns:r="http://schemas.openxmlformats.org/officeDocument/2006/relationships" xmlns:a="http://schemas.openxmlformats.org/drawingml/2006/main" r:embed="Rc999c3cdbbb54b06"/>
+          <a:blip xmlns:r="http://schemas.openxmlformats.org/officeDocument/2006/relationships" xmlns:a="http://schemas.openxmlformats.org/drawingml/2006/main" r:embed="Rf57d0932dc8743c0"/>
           <a:stretch xmlns:a="http://schemas.openxmlformats.org/drawingml/2006/main"/>
         </p:blipFill>
         <p:spPr>
@@ -3400,7 +6788,7 @@
           <p:cNvPr id="7" name="">
             <a:extLst xmlns:a="http://schemas.openxmlformats.org/drawingml/2006/main">
               <a:ext uri="{FF2B5EF4-FFF2-40B4-BE49-F238E27FC236}">
-                <a16:creationId xmlns:a16="http://schemas.microsoft.com/office/drawing/2014/main" id="{729AE7A0-2378-4DA2-9326-19716DB40A5D}"/>
+                <a16:creationId xmlns:a16="http://schemas.microsoft.com/office/drawing/2014/main" id="{94B11EA5-1E36-4BA6-AF8D-1D4344E54F21}"/>
               </a:ext>
             </a:extLst>
           </p:cNvPr>
@@ -3433,7 +6821,7 @@
           <p:cNvPr id="8" name="">
             <a:extLst xmlns:a="http://schemas.openxmlformats.org/drawingml/2006/main">
               <a:ext uri="{FF2B5EF4-FFF2-40B4-BE49-F238E27FC236}">
-                <a16:creationId xmlns:a16="http://schemas.microsoft.com/office/drawing/2014/main" id="{C5E9B1B7-F241-423D-B84A-F356FB05B1BD}"/>
+                <a16:creationId xmlns:a16="http://schemas.microsoft.com/office/drawing/2014/main" id="{783F905A-2D47-4348-A868-F03567FE793A}"/>
               </a:ext>
             </a:extLst>
           </p:cNvPr>
@@ -3483,7 +6871,7 @@
           <p:cNvPr id="9" name="">
             <a:extLst xmlns:a="http://schemas.openxmlformats.org/drawingml/2006/main">
               <a:ext uri="{FF2B5EF4-FFF2-40B4-BE49-F238E27FC236}">
-                <a16:creationId xmlns:a16="http://schemas.microsoft.com/office/drawing/2014/main" id="{B610FDEC-4159-41CB-9940-F5A2A28B6B84}"/>
+                <a16:creationId xmlns:a16="http://schemas.microsoft.com/office/drawing/2014/main" id="{805A1ED5-F9C7-413B-85B3-C0290BC886CC}"/>
               </a:ext>
             </a:extLst>
           </p:cNvPr>
@@ -3528,52 +6916,2040 @@
           </a:p>
         </p:txBody>
       </p:sp>
-      <p:pic>
-        <p:nvPicPr>
-          <p:cNvPr id="48" name=""/>
-          <p:cNvPicPr>
-            <a:picLocks xmlns:a="http://schemas.openxmlformats.org/drawingml/2006/main" noChangeAspect="1"/>
-          </p:cNvPicPr>
-          <p:nvPr/>
-        </p:nvPicPr>
-        <p:blipFill>
-          <a:blip xmlns:r="http://schemas.openxmlformats.org/officeDocument/2006/relationships" xmlns:a="http://schemas.openxmlformats.org/drawingml/2006/main" r:embed="R6ce2523428dd4659"/>
-          <a:stretch xmlns:a="http://schemas.openxmlformats.org/drawingml/2006/main"/>
-        </p:blipFill>
-        <p:spPr>
-          <a:xfrm xmlns:a="http://schemas.openxmlformats.org/drawingml/2006/main">
-            <a:off x="514350" y="1477963"/>
-            <a:ext cx="4953000" cy="3302000"/>
+      <p:sp>
+        <p:nvSpPr>
+          <p:cNvPr id="10" name="">
+            <a:extLst xmlns:a="http://schemas.openxmlformats.org/drawingml/2006/main">
+              <a:ext uri="{FF2B5EF4-FFF2-40B4-BE49-F238E27FC236}">
+                <a16:creationId xmlns:a16="http://schemas.microsoft.com/office/drawing/2014/main" id="{FD84B04F-0D23-4D1A-AE4D-9C41845426F1}"/>
+              </a:ext>
+            </a:extLst>
+          </p:cNvPr>
+          <p:cNvSpPr>
+            <a:spLocks xmlns:a="http://schemas.openxmlformats.org/drawingml/2006/main" noGrp="1"/>
+          </p:cNvSpPr>
+          <p:nvPr/>
+        </p:nvSpPr>
+        <p:spPr>
+          <a:xfrm xmlns:a="http://schemas.openxmlformats.org/drawingml/2006/main">
+            <a:off x="609600" y="2343150"/>
+            <a:ext cx="1524000" cy="304800"/>
           </a:xfrm>
           <a:prstGeom xmlns:a="http://schemas.openxmlformats.org/drawingml/2006/main" prst="roundRect">
             <a:avLst>
-              <a:gd name="adj" fmla="val 4611"/>
+              <a:gd name="adj" fmla="val 50000"/>
             </a:avLst>
           </a:prstGeom>
-        </p:spPr>
-      </p:pic>
+          <a:solidFill xmlns:a="http://schemas.openxmlformats.org/drawingml/2006/main">
+            <a:srgbClr val="008C95"/>
+          </a:solidFill>
+          <a:ln xmlns:a="http://schemas.openxmlformats.org/drawingml/2006/main" w="14288">
+            <a:solidFill>
+              <a:srgbClr val="008C95"/>
+            </a:solidFill>
+            <a:prstDash val="solid"/>
+          </a:ln>
+        </p:spPr>
+        <p:txBody>
+          <a:bodyPr xmlns:a="http://schemas.openxmlformats.org/drawingml/2006/main"/>
+          <a:lstStyle xmlns:a="http://schemas.openxmlformats.org/drawingml/2006/main"/>
+          <a:p xmlns:a="http://schemas.openxmlformats.org/drawingml/2006/main">
+            <a:pPr algn="ctr">
+              <a:defRPr sz="1050" b="1">
+                <a:solidFill>
+                  <a:srgbClr val="FFFFFF"/>
+                </a:solidFill>
+              </a:defRPr>
+            </a:pPr>
+            <a:r>
+              <a:rPr sz="1050" b="1">
+                <a:solidFill>
+                  <a:srgbClr val="FFFFFF"/>
+                </a:solidFill>
+              </a:rPr>
+              <a:t>FLIGHT PATH</a:t>
+            </a:r>
+          </a:p>
+        </p:txBody>
+      </p:sp>
       <p:sp>
         <p:nvSpPr>
           <p:cNvPr id="11" name="">
             <a:extLst xmlns:a="http://schemas.openxmlformats.org/drawingml/2006/main">
               <a:ext uri="{FF2B5EF4-FFF2-40B4-BE49-F238E27FC236}">
-                <a16:creationId xmlns:a16="http://schemas.microsoft.com/office/drawing/2014/main" id="{1DA56241-F1E0-41E4-A845-CE4976E531F3}"/>
-              </a:ext>
-            </a:extLst>
-          </p:cNvPr>
-          <p:cNvSpPr>
-            <a:spLocks xmlns:a="http://schemas.openxmlformats.org/drawingml/2006/main" noGrp="1"/>
-          </p:cNvSpPr>
-          <p:nvPr/>
-        </p:nvSpPr>
-        <p:spPr>
-          <a:xfrm xmlns:a="http://schemas.openxmlformats.org/drawingml/2006/main">
-            <a:off x="514350" y="5010150"/>
-            <a:ext cx="4953000" cy="781050"/>
+                <a16:creationId xmlns:a16="http://schemas.microsoft.com/office/drawing/2014/main" id="{88FBCAB2-EE6C-4C35-B1CD-FC257178A843}"/>
+              </a:ext>
+            </a:extLst>
+          </p:cNvPr>
+          <p:cNvSpPr>
+            <a:spLocks xmlns:a="http://schemas.openxmlformats.org/drawingml/2006/main" noGrp="1"/>
+          </p:cNvSpPr>
+          <p:nvPr/>
+        </p:nvSpPr>
+        <p:spPr>
+          <a:xfrm xmlns:a="http://schemas.openxmlformats.org/drawingml/2006/main">
+            <a:off x="2571750" y="1733550"/>
+            <a:ext cx="1924050" cy="1524000"/>
+          </a:xfrm>
+          <a:prstGeom xmlns:a="http://schemas.openxmlformats.org/drawingml/2006/main" prst="rect">
+            <a:avLst/>
+          </a:prstGeom>
+          <a:ln xmlns:a="http://schemas.openxmlformats.org/drawingml/2006/main" w="0">
+            <a:prstDash val="solid"/>
+          </a:ln>
+        </p:spPr>
+      </p:sp>
+      <p:sp>
+        <p:nvSpPr>
+          <p:cNvPr id="12" name="">
+            <a:extLst xmlns:a="http://schemas.openxmlformats.org/drawingml/2006/main">
+              <a:ext uri="{FF2B5EF4-FFF2-40B4-BE49-F238E27FC236}">
+                <a16:creationId xmlns:a16="http://schemas.microsoft.com/office/drawing/2014/main" id="{2DA2F39C-51BB-4E9C-B40A-0D28E1638041}"/>
+              </a:ext>
+            </a:extLst>
+          </p:cNvPr>
+          <p:cNvSpPr>
+            <a:spLocks xmlns:a="http://schemas.openxmlformats.org/drawingml/2006/main" noGrp="1"/>
+          </p:cNvSpPr>
+          <p:nvPr/>
+        </p:nvSpPr>
+        <p:spPr>
+          <a:xfrm xmlns:a="http://schemas.openxmlformats.org/drawingml/2006/main">
+            <a:off x="4838700" y="1733550"/>
+            <a:ext cx="1924050" cy="1524000"/>
+          </a:xfrm>
+          <a:prstGeom xmlns:a="http://schemas.openxmlformats.org/drawingml/2006/main" prst="rect">
+            <a:avLst/>
+          </a:prstGeom>
+          <a:ln xmlns:a="http://schemas.openxmlformats.org/drawingml/2006/main" w="0">
+            <a:prstDash val="solid"/>
+          </a:ln>
+        </p:spPr>
+      </p:sp>
+      <p:sp>
+        <p:nvSpPr>
+          <p:cNvPr id="13" name="">
+            <a:extLst xmlns:a="http://schemas.openxmlformats.org/drawingml/2006/main">
+              <a:ext uri="{FF2B5EF4-FFF2-40B4-BE49-F238E27FC236}">
+                <a16:creationId xmlns:a16="http://schemas.microsoft.com/office/drawing/2014/main" id="{3A306A70-8F75-4EE0-8AB2-780DF01F0F24}"/>
+              </a:ext>
+            </a:extLst>
+          </p:cNvPr>
+          <p:cNvSpPr>
+            <a:spLocks xmlns:a="http://schemas.openxmlformats.org/drawingml/2006/main" noGrp="1"/>
+          </p:cNvSpPr>
+          <p:nvPr/>
+        </p:nvSpPr>
+        <p:spPr>
+          <a:xfrm xmlns:a="http://schemas.openxmlformats.org/drawingml/2006/main">
+            <a:off x="7105650" y="1733550"/>
+            <a:ext cx="1924050" cy="1524000"/>
+          </a:xfrm>
+          <a:prstGeom xmlns:a="http://schemas.openxmlformats.org/drawingml/2006/main" prst="rect">
+            <a:avLst/>
+          </a:prstGeom>
+          <a:ln xmlns:a="http://schemas.openxmlformats.org/drawingml/2006/main" w="0">
+            <a:prstDash val="solid"/>
+          </a:ln>
+        </p:spPr>
+      </p:sp>
+      <p:sp>
+        <p:nvSpPr>
+          <p:cNvPr id="14" name="">
+            <a:extLst xmlns:a="http://schemas.openxmlformats.org/drawingml/2006/main">
+              <a:ext uri="{FF2B5EF4-FFF2-40B4-BE49-F238E27FC236}">
+                <a16:creationId xmlns:a16="http://schemas.microsoft.com/office/drawing/2014/main" id="{05953CEA-8534-4E09-B12A-3B8C45770CE5}"/>
+              </a:ext>
+            </a:extLst>
+          </p:cNvPr>
+          <p:cNvSpPr>
+            <a:spLocks xmlns:a="http://schemas.openxmlformats.org/drawingml/2006/main" noGrp="1"/>
+          </p:cNvSpPr>
+          <p:nvPr/>
+        </p:nvSpPr>
+        <p:spPr>
+          <a:xfrm xmlns:a="http://schemas.openxmlformats.org/drawingml/2006/main">
+            <a:off x="9372600" y="1733550"/>
+            <a:ext cx="1924050" cy="1524000"/>
+          </a:xfrm>
+          <a:prstGeom xmlns:a="http://schemas.openxmlformats.org/drawingml/2006/main" prst="rect">
+            <a:avLst/>
+          </a:prstGeom>
+          <a:ln xmlns:a="http://schemas.openxmlformats.org/drawingml/2006/main" w="0">
+            <a:prstDash val="solid"/>
+          </a:ln>
+        </p:spPr>
+      </p:sp>
+      <p:cxnSp>
+        <p:nvCxnSpPr>
+          <p:cNvPr id="74" name=""/>
+          <p:cNvCxnSpPr>
+            <a:stCxn xmlns:a="http://schemas.openxmlformats.org/drawingml/2006/main" id="11" idx="3"/>
+            <a:endCxn xmlns:a="http://schemas.openxmlformats.org/drawingml/2006/main" id="12" idx="1"/>
+          </p:cNvCxnSpPr>
+          <p:nvPr/>
+        </p:nvCxnSpPr>
+        <p:spPr>
+          <a:xfrm xmlns:a="http://schemas.openxmlformats.org/drawingml/2006/main">
+            <a:off x="4495800" y="2495550"/>
+            <a:ext cx="342900" cy="0"/>
+          </a:xfrm>
+          <a:prstGeom xmlns:a="http://schemas.openxmlformats.org/drawingml/2006/main" prst="straightConnector1">
+            <a:avLst/>
+          </a:prstGeom>
+          <a:ln xmlns:a="http://schemas.openxmlformats.org/drawingml/2006/main" w="38100">
+            <a:solidFill>
+              <a:srgbClr val="008C95"/>
+            </a:solidFill>
+            <a:prstDash val="solid"/>
+            <a:tailEnd type="triangle" w="med" len="med"/>
+          </a:ln>
+        </p:spPr>
+      </p:cxnSp>
+      <p:cxnSp>
+        <p:nvCxnSpPr>
+          <p:cNvPr id="75" name=""/>
+          <p:cNvCxnSpPr>
+            <a:stCxn xmlns:a="http://schemas.openxmlformats.org/drawingml/2006/main" id="12" idx="3"/>
+            <a:endCxn xmlns:a="http://schemas.openxmlformats.org/drawingml/2006/main" id="13" idx="1"/>
+          </p:cNvCxnSpPr>
+          <p:nvPr/>
+        </p:nvCxnSpPr>
+        <p:spPr>
+          <a:xfrm xmlns:a="http://schemas.openxmlformats.org/drawingml/2006/main">
+            <a:off x="6762750" y="2495550"/>
+            <a:ext cx="342900" cy="0"/>
+          </a:xfrm>
+          <a:prstGeom xmlns:a="http://schemas.openxmlformats.org/drawingml/2006/main" prst="straightConnector1">
+            <a:avLst/>
+          </a:prstGeom>
+          <a:ln xmlns:a="http://schemas.openxmlformats.org/drawingml/2006/main" w="38100">
+            <a:solidFill>
+              <a:srgbClr val="008C95"/>
+            </a:solidFill>
+            <a:prstDash val="solid"/>
+            <a:tailEnd type="triangle" w="med" len="med"/>
+          </a:ln>
+        </p:spPr>
+      </p:cxnSp>
+      <p:cxnSp>
+        <p:nvCxnSpPr>
+          <p:cNvPr id="76" name=""/>
+          <p:cNvCxnSpPr>
+            <a:stCxn xmlns:a="http://schemas.openxmlformats.org/drawingml/2006/main" id="13" idx="3"/>
+            <a:endCxn xmlns:a="http://schemas.openxmlformats.org/drawingml/2006/main" id="14" idx="1"/>
+          </p:cNvCxnSpPr>
+          <p:nvPr/>
+        </p:nvCxnSpPr>
+        <p:spPr>
+          <a:xfrm xmlns:a="http://schemas.openxmlformats.org/drawingml/2006/main">
+            <a:off x="9029700" y="2495550"/>
+            <a:ext cx="342900" cy="0"/>
+          </a:xfrm>
+          <a:prstGeom xmlns:a="http://schemas.openxmlformats.org/drawingml/2006/main" prst="straightConnector1">
+            <a:avLst/>
+          </a:prstGeom>
+          <a:ln xmlns:a="http://schemas.openxmlformats.org/drawingml/2006/main" w="38100">
+            <a:solidFill>
+              <a:srgbClr val="008C95"/>
+            </a:solidFill>
+            <a:prstDash val="solid"/>
+            <a:tailEnd type="triangle" w="med" len="med"/>
+          </a:ln>
+        </p:spPr>
+      </p:cxnSp>
+      <p:sp>
+        <p:nvSpPr>
+          <p:cNvPr id="18" name="">
+            <a:extLst xmlns:a="http://schemas.openxmlformats.org/drawingml/2006/main">
+              <a:ext uri="{FF2B5EF4-FFF2-40B4-BE49-F238E27FC236}">
+                <a16:creationId xmlns:a16="http://schemas.microsoft.com/office/drawing/2014/main" id="{B71305AA-2F03-43EA-9850-70239ABBE329}"/>
+              </a:ext>
+            </a:extLst>
+          </p:cNvPr>
+          <p:cNvSpPr>
+            <a:spLocks xmlns:a="http://schemas.openxmlformats.org/drawingml/2006/main" noGrp="1"/>
+          </p:cNvSpPr>
+          <p:nvPr/>
+        </p:nvSpPr>
+        <p:spPr>
+          <a:xfrm xmlns:a="http://schemas.openxmlformats.org/drawingml/2006/main">
+            <a:off x="2571750" y="1733550"/>
+            <a:ext cx="1924050" cy="1524000"/>
           </a:xfrm>
           <a:prstGeom xmlns:a="http://schemas.openxmlformats.org/drawingml/2006/main" prst="roundRect">
             <a:avLst>
-              <a:gd name="adj" fmla="val 14634"/>
+              <a:gd name="adj" fmla="val 7500"/>
+            </a:avLst>
+          </a:prstGeom>
+          <a:solidFill xmlns:a="http://schemas.openxmlformats.org/drawingml/2006/main">
+            <a:srgbClr val="FFFFFF"/>
+          </a:solidFill>
+          <a:ln xmlns:a="http://schemas.openxmlformats.org/drawingml/2006/main" w="14288">
+            <a:solidFill>
+              <a:srgbClr val="B9CDD5"/>
+            </a:solidFill>
+            <a:prstDash val="solid"/>
+          </a:ln>
+        </p:spPr>
+      </p:sp>
+      <p:sp>
+        <p:nvSpPr>
+          <p:cNvPr id="19" name="">
+            <a:extLst xmlns:a="http://schemas.openxmlformats.org/drawingml/2006/main">
+              <a:ext uri="{FF2B5EF4-FFF2-40B4-BE49-F238E27FC236}">
+                <a16:creationId xmlns:a16="http://schemas.microsoft.com/office/drawing/2014/main" id="{F79FFF5C-804D-491A-8D73-DE3872607286}"/>
+              </a:ext>
+            </a:extLst>
+          </p:cNvPr>
+          <p:cNvSpPr>
+            <a:spLocks xmlns:a="http://schemas.openxmlformats.org/drawingml/2006/main" noGrp="1"/>
+          </p:cNvSpPr>
+          <p:nvPr/>
+        </p:nvSpPr>
+        <p:spPr>
+          <a:xfrm xmlns:a="http://schemas.openxmlformats.org/drawingml/2006/main">
+            <a:off x="2724150" y="1866900"/>
+            <a:ext cx="476250" cy="304800"/>
+          </a:xfrm>
+          <a:prstGeom xmlns:a="http://schemas.openxmlformats.org/drawingml/2006/main" prst="roundRect">
+            <a:avLst>
+              <a:gd name="adj" fmla="val 50000"/>
+            </a:avLst>
+          </a:prstGeom>
+          <a:solidFill xmlns:a="http://schemas.openxmlformats.org/drawingml/2006/main">
+            <a:srgbClr val="008C95"/>
+          </a:solidFill>
+          <a:ln xmlns:a="http://schemas.openxmlformats.org/drawingml/2006/main" w="14288">
+            <a:solidFill>
+              <a:srgbClr val="008C95"/>
+            </a:solidFill>
+            <a:prstDash val="solid"/>
+          </a:ln>
+        </p:spPr>
+        <p:txBody>
+          <a:bodyPr xmlns:a="http://schemas.openxmlformats.org/drawingml/2006/main"/>
+          <a:lstStyle xmlns:a="http://schemas.openxmlformats.org/drawingml/2006/main"/>
+          <a:p xmlns:a="http://schemas.openxmlformats.org/drawingml/2006/main">
+            <a:pPr algn="ctr">
+              <a:defRPr sz="1050" b="1">
+                <a:solidFill>
+                  <a:srgbClr val="FFFFFF"/>
+                </a:solidFill>
+              </a:defRPr>
+            </a:pPr>
+            <a:r>
+              <a:rPr sz="1050" b="1">
+                <a:solidFill>
+                  <a:srgbClr val="FFFFFF"/>
+                </a:solidFill>
+              </a:rPr>
+              <a:t>01</a:t>
+            </a:r>
+          </a:p>
+        </p:txBody>
+      </p:sp>
+      <p:sp>
+        <p:nvSpPr>
+          <p:cNvPr id="20" name="">
+            <a:extLst xmlns:a="http://schemas.openxmlformats.org/drawingml/2006/main">
+              <a:ext uri="{FF2B5EF4-FFF2-40B4-BE49-F238E27FC236}">
+                <a16:creationId xmlns:a16="http://schemas.microsoft.com/office/drawing/2014/main" id="{525D7447-8752-46FA-804A-FA99D74184B4}"/>
+              </a:ext>
+            </a:extLst>
+          </p:cNvPr>
+          <p:cNvSpPr>
+            <a:spLocks xmlns:a="http://schemas.openxmlformats.org/drawingml/2006/main" noGrp="1"/>
+          </p:cNvSpPr>
+          <p:nvPr/>
+        </p:nvSpPr>
+        <p:spPr>
+          <a:xfrm xmlns:a="http://schemas.openxmlformats.org/drawingml/2006/main">
+            <a:off x="2743200" y="2266950"/>
+            <a:ext cx="1581150" cy="428625"/>
+          </a:xfrm>
+          <a:prstGeom xmlns:a="http://schemas.openxmlformats.org/drawingml/2006/main" prst="rect">
+            <a:avLst/>
+          </a:prstGeom>
+          <a:noFill xmlns:a="http://schemas.openxmlformats.org/drawingml/2006/main"/>
+          <a:ln xmlns:a="http://schemas.openxmlformats.org/drawingml/2006/main" w="0">
+            <a:noFill/>
+            <a:prstDash val="solid"/>
+          </a:ln>
+        </p:spPr>
+        <p:txBody>
+          <a:bodyPr xmlns:a="http://schemas.openxmlformats.org/drawingml/2006/main"/>
+          <a:lstStyle xmlns:a="http://schemas.openxmlformats.org/drawingml/2006/main"/>
+          <a:p xmlns:a="http://schemas.openxmlformats.org/drawingml/2006/main">
+            <a:pPr>
+              <a:defRPr sz="1350" b="1">
+                <a:solidFill>
+                  <a:srgbClr val="001B3A"/>
+                </a:solidFill>
+              </a:defRPr>
+            </a:pPr>
+            <a:r>
+              <a:rPr sz="1350" b="1">
+                <a:solidFill>
+                  <a:srgbClr val="001B3A"/>
+                </a:solidFill>
+              </a:rPr>
+              <a:t>Program</a:t>
+            </a:r>
+          </a:p>
+        </p:txBody>
+      </p:sp>
+      <p:sp>
+        <p:nvSpPr>
+          <p:cNvPr id="21" name="">
+            <a:extLst xmlns:a="http://schemas.openxmlformats.org/drawingml/2006/main">
+              <a:ext uri="{FF2B5EF4-FFF2-40B4-BE49-F238E27FC236}">
+                <a16:creationId xmlns:a16="http://schemas.microsoft.com/office/drawing/2014/main" id="{BDDE8130-4970-412C-9B85-AB8DC19BF990}"/>
+              </a:ext>
+            </a:extLst>
+          </p:cNvPr>
+          <p:cNvSpPr>
+            <a:spLocks xmlns:a="http://schemas.openxmlformats.org/drawingml/2006/main" noGrp="1"/>
+          </p:cNvSpPr>
+          <p:nvPr/>
+        </p:nvSpPr>
+        <p:spPr>
+          <a:xfrm xmlns:a="http://schemas.openxmlformats.org/drawingml/2006/main">
+            <a:off x="2743200" y="2762250"/>
+            <a:ext cx="1581150" cy="428625"/>
+          </a:xfrm>
+          <a:prstGeom xmlns:a="http://schemas.openxmlformats.org/drawingml/2006/main" prst="rect">
+            <a:avLst/>
+          </a:prstGeom>
+          <a:noFill xmlns:a="http://schemas.openxmlformats.org/drawingml/2006/main"/>
+          <a:ln xmlns:a="http://schemas.openxmlformats.org/drawingml/2006/main" w="0">
+            <a:noFill/>
+            <a:prstDash val="solid"/>
+          </a:ln>
+        </p:spPr>
+        <p:txBody>
+          <a:bodyPr xmlns:a="http://schemas.openxmlformats.org/drawingml/2006/main"/>
+          <a:lstStyle xmlns:a="http://schemas.openxmlformats.org/drawingml/2006/main"/>
+          <a:p xmlns:a="http://schemas.openxmlformats.org/drawingml/2006/main">
+            <a:pPr>
+              <a:defRPr sz="975">
+                <a:solidFill>
+                  <a:srgbClr val="536A7B"/>
+                </a:solidFill>
+              </a:defRPr>
+            </a:pPr>
+            <a:r>
+              <a:rPr sz="975">
+                <a:solidFill>
+                  <a:srgbClr val="536A7B"/>
+                </a:solidFill>
+              </a:rPr>
+              <a:t>Flight command or state request.</a:t>
+            </a:r>
+          </a:p>
+        </p:txBody>
+      </p:sp>
+      <p:sp>
+        <p:nvSpPr>
+          <p:cNvPr id="22" name="">
+            <a:extLst xmlns:a="http://schemas.openxmlformats.org/drawingml/2006/main">
+              <a:ext uri="{FF2B5EF4-FFF2-40B4-BE49-F238E27FC236}">
+                <a16:creationId xmlns:a16="http://schemas.microsoft.com/office/drawing/2014/main" id="{372028B3-8DBD-4990-9484-09F6E6259E09}"/>
+              </a:ext>
+            </a:extLst>
+          </p:cNvPr>
+          <p:cNvSpPr>
+            <a:spLocks xmlns:a="http://schemas.openxmlformats.org/drawingml/2006/main" noGrp="1"/>
+          </p:cNvSpPr>
+          <p:nvPr/>
+        </p:nvSpPr>
+        <p:spPr>
+          <a:xfrm xmlns:a="http://schemas.openxmlformats.org/drawingml/2006/main">
+            <a:off x="4838700" y="1733550"/>
+            <a:ext cx="1924050" cy="1524000"/>
+          </a:xfrm>
+          <a:prstGeom xmlns:a="http://schemas.openxmlformats.org/drawingml/2006/main" prst="roundRect">
+            <a:avLst>
+              <a:gd name="adj" fmla="val 7500"/>
+            </a:avLst>
+          </a:prstGeom>
+          <a:solidFill xmlns:a="http://schemas.openxmlformats.org/drawingml/2006/main">
+            <a:srgbClr val="DDF2F1"/>
+          </a:solidFill>
+          <a:ln xmlns:a="http://schemas.openxmlformats.org/drawingml/2006/main" w="14288">
+            <a:solidFill>
+              <a:srgbClr val="B9CDD5"/>
+            </a:solidFill>
+            <a:prstDash val="solid"/>
+          </a:ln>
+        </p:spPr>
+      </p:sp>
+      <p:sp>
+        <p:nvSpPr>
+          <p:cNvPr id="23" name="">
+            <a:extLst xmlns:a="http://schemas.openxmlformats.org/drawingml/2006/main">
+              <a:ext uri="{FF2B5EF4-FFF2-40B4-BE49-F238E27FC236}">
+                <a16:creationId xmlns:a16="http://schemas.microsoft.com/office/drawing/2014/main" id="{B89915B7-ED85-4906-951A-730CE53B3CDD}"/>
+              </a:ext>
+            </a:extLst>
+          </p:cNvPr>
+          <p:cNvSpPr>
+            <a:spLocks xmlns:a="http://schemas.openxmlformats.org/drawingml/2006/main" noGrp="1"/>
+          </p:cNvSpPr>
+          <p:nvPr/>
+        </p:nvSpPr>
+        <p:spPr>
+          <a:xfrm xmlns:a="http://schemas.openxmlformats.org/drawingml/2006/main">
+            <a:off x="4991100" y="1866900"/>
+            <a:ext cx="476250" cy="304800"/>
+          </a:xfrm>
+          <a:prstGeom xmlns:a="http://schemas.openxmlformats.org/drawingml/2006/main" prst="roundRect">
+            <a:avLst>
+              <a:gd name="adj" fmla="val 50000"/>
+            </a:avLst>
+          </a:prstGeom>
+          <a:solidFill xmlns:a="http://schemas.openxmlformats.org/drawingml/2006/main">
+            <a:srgbClr val="008C95"/>
+          </a:solidFill>
+          <a:ln xmlns:a="http://schemas.openxmlformats.org/drawingml/2006/main" w="14288">
+            <a:solidFill>
+              <a:srgbClr val="008C95"/>
+            </a:solidFill>
+            <a:prstDash val="solid"/>
+          </a:ln>
+        </p:spPr>
+        <p:txBody>
+          <a:bodyPr xmlns:a="http://schemas.openxmlformats.org/drawingml/2006/main"/>
+          <a:lstStyle xmlns:a="http://schemas.openxmlformats.org/drawingml/2006/main"/>
+          <a:p xmlns:a="http://schemas.openxmlformats.org/drawingml/2006/main">
+            <a:pPr algn="ctr">
+              <a:defRPr sz="1050" b="1">
+                <a:solidFill>
+                  <a:srgbClr val="FFFFFF"/>
+                </a:solidFill>
+              </a:defRPr>
+            </a:pPr>
+            <a:r>
+              <a:rPr sz="1050" b="1">
+                <a:solidFill>
+                  <a:srgbClr val="FFFFFF"/>
+                </a:solidFill>
+              </a:rPr>
+              <a:t>02</a:t>
+            </a:r>
+          </a:p>
+        </p:txBody>
+      </p:sp>
+      <p:sp>
+        <p:nvSpPr>
+          <p:cNvPr id="24" name="">
+            <a:extLst xmlns:a="http://schemas.openxmlformats.org/drawingml/2006/main">
+              <a:ext uri="{FF2B5EF4-FFF2-40B4-BE49-F238E27FC236}">
+                <a16:creationId xmlns:a16="http://schemas.microsoft.com/office/drawing/2014/main" id="{B5B8436F-A9C8-4C43-A070-C1F2B5AB4056}"/>
+              </a:ext>
+            </a:extLst>
+          </p:cNvPr>
+          <p:cNvSpPr>
+            <a:spLocks xmlns:a="http://schemas.openxmlformats.org/drawingml/2006/main" noGrp="1"/>
+          </p:cNvSpPr>
+          <p:nvPr/>
+        </p:nvSpPr>
+        <p:spPr>
+          <a:xfrm xmlns:a="http://schemas.openxmlformats.org/drawingml/2006/main">
+            <a:off x="5010150" y="2266950"/>
+            <a:ext cx="1581150" cy="428625"/>
+          </a:xfrm>
+          <a:prstGeom xmlns:a="http://schemas.openxmlformats.org/drawingml/2006/main" prst="rect">
+            <a:avLst/>
+          </a:prstGeom>
+          <a:noFill xmlns:a="http://schemas.openxmlformats.org/drawingml/2006/main"/>
+          <a:ln xmlns:a="http://schemas.openxmlformats.org/drawingml/2006/main" w="0">
+            <a:noFill/>
+            <a:prstDash val="solid"/>
+          </a:ln>
+        </p:spPr>
+        <p:txBody>
+          <a:bodyPr xmlns:a="http://schemas.openxmlformats.org/drawingml/2006/main"/>
+          <a:lstStyle xmlns:a="http://schemas.openxmlformats.org/drawingml/2006/main"/>
+          <a:p xmlns:a="http://schemas.openxmlformats.org/drawingml/2006/main">
+            <a:pPr>
+              <a:defRPr sz="1350" b="1">
+                <a:solidFill>
+                  <a:srgbClr val="001B3A"/>
+                </a:solidFill>
+              </a:defRPr>
+            </a:pPr>
+            <a:r>
+              <a:rPr sz="1350" b="1">
+                <a:solidFill>
+                  <a:srgbClr val="001B3A"/>
+                </a:solidFill>
+              </a:rPr>
+              <a:t>Bluetooth</a:t>
+            </a:r>
+          </a:p>
+        </p:txBody>
+      </p:sp>
+      <p:sp>
+        <p:nvSpPr>
+          <p:cNvPr id="25" name="">
+            <a:extLst xmlns:a="http://schemas.openxmlformats.org/drawingml/2006/main">
+              <a:ext uri="{FF2B5EF4-FFF2-40B4-BE49-F238E27FC236}">
+                <a16:creationId xmlns:a16="http://schemas.microsoft.com/office/drawing/2014/main" id="{17962672-49B2-444D-AF88-E26D83157C2C}"/>
+              </a:ext>
+            </a:extLst>
+          </p:cNvPr>
+          <p:cNvSpPr>
+            <a:spLocks xmlns:a="http://schemas.openxmlformats.org/drawingml/2006/main" noGrp="1"/>
+          </p:cNvSpPr>
+          <p:nvPr/>
+        </p:nvSpPr>
+        <p:spPr>
+          <a:xfrm xmlns:a="http://schemas.openxmlformats.org/drawingml/2006/main">
+            <a:off x="5010150" y="2762250"/>
+            <a:ext cx="1581150" cy="428625"/>
+          </a:xfrm>
+          <a:prstGeom xmlns:a="http://schemas.openxmlformats.org/drawingml/2006/main" prst="rect">
+            <a:avLst/>
+          </a:prstGeom>
+          <a:noFill xmlns:a="http://schemas.openxmlformats.org/drawingml/2006/main"/>
+          <a:ln xmlns:a="http://schemas.openxmlformats.org/drawingml/2006/main" w="0">
+            <a:noFill/>
+            <a:prstDash val="solid"/>
+          </a:ln>
+        </p:spPr>
+        <p:txBody>
+          <a:bodyPr xmlns:a="http://schemas.openxmlformats.org/drawingml/2006/main"/>
+          <a:lstStyle xmlns:a="http://schemas.openxmlformats.org/drawingml/2006/main"/>
+          <a:p xmlns:a="http://schemas.openxmlformats.org/drawingml/2006/main">
+            <a:pPr>
+              <a:defRPr sz="975">
+                <a:solidFill>
+                  <a:srgbClr val="536A7B"/>
+                </a:solidFill>
+              </a:defRPr>
+            </a:pPr>
+            <a:r>
+              <a:rPr sz="975">
+                <a:solidFill>
+                  <a:srgbClr val="536A7B"/>
+                </a:solidFill>
+              </a:rPr>
+              <a:t>Low-rate command and telemetry link.</a:t>
+            </a:r>
+          </a:p>
+        </p:txBody>
+      </p:sp>
+      <p:sp>
+        <p:nvSpPr>
+          <p:cNvPr id="26" name="">
+            <a:extLst xmlns:a="http://schemas.openxmlformats.org/drawingml/2006/main">
+              <a:ext uri="{FF2B5EF4-FFF2-40B4-BE49-F238E27FC236}">
+                <a16:creationId xmlns:a16="http://schemas.microsoft.com/office/drawing/2014/main" id="{C178E183-DFF9-4C0E-B547-F3B7B53D03D3}"/>
+              </a:ext>
+            </a:extLst>
+          </p:cNvPr>
+          <p:cNvSpPr>
+            <a:spLocks xmlns:a="http://schemas.openxmlformats.org/drawingml/2006/main" noGrp="1"/>
+          </p:cNvSpPr>
+          <p:nvPr/>
+        </p:nvSpPr>
+        <p:spPr>
+          <a:xfrm xmlns:a="http://schemas.openxmlformats.org/drawingml/2006/main">
+            <a:off x="7105650" y="1733550"/>
+            <a:ext cx="1924050" cy="1524000"/>
+          </a:xfrm>
+          <a:prstGeom xmlns:a="http://schemas.openxmlformats.org/drawingml/2006/main" prst="roundRect">
+            <a:avLst>
+              <a:gd name="adj" fmla="val 7500"/>
+            </a:avLst>
+          </a:prstGeom>
+          <a:solidFill xmlns:a="http://schemas.openxmlformats.org/drawingml/2006/main">
+            <a:srgbClr val="FFFFFF"/>
+          </a:solidFill>
+          <a:ln xmlns:a="http://schemas.openxmlformats.org/drawingml/2006/main" w="14288">
+            <a:solidFill>
+              <a:srgbClr val="B9CDD5"/>
+            </a:solidFill>
+            <a:prstDash val="solid"/>
+          </a:ln>
+        </p:spPr>
+      </p:sp>
+      <p:sp>
+        <p:nvSpPr>
+          <p:cNvPr id="27" name="">
+            <a:extLst xmlns:a="http://schemas.openxmlformats.org/drawingml/2006/main">
+              <a:ext uri="{FF2B5EF4-FFF2-40B4-BE49-F238E27FC236}">
+                <a16:creationId xmlns:a16="http://schemas.microsoft.com/office/drawing/2014/main" id="{B6C4E2DB-D5DD-4B84-8C20-26B1C129F76E}"/>
+              </a:ext>
+            </a:extLst>
+          </p:cNvPr>
+          <p:cNvSpPr>
+            <a:spLocks xmlns:a="http://schemas.openxmlformats.org/drawingml/2006/main" noGrp="1"/>
+          </p:cNvSpPr>
+          <p:nvPr/>
+        </p:nvSpPr>
+        <p:spPr>
+          <a:xfrm xmlns:a="http://schemas.openxmlformats.org/drawingml/2006/main">
+            <a:off x="7258050" y="1866900"/>
+            <a:ext cx="476250" cy="304800"/>
+          </a:xfrm>
+          <a:prstGeom xmlns:a="http://schemas.openxmlformats.org/drawingml/2006/main" prst="roundRect">
+            <a:avLst>
+              <a:gd name="adj" fmla="val 50000"/>
+            </a:avLst>
+          </a:prstGeom>
+          <a:solidFill xmlns:a="http://schemas.openxmlformats.org/drawingml/2006/main">
+            <a:srgbClr val="008C95"/>
+          </a:solidFill>
+          <a:ln xmlns:a="http://schemas.openxmlformats.org/drawingml/2006/main" w="14288">
+            <a:solidFill>
+              <a:srgbClr val="008C95"/>
+            </a:solidFill>
+            <a:prstDash val="solid"/>
+          </a:ln>
+        </p:spPr>
+        <p:txBody>
+          <a:bodyPr xmlns:a="http://schemas.openxmlformats.org/drawingml/2006/main"/>
+          <a:lstStyle xmlns:a="http://schemas.openxmlformats.org/drawingml/2006/main"/>
+          <a:p xmlns:a="http://schemas.openxmlformats.org/drawingml/2006/main">
+            <a:pPr algn="ctr">
+              <a:defRPr sz="1050" b="1">
+                <a:solidFill>
+                  <a:srgbClr val="FFFFFF"/>
+                </a:solidFill>
+              </a:defRPr>
+            </a:pPr>
+            <a:r>
+              <a:rPr sz="1050" b="1">
+                <a:solidFill>
+                  <a:srgbClr val="FFFFFF"/>
+                </a:solidFill>
+              </a:rPr>
+              <a:t>03</a:t>
+            </a:r>
+          </a:p>
+        </p:txBody>
+      </p:sp>
+      <p:sp>
+        <p:nvSpPr>
+          <p:cNvPr id="28" name="">
+            <a:extLst xmlns:a="http://schemas.openxmlformats.org/drawingml/2006/main">
+              <a:ext uri="{FF2B5EF4-FFF2-40B4-BE49-F238E27FC236}">
+                <a16:creationId xmlns:a16="http://schemas.microsoft.com/office/drawing/2014/main" id="{22245727-1D61-4337-A996-23AAC6F23A26}"/>
+              </a:ext>
+            </a:extLst>
+          </p:cNvPr>
+          <p:cNvSpPr>
+            <a:spLocks xmlns:a="http://schemas.openxmlformats.org/drawingml/2006/main" noGrp="1"/>
+          </p:cNvSpPr>
+          <p:nvPr/>
+        </p:nvSpPr>
+        <p:spPr>
+          <a:xfrm xmlns:a="http://schemas.openxmlformats.org/drawingml/2006/main">
+            <a:off x="7277100" y="2266950"/>
+            <a:ext cx="1581150" cy="428625"/>
+          </a:xfrm>
+          <a:prstGeom xmlns:a="http://schemas.openxmlformats.org/drawingml/2006/main" prst="rect">
+            <a:avLst/>
+          </a:prstGeom>
+          <a:noFill xmlns:a="http://schemas.openxmlformats.org/drawingml/2006/main"/>
+          <a:ln xmlns:a="http://schemas.openxmlformats.org/drawingml/2006/main" w="0">
+            <a:noFill/>
+            <a:prstDash val="solid"/>
+          </a:ln>
+        </p:spPr>
+        <p:txBody>
+          <a:bodyPr xmlns:a="http://schemas.openxmlformats.org/drawingml/2006/main"/>
+          <a:lstStyle xmlns:a="http://schemas.openxmlformats.org/drawingml/2006/main"/>
+          <a:p xmlns:a="http://schemas.openxmlformats.org/drawingml/2006/main">
+            <a:pPr>
+              <a:defRPr sz="1350" b="1">
+                <a:solidFill>
+                  <a:srgbClr val="001B3A"/>
+                </a:solidFill>
+              </a:defRPr>
+            </a:pPr>
+            <a:r>
+              <a:rPr sz="1350" b="1">
+                <a:solidFill>
+                  <a:srgbClr val="001B3A"/>
+                </a:solidFill>
+              </a:rPr>
+              <a:t>Flight controller</a:t>
+            </a:r>
+          </a:p>
+        </p:txBody>
+      </p:sp>
+      <p:sp>
+        <p:nvSpPr>
+          <p:cNvPr id="29" name="">
+            <a:extLst xmlns:a="http://schemas.openxmlformats.org/drawingml/2006/main">
+              <a:ext uri="{FF2B5EF4-FFF2-40B4-BE49-F238E27FC236}">
+                <a16:creationId xmlns:a16="http://schemas.microsoft.com/office/drawing/2014/main" id="{8B4D65DB-760E-429B-B67E-36E4BBFE0008}"/>
+              </a:ext>
+            </a:extLst>
+          </p:cNvPr>
+          <p:cNvSpPr>
+            <a:spLocks xmlns:a="http://schemas.openxmlformats.org/drawingml/2006/main" noGrp="1"/>
+          </p:cNvSpPr>
+          <p:nvPr/>
+        </p:nvSpPr>
+        <p:spPr>
+          <a:xfrm xmlns:a="http://schemas.openxmlformats.org/drawingml/2006/main">
+            <a:off x="7277100" y="2762250"/>
+            <a:ext cx="1581150" cy="428625"/>
+          </a:xfrm>
+          <a:prstGeom xmlns:a="http://schemas.openxmlformats.org/drawingml/2006/main" prst="rect">
+            <a:avLst/>
+          </a:prstGeom>
+          <a:noFill xmlns:a="http://schemas.openxmlformats.org/drawingml/2006/main"/>
+          <a:ln xmlns:a="http://schemas.openxmlformats.org/drawingml/2006/main" w="0">
+            <a:noFill/>
+            <a:prstDash val="solid"/>
+          </a:ln>
+        </p:spPr>
+        <p:txBody>
+          <a:bodyPr xmlns:a="http://schemas.openxmlformats.org/drawingml/2006/main"/>
+          <a:lstStyle xmlns:a="http://schemas.openxmlformats.org/drawingml/2006/main"/>
+          <a:p xmlns:a="http://schemas.openxmlformats.org/drawingml/2006/main">
+            <a:pPr>
+              <a:defRPr sz="975">
+                <a:solidFill>
+                  <a:srgbClr val="536A7B"/>
+                </a:solidFill>
+              </a:defRPr>
+            </a:pPr>
+            <a:r>
+              <a:rPr sz="975">
+                <a:solidFill>
+                  <a:srgbClr val="536A7B"/>
+                </a:solidFill>
+              </a:rPr>
+              <a:t>Closes the fast onboard control loops.</a:t>
+            </a:r>
+          </a:p>
+        </p:txBody>
+      </p:sp>
+      <p:sp>
+        <p:nvSpPr>
+          <p:cNvPr id="30" name="">
+            <a:extLst xmlns:a="http://schemas.openxmlformats.org/drawingml/2006/main">
+              <a:ext uri="{FF2B5EF4-FFF2-40B4-BE49-F238E27FC236}">
+                <a16:creationId xmlns:a16="http://schemas.microsoft.com/office/drawing/2014/main" id="{F971F976-3E0A-4221-948F-6293C5B20BC1}"/>
+              </a:ext>
+            </a:extLst>
+          </p:cNvPr>
+          <p:cNvSpPr>
+            <a:spLocks xmlns:a="http://schemas.openxmlformats.org/drawingml/2006/main" noGrp="1"/>
+          </p:cNvSpPr>
+          <p:nvPr/>
+        </p:nvSpPr>
+        <p:spPr>
+          <a:xfrm xmlns:a="http://schemas.openxmlformats.org/drawingml/2006/main">
+            <a:off x="9372600" y="1733550"/>
+            <a:ext cx="1924050" cy="1524000"/>
+          </a:xfrm>
+          <a:prstGeom xmlns:a="http://schemas.openxmlformats.org/drawingml/2006/main" prst="roundRect">
+            <a:avLst>
+              <a:gd name="adj" fmla="val 7500"/>
+            </a:avLst>
+          </a:prstGeom>
+          <a:solidFill xmlns:a="http://schemas.openxmlformats.org/drawingml/2006/main">
+            <a:srgbClr val="001B3A"/>
+          </a:solidFill>
+          <a:ln xmlns:a="http://schemas.openxmlformats.org/drawingml/2006/main" w="14288">
+            <a:solidFill>
+              <a:srgbClr val="001B3A"/>
+            </a:solidFill>
+            <a:prstDash val="solid"/>
+          </a:ln>
+        </p:spPr>
+      </p:sp>
+      <p:sp>
+        <p:nvSpPr>
+          <p:cNvPr id="31" name="">
+            <a:extLst xmlns:a="http://schemas.openxmlformats.org/drawingml/2006/main">
+              <a:ext uri="{FF2B5EF4-FFF2-40B4-BE49-F238E27FC236}">
+                <a16:creationId xmlns:a16="http://schemas.microsoft.com/office/drawing/2014/main" id="{359212DE-FE94-4685-8587-3455D6840B68}"/>
+              </a:ext>
+            </a:extLst>
+          </p:cNvPr>
+          <p:cNvSpPr>
+            <a:spLocks xmlns:a="http://schemas.openxmlformats.org/drawingml/2006/main" noGrp="1"/>
+          </p:cNvSpPr>
+          <p:nvPr/>
+        </p:nvSpPr>
+        <p:spPr>
+          <a:xfrm xmlns:a="http://schemas.openxmlformats.org/drawingml/2006/main">
+            <a:off x="9525000" y="1866900"/>
+            <a:ext cx="476250" cy="304800"/>
+          </a:xfrm>
+          <a:prstGeom xmlns:a="http://schemas.openxmlformats.org/drawingml/2006/main" prst="roundRect">
+            <a:avLst>
+              <a:gd name="adj" fmla="val 50000"/>
+            </a:avLst>
+          </a:prstGeom>
+          <a:solidFill xmlns:a="http://schemas.openxmlformats.org/drawingml/2006/main">
+            <a:srgbClr val="C9A227"/>
+          </a:solidFill>
+          <a:ln xmlns:a="http://schemas.openxmlformats.org/drawingml/2006/main" w="14288">
+            <a:solidFill>
+              <a:srgbClr val="C9A227"/>
+            </a:solidFill>
+            <a:prstDash val="solid"/>
+          </a:ln>
+        </p:spPr>
+        <p:txBody>
+          <a:bodyPr xmlns:a="http://schemas.openxmlformats.org/drawingml/2006/main"/>
+          <a:lstStyle xmlns:a="http://schemas.openxmlformats.org/drawingml/2006/main"/>
+          <a:p xmlns:a="http://schemas.openxmlformats.org/drawingml/2006/main">
+            <a:pPr algn="ctr">
+              <a:defRPr sz="1050" b="1">
+                <a:solidFill>
+                  <a:srgbClr val="FFFFFF"/>
+                </a:solidFill>
+              </a:defRPr>
+            </a:pPr>
+            <a:r>
+              <a:rPr sz="1050" b="1">
+                <a:solidFill>
+                  <a:srgbClr val="FFFFFF"/>
+                </a:solidFill>
+              </a:rPr>
+              <a:t>04</a:t>
+            </a:r>
+          </a:p>
+        </p:txBody>
+      </p:sp>
+      <p:sp>
+        <p:nvSpPr>
+          <p:cNvPr id="32" name="">
+            <a:extLst xmlns:a="http://schemas.openxmlformats.org/drawingml/2006/main">
+              <a:ext uri="{FF2B5EF4-FFF2-40B4-BE49-F238E27FC236}">
+                <a16:creationId xmlns:a16="http://schemas.microsoft.com/office/drawing/2014/main" id="{74ADAE2B-EC07-406F-BCEB-F76438905CAF}"/>
+              </a:ext>
+            </a:extLst>
+          </p:cNvPr>
+          <p:cNvSpPr>
+            <a:spLocks xmlns:a="http://schemas.openxmlformats.org/drawingml/2006/main" noGrp="1"/>
+          </p:cNvSpPr>
+          <p:nvPr/>
+        </p:nvSpPr>
+        <p:spPr>
+          <a:xfrm xmlns:a="http://schemas.openxmlformats.org/drawingml/2006/main">
+            <a:off x="9544050" y="2266950"/>
+            <a:ext cx="1581150" cy="428625"/>
+          </a:xfrm>
+          <a:prstGeom xmlns:a="http://schemas.openxmlformats.org/drawingml/2006/main" prst="rect">
+            <a:avLst/>
+          </a:prstGeom>
+          <a:noFill xmlns:a="http://schemas.openxmlformats.org/drawingml/2006/main"/>
+          <a:ln xmlns:a="http://schemas.openxmlformats.org/drawingml/2006/main" w="0">
+            <a:noFill/>
+            <a:prstDash val="solid"/>
+          </a:ln>
+        </p:spPr>
+        <p:txBody>
+          <a:bodyPr xmlns:a="http://schemas.openxmlformats.org/drawingml/2006/main"/>
+          <a:lstStyle xmlns:a="http://schemas.openxmlformats.org/drawingml/2006/main"/>
+          <a:p xmlns:a="http://schemas.openxmlformats.org/drawingml/2006/main">
+            <a:pPr>
+              <a:defRPr sz="1350" b="1">
+                <a:solidFill>
+                  <a:srgbClr val="FFFFFF"/>
+                </a:solidFill>
+              </a:defRPr>
+            </a:pPr>
+            <a:r>
+              <a:rPr sz="1350" b="1">
+                <a:solidFill>
+                  <a:srgbClr val="FFFFFF"/>
+                </a:solidFill>
+              </a:rPr>
+              <a:t>Motors</a:t>
+            </a:r>
+          </a:p>
+        </p:txBody>
+      </p:sp>
+      <p:sp>
+        <p:nvSpPr>
+          <p:cNvPr id="33" name="">
+            <a:extLst xmlns:a="http://schemas.openxmlformats.org/drawingml/2006/main">
+              <a:ext uri="{FF2B5EF4-FFF2-40B4-BE49-F238E27FC236}">
+                <a16:creationId xmlns:a16="http://schemas.microsoft.com/office/drawing/2014/main" id="{8058F386-59FE-46DB-AA2D-FE59A1503D8C}"/>
+              </a:ext>
+            </a:extLst>
+          </p:cNvPr>
+          <p:cNvSpPr>
+            <a:spLocks xmlns:a="http://schemas.openxmlformats.org/drawingml/2006/main" noGrp="1"/>
+          </p:cNvSpPr>
+          <p:nvPr/>
+        </p:nvSpPr>
+        <p:spPr>
+          <a:xfrm xmlns:a="http://schemas.openxmlformats.org/drawingml/2006/main">
+            <a:off x="9544050" y="2762250"/>
+            <a:ext cx="1581150" cy="428625"/>
+          </a:xfrm>
+          <a:prstGeom xmlns:a="http://schemas.openxmlformats.org/drawingml/2006/main" prst="rect">
+            <a:avLst/>
+          </a:prstGeom>
+          <a:noFill xmlns:a="http://schemas.openxmlformats.org/drawingml/2006/main"/>
+          <a:ln xmlns:a="http://schemas.openxmlformats.org/drawingml/2006/main" w="0">
+            <a:noFill/>
+            <a:prstDash val="solid"/>
+          </a:ln>
+        </p:spPr>
+        <p:txBody>
+          <a:bodyPr xmlns:a="http://schemas.openxmlformats.org/drawingml/2006/main"/>
+          <a:lstStyle xmlns:a="http://schemas.openxmlformats.org/drawingml/2006/main"/>
+          <a:p xmlns:a="http://schemas.openxmlformats.org/drawingml/2006/main">
+            <a:pPr>
+              <a:defRPr sz="975">
+                <a:solidFill>
+                  <a:srgbClr val="D6E7EC"/>
+                </a:solidFill>
+              </a:defRPr>
+            </a:pPr>
+            <a:r>
+              <a:rPr sz="975">
+                <a:solidFill>
+                  <a:srgbClr val="D6E7EC"/>
+                </a:solidFill>
+              </a:rPr>
+              <a:t>Produce thrust and torque.</a:t>
+            </a:r>
+          </a:p>
+        </p:txBody>
+      </p:sp>
+      <p:sp>
+        <p:nvSpPr>
+          <p:cNvPr id="34" name="">
+            <a:extLst xmlns:a="http://schemas.openxmlformats.org/drawingml/2006/main">
+              <a:ext uri="{FF2B5EF4-FFF2-40B4-BE49-F238E27FC236}">
+                <a16:creationId xmlns:a16="http://schemas.microsoft.com/office/drawing/2014/main" id="{603F98BF-EA5C-42DB-9231-252ECB85F406}"/>
+              </a:ext>
+            </a:extLst>
+          </p:cNvPr>
+          <p:cNvSpPr>
+            <a:spLocks xmlns:a="http://schemas.openxmlformats.org/drawingml/2006/main" noGrp="1"/>
+          </p:cNvSpPr>
+          <p:nvPr/>
+        </p:nvSpPr>
+        <p:spPr>
+          <a:xfrm xmlns:a="http://schemas.openxmlformats.org/drawingml/2006/main">
+            <a:off x="609600" y="4819650"/>
+            <a:ext cx="1524000" cy="304800"/>
+          </a:xfrm>
+          <a:prstGeom xmlns:a="http://schemas.openxmlformats.org/drawingml/2006/main" prst="roundRect">
+            <a:avLst>
+              <a:gd name="adj" fmla="val 50000"/>
+            </a:avLst>
+          </a:prstGeom>
+          <a:solidFill xmlns:a="http://schemas.openxmlformats.org/drawingml/2006/main">
+            <a:srgbClr val="C9A227"/>
+          </a:solidFill>
+          <a:ln xmlns:a="http://schemas.openxmlformats.org/drawingml/2006/main" w="14288">
+            <a:solidFill>
+              <a:srgbClr val="C9A227"/>
+            </a:solidFill>
+            <a:prstDash val="solid"/>
+          </a:ln>
+        </p:spPr>
+        <p:txBody>
+          <a:bodyPr xmlns:a="http://schemas.openxmlformats.org/drawingml/2006/main"/>
+          <a:lstStyle xmlns:a="http://schemas.openxmlformats.org/drawingml/2006/main"/>
+          <a:p xmlns:a="http://schemas.openxmlformats.org/drawingml/2006/main">
+            <a:pPr algn="ctr">
+              <a:defRPr sz="1050" b="1">
+                <a:solidFill>
+                  <a:srgbClr val="001B3A"/>
+                </a:solidFill>
+              </a:defRPr>
+            </a:pPr>
+            <a:r>
+              <a:rPr sz="1050" b="1">
+                <a:solidFill>
+                  <a:srgbClr val="001B3A"/>
+                </a:solidFill>
+              </a:rPr>
+              <a:t>CAMERA PATH</a:t>
+            </a:r>
+          </a:p>
+        </p:txBody>
+      </p:sp>
+      <p:sp>
+        <p:nvSpPr>
+          <p:cNvPr id="35" name="">
+            <a:extLst xmlns:a="http://schemas.openxmlformats.org/drawingml/2006/main">
+              <a:ext uri="{FF2B5EF4-FFF2-40B4-BE49-F238E27FC236}">
+                <a16:creationId xmlns:a16="http://schemas.microsoft.com/office/drawing/2014/main" id="{5310BEAF-AB70-4AE5-82FB-BE8E49083C91}"/>
+              </a:ext>
+            </a:extLst>
+          </p:cNvPr>
+          <p:cNvSpPr>
+            <a:spLocks xmlns:a="http://schemas.openxmlformats.org/drawingml/2006/main" noGrp="1"/>
+          </p:cNvSpPr>
+          <p:nvPr/>
+        </p:nvSpPr>
+        <p:spPr>
+          <a:xfrm xmlns:a="http://schemas.openxmlformats.org/drawingml/2006/main">
+            <a:off x="2571750" y="4210050"/>
+            <a:ext cx="1924050" cy="1524000"/>
+          </a:xfrm>
+          <a:prstGeom xmlns:a="http://schemas.openxmlformats.org/drawingml/2006/main" prst="rect">
+            <a:avLst/>
+          </a:prstGeom>
+          <a:ln xmlns:a="http://schemas.openxmlformats.org/drawingml/2006/main" w="0">
+            <a:prstDash val="solid"/>
+          </a:ln>
+        </p:spPr>
+      </p:sp>
+      <p:sp>
+        <p:nvSpPr>
+          <p:cNvPr id="36" name="">
+            <a:extLst xmlns:a="http://schemas.openxmlformats.org/drawingml/2006/main">
+              <a:ext uri="{FF2B5EF4-FFF2-40B4-BE49-F238E27FC236}">
+                <a16:creationId xmlns:a16="http://schemas.microsoft.com/office/drawing/2014/main" id="{2A530DC1-C6C1-4BAE-84BC-01F597A7354F}"/>
+              </a:ext>
+            </a:extLst>
+          </p:cNvPr>
+          <p:cNvSpPr>
+            <a:spLocks xmlns:a="http://schemas.openxmlformats.org/drawingml/2006/main" noGrp="1"/>
+          </p:cNvSpPr>
+          <p:nvPr/>
+        </p:nvSpPr>
+        <p:spPr>
+          <a:xfrm xmlns:a="http://schemas.openxmlformats.org/drawingml/2006/main">
+            <a:off x="4838700" y="4210050"/>
+            <a:ext cx="1924050" cy="1524000"/>
+          </a:xfrm>
+          <a:prstGeom xmlns:a="http://schemas.openxmlformats.org/drawingml/2006/main" prst="rect">
+            <a:avLst/>
+          </a:prstGeom>
+          <a:ln xmlns:a="http://schemas.openxmlformats.org/drawingml/2006/main" w="0">
+            <a:prstDash val="solid"/>
+          </a:ln>
+        </p:spPr>
+      </p:sp>
+      <p:sp>
+        <p:nvSpPr>
+          <p:cNvPr id="37" name="">
+            <a:extLst xmlns:a="http://schemas.openxmlformats.org/drawingml/2006/main">
+              <a:ext uri="{FF2B5EF4-FFF2-40B4-BE49-F238E27FC236}">
+                <a16:creationId xmlns:a16="http://schemas.microsoft.com/office/drawing/2014/main" id="{541C3A1B-8198-4CA4-B163-C1B614FBB0A3}"/>
+              </a:ext>
+            </a:extLst>
+          </p:cNvPr>
+          <p:cNvSpPr>
+            <a:spLocks xmlns:a="http://schemas.openxmlformats.org/drawingml/2006/main" noGrp="1"/>
+          </p:cNvSpPr>
+          <p:nvPr/>
+        </p:nvSpPr>
+        <p:spPr>
+          <a:xfrm xmlns:a="http://schemas.openxmlformats.org/drawingml/2006/main">
+            <a:off x="7105650" y="4210050"/>
+            <a:ext cx="1924050" cy="1524000"/>
+          </a:xfrm>
+          <a:prstGeom xmlns:a="http://schemas.openxmlformats.org/drawingml/2006/main" prst="rect">
+            <a:avLst/>
+          </a:prstGeom>
+          <a:ln xmlns:a="http://schemas.openxmlformats.org/drawingml/2006/main" w="0">
+            <a:prstDash val="solid"/>
+          </a:ln>
+        </p:spPr>
+      </p:sp>
+      <p:sp>
+        <p:nvSpPr>
+          <p:cNvPr id="38" name="">
+            <a:extLst xmlns:a="http://schemas.openxmlformats.org/drawingml/2006/main">
+              <a:ext uri="{FF2B5EF4-FFF2-40B4-BE49-F238E27FC236}">
+                <a16:creationId xmlns:a16="http://schemas.microsoft.com/office/drawing/2014/main" id="{99CA439E-14A8-4293-9E60-B0E3E81E09D5}"/>
+              </a:ext>
+            </a:extLst>
+          </p:cNvPr>
+          <p:cNvSpPr>
+            <a:spLocks xmlns:a="http://schemas.openxmlformats.org/drawingml/2006/main" noGrp="1"/>
+          </p:cNvSpPr>
+          <p:nvPr/>
+        </p:nvSpPr>
+        <p:spPr>
+          <a:xfrm xmlns:a="http://schemas.openxmlformats.org/drawingml/2006/main">
+            <a:off x="9372600" y="4210050"/>
+            <a:ext cx="1924050" cy="1524000"/>
+          </a:xfrm>
+          <a:prstGeom xmlns:a="http://schemas.openxmlformats.org/drawingml/2006/main" prst="rect">
+            <a:avLst/>
+          </a:prstGeom>
+          <a:ln xmlns:a="http://schemas.openxmlformats.org/drawingml/2006/main" w="0">
+            <a:prstDash val="solid"/>
+          </a:ln>
+        </p:spPr>
+      </p:sp>
+      <p:cxnSp>
+        <p:nvCxnSpPr>
+          <p:cNvPr id="98" name=""/>
+          <p:cNvCxnSpPr>
+            <a:stCxn xmlns:a="http://schemas.openxmlformats.org/drawingml/2006/main" id="35" idx="3"/>
+            <a:endCxn xmlns:a="http://schemas.openxmlformats.org/drawingml/2006/main" id="36" idx="1"/>
+          </p:cNvCxnSpPr>
+          <p:nvPr/>
+        </p:nvCxnSpPr>
+        <p:spPr>
+          <a:xfrm xmlns:a="http://schemas.openxmlformats.org/drawingml/2006/main">
+            <a:off x="4495800" y="4972050"/>
+            <a:ext cx="342900" cy="0"/>
+          </a:xfrm>
+          <a:prstGeom xmlns:a="http://schemas.openxmlformats.org/drawingml/2006/main" prst="straightConnector1">
+            <a:avLst/>
+          </a:prstGeom>
+          <a:ln xmlns:a="http://schemas.openxmlformats.org/drawingml/2006/main" w="38100">
+            <a:solidFill>
+              <a:srgbClr val="C9A227"/>
+            </a:solidFill>
+            <a:prstDash val="solid"/>
+            <a:tailEnd type="triangle" w="med" len="med"/>
+          </a:ln>
+        </p:spPr>
+      </p:cxnSp>
+      <p:cxnSp>
+        <p:nvCxnSpPr>
+          <p:cNvPr id="99" name=""/>
+          <p:cNvCxnSpPr>
+            <a:stCxn xmlns:a="http://schemas.openxmlformats.org/drawingml/2006/main" id="36" idx="3"/>
+            <a:endCxn xmlns:a="http://schemas.openxmlformats.org/drawingml/2006/main" id="37" idx="1"/>
+          </p:cNvCxnSpPr>
+          <p:nvPr/>
+        </p:nvCxnSpPr>
+        <p:spPr>
+          <a:xfrm xmlns:a="http://schemas.openxmlformats.org/drawingml/2006/main">
+            <a:off x="6762750" y="4972050"/>
+            <a:ext cx="342900" cy="0"/>
+          </a:xfrm>
+          <a:prstGeom xmlns:a="http://schemas.openxmlformats.org/drawingml/2006/main" prst="straightConnector1">
+            <a:avLst/>
+          </a:prstGeom>
+          <a:ln xmlns:a="http://schemas.openxmlformats.org/drawingml/2006/main" w="38100">
+            <a:solidFill>
+              <a:srgbClr val="C9A227"/>
+            </a:solidFill>
+            <a:prstDash val="solid"/>
+            <a:tailEnd type="triangle" w="med" len="med"/>
+          </a:ln>
+        </p:spPr>
+      </p:cxnSp>
+      <p:cxnSp>
+        <p:nvCxnSpPr>
+          <p:cNvPr id="100" name=""/>
+          <p:cNvCxnSpPr>
+            <a:stCxn xmlns:a="http://schemas.openxmlformats.org/drawingml/2006/main" id="37" idx="3"/>
+            <a:endCxn xmlns:a="http://schemas.openxmlformats.org/drawingml/2006/main" id="38" idx="1"/>
+          </p:cNvCxnSpPr>
+          <p:nvPr/>
+        </p:nvCxnSpPr>
+        <p:spPr>
+          <a:xfrm xmlns:a="http://schemas.openxmlformats.org/drawingml/2006/main">
+            <a:off x="9029700" y="4972050"/>
+            <a:ext cx="342900" cy="0"/>
+          </a:xfrm>
+          <a:prstGeom xmlns:a="http://schemas.openxmlformats.org/drawingml/2006/main" prst="straightConnector1">
+            <a:avLst/>
+          </a:prstGeom>
+          <a:ln xmlns:a="http://schemas.openxmlformats.org/drawingml/2006/main" w="38100">
+            <a:solidFill>
+              <a:srgbClr val="C9A227"/>
+            </a:solidFill>
+            <a:prstDash val="solid"/>
+            <a:tailEnd type="triangle" w="med" len="med"/>
+          </a:ln>
+        </p:spPr>
+      </p:cxnSp>
+      <p:sp>
+        <p:nvSpPr>
+          <p:cNvPr id="42" name="">
+            <a:extLst xmlns:a="http://schemas.openxmlformats.org/drawingml/2006/main">
+              <a:ext uri="{FF2B5EF4-FFF2-40B4-BE49-F238E27FC236}">
+                <a16:creationId xmlns:a16="http://schemas.microsoft.com/office/drawing/2014/main" id="{7009F121-5D17-435C-9F05-23DEF121D648}"/>
+              </a:ext>
+            </a:extLst>
+          </p:cNvPr>
+          <p:cNvSpPr>
+            <a:spLocks xmlns:a="http://schemas.openxmlformats.org/drawingml/2006/main" noGrp="1"/>
+          </p:cNvSpPr>
+          <p:nvPr/>
+        </p:nvSpPr>
+        <p:spPr>
+          <a:xfrm xmlns:a="http://schemas.openxmlformats.org/drawingml/2006/main">
+            <a:off x="2571750" y="4210050"/>
+            <a:ext cx="1924050" cy="1524000"/>
+          </a:xfrm>
+          <a:prstGeom xmlns:a="http://schemas.openxmlformats.org/drawingml/2006/main" prst="roundRect">
+            <a:avLst>
+              <a:gd name="adj" fmla="val 7500"/>
+            </a:avLst>
+          </a:prstGeom>
+          <a:solidFill xmlns:a="http://schemas.openxmlformats.org/drawingml/2006/main">
+            <a:srgbClr val="FFFFFF"/>
+          </a:solidFill>
+          <a:ln xmlns:a="http://schemas.openxmlformats.org/drawingml/2006/main" w="14288">
+            <a:solidFill>
+              <a:srgbClr val="B9CDD5"/>
+            </a:solidFill>
+            <a:prstDash val="solid"/>
+          </a:ln>
+        </p:spPr>
+      </p:sp>
+      <p:sp>
+        <p:nvSpPr>
+          <p:cNvPr id="43" name="">
+            <a:extLst xmlns:a="http://schemas.openxmlformats.org/drawingml/2006/main">
+              <a:ext uri="{FF2B5EF4-FFF2-40B4-BE49-F238E27FC236}">
+                <a16:creationId xmlns:a16="http://schemas.microsoft.com/office/drawing/2014/main" id="{5B88017F-7866-467A-B5DE-2B7A176AA6F8}"/>
+              </a:ext>
+            </a:extLst>
+          </p:cNvPr>
+          <p:cNvSpPr>
+            <a:spLocks xmlns:a="http://schemas.openxmlformats.org/drawingml/2006/main" noGrp="1"/>
+          </p:cNvSpPr>
+          <p:nvPr/>
+        </p:nvSpPr>
+        <p:spPr>
+          <a:xfrm xmlns:a="http://schemas.openxmlformats.org/drawingml/2006/main">
+            <a:off x="2724150" y="4343400"/>
+            <a:ext cx="476250" cy="304800"/>
+          </a:xfrm>
+          <a:prstGeom xmlns:a="http://schemas.openxmlformats.org/drawingml/2006/main" prst="roundRect">
+            <a:avLst>
+              <a:gd name="adj" fmla="val 50000"/>
+            </a:avLst>
+          </a:prstGeom>
+          <a:solidFill xmlns:a="http://schemas.openxmlformats.org/drawingml/2006/main">
+            <a:srgbClr val="C9A227"/>
+          </a:solidFill>
+          <a:ln xmlns:a="http://schemas.openxmlformats.org/drawingml/2006/main" w="14288">
+            <a:solidFill>
+              <a:srgbClr val="C9A227"/>
+            </a:solidFill>
+            <a:prstDash val="solid"/>
+          </a:ln>
+        </p:spPr>
+        <p:txBody>
+          <a:bodyPr xmlns:a="http://schemas.openxmlformats.org/drawingml/2006/main"/>
+          <a:lstStyle xmlns:a="http://schemas.openxmlformats.org/drawingml/2006/main"/>
+          <a:p xmlns:a="http://schemas.openxmlformats.org/drawingml/2006/main">
+            <a:pPr algn="ctr">
+              <a:defRPr sz="1050" b="1">
+                <a:solidFill>
+                  <a:srgbClr val="001B3A"/>
+                </a:solidFill>
+              </a:defRPr>
+            </a:pPr>
+            <a:r>
+              <a:rPr sz="1050" b="1">
+                <a:solidFill>
+                  <a:srgbClr val="001B3A"/>
+                </a:solidFill>
+              </a:rPr>
+              <a:t>01</a:t>
+            </a:r>
+          </a:p>
+        </p:txBody>
+      </p:sp>
+      <p:sp>
+        <p:nvSpPr>
+          <p:cNvPr id="44" name="">
+            <a:extLst xmlns:a="http://schemas.openxmlformats.org/drawingml/2006/main">
+              <a:ext uri="{FF2B5EF4-FFF2-40B4-BE49-F238E27FC236}">
+                <a16:creationId xmlns:a16="http://schemas.microsoft.com/office/drawing/2014/main" id="{CC176D73-96EB-4762-926D-456954B3AF91}"/>
+              </a:ext>
+            </a:extLst>
+          </p:cNvPr>
+          <p:cNvSpPr>
+            <a:spLocks xmlns:a="http://schemas.openxmlformats.org/drawingml/2006/main" noGrp="1"/>
+          </p:cNvSpPr>
+          <p:nvPr/>
+        </p:nvSpPr>
+        <p:spPr>
+          <a:xfrm xmlns:a="http://schemas.openxmlformats.org/drawingml/2006/main">
+            <a:off x="2743200" y="4743450"/>
+            <a:ext cx="1581150" cy="428625"/>
+          </a:xfrm>
+          <a:prstGeom xmlns:a="http://schemas.openxmlformats.org/drawingml/2006/main" prst="rect">
+            <a:avLst/>
+          </a:prstGeom>
+          <a:noFill xmlns:a="http://schemas.openxmlformats.org/drawingml/2006/main"/>
+          <a:ln xmlns:a="http://schemas.openxmlformats.org/drawingml/2006/main" w="0">
+            <a:noFill/>
+            <a:prstDash val="solid"/>
+          </a:ln>
+        </p:spPr>
+        <p:txBody>
+          <a:bodyPr xmlns:a="http://schemas.openxmlformats.org/drawingml/2006/main"/>
+          <a:lstStyle xmlns:a="http://schemas.openxmlformats.org/drawingml/2006/main"/>
+          <a:p xmlns:a="http://schemas.openxmlformats.org/drawingml/2006/main">
+            <a:pPr>
+              <a:defRPr sz="1350" b="1">
+                <a:solidFill>
+                  <a:srgbClr val="001B3A"/>
+                </a:solidFill>
+              </a:defRPr>
+            </a:pPr>
+            <a:r>
+              <a:rPr sz="1350" b="1">
+                <a:solidFill>
+                  <a:srgbClr val="001B3A"/>
+                </a:solidFill>
+              </a:rPr>
+              <a:t>Camera</a:t>
+            </a:r>
+          </a:p>
+        </p:txBody>
+      </p:sp>
+      <p:sp>
+        <p:nvSpPr>
+          <p:cNvPr id="45" name="">
+            <a:extLst xmlns:a="http://schemas.openxmlformats.org/drawingml/2006/main">
+              <a:ext uri="{FF2B5EF4-FFF2-40B4-BE49-F238E27FC236}">
+                <a16:creationId xmlns:a16="http://schemas.microsoft.com/office/drawing/2014/main" id="{B14F46E1-1FCD-435F-BB5E-AC046E44EAD7}"/>
+              </a:ext>
+            </a:extLst>
+          </p:cNvPr>
+          <p:cNvSpPr>
+            <a:spLocks xmlns:a="http://schemas.openxmlformats.org/drawingml/2006/main" noGrp="1"/>
+          </p:cNvSpPr>
+          <p:nvPr/>
+        </p:nvSpPr>
+        <p:spPr>
+          <a:xfrm xmlns:a="http://schemas.openxmlformats.org/drawingml/2006/main">
+            <a:off x="2743200" y="5238750"/>
+            <a:ext cx="1581150" cy="428625"/>
+          </a:xfrm>
+          <a:prstGeom xmlns:a="http://schemas.openxmlformats.org/drawingml/2006/main" prst="rect">
+            <a:avLst/>
+          </a:prstGeom>
+          <a:noFill xmlns:a="http://schemas.openxmlformats.org/drawingml/2006/main"/>
+          <a:ln xmlns:a="http://schemas.openxmlformats.org/drawingml/2006/main" w="0">
+            <a:noFill/>
+            <a:prstDash val="solid"/>
+          </a:ln>
+        </p:spPr>
+        <p:txBody>
+          <a:bodyPr xmlns:a="http://schemas.openxmlformats.org/drawingml/2006/main"/>
+          <a:lstStyle xmlns:a="http://schemas.openxmlformats.org/drawingml/2006/main"/>
+          <a:p xmlns:a="http://schemas.openxmlformats.org/drawingml/2006/main">
+            <a:pPr>
+              <a:defRPr sz="975">
+                <a:solidFill>
+                  <a:srgbClr val="536A7B"/>
+                </a:solidFill>
+              </a:defRPr>
+            </a:pPr>
+            <a:r>
+              <a:rPr sz="975">
+                <a:solidFill>
+                  <a:srgbClr val="536A7B"/>
+                </a:solidFill>
+              </a:rPr>
+              <a:t>Video from 192.168.2.1.</a:t>
+            </a:r>
+          </a:p>
+        </p:txBody>
+      </p:sp>
+      <p:sp>
+        <p:nvSpPr>
+          <p:cNvPr id="46" name="">
+            <a:extLst xmlns:a="http://schemas.openxmlformats.org/drawingml/2006/main">
+              <a:ext uri="{FF2B5EF4-FFF2-40B4-BE49-F238E27FC236}">
+                <a16:creationId xmlns:a16="http://schemas.microsoft.com/office/drawing/2014/main" id="{6D691BD3-41AD-4084-9748-FD81698A55E6}"/>
+              </a:ext>
+            </a:extLst>
+          </p:cNvPr>
+          <p:cNvSpPr>
+            <a:spLocks xmlns:a="http://schemas.openxmlformats.org/drawingml/2006/main" noGrp="1"/>
+          </p:cNvSpPr>
+          <p:nvPr/>
+        </p:nvSpPr>
+        <p:spPr>
+          <a:xfrm xmlns:a="http://schemas.openxmlformats.org/drawingml/2006/main">
+            <a:off x="4838700" y="4210050"/>
+            <a:ext cx="1924050" cy="1524000"/>
+          </a:xfrm>
+          <a:prstGeom xmlns:a="http://schemas.openxmlformats.org/drawingml/2006/main" prst="roundRect">
+            <a:avLst>
+              <a:gd name="adj" fmla="val 7500"/>
+            </a:avLst>
+          </a:prstGeom>
+          <a:solidFill xmlns:a="http://schemas.openxmlformats.org/drawingml/2006/main">
+            <a:srgbClr val="F5EFCF"/>
+          </a:solidFill>
+          <a:ln xmlns:a="http://schemas.openxmlformats.org/drawingml/2006/main" w="14288">
+            <a:solidFill>
+              <a:srgbClr val="B9CDD5"/>
+            </a:solidFill>
+            <a:prstDash val="solid"/>
+          </a:ln>
+        </p:spPr>
+      </p:sp>
+      <p:sp>
+        <p:nvSpPr>
+          <p:cNvPr id="47" name="">
+            <a:extLst xmlns:a="http://schemas.openxmlformats.org/drawingml/2006/main">
+              <a:ext uri="{FF2B5EF4-FFF2-40B4-BE49-F238E27FC236}">
+                <a16:creationId xmlns:a16="http://schemas.microsoft.com/office/drawing/2014/main" id="{D9D022BE-1C72-4371-ACA1-7519732DAD7C}"/>
+              </a:ext>
+            </a:extLst>
+          </p:cNvPr>
+          <p:cNvSpPr>
+            <a:spLocks xmlns:a="http://schemas.openxmlformats.org/drawingml/2006/main" noGrp="1"/>
+          </p:cNvSpPr>
+          <p:nvPr/>
+        </p:nvSpPr>
+        <p:spPr>
+          <a:xfrm xmlns:a="http://schemas.openxmlformats.org/drawingml/2006/main">
+            <a:off x="4991100" y="4343400"/>
+            <a:ext cx="476250" cy="304800"/>
+          </a:xfrm>
+          <a:prstGeom xmlns:a="http://schemas.openxmlformats.org/drawingml/2006/main" prst="roundRect">
+            <a:avLst>
+              <a:gd name="adj" fmla="val 50000"/>
+            </a:avLst>
+          </a:prstGeom>
+          <a:solidFill xmlns:a="http://schemas.openxmlformats.org/drawingml/2006/main">
+            <a:srgbClr val="C9A227"/>
+          </a:solidFill>
+          <a:ln xmlns:a="http://schemas.openxmlformats.org/drawingml/2006/main" w="14288">
+            <a:solidFill>
+              <a:srgbClr val="C9A227"/>
+            </a:solidFill>
+            <a:prstDash val="solid"/>
+          </a:ln>
+        </p:spPr>
+        <p:txBody>
+          <a:bodyPr xmlns:a="http://schemas.openxmlformats.org/drawingml/2006/main"/>
+          <a:lstStyle xmlns:a="http://schemas.openxmlformats.org/drawingml/2006/main"/>
+          <a:p xmlns:a="http://schemas.openxmlformats.org/drawingml/2006/main">
+            <a:pPr algn="ctr">
+              <a:defRPr sz="1050" b="1">
+                <a:solidFill>
+                  <a:srgbClr val="001B3A"/>
+                </a:solidFill>
+              </a:defRPr>
+            </a:pPr>
+            <a:r>
+              <a:rPr sz="1050" b="1">
+                <a:solidFill>
+                  <a:srgbClr val="001B3A"/>
+                </a:solidFill>
+              </a:rPr>
+              <a:t>02</a:t>
+            </a:r>
+          </a:p>
+        </p:txBody>
+      </p:sp>
+      <p:sp>
+        <p:nvSpPr>
+          <p:cNvPr id="48" name="">
+            <a:extLst xmlns:a="http://schemas.openxmlformats.org/drawingml/2006/main">
+              <a:ext uri="{FF2B5EF4-FFF2-40B4-BE49-F238E27FC236}">
+                <a16:creationId xmlns:a16="http://schemas.microsoft.com/office/drawing/2014/main" id="{9B2A561E-A5C0-4609-ABBE-7BF9CF07A2F3}"/>
+              </a:ext>
+            </a:extLst>
+          </p:cNvPr>
+          <p:cNvSpPr>
+            <a:spLocks xmlns:a="http://schemas.openxmlformats.org/drawingml/2006/main" noGrp="1"/>
+          </p:cNvSpPr>
+          <p:nvPr/>
+        </p:nvSpPr>
+        <p:spPr>
+          <a:xfrm xmlns:a="http://schemas.openxmlformats.org/drawingml/2006/main">
+            <a:off x="5010150" y="4743450"/>
+            <a:ext cx="1581150" cy="428625"/>
+          </a:xfrm>
+          <a:prstGeom xmlns:a="http://schemas.openxmlformats.org/drawingml/2006/main" prst="rect">
+            <a:avLst/>
+          </a:prstGeom>
+          <a:noFill xmlns:a="http://schemas.openxmlformats.org/drawingml/2006/main"/>
+          <a:ln xmlns:a="http://schemas.openxmlformats.org/drawingml/2006/main" w="0">
+            <a:noFill/>
+            <a:prstDash val="solid"/>
+          </a:ln>
+        </p:spPr>
+        <p:txBody>
+          <a:bodyPr xmlns:a="http://schemas.openxmlformats.org/drawingml/2006/main"/>
+          <a:lstStyle xmlns:a="http://schemas.openxmlformats.org/drawingml/2006/main"/>
+          <a:p xmlns:a="http://schemas.openxmlformats.org/drawingml/2006/main">
+            <a:pPr>
+              <a:defRPr sz="1350" b="1">
+                <a:solidFill>
+                  <a:srgbClr val="001B3A"/>
+                </a:solidFill>
+              </a:defRPr>
+            </a:pPr>
+            <a:r>
+              <a:rPr sz="1350" b="1">
+                <a:solidFill>
+                  <a:srgbClr val="001B3A"/>
+                </a:solidFill>
+              </a:rPr>
+              <a:t>Wi-Fi / HTTP</a:t>
+            </a:r>
+          </a:p>
+        </p:txBody>
+      </p:sp>
+      <p:sp>
+        <p:nvSpPr>
+          <p:cNvPr id="49" name="">
+            <a:extLst xmlns:a="http://schemas.openxmlformats.org/drawingml/2006/main">
+              <a:ext uri="{FF2B5EF4-FFF2-40B4-BE49-F238E27FC236}">
+                <a16:creationId xmlns:a16="http://schemas.microsoft.com/office/drawing/2014/main" id="{5227DC48-B796-4CBD-BB47-FD297E5256B5}"/>
+              </a:ext>
+            </a:extLst>
+          </p:cNvPr>
+          <p:cNvSpPr>
+            <a:spLocks xmlns:a="http://schemas.openxmlformats.org/drawingml/2006/main" noGrp="1"/>
+          </p:cNvSpPr>
+          <p:nvPr/>
+        </p:nvSpPr>
+        <p:spPr>
+          <a:xfrm xmlns:a="http://schemas.openxmlformats.org/drawingml/2006/main">
+            <a:off x="5010150" y="5238750"/>
+            <a:ext cx="1581150" cy="428625"/>
+          </a:xfrm>
+          <a:prstGeom xmlns:a="http://schemas.openxmlformats.org/drawingml/2006/main" prst="rect">
+            <a:avLst/>
+          </a:prstGeom>
+          <a:noFill xmlns:a="http://schemas.openxmlformats.org/drawingml/2006/main"/>
+          <a:ln xmlns:a="http://schemas.openxmlformats.org/drawingml/2006/main" w="0">
+            <a:noFill/>
+            <a:prstDash val="solid"/>
+          </a:ln>
+        </p:spPr>
+        <p:txBody>
+          <a:bodyPr xmlns:a="http://schemas.openxmlformats.org/drawingml/2006/main"/>
+          <a:lstStyle xmlns:a="http://schemas.openxmlformats.org/drawingml/2006/main"/>
+          <a:p xmlns:a="http://schemas.openxmlformats.org/drawingml/2006/main">
+            <a:pPr>
+              <a:defRPr sz="975">
+                <a:solidFill>
+                  <a:srgbClr val="536A7B"/>
+                </a:solidFill>
+              </a:defRPr>
+            </a:pPr>
+            <a:r>
+              <a:rPr sz="975">
+                <a:solidFill>
+                  <a:srgbClr val="536A7B"/>
+                </a:solidFill>
+              </a:rPr>
+              <a:t>Separate image-data path.</a:t>
+            </a:r>
+          </a:p>
+        </p:txBody>
+      </p:sp>
+      <p:sp>
+        <p:nvSpPr>
+          <p:cNvPr id="50" name="">
+            <a:extLst xmlns:a="http://schemas.openxmlformats.org/drawingml/2006/main">
+              <a:ext uri="{FF2B5EF4-FFF2-40B4-BE49-F238E27FC236}">
+                <a16:creationId xmlns:a16="http://schemas.microsoft.com/office/drawing/2014/main" id="{CB915AAF-B4D8-4D3F-9FAA-D9F9E98B2E65}"/>
+              </a:ext>
+            </a:extLst>
+          </p:cNvPr>
+          <p:cNvSpPr>
+            <a:spLocks xmlns:a="http://schemas.openxmlformats.org/drawingml/2006/main" noGrp="1"/>
+          </p:cNvSpPr>
+          <p:nvPr/>
+        </p:nvSpPr>
+        <p:spPr>
+          <a:xfrm xmlns:a="http://schemas.openxmlformats.org/drawingml/2006/main">
+            <a:off x="7105650" y="4210050"/>
+            <a:ext cx="1924050" cy="1524000"/>
+          </a:xfrm>
+          <a:prstGeom xmlns:a="http://schemas.openxmlformats.org/drawingml/2006/main" prst="roundRect">
+            <a:avLst>
+              <a:gd name="adj" fmla="val 7500"/>
+            </a:avLst>
+          </a:prstGeom>
+          <a:solidFill xmlns:a="http://schemas.openxmlformats.org/drawingml/2006/main">
+            <a:srgbClr val="FFFFFF"/>
+          </a:solidFill>
+          <a:ln xmlns:a="http://schemas.openxmlformats.org/drawingml/2006/main" w="14288">
+            <a:solidFill>
+              <a:srgbClr val="B9CDD5"/>
+            </a:solidFill>
+            <a:prstDash val="solid"/>
+          </a:ln>
+        </p:spPr>
+      </p:sp>
+      <p:sp>
+        <p:nvSpPr>
+          <p:cNvPr id="51" name="">
+            <a:extLst xmlns:a="http://schemas.openxmlformats.org/drawingml/2006/main">
+              <a:ext uri="{FF2B5EF4-FFF2-40B4-BE49-F238E27FC236}">
+                <a16:creationId xmlns:a16="http://schemas.microsoft.com/office/drawing/2014/main" id="{7E96A38A-D951-406B-8FFF-4C67FF5E3F5C}"/>
+              </a:ext>
+            </a:extLst>
+          </p:cNvPr>
+          <p:cNvSpPr>
+            <a:spLocks xmlns:a="http://schemas.openxmlformats.org/drawingml/2006/main" noGrp="1"/>
+          </p:cNvSpPr>
+          <p:nvPr/>
+        </p:nvSpPr>
+        <p:spPr>
+          <a:xfrm xmlns:a="http://schemas.openxmlformats.org/drawingml/2006/main">
+            <a:off x="7258050" y="4343400"/>
+            <a:ext cx="476250" cy="304800"/>
+          </a:xfrm>
+          <a:prstGeom xmlns:a="http://schemas.openxmlformats.org/drawingml/2006/main" prst="roundRect">
+            <a:avLst>
+              <a:gd name="adj" fmla="val 50000"/>
+            </a:avLst>
+          </a:prstGeom>
+          <a:solidFill xmlns:a="http://schemas.openxmlformats.org/drawingml/2006/main">
+            <a:srgbClr val="C9A227"/>
+          </a:solidFill>
+          <a:ln xmlns:a="http://schemas.openxmlformats.org/drawingml/2006/main" w="14288">
+            <a:solidFill>
+              <a:srgbClr val="C9A227"/>
+            </a:solidFill>
+            <a:prstDash val="solid"/>
+          </a:ln>
+        </p:spPr>
+        <p:txBody>
+          <a:bodyPr xmlns:a="http://schemas.openxmlformats.org/drawingml/2006/main"/>
+          <a:lstStyle xmlns:a="http://schemas.openxmlformats.org/drawingml/2006/main"/>
+          <a:p xmlns:a="http://schemas.openxmlformats.org/drawingml/2006/main">
+            <a:pPr algn="ctr">
+              <a:defRPr sz="1050" b="1">
+                <a:solidFill>
+                  <a:srgbClr val="001B3A"/>
+                </a:solidFill>
+              </a:defRPr>
+            </a:pPr>
+            <a:r>
+              <a:rPr sz="1050" b="1">
+                <a:solidFill>
+                  <a:srgbClr val="001B3A"/>
+                </a:solidFill>
+              </a:rPr>
+              <a:t>03</a:t>
+            </a:r>
+          </a:p>
+        </p:txBody>
+      </p:sp>
+      <p:sp>
+        <p:nvSpPr>
+          <p:cNvPr id="52" name="">
+            <a:extLst xmlns:a="http://schemas.openxmlformats.org/drawingml/2006/main">
+              <a:ext uri="{FF2B5EF4-FFF2-40B4-BE49-F238E27FC236}">
+                <a16:creationId xmlns:a16="http://schemas.microsoft.com/office/drawing/2014/main" id="{E17A85BC-4750-4E0D-AED1-73D12D432F2D}"/>
+              </a:ext>
+            </a:extLst>
+          </p:cNvPr>
+          <p:cNvSpPr>
+            <a:spLocks xmlns:a="http://schemas.openxmlformats.org/drawingml/2006/main" noGrp="1"/>
+          </p:cNvSpPr>
+          <p:nvPr/>
+        </p:nvSpPr>
+        <p:spPr>
+          <a:xfrm xmlns:a="http://schemas.openxmlformats.org/drawingml/2006/main">
+            <a:off x="7277100" y="4743450"/>
+            <a:ext cx="1581150" cy="428625"/>
+          </a:xfrm>
+          <a:prstGeom xmlns:a="http://schemas.openxmlformats.org/drawingml/2006/main" prst="rect">
+            <a:avLst/>
+          </a:prstGeom>
+          <a:noFill xmlns:a="http://schemas.openxmlformats.org/drawingml/2006/main"/>
+          <a:ln xmlns:a="http://schemas.openxmlformats.org/drawingml/2006/main" w="0">
+            <a:noFill/>
+            <a:prstDash val="solid"/>
+          </a:ln>
+        </p:spPr>
+        <p:txBody>
+          <a:bodyPr xmlns:a="http://schemas.openxmlformats.org/drawingml/2006/main"/>
+          <a:lstStyle xmlns:a="http://schemas.openxmlformats.org/drawingml/2006/main"/>
+          <a:p xmlns:a="http://schemas.openxmlformats.org/drawingml/2006/main">
+            <a:pPr>
+              <a:defRPr sz="1350" b="1">
+                <a:solidFill>
+                  <a:srgbClr val="001B3A"/>
+                </a:solidFill>
+              </a:defRPr>
+            </a:pPr>
+            <a:r>
+              <a:rPr sz="1350" b="1">
+                <a:solidFill>
+                  <a:srgbClr val="001B3A"/>
+                </a:solidFill>
+              </a:rPr>
+              <a:t>Canvas</a:t>
+            </a:r>
+          </a:p>
+        </p:txBody>
+      </p:sp>
+      <p:sp>
+        <p:nvSpPr>
+          <p:cNvPr id="53" name="">
+            <a:extLst xmlns:a="http://schemas.openxmlformats.org/drawingml/2006/main">
+              <a:ext uri="{FF2B5EF4-FFF2-40B4-BE49-F238E27FC236}">
+                <a16:creationId xmlns:a16="http://schemas.microsoft.com/office/drawing/2014/main" id="{288886F7-1880-4055-AEF7-0378719E9131}"/>
+              </a:ext>
+            </a:extLst>
+          </p:cNvPr>
+          <p:cNvSpPr>
+            <a:spLocks xmlns:a="http://schemas.openxmlformats.org/drawingml/2006/main" noGrp="1"/>
+          </p:cNvSpPr>
+          <p:nvPr/>
+        </p:nvSpPr>
+        <p:spPr>
+          <a:xfrm xmlns:a="http://schemas.openxmlformats.org/drawingml/2006/main">
+            <a:off x="7277100" y="5238750"/>
+            <a:ext cx="1581150" cy="428625"/>
+          </a:xfrm>
+          <a:prstGeom xmlns:a="http://schemas.openxmlformats.org/drawingml/2006/main" prst="rect">
+            <a:avLst/>
+          </a:prstGeom>
+          <a:noFill xmlns:a="http://schemas.openxmlformats.org/drawingml/2006/main"/>
+          <a:ln xmlns:a="http://schemas.openxmlformats.org/drawingml/2006/main" w="0">
+            <a:noFill/>
+            <a:prstDash val="solid"/>
+          </a:ln>
+        </p:spPr>
+        <p:txBody>
+          <a:bodyPr xmlns:a="http://schemas.openxmlformats.org/drawingml/2006/main"/>
+          <a:lstStyle xmlns:a="http://schemas.openxmlformats.org/drawingml/2006/main"/>
+          <a:p xmlns:a="http://schemas.openxmlformats.org/drawingml/2006/main">
+            <a:pPr>
+              <a:defRPr sz="975">
+                <a:solidFill>
+                  <a:srgbClr val="536A7B"/>
+                </a:solidFill>
+              </a:defRPr>
+            </a:pPr>
+            <a:r>
+              <a:rPr sz="975">
+                <a:solidFill>
+                  <a:srgbClr val="536A7B"/>
+                </a:solidFill>
+              </a:rPr>
+              <a:t>Hopper Studio reads fresh pixels.</a:t>
+            </a:r>
+          </a:p>
+        </p:txBody>
+      </p:sp>
+      <p:sp>
+        <p:nvSpPr>
+          <p:cNvPr id="54" name="">
+            <a:extLst xmlns:a="http://schemas.openxmlformats.org/drawingml/2006/main">
+              <a:ext uri="{FF2B5EF4-FFF2-40B4-BE49-F238E27FC236}">
+                <a16:creationId xmlns:a16="http://schemas.microsoft.com/office/drawing/2014/main" id="{71053197-2888-450E-9752-9107E02DD071}"/>
+              </a:ext>
+            </a:extLst>
+          </p:cNvPr>
+          <p:cNvSpPr>
+            <a:spLocks xmlns:a="http://schemas.openxmlformats.org/drawingml/2006/main" noGrp="1"/>
+          </p:cNvSpPr>
+          <p:nvPr/>
+        </p:nvSpPr>
+        <p:spPr>
+          <a:xfrm xmlns:a="http://schemas.openxmlformats.org/drawingml/2006/main">
+            <a:off x="9372600" y="4210050"/>
+            <a:ext cx="1924050" cy="1524000"/>
+          </a:xfrm>
+          <a:prstGeom xmlns:a="http://schemas.openxmlformats.org/drawingml/2006/main" prst="roundRect">
+            <a:avLst>
+              <a:gd name="adj" fmla="val 7500"/>
+            </a:avLst>
+          </a:prstGeom>
+          <a:solidFill xmlns:a="http://schemas.openxmlformats.org/drawingml/2006/main">
+            <a:srgbClr val="001B3A"/>
+          </a:solidFill>
+          <a:ln xmlns:a="http://schemas.openxmlformats.org/drawingml/2006/main" w="14288">
+            <a:solidFill>
+              <a:srgbClr val="001B3A"/>
+            </a:solidFill>
+            <a:prstDash val="solid"/>
+          </a:ln>
+        </p:spPr>
+      </p:sp>
+      <p:sp>
+        <p:nvSpPr>
+          <p:cNvPr id="55" name="">
+            <a:extLst xmlns:a="http://schemas.openxmlformats.org/drawingml/2006/main">
+              <a:ext uri="{FF2B5EF4-FFF2-40B4-BE49-F238E27FC236}">
+                <a16:creationId xmlns:a16="http://schemas.microsoft.com/office/drawing/2014/main" id="{9467AFC9-146F-4DAE-B731-3529C23C85F6}"/>
+              </a:ext>
+            </a:extLst>
+          </p:cNvPr>
+          <p:cNvSpPr>
+            <a:spLocks xmlns:a="http://schemas.openxmlformats.org/drawingml/2006/main" noGrp="1"/>
+          </p:cNvSpPr>
+          <p:nvPr/>
+        </p:nvSpPr>
+        <p:spPr>
+          <a:xfrm xmlns:a="http://schemas.openxmlformats.org/drawingml/2006/main">
+            <a:off x="9525000" y="4343400"/>
+            <a:ext cx="476250" cy="304800"/>
+          </a:xfrm>
+          <a:prstGeom xmlns:a="http://schemas.openxmlformats.org/drawingml/2006/main" prst="roundRect">
+            <a:avLst>
+              <a:gd name="adj" fmla="val 50000"/>
+            </a:avLst>
+          </a:prstGeom>
+          <a:solidFill xmlns:a="http://schemas.openxmlformats.org/drawingml/2006/main">
+            <a:srgbClr val="C9A227"/>
+          </a:solidFill>
+          <a:ln xmlns:a="http://schemas.openxmlformats.org/drawingml/2006/main" w="14288">
+            <a:solidFill>
+              <a:srgbClr val="C9A227"/>
+            </a:solidFill>
+            <a:prstDash val="solid"/>
+          </a:ln>
+        </p:spPr>
+        <p:txBody>
+          <a:bodyPr xmlns:a="http://schemas.openxmlformats.org/drawingml/2006/main"/>
+          <a:lstStyle xmlns:a="http://schemas.openxmlformats.org/drawingml/2006/main"/>
+          <a:p xmlns:a="http://schemas.openxmlformats.org/drawingml/2006/main">
+            <a:pPr algn="ctr">
+              <a:defRPr sz="1050" b="1">
+                <a:solidFill>
+                  <a:srgbClr val="FFFFFF"/>
+                </a:solidFill>
+              </a:defRPr>
+            </a:pPr>
+            <a:r>
+              <a:rPr sz="1050" b="1">
+                <a:solidFill>
+                  <a:srgbClr val="FFFFFF"/>
+                </a:solidFill>
+              </a:rPr>
+              <a:t>04</a:t>
+            </a:r>
+          </a:p>
+        </p:txBody>
+      </p:sp>
+      <p:sp>
+        <p:nvSpPr>
+          <p:cNvPr id="56" name="">
+            <a:extLst xmlns:a="http://schemas.openxmlformats.org/drawingml/2006/main">
+              <a:ext uri="{FF2B5EF4-FFF2-40B4-BE49-F238E27FC236}">
+                <a16:creationId xmlns:a16="http://schemas.microsoft.com/office/drawing/2014/main" id="{CCD6F246-C3F7-4F7D-A750-FA62982CCDF5}"/>
+              </a:ext>
+            </a:extLst>
+          </p:cNvPr>
+          <p:cNvSpPr>
+            <a:spLocks xmlns:a="http://schemas.openxmlformats.org/drawingml/2006/main" noGrp="1"/>
+          </p:cNvSpPr>
+          <p:nvPr/>
+        </p:nvSpPr>
+        <p:spPr>
+          <a:xfrm xmlns:a="http://schemas.openxmlformats.org/drawingml/2006/main">
+            <a:off x="9544050" y="4743450"/>
+            <a:ext cx="1581150" cy="428625"/>
+          </a:xfrm>
+          <a:prstGeom xmlns:a="http://schemas.openxmlformats.org/drawingml/2006/main" prst="rect">
+            <a:avLst/>
+          </a:prstGeom>
+          <a:noFill xmlns:a="http://schemas.openxmlformats.org/drawingml/2006/main"/>
+          <a:ln xmlns:a="http://schemas.openxmlformats.org/drawingml/2006/main" w="0">
+            <a:noFill/>
+            <a:prstDash val="solid"/>
+          </a:ln>
+        </p:spPr>
+        <p:txBody>
+          <a:bodyPr xmlns:a="http://schemas.openxmlformats.org/drawingml/2006/main"/>
+          <a:lstStyle xmlns:a="http://schemas.openxmlformats.org/drawingml/2006/main"/>
+          <a:p xmlns:a="http://schemas.openxmlformats.org/drawingml/2006/main">
+            <a:pPr>
+              <a:defRPr sz="1350" b="1">
+                <a:solidFill>
+                  <a:srgbClr val="FFFFFF"/>
+                </a:solidFill>
+              </a:defRPr>
+            </a:pPr>
+            <a:r>
+              <a:rPr sz="1350" b="1">
+                <a:solidFill>
+                  <a:srgbClr val="FFFFFF"/>
+                </a:solidFill>
+              </a:rPr>
+              <a:t>Vision</a:t>
+            </a:r>
+          </a:p>
+        </p:txBody>
+      </p:sp>
+      <p:sp>
+        <p:nvSpPr>
+          <p:cNvPr id="57" name="">
+            <a:extLst xmlns:a="http://schemas.openxmlformats.org/drawingml/2006/main">
+              <a:ext uri="{FF2B5EF4-FFF2-40B4-BE49-F238E27FC236}">
+                <a16:creationId xmlns:a16="http://schemas.microsoft.com/office/drawing/2014/main" id="{71570134-800D-457E-912C-BC0427B1ED11}"/>
+              </a:ext>
+            </a:extLst>
+          </p:cNvPr>
+          <p:cNvSpPr>
+            <a:spLocks xmlns:a="http://schemas.openxmlformats.org/drawingml/2006/main" noGrp="1"/>
+          </p:cNvSpPr>
+          <p:nvPr/>
+        </p:nvSpPr>
+        <p:spPr>
+          <a:xfrm xmlns:a="http://schemas.openxmlformats.org/drawingml/2006/main">
+            <a:off x="9544050" y="5238750"/>
+            <a:ext cx="1581150" cy="428625"/>
+          </a:xfrm>
+          <a:prstGeom xmlns:a="http://schemas.openxmlformats.org/drawingml/2006/main" prst="rect">
+            <a:avLst/>
+          </a:prstGeom>
+          <a:noFill xmlns:a="http://schemas.openxmlformats.org/drawingml/2006/main"/>
+          <a:ln xmlns:a="http://schemas.openxmlformats.org/drawingml/2006/main" w="0">
+            <a:noFill/>
+            <a:prstDash val="solid"/>
+          </a:ln>
+        </p:spPr>
+        <p:txBody>
+          <a:bodyPr xmlns:a="http://schemas.openxmlformats.org/drawingml/2006/main"/>
+          <a:lstStyle xmlns:a="http://schemas.openxmlformats.org/drawingml/2006/main"/>
+          <a:p xmlns:a="http://schemas.openxmlformats.org/drawingml/2006/main">
+            <a:pPr>
+              <a:defRPr sz="975">
+                <a:solidFill>
+                  <a:srgbClr val="D6E7EC"/>
+                </a:solidFill>
+              </a:defRPr>
+            </a:pPr>
+            <a:r>
+              <a:rPr sz="975">
+                <a:solidFill>
+                  <a:srgbClr val="D6E7EC"/>
+                </a:solidFill>
+              </a:rPr>
+              <a:t>Threshold, COCO, custom model, or AprilTag.</a:t>
+            </a:r>
+          </a:p>
+        </p:txBody>
+      </p:sp>
+      <p:sp>
+        <p:nvSpPr>
+          <p:cNvPr id="58" name="">
+            <a:extLst xmlns:a="http://schemas.openxmlformats.org/drawingml/2006/main">
+              <a:ext uri="{FF2B5EF4-FFF2-40B4-BE49-F238E27FC236}">
+                <a16:creationId xmlns:a16="http://schemas.microsoft.com/office/drawing/2014/main" id="{48652F81-3ABC-4FE3-92DF-64650D4E8642}"/>
+              </a:ext>
+            </a:extLst>
+          </p:cNvPr>
+          <p:cNvSpPr>
+            <a:spLocks xmlns:a="http://schemas.openxmlformats.org/drawingml/2006/main" noGrp="1"/>
+          </p:cNvSpPr>
+          <p:nvPr/>
+        </p:nvSpPr>
+        <p:spPr>
+          <a:xfrm xmlns:a="http://schemas.openxmlformats.org/drawingml/2006/main">
+            <a:off x="2476500" y="3476625"/>
+            <a:ext cx="7239000" cy="495300"/>
+          </a:xfrm>
+          <a:prstGeom xmlns:a="http://schemas.openxmlformats.org/drawingml/2006/main" prst="roundRect">
+            <a:avLst>
+              <a:gd name="adj" fmla="val 50000"/>
             </a:avLst>
           </a:prstGeom>
           <a:solidFill xmlns:a="http://schemas.openxmlformats.org/drawingml/2006/main">
@@ -3589,22 +8965,22 @@
       </p:sp>
       <p:sp>
         <p:nvSpPr>
-          <p:cNvPr id="12" name="">
-            <a:extLst xmlns:a="http://schemas.openxmlformats.org/drawingml/2006/main">
-              <a:ext uri="{FF2B5EF4-FFF2-40B4-BE49-F238E27FC236}">
-                <a16:creationId xmlns:a16="http://schemas.microsoft.com/office/drawing/2014/main" id="{0E670AE5-5501-464B-9F2A-EB9A06B2FB96}"/>
-              </a:ext>
-            </a:extLst>
-          </p:cNvPr>
-          <p:cNvSpPr>
-            <a:spLocks xmlns:a="http://schemas.openxmlformats.org/drawingml/2006/main" noGrp="1"/>
-          </p:cNvSpPr>
-          <p:nvPr/>
-        </p:nvSpPr>
-        <p:spPr>
-          <a:xfrm xmlns:a="http://schemas.openxmlformats.org/drawingml/2006/main">
-            <a:off x="723900" y="5200650"/>
-            <a:ext cx="4533900" cy="266700"/>
+          <p:cNvPr id="59" name="">
+            <a:extLst xmlns:a="http://schemas.openxmlformats.org/drawingml/2006/main">
+              <a:ext uri="{FF2B5EF4-FFF2-40B4-BE49-F238E27FC236}">
+                <a16:creationId xmlns:a16="http://schemas.microsoft.com/office/drawing/2014/main" id="{25B7C7B8-0592-412C-838C-0DB07786FB15}"/>
+              </a:ext>
+            </a:extLst>
+          </p:cNvPr>
+          <p:cNvSpPr>
+            <a:spLocks xmlns:a="http://schemas.openxmlformats.org/drawingml/2006/main" noGrp="1"/>
+          </p:cNvSpPr>
+          <p:nvPr/>
+        </p:nvSpPr>
+        <p:spPr>
+          <a:xfrm xmlns:a="http://schemas.openxmlformats.org/drawingml/2006/main">
+            <a:off x="2724150" y="3609975"/>
+            <a:ext cx="6743700" cy="228600"/>
           </a:xfrm>
           <a:prstGeom xmlns:a="http://schemas.openxmlformats.org/drawingml/2006/main" prst="rect">
             <a:avLst/>
@@ -3620,1145 +8996,19 @@
           <a:lstStyle xmlns:a="http://schemas.openxmlformats.org/drawingml/2006/main"/>
           <a:p xmlns:a="http://schemas.openxmlformats.org/drawingml/2006/main">
             <a:pPr algn="ctr">
-              <a:defRPr sz="1575" b="1">
+              <a:defRPr sz="1275" b="1">
                 <a:solidFill>
                   <a:srgbClr val="D94F5C"/>
                 </a:solidFill>
               </a:defRPr>
             </a:pPr>
             <a:r>
-              <a:rPr sz="1575" b="1">
+              <a:rPr sz="1275" b="1">
                 <a:solidFill>
                   <a:srgbClr val="D94F5C"/>
                 </a:solidFill>
               </a:rPr>
-              <a:t>GPS / GNSS IS NOT INCLUDED</a:t>
-            </a:r>
-          </a:p>
-        </p:txBody>
-      </p:sp>
-      <p:sp>
-        <p:nvSpPr>
-          <p:cNvPr id="13" name="">
-            <a:extLst xmlns:a="http://schemas.openxmlformats.org/drawingml/2006/main">
-              <a:ext uri="{FF2B5EF4-FFF2-40B4-BE49-F238E27FC236}">
-                <a16:creationId xmlns:a16="http://schemas.microsoft.com/office/drawing/2014/main" id="{1610F268-E8BC-4F8B-A33D-D036A1DA6F2E}"/>
-              </a:ext>
-            </a:extLst>
-          </p:cNvPr>
-          <p:cNvSpPr>
-            <a:spLocks xmlns:a="http://schemas.openxmlformats.org/drawingml/2006/main" noGrp="1"/>
-          </p:cNvSpPr>
-          <p:nvPr/>
-        </p:nvSpPr>
-        <p:spPr>
-          <a:xfrm xmlns:a="http://schemas.openxmlformats.org/drawingml/2006/main">
-            <a:off x="5905500" y="1428750"/>
-            <a:ext cx="2647950" cy="1809750"/>
-          </a:xfrm>
-          <a:prstGeom xmlns:a="http://schemas.openxmlformats.org/drawingml/2006/main" prst="roundRect">
-            <a:avLst>
-              <a:gd name="adj" fmla="val 6316"/>
-            </a:avLst>
-          </a:prstGeom>
-          <a:solidFill xmlns:a="http://schemas.openxmlformats.org/drawingml/2006/main">
-            <a:srgbClr val="FFFFFF"/>
-          </a:solidFill>
-          <a:ln xmlns:a="http://schemas.openxmlformats.org/drawingml/2006/main" w="14288">
-            <a:solidFill>
-              <a:srgbClr val="C6D4DB"/>
-            </a:solidFill>
-            <a:prstDash val="solid"/>
-          </a:ln>
-        </p:spPr>
-      </p:sp>
-      <p:sp>
-        <p:nvSpPr>
-          <p:cNvPr id="14" name="">
-            <a:extLst xmlns:a="http://schemas.openxmlformats.org/drawingml/2006/main">
-              <a:ext uri="{FF2B5EF4-FFF2-40B4-BE49-F238E27FC236}">
-                <a16:creationId xmlns:a16="http://schemas.microsoft.com/office/drawing/2014/main" id="{E11C613A-CB6D-4AE6-A6B8-7F59C3EF812B}"/>
-              </a:ext>
-            </a:extLst>
-          </p:cNvPr>
-          <p:cNvSpPr>
-            <a:spLocks xmlns:a="http://schemas.openxmlformats.org/drawingml/2006/main" noGrp="1"/>
-          </p:cNvSpPr>
-          <p:nvPr/>
-        </p:nvSpPr>
-        <p:spPr>
-          <a:xfrm xmlns:a="http://schemas.openxmlformats.org/drawingml/2006/main">
-            <a:off x="5905500" y="1428750"/>
-            <a:ext cx="66675" cy="1809750"/>
-          </a:xfrm>
-          <a:prstGeom xmlns:a="http://schemas.openxmlformats.org/drawingml/2006/main" prst="rect">
-            <a:avLst/>
-          </a:prstGeom>
-          <a:solidFill xmlns:a="http://schemas.openxmlformats.org/drawingml/2006/main">
-            <a:srgbClr val="008C95"/>
-          </a:solidFill>
-          <a:ln xmlns:a="http://schemas.openxmlformats.org/drawingml/2006/main" w="0">
-            <a:solidFill>
-              <a:srgbClr val="008C95"/>
-            </a:solidFill>
-            <a:prstDash val="solid"/>
-          </a:ln>
-        </p:spPr>
-      </p:sp>
-      <p:sp>
-        <p:nvSpPr>
-          <p:cNvPr id="15" name="">
-            <a:extLst xmlns:a="http://schemas.openxmlformats.org/drawingml/2006/main">
-              <a:ext uri="{FF2B5EF4-FFF2-40B4-BE49-F238E27FC236}">
-                <a16:creationId xmlns:a16="http://schemas.microsoft.com/office/drawing/2014/main" id="{EAE82E9F-EF21-44F9-8FEE-F0EBB52A7CF5}"/>
-              </a:ext>
-            </a:extLst>
-          </p:cNvPr>
-          <p:cNvSpPr>
-            <a:spLocks xmlns:a="http://schemas.openxmlformats.org/drawingml/2006/main" noGrp="1"/>
-          </p:cNvSpPr>
-          <p:nvPr/>
-        </p:nvSpPr>
-        <p:spPr>
-          <a:xfrm xmlns:a="http://schemas.openxmlformats.org/drawingml/2006/main">
-            <a:off x="6134100" y="1619250"/>
-            <a:ext cx="2228850" cy="266700"/>
-          </a:xfrm>
-          <a:prstGeom xmlns:a="http://schemas.openxmlformats.org/drawingml/2006/main" prst="rect">
-            <a:avLst/>
-          </a:prstGeom>
-          <a:noFill xmlns:a="http://schemas.openxmlformats.org/drawingml/2006/main"/>
-          <a:ln xmlns:a="http://schemas.openxmlformats.org/drawingml/2006/main" w="0">
-            <a:noFill/>
-            <a:prstDash val="solid"/>
-          </a:ln>
-        </p:spPr>
-        <p:txBody>
-          <a:bodyPr xmlns:a="http://schemas.openxmlformats.org/drawingml/2006/main"/>
-          <a:lstStyle xmlns:a="http://schemas.openxmlformats.org/drawingml/2006/main"/>
-          <a:p xmlns:a="http://schemas.openxmlformats.org/drawingml/2006/main">
-            <a:pPr>
-              <a:defRPr sz="1500" b="1">
-                <a:solidFill>
-                  <a:srgbClr val="001B3A"/>
-                </a:solidFill>
-              </a:defRPr>
-            </a:pPr>
-            <a:r>
-              <a:rPr sz="1500" b="1">
-                <a:solidFill>
-                  <a:srgbClr val="001B3A"/>
-                </a:solidFill>
-              </a:rPr>
-              <a:t>BLUETOOTH</a:t>
-            </a:r>
-          </a:p>
-        </p:txBody>
-      </p:sp>
-      <p:sp>
-        <p:nvSpPr>
-          <p:cNvPr id="16" name="">
-            <a:extLst xmlns:a="http://schemas.openxmlformats.org/drawingml/2006/main">
-              <a:ext uri="{FF2B5EF4-FFF2-40B4-BE49-F238E27FC236}">
-                <a16:creationId xmlns:a16="http://schemas.microsoft.com/office/drawing/2014/main" id="{8676B46D-9FCD-4F79-AEFB-009A0A66D084}"/>
-              </a:ext>
-            </a:extLst>
-          </p:cNvPr>
-          <p:cNvSpPr>
-            <a:spLocks xmlns:a="http://schemas.openxmlformats.org/drawingml/2006/main" noGrp="1"/>
-          </p:cNvSpPr>
-          <p:nvPr/>
-        </p:nvSpPr>
-        <p:spPr>
-          <a:xfrm xmlns:a="http://schemas.openxmlformats.org/drawingml/2006/main">
-            <a:off x="6134100" y="2009775"/>
-            <a:ext cx="2228850" cy="1085850"/>
-          </a:xfrm>
-          <a:prstGeom xmlns:a="http://schemas.openxmlformats.org/drawingml/2006/main" prst="rect">
-            <a:avLst/>
-          </a:prstGeom>
-          <a:noFill xmlns:a="http://schemas.openxmlformats.org/drawingml/2006/main"/>
-          <a:ln xmlns:a="http://schemas.openxmlformats.org/drawingml/2006/main" w="0">
-            <a:noFill/>
-            <a:prstDash val="solid"/>
-          </a:ln>
-        </p:spPr>
-        <p:txBody>
-          <a:bodyPr xmlns:a="http://schemas.openxmlformats.org/drawingml/2006/main"/>
-          <a:lstStyle xmlns:a="http://schemas.openxmlformats.org/drawingml/2006/main"/>
-          <a:p xmlns:a="http://schemas.openxmlformats.org/drawingml/2006/main">
-            <a:pPr>
-              <a:defRPr sz="1275">
-                <a:solidFill>
-                  <a:srgbClr val="0D2843"/>
-                </a:solidFill>
-              </a:defRPr>
-            </a:pPr>
-            <a:r>
-              <a:rPr sz="1275">
-                <a:solidFill>
-                  <a:srgbClr val="0D2843"/>
-                </a:solidFill>
-              </a:rPr>
-              <a:t>• Flight commands.</a:t>
-            </a:r>
-          </a:p>
-          <a:p xmlns:a="http://schemas.openxmlformats.org/drawingml/2006/main">
-            <a:pPr>
-              <a:defRPr sz="1275">
-                <a:solidFill>
-                  <a:srgbClr val="0D2843"/>
-                </a:solidFill>
-              </a:defRPr>
-            </a:pPr>
-            <a:r>
-              <a:rPr sz="1275">
-                <a:solidFill>
-                  <a:srgbClr val="0D2843"/>
-                </a:solidFill>
-              </a:rPr>
-              <a:t>• Battery and coarse flight state.</a:t>
-            </a:r>
-          </a:p>
-        </p:txBody>
-      </p:sp>
-      <p:sp>
-        <p:nvSpPr>
-          <p:cNvPr id="17" name="">
-            <a:extLst xmlns:a="http://schemas.openxmlformats.org/drawingml/2006/main">
-              <a:ext uri="{FF2B5EF4-FFF2-40B4-BE49-F238E27FC236}">
-                <a16:creationId xmlns:a16="http://schemas.microsoft.com/office/drawing/2014/main" id="{87159637-EE9D-4509-B84F-BAC3ED0C266F}"/>
-              </a:ext>
-            </a:extLst>
-          </p:cNvPr>
-          <p:cNvSpPr>
-            <a:spLocks xmlns:a="http://schemas.openxmlformats.org/drawingml/2006/main" noGrp="1"/>
-          </p:cNvSpPr>
-          <p:nvPr/>
-        </p:nvSpPr>
-        <p:spPr>
-          <a:xfrm xmlns:a="http://schemas.openxmlformats.org/drawingml/2006/main">
-            <a:off x="8858250" y="1428750"/>
-            <a:ext cx="2819400" cy="1809750"/>
-          </a:xfrm>
-          <a:prstGeom xmlns:a="http://schemas.openxmlformats.org/drawingml/2006/main" prst="roundRect">
-            <a:avLst>
-              <a:gd name="adj" fmla="val 6316"/>
-            </a:avLst>
-          </a:prstGeom>
-          <a:solidFill xmlns:a="http://schemas.openxmlformats.org/drawingml/2006/main">
-            <a:srgbClr val="F5EFCF"/>
-          </a:solidFill>
-          <a:ln xmlns:a="http://schemas.openxmlformats.org/drawingml/2006/main" w="14288">
-            <a:solidFill>
-              <a:srgbClr val="C6D4DB"/>
-            </a:solidFill>
-            <a:prstDash val="solid"/>
-          </a:ln>
-        </p:spPr>
-      </p:sp>
-      <p:sp>
-        <p:nvSpPr>
-          <p:cNvPr id="18" name="">
-            <a:extLst xmlns:a="http://schemas.openxmlformats.org/drawingml/2006/main">
-              <a:ext uri="{FF2B5EF4-FFF2-40B4-BE49-F238E27FC236}">
-                <a16:creationId xmlns:a16="http://schemas.microsoft.com/office/drawing/2014/main" id="{EF90FE62-D04D-4967-BA44-24897ED0CCBF}"/>
-              </a:ext>
-            </a:extLst>
-          </p:cNvPr>
-          <p:cNvSpPr>
-            <a:spLocks xmlns:a="http://schemas.openxmlformats.org/drawingml/2006/main" noGrp="1"/>
-          </p:cNvSpPr>
-          <p:nvPr/>
-        </p:nvSpPr>
-        <p:spPr>
-          <a:xfrm xmlns:a="http://schemas.openxmlformats.org/drawingml/2006/main">
-            <a:off x="8858250" y="1428750"/>
-            <a:ext cx="66675" cy="1809750"/>
-          </a:xfrm>
-          <a:prstGeom xmlns:a="http://schemas.openxmlformats.org/drawingml/2006/main" prst="rect">
-            <a:avLst/>
-          </a:prstGeom>
-          <a:solidFill xmlns:a="http://schemas.openxmlformats.org/drawingml/2006/main">
-            <a:srgbClr val="C9A227"/>
-          </a:solidFill>
-          <a:ln xmlns:a="http://schemas.openxmlformats.org/drawingml/2006/main" w="0">
-            <a:solidFill>
-              <a:srgbClr val="C9A227"/>
-            </a:solidFill>
-            <a:prstDash val="solid"/>
-          </a:ln>
-        </p:spPr>
-      </p:sp>
-      <p:sp>
-        <p:nvSpPr>
-          <p:cNvPr id="19" name="">
-            <a:extLst xmlns:a="http://schemas.openxmlformats.org/drawingml/2006/main">
-              <a:ext uri="{FF2B5EF4-FFF2-40B4-BE49-F238E27FC236}">
-                <a16:creationId xmlns:a16="http://schemas.microsoft.com/office/drawing/2014/main" id="{DD7BE5C7-0477-4429-8DF7-D32C8B141B97}"/>
-              </a:ext>
-            </a:extLst>
-          </p:cNvPr>
-          <p:cNvSpPr>
-            <a:spLocks xmlns:a="http://schemas.openxmlformats.org/drawingml/2006/main" noGrp="1"/>
-          </p:cNvSpPr>
-          <p:nvPr/>
-        </p:nvSpPr>
-        <p:spPr>
-          <a:xfrm xmlns:a="http://schemas.openxmlformats.org/drawingml/2006/main">
-            <a:off x="9086850" y="1619250"/>
-            <a:ext cx="2400300" cy="266700"/>
-          </a:xfrm>
-          <a:prstGeom xmlns:a="http://schemas.openxmlformats.org/drawingml/2006/main" prst="rect">
-            <a:avLst/>
-          </a:prstGeom>
-          <a:noFill xmlns:a="http://schemas.openxmlformats.org/drawingml/2006/main"/>
-          <a:ln xmlns:a="http://schemas.openxmlformats.org/drawingml/2006/main" w="0">
-            <a:noFill/>
-            <a:prstDash val="solid"/>
-          </a:ln>
-        </p:spPr>
-        <p:txBody>
-          <a:bodyPr xmlns:a="http://schemas.openxmlformats.org/drawingml/2006/main"/>
-          <a:lstStyle xmlns:a="http://schemas.openxmlformats.org/drawingml/2006/main"/>
-          <a:p xmlns:a="http://schemas.openxmlformats.org/drawingml/2006/main">
-            <a:pPr>
-              <a:defRPr sz="1500" b="1">
-                <a:solidFill>
-                  <a:srgbClr val="001B3A"/>
-                </a:solidFill>
-              </a:defRPr>
-            </a:pPr>
-            <a:r>
-              <a:rPr sz="1500" b="1">
-                <a:solidFill>
-                  <a:srgbClr val="001B3A"/>
-                </a:solidFill>
-              </a:rPr>
-              <a:t>WI-FI / HTTP</a:t>
-            </a:r>
-          </a:p>
-        </p:txBody>
-      </p:sp>
-      <p:sp>
-        <p:nvSpPr>
-          <p:cNvPr id="20" name="">
-            <a:extLst xmlns:a="http://schemas.openxmlformats.org/drawingml/2006/main">
-              <a:ext uri="{FF2B5EF4-FFF2-40B4-BE49-F238E27FC236}">
-                <a16:creationId xmlns:a16="http://schemas.microsoft.com/office/drawing/2014/main" id="{3F61BD93-B052-4624-9755-F4722ADCEA77}"/>
-              </a:ext>
-            </a:extLst>
-          </p:cNvPr>
-          <p:cNvSpPr>
-            <a:spLocks xmlns:a="http://schemas.openxmlformats.org/drawingml/2006/main" noGrp="1"/>
-          </p:cNvSpPr>
-          <p:nvPr/>
-        </p:nvSpPr>
-        <p:spPr>
-          <a:xfrm xmlns:a="http://schemas.openxmlformats.org/drawingml/2006/main">
-            <a:off x="9086850" y="2009775"/>
-            <a:ext cx="2400300" cy="1085850"/>
-          </a:xfrm>
-          <a:prstGeom xmlns:a="http://schemas.openxmlformats.org/drawingml/2006/main" prst="rect">
-            <a:avLst/>
-          </a:prstGeom>
-          <a:noFill xmlns:a="http://schemas.openxmlformats.org/drawingml/2006/main"/>
-          <a:ln xmlns:a="http://schemas.openxmlformats.org/drawingml/2006/main" w="0">
-            <a:noFill/>
-            <a:prstDash val="solid"/>
-          </a:ln>
-        </p:spPr>
-        <p:txBody>
-          <a:bodyPr xmlns:a="http://schemas.openxmlformats.org/drawingml/2006/main"/>
-          <a:lstStyle xmlns:a="http://schemas.openxmlformats.org/drawingml/2006/main"/>
-          <a:p xmlns:a="http://schemas.openxmlformats.org/drawingml/2006/main">
-            <a:pPr>
-              <a:defRPr sz="1275">
-                <a:solidFill>
-                  <a:srgbClr val="0D2843"/>
-                </a:solidFill>
-              </a:defRPr>
-            </a:pPr>
-            <a:r>
-              <a:rPr sz="1275">
-                <a:solidFill>
-                  <a:srgbClr val="0D2843"/>
-                </a:solidFill>
-              </a:rPr>
-              <a:t>• Camera video at 192.168.2.1.</a:t>
-            </a:r>
-          </a:p>
-          <a:p xmlns:a="http://schemas.openxmlformats.org/drawingml/2006/main">
-            <a:pPr>
-              <a:defRPr sz="1275">
-                <a:solidFill>
-                  <a:srgbClr val="0D2843"/>
-                </a:solidFill>
-              </a:defRPr>
-            </a:pPr>
-            <a:r>
-              <a:rPr sz="1275">
-                <a:solidFill>
-                  <a:srgbClr val="0D2843"/>
-                </a:solidFill>
-              </a:rPr>
-              <a:t>• Vision needs readable image pixels.</a:t>
-            </a:r>
-          </a:p>
-        </p:txBody>
-      </p:sp>
-      <p:sp>
-        <p:nvSpPr>
-          <p:cNvPr id="21" name="">
-            <a:extLst xmlns:a="http://schemas.openxmlformats.org/drawingml/2006/main">
-              <a:ext uri="{FF2B5EF4-FFF2-40B4-BE49-F238E27FC236}">
-                <a16:creationId xmlns:a16="http://schemas.microsoft.com/office/drawing/2014/main" id="{EC8CECC6-3A52-4ED8-9DB1-135C1E1E264E}"/>
-              </a:ext>
-            </a:extLst>
-          </p:cNvPr>
-          <p:cNvSpPr>
-            <a:spLocks xmlns:a="http://schemas.openxmlformats.org/drawingml/2006/main" noGrp="1"/>
-          </p:cNvSpPr>
-          <p:nvPr/>
-        </p:nvSpPr>
-        <p:spPr>
-          <a:xfrm xmlns:a="http://schemas.openxmlformats.org/drawingml/2006/main">
-            <a:off x="5905500" y="3714750"/>
-            <a:ext cx="1638300" cy="1619250"/>
-          </a:xfrm>
-          <a:prstGeom xmlns:a="http://schemas.openxmlformats.org/drawingml/2006/main" prst="rect">
-            <a:avLst/>
-          </a:prstGeom>
-          <a:ln xmlns:a="http://schemas.openxmlformats.org/drawingml/2006/main" w="0">
-            <a:prstDash val="solid"/>
-          </a:ln>
-        </p:spPr>
-      </p:sp>
-      <p:sp>
-        <p:nvSpPr>
-          <p:cNvPr id="22" name="">
-            <a:extLst xmlns:a="http://schemas.openxmlformats.org/drawingml/2006/main">
-              <a:ext uri="{FF2B5EF4-FFF2-40B4-BE49-F238E27FC236}">
-                <a16:creationId xmlns:a16="http://schemas.microsoft.com/office/drawing/2014/main" id="{C99ED845-AAFA-4001-BC2C-CB5A2C67AD5C}"/>
-              </a:ext>
-            </a:extLst>
-          </p:cNvPr>
-          <p:cNvSpPr>
-            <a:spLocks xmlns:a="http://schemas.openxmlformats.org/drawingml/2006/main" noGrp="1"/>
-          </p:cNvSpPr>
-          <p:nvPr/>
-        </p:nvSpPr>
-        <p:spPr>
-          <a:xfrm xmlns:a="http://schemas.openxmlformats.org/drawingml/2006/main">
-            <a:off x="7858125" y="3714750"/>
-            <a:ext cx="1638300" cy="1619250"/>
-          </a:xfrm>
-          <a:prstGeom xmlns:a="http://schemas.openxmlformats.org/drawingml/2006/main" prst="rect">
-            <a:avLst/>
-          </a:prstGeom>
-          <a:ln xmlns:a="http://schemas.openxmlformats.org/drawingml/2006/main" w="0">
-            <a:prstDash val="solid"/>
-          </a:ln>
-        </p:spPr>
-      </p:sp>
-      <p:sp>
-        <p:nvSpPr>
-          <p:cNvPr id="23" name="">
-            <a:extLst xmlns:a="http://schemas.openxmlformats.org/drawingml/2006/main">
-              <a:ext uri="{FF2B5EF4-FFF2-40B4-BE49-F238E27FC236}">
-                <a16:creationId xmlns:a16="http://schemas.microsoft.com/office/drawing/2014/main" id="{880316BF-96AA-4C4E-8475-716C1048934E}"/>
-              </a:ext>
-            </a:extLst>
-          </p:cNvPr>
-          <p:cNvSpPr>
-            <a:spLocks xmlns:a="http://schemas.openxmlformats.org/drawingml/2006/main" noGrp="1"/>
-          </p:cNvSpPr>
-          <p:nvPr/>
-        </p:nvSpPr>
-        <p:spPr>
-          <a:xfrm xmlns:a="http://schemas.openxmlformats.org/drawingml/2006/main">
-            <a:off x="9810750" y="3714750"/>
-            <a:ext cx="1638300" cy="1619250"/>
-          </a:xfrm>
-          <a:prstGeom xmlns:a="http://schemas.openxmlformats.org/drawingml/2006/main" prst="rect">
-            <a:avLst/>
-          </a:prstGeom>
-          <a:ln xmlns:a="http://schemas.openxmlformats.org/drawingml/2006/main" w="0">
-            <a:prstDash val="solid"/>
-          </a:ln>
-        </p:spPr>
-      </p:sp>
-      <p:cxnSp>
-        <p:nvCxnSpPr>
-          <p:cNvPr id="62" name=""/>
-          <p:cNvCxnSpPr>
-            <a:stCxn xmlns:a="http://schemas.openxmlformats.org/drawingml/2006/main" id="21" idx="3"/>
-            <a:endCxn xmlns:a="http://schemas.openxmlformats.org/drawingml/2006/main" id="22" idx="1"/>
-          </p:cNvCxnSpPr>
-          <p:nvPr/>
-        </p:nvCxnSpPr>
-        <p:spPr>
-          <a:xfrm xmlns:a="http://schemas.openxmlformats.org/drawingml/2006/main">
-            <a:off x="7543800" y="4524375"/>
-            <a:ext cx="314325" cy="0"/>
-          </a:xfrm>
-          <a:prstGeom xmlns:a="http://schemas.openxmlformats.org/drawingml/2006/main" prst="straightConnector1">
-            <a:avLst/>
-          </a:prstGeom>
-          <a:ln xmlns:a="http://schemas.openxmlformats.org/drawingml/2006/main" w="38100">
-            <a:solidFill>
-              <a:srgbClr val="008C95"/>
-            </a:solidFill>
-            <a:prstDash val="solid"/>
-            <a:tailEnd type="triangle" w="med" len="med"/>
-          </a:ln>
-        </p:spPr>
-      </p:cxnSp>
-      <p:cxnSp>
-        <p:nvCxnSpPr>
-          <p:cNvPr id="63" name=""/>
-          <p:cNvCxnSpPr>
-            <a:stCxn xmlns:a="http://schemas.openxmlformats.org/drawingml/2006/main" id="22" idx="3"/>
-            <a:endCxn xmlns:a="http://schemas.openxmlformats.org/drawingml/2006/main" id="23" idx="1"/>
-          </p:cNvCxnSpPr>
-          <p:nvPr/>
-        </p:nvCxnSpPr>
-        <p:spPr>
-          <a:xfrm xmlns:a="http://schemas.openxmlformats.org/drawingml/2006/main">
-            <a:off x="9496425" y="4524375"/>
-            <a:ext cx="314325" cy="0"/>
-          </a:xfrm>
-          <a:prstGeom xmlns:a="http://schemas.openxmlformats.org/drawingml/2006/main" prst="straightConnector1">
-            <a:avLst/>
-          </a:prstGeom>
-          <a:ln xmlns:a="http://schemas.openxmlformats.org/drawingml/2006/main" w="38100">
-            <a:solidFill>
-              <a:srgbClr val="008C95"/>
-            </a:solidFill>
-            <a:prstDash val="solid"/>
-            <a:tailEnd type="triangle" w="med" len="med"/>
-          </a:ln>
-        </p:spPr>
-      </p:cxnSp>
-      <p:sp>
-        <p:nvSpPr>
-          <p:cNvPr id="26" name="">
-            <a:extLst xmlns:a="http://schemas.openxmlformats.org/drawingml/2006/main">
-              <a:ext uri="{FF2B5EF4-FFF2-40B4-BE49-F238E27FC236}">
-                <a16:creationId xmlns:a16="http://schemas.microsoft.com/office/drawing/2014/main" id="{E27DA9EE-3F6E-48FE-AE7D-24855EFCFCED}"/>
-              </a:ext>
-            </a:extLst>
-          </p:cNvPr>
-          <p:cNvSpPr>
-            <a:spLocks xmlns:a="http://schemas.openxmlformats.org/drawingml/2006/main" noGrp="1"/>
-          </p:cNvSpPr>
-          <p:nvPr/>
-        </p:nvSpPr>
-        <p:spPr>
-          <a:xfrm xmlns:a="http://schemas.openxmlformats.org/drawingml/2006/main">
-            <a:off x="5905500" y="3714750"/>
-            <a:ext cx="1638300" cy="1619250"/>
-          </a:xfrm>
-          <a:prstGeom xmlns:a="http://schemas.openxmlformats.org/drawingml/2006/main" prst="roundRect">
-            <a:avLst>
-              <a:gd name="adj" fmla="val 7059"/>
-            </a:avLst>
-          </a:prstGeom>
-          <a:solidFill xmlns:a="http://schemas.openxmlformats.org/drawingml/2006/main">
-            <a:srgbClr val="FFFFFF"/>
-          </a:solidFill>
-          <a:ln xmlns:a="http://schemas.openxmlformats.org/drawingml/2006/main" w="14288">
-            <a:solidFill>
-              <a:srgbClr val="B7CBD3"/>
-            </a:solidFill>
-            <a:prstDash val="solid"/>
-          </a:ln>
-        </p:spPr>
-      </p:sp>
-      <p:sp>
-        <p:nvSpPr>
-          <p:cNvPr id="27" name="">
-            <a:extLst xmlns:a="http://schemas.openxmlformats.org/drawingml/2006/main">
-              <a:ext uri="{FF2B5EF4-FFF2-40B4-BE49-F238E27FC236}">
-                <a16:creationId xmlns:a16="http://schemas.microsoft.com/office/drawing/2014/main" id="{00C3A8DE-95BB-4F63-AE30-957FE8CDDA44}"/>
-              </a:ext>
-            </a:extLst>
-          </p:cNvPr>
-          <p:cNvSpPr>
-            <a:spLocks xmlns:a="http://schemas.openxmlformats.org/drawingml/2006/main" noGrp="1"/>
-          </p:cNvSpPr>
-          <p:nvPr/>
-        </p:nvSpPr>
-        <p:spPr>
-          <a:xfrm xmlns:a="http://schemas.openxmlformats.org/drawingml/2006/main">
-            <a:off x="6067425" y="3867150"/>
-            <a:ext cx="400050" cy="304800"/>
-          </a:xfrm>
-          <a:prstGeom xmlns:a="http://schemas.openxmlformats.org/drawingml/2006/main" prst="roundRect">
-            <a:avLst>
-              <a:gd name="adj" fmla="val 50000"/>
-            </a:avLst>
-          </a:prstGeom>
-          <a:solidFill xmlns:a="http://schemas.openxmlformats.org/drawingml/2006/main">
-            <a:srgbClr val="008C95"/>
-          </a:solidFill>
-          <a:ln xmlns:a="http://schemas.openxmlformats.org/drawingml/2006/main" w="14288">
-            <a:solidFill>
-              <a:srgbClr val="008C95"/>
-            </a:solidFill>
-            <a:prstDash val="solid"/>
-          </a:ln>
-        </p:spPr>
-        <p:txBody>
-          <a:bodyPr xmlns:a="http://schemas.openxmlformats.org/drawingml/2006/main"/>
-          <a:lstStyle xmlns:a="http://schemas.openxmlformats.org/drawingml/2006/main"/>
-          <a:p xmlns:a="http://schemas.openxmlformats.org/drawingml/2006/main">
-            <a:pPr algn="ctr">
-              <a:defRPr sz="1050" b="1">
-                <a:solidFill>
-                  <a:srgbClr val="FFFFFF"/>
-                </a:solidFill>
-              </a:defRPr>
-            </a:pPr>
-            <a:r>
-              <a:rPr sz="1050" b="1">
-                <a:solidFill>
-                  <a:srgbClr val="FFFFFF"/>
-                </a:solidFill>
-              </a:rPr>
-              <a:t>1</a:t>
-            </a:r>
-          </a:p>
-        </p:txBody>
-      </p:sp>
-      <p:sp>
-        <p:nvSpPr>
-          <p:cNvPr id="28" name="">
-            <a:extLst xmlns:a="http://schemas.openxmlformats.org/drawingml/2006/main">
-              <a:ext uri="{FF2B5EF4-FFF2-40B4-BE49-F238E27FC236}">
-                <a16:creationId xmlns:a16="http://schemas.microsoft.com/office/drawing/2014/main" id="{CF69F877-A7ED-4EBE-87E1-F98048983591}"/>
-              </a:ext>
-            </a:extLst>
-          </p:cNvPr>
-          <p:cNvSpPr>
-            <a:spLocks xmlns:a="http://schemas.openxmlformats.org/drawingml/2006/main" noGrp="1"/>
-          </p:cNvSpPr>
-          <p:nvPr/>
-        </p:nvSpPr>
-        <p:spPr>
-          <a:xfrm xmlns:a="http://schemas.openxmlformats.org/drawingml/2006/main">
-            <a:off x="6076950" y="4324350"/>
-            <a:ext cx="1295400" cy="266700"/>
-          </a:xfrm>
-          <a:prstGeom xmlns:a="http://schemas.openxmlformats.org/drawingml/2006/main" prst="rect">
-            <a:avLst/>
-          </a:prstGeom>
-          <a:noFill xmlns:a="http://schemas.openxmlformats.org/drawingml/2006/main"/>
-          <a:ln xmlns:a="http://schemas.openxmlformats.org/drawingml/2006/main" w="0">
-            <a:noFill/>
-            <a:prstDash val="solid"/>
-          </a:ln>
-        </p:spPr>
-        <p:txBody>
-          <a:bodyPr xmlns:a="http://schemas.openxmlformats.org/drawingml/2006/main"/>
-          <a:lstStyle xmlns:a="http://schemas.openxmlformats.org/drawingml/2006/main"/>
-          <a:p xmlns:a="http://schemas.openxmlformats.org/drawingml/2006/main">
-            <a:pPr>
-              <a:defRPr sz="1350" b="1">
-                <a:solidFill>
-                  <a:srgbClr val="001B3A"/>
-                </a:solidFill>
-              </a:defRPr>
-            </a:pPr>
-            <a:r>
-              <a:rPr sz="1350" b="1">
-                <a:solidFill>
-                  <a:srgbClr val="001B3A"/>
-                </a:solidFill>
-              </a:rPr>
-              <a:t>Camera</a:t>
-            </a:r>
-          </a:p>
-        </p:txBody>
-      </p:sp>
-      <p:sp>
-        <p:nvSpPr>
-          <p:cNvPr id="29" name="">
-            <a:extLst xmlns:a="http://schemas.openxmlformats.org/drawingml/2006/main">
-              <a:ext uri="{FF2B5EF4-FFF2-40B4-BE49-F238E27FC236}">
-                <a16:creationId xmlns:a16="http://schemas.microsoft.com/office/drawing/2014/main" id="{FA13A11E-9585-4F12-9E64-8E04B549CE5F}"/>
-              </a:ext>
-            </a:extLst>
-          </p:cNvPr>
-          <p:cNvSpPr>
-            <a:spLocks xmlns:a="http://schemas.openxmlformats.org/drawingml/2006/main" noGrp="1"/>
-          </p:cNvSpPr>
-          <p:nvPr/>
-        </p:nvSpPr>
-        <p:spPr>
-          <a:xfrm xmlns:a="http://schemas.openxmlformats.org/drawingml/2006/main">
-            <a:off x="6076950" y="4705350"/>
-            <a:ext cx="1295400" cy="495300"/>
-          </a:xfrm>
-          <a:prstGeom xmlns:a="http://schemas.openxmlformats.org/drawingml/2006/main" prst="rect">
-            <a:avLst/>
-          </a:prstGeom>
-          <a:noFill xmlns:a="http://schemas.openxmlformats.org/drawingml/2006/main"/>
-          <a:ln xmlns:a="http://schemas.openxmlformats.org/drawingml/2006/main" w="0">
-            <a:noFill/>
-            <a:prstDash val="solid"/>
-          </a:ln>
-        </p:spPr>
-        <p:txBody>
-          <a:bodyPr xmlns:a="http://schemas.openxmlformats.org/drawingml/2006/main"/>
-          <a:lstStyle xmlns:a="http://schemas.openxmlformats.org/drawingml/2006/main"/>
-          <a:p xmlns:a="http://schemas.openxmlformats.org/drawingml/2006/main">
-            <a:pPr>
-              <a:defRPr sz="1050">
-                <a:solidFill>
-                  <a:srgbClr val="536A7B"/>
-                </a:solidFill>
-              </a:defRPr>
-            </a:pPr>
-            <a:r>
-              <a:rPr sz="1050">
-                <a:solidFill>
-                  <a:srgbClr val="536A7B"/>
-                </a:solidFill>
-              </a:rPr>
-              <a:t>Forward or downward view.</a:t>
-            </a:r>
-          </a:p>
-        </p:txBody>
-      </p:sp>
-      <p:sp>
-        <p:nvSpPr>
-          <p:cNvPr id="30" name="">
-            <a:extLst xmlns:a="http://schemas.openxmlformats.org/drawingml/2006/main">
-              <a:ext uri="{FF2B5EF4-FFF2-40B4-BE49-F238E27FC236}">
-                <a16:creationId xmlns:a16="http://schemas.microsoft.com/office/drawing/2014/main" id="{DCC02744-252C-49E3-82BF-AFE6C6DD004A}"/>
-              </a:ext>
-            </a:extLst>
-          </p:cNvPr>
-          <p:cNvSpPr>
-            <a:spLocks xmlns:a="http://schemas.openxmlformats.org/drawingml/2006/main" noGrp="1"/>
-          </p:cNvSpPr>
-          <p:nvPr/>
-        </p:nvSpPr>
-        <p:spPr>
-          <a:xfrm xmlns:a="http://schemas.openxmlformats.org/drawingml/2006/main">
-            <a:off x="7858125" y="3714750"/>
-            <a:ext cx="1638300" cy="1619250"/>
-          </a:xfrm>
-          <a:prstGeom xmlns:a="http://schemas.openxmlformats.org/drawingml/2006/main" prst="roundRect">
-            <a:avLst>
-              <a:gd name="adj" fmla="val 7059"/>
-            </a:avLst>
-          </a:prstGeom>
-          <a:solidFill xmlns:a="http://schemas.openxmlformats.org/drawingml/2006/main">
-            <a:srgbClr val="FFFFFF"/>
-          </a:solidFill>
-          <a:ln xmlns:a="http://schemas.openxmlformats.org/drawingml/2006/main" w="14288">
-            <a:solidFill>
-              <a:srgbClr val="B7CBD3"/>
-            </a:solidFill>
-            <a:prstDash val="solid"/>
-          </a:ln>
-        </p:spPr>
-      </p:sp>
-      <p:sp>
-        <p:nvSpPr>
-          <p:cNvPr id="31" name="">
-            <a:extLst xmlns:a="http://schemas.openxmlformats.org/drawingml/2006/main">
-              <a:ext uri="{FF2B5EF4-FFF2-40B4-BE49-F238E27FC236}">
-                <a16:creationId xmlns:a16="http://schemas.microsoft.com/office/drawing/2014/main" id="{CBC539E1-CE8E-41A9-95A2-6469CF5EBFCB}"/>
-              </a:ext>
-            </a:extLst>
-          </p:cNvPr>
-          <p:cNvSpPr>
-            <a:spLocks xmlns:a="http://schemas.openxmlformats.org/drawingml/2006/main" noGrp="1"/>
-          </p:cNvSpPr>
-          <p:nvPr/>
-        </p:nvSpPr>
-        <p:spPr>
-          <a:xfrm xmlns:a="http://schemas.openxmlformats.org/drawingml/2006/main">
-            <a:off x="8020050" y="3867150"/>
-            <a:ext cx="400050" cy="304800"/>
-          </a:xfrm>
-          <a:prstGeom xmlns:a="http://schemas.openxmlformats.org/drawingml/2006/main" prst="roundRect">
-            <a:avLst>
-              <a:gd name="adj" fmla="val 50000"/>
-            </a:avLst>
-          </a:prstGeom>
-          <a:solidFill xmlns:a="http://schemas.openxmlformats.org/drawingml/2006/main">
-            <a:srgbClr val="008C95"/>
-          </a:solidFill>
-          <a:ln xmlns:a="http://schemas.openxmlformats.org/drawingml/2006/main" w="14288">
-            <a:solidFill>
-              <a:srgbClr val="008C95"/>
-            </a:solidFill>
-            <a:prstDash val="solid"/>
-          </a:ln>
-        </p:spPr>
-        <p:txBody>
-          <a:bodyPr xmlns:a="http://schemas.openxmlformats.org/drawingml/2006/main"/>
-          <a:lstStyle xmlns:a="http://schemas.openxmlformats.org/drawingml/2006/main"/>
-          <a:p xmlns:a="http://schemas.openxmlformats.org/drawingml/2006/main">
-            <a:pPr algn="ctr">
-              <a:defRPr sz="1050" b="1">
-                <a:solidFill>
-                  <a:srgbClr val="FFFFFF"/>
-                </a:solidFill>
-              </a:defRPr>
-            </a:pPr>
-            <a:r>
-              <a:rPr sz="1050" b="1">
-                <a:solidFill>
-                  <a:srgbClr val="FFFFFF"/>
-                </a:solidFill>
-              </a:rPr>
-              <a:t>2</a:t>
-            </a:r>
-          </a:p>
-        </p:txBody>
-      </p:sp>
-      <p:sp>
-        <p:nvSpPr>
-          <p:cNvPr id="32" name="">
-            <a:extLst xmlns:a="http://schemas.openxmlformats.org/drawingml/2006/main">
-              <a:ext uri="{FF2B5EF4-FFF2-40B4-BE49-F238E27FC236}">
-                <a16:creationId xmlns:a16="http://schemas.microsoft.com/office/drawing/2014/main" id="{A99EC92D-1A95-4AD3-9429-8968351AE337}"/>
-              </a:ext>
-            </a:extLst>
-          </p:cNvPr>
-          <p:cNvSpPr>
-            <a:spLocks xmlns:a="http://schemas.openxmlformats.org/drawingml/2006/main" noGrp="1"/>
-          </p:cNvSpPr>
-          <p:nvPr/>
-        </p:nvSpPr>
-        <p:spPr>
-          <a:xfrm xmlns:a="http://schemas.openxmlformats.org/drawingml/2006/main">
-            <a:off x="8029575" y="4324350"/>
-            <a:ext cx="1295400" cy="266700"/>
-          </a:xfrm>
-          <a:prstGeom xmlns:a="http://schemas.openxmlformats.org/drawingml/2006/main" prst="rect">
-            <a:avLst/>
-          </a:prstGeom>
-          <a:noFill xmlns:a="http://schemas.openxmlformats.org/drawingml/2006/main"/>
-          <a:ln xmlns:a="http://schemas.openxmlformats.org/drawingml/2006/main" w="0">
-            <a:noFill/>
-            <a:prstDash val="solid"/>
-          </a:ln>
-        </p:spPr>
-        <p:txBody>
-          <a:bodyPr xmlns:a="http://schemas.openxmlformats.org/drawingml/2006/main"/>
-          <a:lstStyle xmlns:a="http://schemas.openxmlformats.org/drawingml/2006/main"/>
-          <a:p xmlns:a="http://schemas.openxmlformats.org/drawingml/2006/main">
-            <a:pPr>
-              <a:defRPr sz="1350" b="1">
-                <a:solidFill>
-                  <a:srgbClr val="001B3A"/>
-                </a:solidFill>
-              </a:defRPr>
-            </a:pPr>
-            <a:r>
-              <a:rPr sz="1350" b="1">
-                <a:solidFill>
-                  <a:srgbClr val="001B3A"/>
-                </a:solidFill>
-              </a:rPr>
-              <a:t>Local app</a:t>
-            </a:r>
-          </a:p>
-        </p:txBody>
-      </p:sp>
-      <p:sp>
-        <p:nvSpPr>
-          <p:cNvPr id="33" name="">
-            <a:extLst xmlns:a="http://schemas.openxmlformats.org/drawingml/2006/main">
-              <a:ext uri="{FF2B5EF4-FFF2-40B4-BE49-F238E27FC236}">
-                <a16:creationId xmlns:a16="http://schemas.microsoft.com/office/drawing/2014/main" id="{8CABE834-9CAA-46F8-9F98-A42E75BAADB1}"/>
-              </a:ext>
-            </a:extLst>
-          </p:cNvPr>
-          <p:cNvSpPr>
-            <a:spLocks xmlns:a="http://schemas.openxmlformats.org/drawingml/2006/main" noGrp="1"/>
-          </p:cNvSpPr>
-          <p:nvPr/>
-        </p:nvSpPr>
-        <p:spPr>
-          <a:xfrm xmlns:a="http://schemas.openxmlformats.org/drawingml/2006/main">
-            <a:off x="8029575" y="4705350"/>
-            <a:ext cx="1295400" cy="495300"/>
-          </a:xfrm>
-          <a:prstGeom xmlns:a="http://schemas.openxmlformats.org/drawingml/2006/main" prst="rect">
-            <a:avLst/>
-          </a:prstGeom>
-          <a:noFill xmlns:a="http://schemas.openxmlformats.org/drawingml/2006/main"/>
-          <a:ln xmlns:a="http://schemas.openxmlformats.org/drawingml/2006/main" w="0">
-            <a:noFill/>
-            <a:prstDash val="solid"/>
-          </a:ln>
-        </p:spPr>
-        <p:txBody>
-          <a:bodyPr xmlns:a="http://schemas.openxmlformats.org/drawingml/2006/main"/>
-          <a:lstStyle xmlns:a="http://schemas.openxmlformats.org/drawingml/2006/main"/>
-          <a:p xmlns:a="http://schemas.openxmlformats.org/drawingml/2006/main">
-            <a:pPr>
-              <a:defRPr sz="1050">
-                <a:solidFill>
-                  <a:srgbClr val="536A7B"/>
-                </a:solidFill>
-              </a:defRPr>
-            </a:pPr>
-            <a:r>
-              <a:rPr sz="1050">
-                <a:solidFill>
-                  <a:srgbClr val="536A7B"/>
-                </a:solidFill>
-              </a:rPr>
-              <a:t>Reads the stream into a canvas.</a:t>
-            </a:r>
-          </a:p>
-        </p:txBody>
-      </p:sp>
-      <p:sp>
-        <p:nvSpPr>
-          <p:cNvPr id="34" name="">
-            <a:extLst xmlns:a="http://schemas.openxmlformats.org/drawingml/2006/main">
-              <a:ext uri="{FF2B5EF4-FFF2-40B4-BE49-F238E27FC236}">
-                <a16:creationId xmlns:a16="http://schemas.microsoft.com/office/drawing/2014/main" id="{4F26C978-F11D-4EBB-82EB-13DEE59B12AF}"/>
-              </a:ext>
-            </a:extLst>
-          </p:cNvPr>
-          <p:cNvSpPr>
-            <a:spLocks xmlns:a="http://schemas.openxmlformats.org/drawingml/2006/main" noGrp="1"/>
-          </p:cNvSpPr>
-          <p:nvPr/>
-        </p:nvSpPr>
-        <p:spPr>
-          <a:xfrm xmlns:a="http://schemas.openxmlformats.org/drawingml/2006/main">
-            <a:off x="9810750" y="3714750"/>
-            <a:ext cx="1638300" cy="1619250"/>
-          </a:xfrm>
-          <a:prstGeom xmlns:a="http://schemas.openxmlformats.org/drawingml/2006/main" prst="roundRect">
-            <a:avLst>
-              <a:gd name="adj" fmla="val 7059"/>
-            </a:avLst>
-          </a:prstGeom>
-          <a:solidFill xmlns:a="http://schemas.openxmlformats.org/drawingml/2006/main">
-            <a:srgbClr val="062B4D"/>
-          </a:solidFill>
-          <a:ln xmlns:a="http://schemas.openxmlformats.org/drawingml/2006/main" w="14288">
-            <a:solidFill>
-              <a:srgbClr val="062B4D"/>
-            </a:solidFill>
-            <a:prstDash val="solid"/>
-          </a:ln>
-        </p:spPr>
-      </p:sp>
-      <p:sp>
-        <p:nvSpPr>
-          <p:cNvPr id="35" name="">
-            <a:extLst xmlns:a="http://schemas.openxmlformats.org/drawingml/2006/main">
-              <a:ext uri="{FF2B5EF4-FFF2-40B4-BE49-F238E27FC236}">
-                <a16:creationId xmlns:a16="http://schemas.microsoft.com/office/drawing/2014/main" id="{41ED37AD-330E-47F2-B156-C12E54B23498}"/>
-              </a:ext>
-            </a:extLst>
-          </p:cNvPr>
-          <p:cNvSpPr>
-            <a:spLocks xmlns:a="http://schemas.openxmlformats.org/drawingml/2006/main" noGrp="1"/>
-          </p:cNvSpPr>
-          <p:nvPr/>
-        </p:nvSpPr>
-        <p:spPr>
-          <a:xfrm xmlns:a="http://schemas.openxmlformats.org/drawingml/2006/main">
-            <a:off x="9972675" y="3867150"/>
-            <a:ext cx="400050" cy="304800"/>
-          </a:xfrm>
-          <a:prstGeom xmlns:a="http://schemas.openxmlformats.org/drawingml/2006/main" prst="roundRect">
-            <a:avLst>
-              <a:gd name="adj" fmla="val 50000"/>
-            </a:avLst>
-          </a:prstGeom>
-          <a:solidFill xmlns:a="http://schemas.openxmlformats.org/drawingml/2006/main">
-            <a:srgbClr val="C9A227"/>
-          </a:solidFill>
-          <a:ln xmlns:a="http://schemas.openxmlformats.org/drawingml/2006/main" w="14288">
-            <a:solidFill>
-              <a:srgbClr val="C9A227"/>
-            </a:solidFill>
-            <a:prstDash val="solid"/>
-          </a:ln>
-        </p:spPr>
-        <p:txBody>
-          <a:bodyPr xmlns:a="http://schemas.openxmlformats.org/drawingml/2006/main"/>
-          <a:lstStyle xmlns:a="http://schemas.openxmlformats.org/drawingml/2006/main"/>
-          <a:p xmlns:a="http://schemas.openxmlformats.org/drawingml/2006/main">
-            <a:pPr algn="ctr">
-              <a:defRPr sz="1050" b="1">
-                <a:solidFill>
-                  <a:srgbClr val="001B3A"/>
-                </a:solidFill>
-              </a:defRPr>
-            </a:pPr>
-            <a:r>
-              <a:rPr sz="1050" b="1">
-                <a:solidFill>
-                  <a:srgbClr val="001B3A"/>
-                </a:solidFill>
-              </a:rPr>
-              <a:t>3</a:t>
-            </a:r>
-          </a:p>
-        </p:txBody>
-      </p:sp>
-      <p:sp>
-        <p:nvSpPr>
-          <p:cNvPr id="36" name="">
-            <a:extLst xmlns:a="http://schemas.openxmlformats.org/drawingml/2006/main">
-              <a:ext uri="{FF2B5EF4-FFF2-40B4-BE49-F238E27FC236}">
-                <a16:creationId xmlns:a16="http://schemas.microsoft.com/office/drawing/2014/main" id="{1FACF5D6-93E6-4026-9798-7FB3051E3355}"/>
-              </a:ext>
-            </a:extLst>
-          </p:cNvPr>
-          <p:cNvSpPr>
-            <a:spLocks xmlns:a="http://schemas.openxmlformats.org/drawingml/2006/main" noGrp="1"/>
-          </p:cNvSpPr>
-          <p:nvPr/>
-        </p:nvSpPr>
-        <p:spPr>
-          <a:xfrm xmlns:a="http://schemas.openxmlformats.org/drawingml/2006/main">
-            <a:off x="9982200" y="4324350"/>
-            <a:ext cx="1295400" cy="266700"/>
-          </a:xfrm>
-          <a:prstGeom xmlns:a="http://schemas.openxmlformats.org/drawingml/2006/main" prst="rect">
-            <a:avLst/>
-          </a:prstGeom>
-          <a:noFill xmlns:a="http://schemas.openxmlformats.org/drawingml/2006/main"/>
-          <a:ln xmlns:a="http://schemas.openxmlformats.org/drawingml/2006/main" w="0">
-            <a:noFill/>
-            <a:prstDash val="solid"/>
-          </a:ln>
-        </p:spPr>
-        <p:txBody>
-          <a:bodyPr xmlns:a="http://schemas.openxmlformats.org/drawingml/2006/main"/>
-          <a:lstStyle xmlns:a="http://schemas.openxmlformats.org/drawingml/2006/main"/>
-          <a:p xmlns:a="http://schemas.openxmlformats.org/drawingml/2006/main">
-            <a:pPr>
-              <a:defRPr sz="1350" b="1">
-                <a:solidFill>
-                  <a:srgbClr val="FFFFFF"/>
-                </a:solidFill>
-              </a:defRPr>
-            </a:pPr>
-            <a:r>
-              <a:rPr sz="1350" b="1">
-                <a:solidFill>
-                  <a:srgbClr val="FFFFFF"/>
-                </a:solidFill>
-              </a:rPr>
-              <a:t>Vision</a:t>
-            </a:r>
-          </a:p>
-        </p:txBody>
-      </p:sp>
-      <p:sp>
-        <p:nvSpPr>
-          <p:cNvPr id="37" name="">
-            <a:extLst xmlns:a="http://schemas.openxmlformats.org/drawingml/2006/main">
-              <a:ext uri="{FF2B5EF4-FFF2-40B4-BE49-F238E27FC236}">
-                <a16:creationId xmlns:a16="http://schemas.microsoft.com/office/drawing/2014/main" id="{751D9029-60A9-451D-9790-01AE5C553591}"/>
-              </a:ext>
-            </a:extLst>
-          </p:cNvPr>
-          <p:cNvSpPr>
-            <a:spLocks xmlns:a="http://schemas.openxmlformats.org/drawingml/2006/main" noGrp="1"/>
-          </p:cNvSpPr>
-          <p:nvPr/>
-        </p:nvSpPr>
-        <p:spPr>
-          <a:xfrm xmlns:a="http://schemas.openxmlformats.org/drawingml/2006/main">
-            <a:off x="9982200" y="4705350"/>
-            <a:ext cx="1295400" cy="495300"/>
-          </a:xfrm>
-          <a:prstGeom xmlns:a="http://schemas.openxmlformats.org/drawingml/2006/main" prst="rect">
-            <a:avLst/>
-          </a:prstGeom>
-          <a:noFill xmlns:a="http://schemas.openxmlformats.org/drawingml/2006/main"/>
-          <a:ln xmlns:a="http://schemas.openxmlformats.org/drawingml/2006/main" w="0">
-            <a:noFill/>
-            <a:prstDash val="solid"/>
-          </a:ln>
-        </p:spPr>
-        <p:txBody>
-          <a:bodyPr xmlns:a="http://schemas.openxmlformats.org/drawingml/2006/main"/>
-          <a:lstStyle xmlns:a="http://schemas.openxmlformats.org/drawingml/2006/main"/>
-          <a:p xmlns:a="http://schemas.openxmlformats.org/drawingml/2006/main">
-            <a:pPr>
-              <a:defRPr sz="1050">
-                <a:solidFill>
-                  <a:srgbClr val="D5E6EC"/>
-                </a:solidFill>
-              </a:defRPr>
-            </a:pPr>
-            <a:r>
-              <a:rPr sz="1050">
-                <a:solidFill>
-                  <a:srgbClr val="D5E6EC"/>
-                </a:solidFill>
-              </a:rPr>
-              <a:t>Threshold, COCO, custom model, or AprilTag.</a:t>
-            </a:r>
-          </a:p>
-        </p:txBody>
-      </p:sp>
-      <p:sp>
-        <p:nvSpPr>
-          <p:cNvPr id="38" name="">
-            <a:extLst xmlns:a="http://schemas.openxmlformats.org/drawingml/2006/main">
-              <a:ext uri="{FF2B5EF4-FFF2-40B4-BE49-F238E27FC236}">
-                <a16:creationId xmlns:a16="http://schemas.microsoft.com/office/drawing/2014/main" id="{65CDB297-3571-438E-A296-930D2897B16E}"/>
-              </a:ext>
-            </a:extLst>
-          </p:cNvPr>
-          <p:cNvSpPr>
-            <a:spLocks xmlns:a="http://schemas.openxmlformats.org/drawingml/2006/main" noGrp="1"/>
-          </p:cNvSpPr>
-          <p:nvPr/>
-        </p:nvSpPr>
-        <p:spPr>
-          <a:xfrm xmlns:a="http://schemas.openxmlformats.org/drawingml/2006/main">
-            <a:off x="6096000" y="5715000"/>
-            <a:ext cx="5334000" cy="285750"/>
-          </a:xfrm>
-          <a:prstGeom xmlns:a="http://schemas.openxmlformats.org/drawingml/2006/main" prst="rect">
-            <a:avLst/>
-          </a:prstGeom>
-          <a:noFill xmlns:a="http://schemas.openxmlformats.org/drawingml/2006/main"/>
-          <a:ln xmlns:a="http://schemas.openxmlformats.org/drawingml/2006/main" w="0">
-            <a:noFill/>
-            <a:prstDash val="solid"/>
-          </a:ln>
-        </p:spPr>
-        <p:txBody>
-          <a:bodyPr xmlns:a="http://schemas.openxmlformats.org/drawingml/2006/main"/>
-          <a:lstStyle xmlns:a="http://schemas.openxmlformats.org/drawingml/2006/main"/>
-          <a:p xmlns:a="http://schemas.openxmlformats.org/drawingml/2006/main">
-            <a:pPr algn="ctr">
-              <a:defRPr sz="1350" b="1">
-                <a:solidFill>
-                  <a:srgbClr val="D94F5C"/>
-                </a:solidFill>
-              </a:defRPr>
-            </a:pPr>
-            <a:r>
-              <a:rPr sz="1350" b="1">
-                <a:solidFill>
-                  <a:srgbClr val="D94F5C"/>
-                </a:solidFill>
-              </a:rPr>
-              <a:t>A green Bluetooth link does not guarantee a readable camera feed.</a:t>
+              <a:t>Independent links: Bluetooth may be connected while camera pixels are unavailable.</a:t>
             </a:r>
           </a:p>
         </p:txBody>
@@ -4766,7 +9016,7 @@
     </p:spTree>
     <p:extLst>
       <p:ext uri="{BB962C8B-B14F-4D97-AF65-F5344CB8AC3E}">
-        <p14:creationId xmlns:p14="http://schemas.microsoft.com/office/powerpoint/2010/main" val="389905820"/>
+        <p14:creationId xmlns:p14="http://schemas.microsoft.com/office/powerpoint/2010/main" val="860501778"/>
       </p:ext>
     </p:extLst>
   </p:cSld>
@@ -4794,7 +9044,7 @@
           <p:nvPr/>
         </p:nvPicPr>
         <p:blipFill>
-          <a:blip xmlns:r="http://schemas.openxmlformats.org/officeDocument/2006/relationships" xmlns:a="http://schemas.openxmlformats.org/drawingml/2006/main" r:embed="R94144599928d4ccb"/>
+          <a:blip xmlns:r="http://schemas.openxmlformats.org/officeDocument/2006/relationships" xmlns:a="http://schemas.openxmlformats.org/drawingml/2006/main" r:embed="Rc163aa75bd5a42b7"/>
           <a:srcRect xmlns:a="http://schemas.openxmlformats.org/drawingml/2006/main" l="0" t="0" r="0" b="0"/>
           <a:stretch xmlns:a="http://schemas.openxmlformats.org/drawingml/2006/main">
             <a:fillRect l="0" t="0" r="0" b="0"/>
@@ -4815,7 +9065,7 @@
           <p:cNvPr id="2" name="">
             <a:extLst xmlns:a="http://schemas.openxmlformats.org/drawingml/2006/main">
               <a:ext uri="{FF2B5EF4-FFF2-40B4-BE49-F238E27FC236}">
-                <a16:creationId xmlns:a16="http://schemas.microsoft.com/office/drawing/2014/main" id="{235690CA-97BE-4D48-94FB-1BCECD50BB04}"/>
+                <a16:creationId xmlns:a16="http://schemas.microsoft.com/office/drawing/2014/main" id="{8BDF8AA0-28BA-49B6-B5B5-CBCFC714F5C9}"/>
               </a:ext>
             </a:extLst>
           </p:cNvPr>
@@ -4848,7 +9098,7 @@
           <p:cNvPr id="3" name="">
             <a:extLst xmlns:a="http://schemas.openxmlformats.org/drawingml/2006/main">
               <a:ext uri="{FF2B5EF4-FFF2-40B4-BE49-F238E27FC236}">
-                <a16:creationId xmlns:a16="http://schemas.microsoft.com/office/drawing/2014/main" id="{B06B86F5-7CAB-40FD-A9BB-58C3462C879D}"/>
+                <a16:creationId xmlns:a16="http://schemas.microsoft.com/office/drawing/2014/main" id="{527E6A57-9D95-43C9-8C6F-ABD768DD3FE3}"/>
               </a:ext>
             </a:extLst>
           </p:cNvPr>
@@ -4898,7 +9148,7 @@
           <p:cNvPr id="4" name="">
             <a:extLst xmlns:a="http://schemas.openxmlformats.org/drawingml/2006/main">
               <a:ext uri="{FF2B5EF4-FFF2-40B4-BE49-F238E27FC236}">
-                <a16:creationId xmlns:a16="http://schemas.microsoft.com/office/drawing/2014/main" id="{1851371E-FFF5-4171-9775-16D3DF1D9AC9}"/>
+                <a16:creationId xmlns:a16="http://schemas.microsoft.com/office/drawing/2014/main" id="{7762B60A-C9FD-4E63-9E75-4806CAD53E45}"/>
               </a:ext>
             </a:extLst>
           </p:cNvPr>
@@ -4931,7 +9181,7 @@
           <p:cNvPr id="5" name="">
             <a:extLst xmlns:a="http://schemas.openxmlformats.org/drawingml/2006/main">
               <a:ext uri="{FF2B5EF4-FFF2-40B4-BE49-F238E27FC236}">
-                <a16:creationId xmlns:a16="http://schemas.microsoft.com/office/drawing/2014/main" id="{1C26FCC0-21D6-47DE-ADF3-060A6C4446D7}"/>
+                <a16:creationId xmlns:a16="http://schemas.microsoft.com/office/drawing/2014/main" id="{98D4B4A0-5B79-4A75-888D-E29D5689D781}"/>
               </a:ext>
             </a:extLst>
           </p:cNvPr>
@@ -4979,7 +9229,7 @@
     </p:spTree>
     <p:extLst>
       <p:ext uri="{BB962C8B-B14F-4D97-AF65-F5344CB8AC3E}">
-        <p14:creationId xmlns:p14="http://schemas.microsoft.com/office/powerpoint/2010/main" val="807798528"/>
+        <p14:creationId xmlns:p14="http://schemas.microsoft.com/office/powerpoint/2010/main" val="1636376072"/>
       </p:ext>
     </p:extLst>
   </p:cSld>
